--- a/V2授课PPT/W04-第8次课-给设备装上行为.pptx
+++ b/V2授课PPT/W04-第8次课-给设备装上行为.pptx
@@ -6,12 +6,15 @@
   </p:sldMasterIdLst>
   <p:sldIdLst>
     <p:sldId id="256" r:id="rId7"/>
+    <p:sldId id="367" r:id="rId15"/>
     <p:sldId id="280" r:id="rId32"/>
     <p:sldId id="311" r:id="rId63"/>
     <p:sldId id="319" r:id="rId71"/>
     <p:sldId id="338" r:id="rId90"/>
     <p:sldId id="365" r:id="rId117"/>
     <p:sldId id="366" r:id="rId118"/>
+    <p:sldId id="368" r:id="rId16"/>
+    <p:sldId id="369" r:id="rId17"/>
   </p:sldIdLst>
   <p:sldSz cx="12192000" cy="6858000" type="screen4x3"/>
   <p:notesSz cx="6858000" cy="9144000"/>
@@ -4309,6 +4312,120 @@
 </p:sld>
 </file>
 
+<file path=ppt/slides/slide10.xml><?xml version="1.0" encoding="utf-8"?>
+<p:sld xmlns:a="http://schemas.openxmlformats.org/drawingml/2006/main" xmlns:p="http://schemas.openxmlformats.org/presentationml/2006/main" xmlns:r="http://schemas.openxmlformats.org/officeDocument/2006/relationships">
+  <p:cSld>
+    <p:spTree>
+      <p:nvGrpSpPr>
+        <p:cNvPr id="1" name=""/>
+        <p:cNvGrpSpPr/>
+        <p:nvPr/>
+      </p:nvGrpSpPr>
+      <p:grpSpPr/>
+      <p:sp>
+        <p:nvSpPr>
+          <p:cNvPr id="2" name="TextBox 1"/>
+          <p:cNvSpPr txBox="1"/>
+          <p:nvPr/>
+        </p:nvSpPr>
+        <p:spPr>
+          <a:xfrm>
+            <a:off x="548640" y="320040"/>
+            <a:ext cx="11094720" cy="914400"/>
+          </a:xfrm>
+          <a:prstGeom prst="rect">
+            <a:avLst/>
+          </a:prstGeom>
+          <a:noFill/>
+        </p:spPr>
+        <p:txBody>
+          <a:bodyPr wrap="none">
+            <a:spAutoFit/>
+          </a:bodyPr>
+          <a:lstStyle/>
+          <a:p>
+            <a:r>
+              <a:rPr sz="3000" b="1"/>
+              <a:t>本讲与岗位任务单的衔接</a:t>
+            </a:r>
+          </a:p>
+        </p:txBody>
+      </p:sp>
+      <p:sp>
+        <p:nvSpPr>
+          <p:cNvPr id="3" name="TextBox 2"/>
+          <p:cNvSpPr txBox="1"/>
+          <p:nvPr/>
+        </p:nvSpPr>
+        <p:spPr>
+          <a:xfrm>
+            <a:off x="731520" y="1371600"/>
+            <a:ext cx="10728960" cy="4663440"/>
+          </a:xfrm>
+          <a:prstGeom prst="rect">
+            <a:avLst/>
+          </a:prstGeom>
+          <a:noFill/>
+        </p:spPr>
+        <p:txBody>
+          <a:bodyPr wrap="square">
+            <a:spAutoFit/>
+          </a:bodyPr>
+          <a:lstStyle/>
+          <a:p>
+            <a:pPr>
+              <a:spcAft>
+                <a:spcPts val="1000"/>
+              </a:spcAft>
+            </a:pPr>
+            <a:r>
+              <a:rPr sz="1800"/>
+              <a:t>本讲在工作过程系统化课程中承担的任务环节：任务实施</a:t>
+            </a:r>
+          </a:p>
+          <a:p>
+            <a:pPr>
+              <a:spcAft>
+                <a:spcPts val="1000"/>
+              </a:spcAft>
+            </a:pPr>
+            <a:r>
+              <a:rPr sz="1800"/>
+              <a:t>考核对齐：过程性成绩取自本讲工单第六节各模块得分合计（满分 100）。</a:t>
+            </a:r>
+          </a:p>
+          <a:p>
+            <a:pPr>
+              <a:spcAft>
+                <a:spcPts val="1000"/>
+              </a:spcAft>
+            </a:pPr>
+            <a:r>
+              <a:rPr sz="1800"/>
+              <a:t>达标线：综合成绩≥60 分，且无安全红线一票否决记录</a:t>
+            </a:r>
+          </a:p>
+          <a:p>
+            <a:pPr>
+              <a:spcAft>
+                <a:spcPts val="1000"/>
+              </a:spcAft>
+            </a:pPr>
+            <a:r>
+              <a:rPr sz="1800"/>
+              <a:t>无效工单判定：未打安全勾、无本人签字、无三方联签。</a:t>
+            </a:r>
+          </a:p>
+        </p:txBody>
+      </p:sp>
+    </p:spTree>
+  </p:cSld>
+  <p:clrMapOvr>
+    <a:masterClrMapping/>
+  </p:clrMapOvr>
+</p:sld>
+</file>
+
 <file path=ppt/slides/slide2.xml><?xml version="1.0" encoding="utf-8"?>
 <p:sld xmlns:a="http://schemas.openxmlformats.org/drawingml/2006/main" xmlns:p="http://schemas.openxmlformats.org/presentationml/2006/main" xmlns:r="http://schemas.openxmlformats.org/officeDocument/2006/relationships">
   <p:cSld>
@@ -7413,6 +7530,251 @@
                 <a:latin typeface="微软雅黑"/>
               </a:rPr>
               <a:t>带着问题来上课——Predict先于Run</a:t>
+            </a:r>
+          </a:p>
+        </p:txBody>
+      </p:sp>
+    </p:spTree>
+  </p:cSld>
+  <p:clrMapOvr>
+    <a:masterClrMapping/>
+  </p:clrMapOvr>
+</p:sld>
+</file>
+
+<file path=ppt/slides/slide8.xml><?xml version="1.0" encoding="utf-8"?>
+<p:sld xmlns:a="http://schemas.openxmlformats.org/drawingml/2006/main" xmlns:p="http://schemas.openxmlformats.org/presentationml/2006/main" xmlns:r="http://schemas.openxmlformats.org/officeDocument/2006/relationships">
+  <p:cSld>
+    <p:spTree>
+      <p:nvGrpSpPr>
+        <p:cNvPr id="1" name=""/>
+        <p:cNvGrpSpPr/>
+        <p:nvPr/>
+      </p:nvGrpSpPr>
+      <p:grpSpPr/>
+      <p:sp>
+        <p:nvSpPr>
+          <p:cNvPr id="2" name="TextBox 1"/>
+          <p:cNvSpPr txBox="1"/>
+          <p:nvPr/>
+        </p:nvSpPr>
+        <p:spPr>
+          <a:xfrm>
+            <a:off x="548640" y="320040"/>
+            <a:ext cx="11094720" cy="914400"/>
+          </a:xfrm>
+          <a:prstGeom prst="rect">
+            <a:avLst/>
+          </a:prstGeom>
+          <a:noFill/>
+        </p:spPr>
+        <p:txBody>
+          <a:bodyPr wrap="none">
+            <a:spAutoFit/>
+          </a:bodyPr>
+          <a:lstStyle/>
+          <a:p>
+            <a:r>
+              <a:rPr sz="3000" b="1"/>
+              <a:t>安全与合规警示（操作前必读）</a:t>
+            </a:r>
+          </a:p>
+        </p:txBody>
+      </p:sp>
+      <p:sp>
+        <p:nvSpPr>
+          <p:cNvPr id="3" name="TextBox 2"/>
+          <p:cNvSpPr txBox="1"/>
+          <p:nvPr/>
+        </p:nvSpPr>
+        <p:spPr>
+          <a:xfrm>
+            <a:off x="731520" y="1371600"/>
+            <a:ext cx="10728960" cy="4663440"/>
+          </a:xfrm>
+          <a:prstGeom prst="rect">
+            <a:avLst/>
+          </a:prstGeom>
+          <a:noFill/>
+        </p:spPr>
+        <p:txBody>
+          <a:bodyPr wrap="square">
+            <a:spAutoFit/>
+          </a:bodyPr>
+          <a:lstStyle/>
+          <a:p>
+            <a:pPr>
+              <a:spcAft>
+                <a:spcPts val="1000"/>
+              </a:spcAft>
+            </a:pPr>
+            <a:r>
+              <a:rPr sz="1800"/>
+              <a:t>1. 上机前确认本工位电源开关与急停位置，确认设备处于安全状态。</a:t>
+            </a:r>
+          </a:p>
+          <a:p>
+            <a:pPr>
+              <a:spcAft>
+                <a:spcPts val="1000"/>
+              </a:spcAft>
+            </a:pPr>
+            <a:r>
+              <a:rPr sz="1800"/>
+              <a:t>2. 涉及接线的操作一律先断电、后验电、再作业，禁止带电插拔。</a:t>
+            </a:r>
+          </a:p>
+          <a:p>
+            <a:pPr>
+              <a:spcAft>
+                <a:spcPts val="1000"/>
+              </a:spcAft>
+            </a:pPr>
+            <a:r>
+              <a:rPr sz="1800"/>
+              <a:t>3. 身体任何部位不进入设备运动/散热区域，长发束起，不佩戴悬垂饰物。</a:t>
+            </a:r>
+          </a:p>
+          <a:p>
+            <a:pPr>
+              <a:spcAft>
+                <a:spcPts val="1000"/>
+              </a:spcAft>
+            </a:pPr>
+            <a:r>
+              <a:rPr sz="1800"/>
+              <a:t>4. 调试程序前先静态检查、再低速小样本试运行，确认无异常后放大规模。</a:t>
+            </a:r>
+          </a:p>
+          <a:p>
+            <a:pPr>
+              <a:spcAft>
+                <a:spcPts val="1000"/>
+              </a:spcAft>
+            </a:pPr>
+            <a:r>
+              <a:rPr sz="1800"/>
+              <a:t>5. 任何不确定或异常情况，立即停止操作并报告指导教师，不擅自处置。</a:t>
+            </a:r>
+          </a:p>
+          <a:p>
+            <a:r>
+              <a:rPr sz="1400" b="1"/>
+              <a:t>以上任一条违反，本次任务按课程标准「安全规范一票否决」条款记 0 分并中止实训。</a:t>
+            </a:r>
+          </a:p>
+        </p:txBody>
+      </p:sp>
+    </p:spTree>
+  </p:cSld>
+  <p:clrMapOvr>
+    <a:masterClrMapping/>
+  </p:clrMapOvr>
+</p:sld>
+</file>
+
+<file path=ppt/slides/slide9.xml><?xml version="1.0" encoding="utf-8"?>
+<p:sld xmlns:a="http://schemas.openxmlformats.org/drawingml/2006/main" xmlns:p="http://schemas.openxmlformats.org/presentationml/2006/main" xmlns:r="http://schemas.openxmlformats.org/officeDocument/2006/relationships">
+  <p:cSld>
+    <p:spTree>
+      <p:nvGrpSpPr>
+        <p:cNvPr id="1" name=""/>
+        <p:cNvGrpSpPr/>
+        <p:nvPr/>
+      </p:nvGrpSpPr>
+      <p:grpSpPr/>
+      <p:sp>
+        <p:nvSpPr>
+          <p:cNvPr id="2" name="TextBox 1"/>
+          <p:cNvSpPr txBox="1"/>
+          <p:nvPr/>
+        </p:nvSpPr>
+        <p:spPr>
+          <a:xfrm>
+            <a:off x="548640" y="320040"/>
+            <a:ext cx="11094720" cy="914400"/>
+          </a:xfrm>
+          <a:prstGeom prst="rect">
+            <a:avLst/>
+          </a:prstGeom>
+          <a:noFill/>
+        </p:spPr>
+        <p:txBody>
+          <a:bodyPr wrap="none">
+            <a:spAutoFit/>
+          </a:bodyPr>
+          <a:lstStyle/>
+          <a:p>
+            <a:r>
+              <a:rPr sz="3000" b="1"/>
+              <a:t>本任务六步法导航</a:t>
+            </a:r>
+          </a:p>
+        </p:txBody>
+      </p:sp>
+      <p:sp>
+        <p:nvSpPr>
+          <p:cNvPr id="3" name="TextBox 2"/>
+          <p:cNvSpPr txBox="1"/>
+          <p:nvPr/>
+        </p:nvSpPr>
+        <p:spPr>
+          <a:xfrm>
+            <a:off x="731520" y="1371600"/>
+            <a:ext cx="10728960" cy="4663440"/>
+          </a:xfrm>
+          <a:prstGeom prst="rect">
+            <a:avLst/>
+          </a:prstGeom>
+          <a:noFill/>
+        </p:spPr>
+        <p:txBody>
+          <a:bodyPr wrap="square">
+            <a:spAutoFit/>
+          </a:bodyPr>
+          <a:lstStyle/>
+          <a:p>
+            <a:pPr>
+              <a:spcAft>
+                <a:spcPts val="1000"/>
+              </a:spcAft>
+            </a:pPr>
+            <a:r>
+              <a:rPr sz="1800"/>
+              <a:t>六步法：资讯 → 计划 → 决策 → 实施 → 检查 → 评估</a:t>
+            </a:r>
+          </a:p>
+          <a:p>
+            <a:pPr>
+              <a:spcAft>
+                <a:spcPts val="1000"/>
+              </a:spcAft>
+            </a:pPr>
+            <a:r>
+              <a:rPr sz="1800"/>
+              <a:t>本讲对应工单：《程序设计基础》分层任务工单</a:t>
+            </a:r>
+          </a:p>
+          <a:p>
+            <a:pPr>
+              <a:spcAft>
+                <a:spcPts val="1000"/>
+              </a:spcAft>
+            </a:pPr>
+            <a:r>
+              <a:rPr sz="1800"/>
+              <a:t>课堂产出：工单第六节实施记录须当堂填写，含操作前安全打勾与学生本人签字。</a:t>
+            </a:r>
+          </a:p>
+          <a:p>
+            <a:pPr>
+              <a:spcAft>
+                <a:spcPts val="1000"/>
+              </a:spcAft>
+            </a:pPr>
+            <a:r>
+              <a:rPr sz="1800"/>
+              <a:t>课后交付：班组长／操作员／教师三方联签后交回，缺签视为未交付。</a:t>
             </a:r>
           </a:p>
         </p:txBody>

--- a/V2授课PPT/W04-第8次课-给设备装上行为.pptx
+++ b/V2授课PPT/W04-第8次课-给设备装上行为.pptx
@@ -9,6 +9,9 @@
     <p:sldId id="367" r:id="rId15"/>
     <p:sldId id="280" r:id="rId32"/>
     <p:sldId id="311" r:id="rId63"/>
+    <p:sldId id="370" r:id="rId18"/>
+    <p:sldId id="371" r:id="rId19"/>
+    <p:sldId id="372" r:id="rId20"/>
     <p:sldId id="319" r:id="rId71"/>
     <p:sldId id="338" r:id="rId90"/>
     <p:sldId id="365" r:id="rId117"/>
@@ -4426,6 +4429,3259 @@
 </p:sld>
 </file>
 
+<file path=ppt/slides/slide11.xml><?xml version="1.0" encoding="utf-8"?>
+<p:sld xmlns:a="http://schemas.openxmlformats.org/drawingml/2006/main" xmlns:p="http://schemas.openxmlformats.org/presentationml/2006/main" xmlns:r="http://schemas.openxmlformats.org/officeDocument/2006/relationships">
+  <p:cSld>
+    <p:spTree>
+      <p:nvGrpSpPr>
+        <p:cNvPr id="1" name=""/>
+        <p:cNvGrpSpPr/>
+        <p:nvPr/>
+      </p:nvGrpSpPr>
+      <p:grpSpPr/>
+      <p:sp>
+        <p:nvSpPr>
+          <p:cNvPr id="2" name="Rectangle 1"/>
+          <p:cNvSpPr/>
+          <p:nvPr/>
+        </p:nvSpPr>
+        <p:spPr>
+          <a:xfrm>
+            <a:off x="0" y="0"/>
+            <a:ext cx="12192000" cy="1150000"/>
+          </a:xfrm>
+          <a:prstGeom prst="rect">
+            <a:avLst/>
+          </a:prstGeom>
+          <a:solidFill>
+            <a:srgbClr val="010328"/>
+          </a:solidFill>
+          <a:ln>
+            <a:noFill/>
+          </a:ln>
+          <a:effectLst/>
+        </p:spPr>
+        <p:style>
+          <a:lnRef idx="1">
+            <a:schemeClr val="accent1"/>
+          </a:lnRef>
+          <a:fillRef idx="3">
+            <a:schemeClr val="accent1"/>
+          </a:fillRef>
+          <a:effectRef idx="2">
+            <a:schemeClr val="accent1"/>
+          </a:effectRef>
+          <a:fontRef idx="minor">
+            <a:schemeClr val="lt1"/>
+          </a:fontRef>
+        </p:style>
+        <p:txBody>
+          <a:bodyPr rtlCol="0" anchor="ctr"/>
+          <a:lstStyle/>
+          <a:p>
+            <a:pPr algn="ctr"/>
+          </a:p>
+        </p:txBody>
+      </p:sp>
+      <p:sp>
+        <p:nvSpPr>
+          <p:cNvPr id="3" name="Rectangle 2"/>
+          <p:cNvSpPr/>
+          <p:nvPr/>
+        </p:nvSpPr>
+        <p:spPr>
+          <a:xfrm>
+            <a:off x="0" y="1150000"/>
+            <a:ext cx="2600000" cy="70000"/>
+          </a:xfrm>
+          <a:prstGeom prst="rect">
+            <a:avLst/>
+          </a:prstGeom>
+          <a:solidFill>
+            <a:srgbClr val="F5670F"/>
+          </a:solidFill>
+          <a:ln>
+            <a:noFill/>
+          </a:ln>
+          <a:effectLst/>
+        </p:spPr>
+        <p:style>
+          <a:lnRef idx="1">
+            <a:schemeClr val="accent1"/>
+          </a:lnRef>
+          <a:fillRef idx="3">
+            <a:schemeClr val="accent1"/>
+          </a:fillRef>
+          <a:effectRef idx="2">
+            <a:schemeClr val="accent1"/>
+          </a:effectRef>
+          <a:fontRef idx="minor">
+            <a:schemeClr val="lt1"/>
+          </a:fontRef>
+        </p:style>
+        <p:txBody>
+          <a:bodyPr rtlCol="0" anchor="ctr"/>
+          <a:lstStyle/>
+          <a:p>
+            <a:pPr algn="ctr"/>
+          </a:p>
+        </p:txBody>
+      </p:sp>
+      <p:sp>
+        <p:nvSpPr>
+          <p:cNvPr id="4" name="TextBox 3"/>
+          <p:cNvSpPr txBox="1"/>
+          <p:nvPr/>
+        </p:nvSpPr>
+        <p:spPr>
+          <a:xfrm>
+            <a:off x="700000" y="300000"/>
+            <a:ext cx="10792000" cy="700000"/>
+          </a:xfrm>
+          <a:prstGeom prst="rect">
+            <a:avLst/>
+          </a:prstGeom>
+          <a:noFill/>
+        </p:spPr>
+        <p:txBody>
+          <a:bodyPr wrap="square" anchor="t">
+            <a:spAutoFit/>
+          </a:bodyPr>
+          <a:lstStyle/>
+          <a:p>
+            <a:pPr algn="l">
+              <a:lnSpc>
+                <a:spcPct val="110000"/>
+              </a:lnSpc>
+              <a:spcAft>
+                <a:spcPts val="600"/>
+              </a:spcAft>
+            </a:pPr>
+            <a:r>
+              <a:rPr sz="2400" b="1">
+                <a:solidFill>
+                  <a:srgbClr val="FFFFFF"/>
+                </a:solidFill>
+                <a:latin typeface="微软雅黑"/>
+              </a:rPr>
+              <a:t>本课重难点地图 · 老师划重点（动手前必看）</a:t>
+            </a:r>
+          </a:p>
+        </p:txBody>
+      </p:sp>
+      <p:sp>
+        <p:nvSpPr>
+          <p:cNvPr id="11" name="Rectangle 10"/>
+          <p:cNvSpPr/>
+          <p:nvPr/>
+        </p:nvSpPr>
+        <p:spPr>
+          <a:xfrm>
+            <a:off x="500000" y="6500000"/>
+            <a:ext cx="11100000" cy="20000"/>
+          </a:xfrm>
+          <a:prstGeom prst="rect">
+            <a:avLst/>
+          </a:prstGeom>
+          <a:solidFill>
+            <a:srgbClr val="C9D4EE"/>
+          </a:solidFill>
+          <a:ln>
+            <a:noFill/>
+          </a:ln>
+          <a:effectLst/>
+        </p:spPr>
+        <p:style>
+          <a:lnRef idx="1">
+            <a:schemeClr val="accent1"/>
+          </a:lnRef>
+          <a:fillRef idx="3">
+            <a:schemeClr val="accent1"/>
+          </a:fillRef>
+          <a:effectRef idx="2">
+            <a:schemeClr val="accent1"/>
+          </a:effectRef>
+          <a:fontRef idx="minor">
+            <a:schemeClr val="lt1"/>
+          </a:fontRef>
+        </p:style>
+        <p:txBody>
+          <a:bodyPr rtlCol="0" anchor="ctr"/>
+          <a:lstStyle/>
+          <a:p>
+            <a:pPr algn="ctr"/>
+          </a:p>
+        </p:txBody>
+      </p:sp>
+      <p:sp>
+        <p:nvSpPr>
+          <p:cNvPr id="12" name="TextBox 11"/>
+          <p:cNvSpPr txBox="1"/>
+          <p:nvPr/>
+        </p:nvSpPr>
+        <p:spPr>
+          <a:xfrm>
+            <a:off x="500000" y="6540000"/>
+            <a:ext cx="7000000" cy="300000"/>
+          </a:xfrm>
+          <a:prstGeom prst="rect">
+            <a:avLst/>
+          </a:prstGeom>
+          <a:noFill/>
+        </p:spPr>
+        <p:txBody>
+          <a:bodyPr wrap="square" anchor="t">
+            <a:spAutoFit/>
+          </a:bodyPr>
+          <a:lstStyle/>
+          <a:p>
+            <a:pPr algn="l">
+              <a:lnSpc>
+                <a:spcPct val="110000"/>
+              </a:lnSpc>
+              <a:spcAft>
+                <a:spcPts val="600"/>
+              </a:spcAft>
+            </a:pPr>
+            <a:r>
+              <a:rPr sz="1000" b="0">
+                <a:solidFill>
+                  <a:srgbClr val="8A97B5"/>
+                </a:solidFill>
+                <a:latin typeface="微软雅黑"/>
+              </a:rPr>
+              <a:t>两江智造集团 · Python编程基础</a:t>
+            </a:r>
+          </a:p>
+        </p:txBody>
+      </p:sp>
+      <p:sp>
+        <p:nvSpPr>
+          <p:cNvPr id="13" name="TextBox 12"/>
+          <p:cNvSpPr txBox="1"/>
+          <p:nvPr/>
+        </p:nvSpPr>
+        <p:spPr>
+          <a:xfrm>
+            <a:off x="10600000" y="6540000"/>
+            <a:ext cx="1000000" cy="300000"/>
+          </a:xfrm>
+          <a:prstGeom prst="rect">
+            <a:avLst/>
+          </a:prstGeom>
+          <a:noFill/>
+        </p:spPr>
+        <p:txBody>
+          <a:bodyPr wrap="square" anchor="t">
+            <a:spAutoFit/>
+          </a:bodyPr>
+          <a:lstStyle/>
+          <a:p>
+            <a:pPr algn="r">
+              <a:lnSpc>
+                <a:spcPct val="110000"/>
+              </a:lnSpc>
+              <a:spcAft>
+                <a:spcPts val="600"/>
+              </a:spcAft>
+            </a:pPr>
+            <a:r>
+              <a:rPr sz="1000" b="0">
+                <a:solidFill>
+                  <a:srgbClr val="8A97B5"/>
+                </a:solidFill>
+                <a:latin typeface="微软雅黑"/>
+              </a:rPr>
+              <a:t>5 / 13</a:t>
+            </a:r>
+          </a:p>
+        </p:txBody>
+      </p:sp>
+      <p:sp>
+        <p:nvSpPr>
+          <p:cNvPr id="14" name="TextBox 13"/>
+          <p:cNvSpPr txBox="1"/>
+          <p:nvPr/>
+        </p:nvSpPr>
+        <p:spPr>
+          <a:xfrm>
+            <a:off x="457200" y="1389888"/>
+            <a:ext cx="11274552" cy="274320"/>
+          </a:xfrm>
+          <a:prstGeom prst="rect">
+            <a:avLst/>
+          </a:prstGeom>
+          <a:noFill/>
+        </p:spPr>
+        <p:txBody>
+          <a:bodyPr wrap="square">
+            <a:spAutoFit/>
+          </a:bodyPr>
+          <a:lstStyle/>
+          <a:p>
+            <a:r>
+              <a:rPr sz="1050" b="0">
+                <a:solidFill>
+                  <a:srgbClr val="6B7280"/>
+                </a:solidFill>
+                <a:latin typeface="微软雅黑"/>
+              </a:rPr>
+              <a:t>动手前先看这页：重点要会什么、难点会卡在哪、哪里最容易错、学没学会怎么自测。</a:t>
+            </a:r>
+          </a:p>
+        </p:txBody>
+      </p:sp>
+      <p:sp>
+        <p:nvSpPr>
+          <p:cNvPr id="15" name="Rectangle 14"/>
+          <p:cNvSpPr/>
+          <p:nvPr/>
+        </p:nvSpPr>
+        <p:spPr>
+          <a:xfrm>
+            <a:off x="457200" y="1783080"/>
+            <a:ext cx="5532120" cy="3127248"/>
+          </a:xfrm>
+          <a:prstGeom prst="rect">
+            <a:avLst/>
+          </a:prstGeom>
+          <a:solidFill>
+            <a:srgbClr val="FFFFFF"/>
+          </a:solidFill>
+          <a:ln>
+            <a:solidFill>
+              <a:srgbClr val="D6DCE4"/>
+            </a:solidFill>
+          </a:ln>
+          <a:effectLst/>
+        </p:spPr>
+        <p:style>
+          <a:lnRef idx="1">
+            <a:schemeClr val="accent1"/>
+          </a:lnRef>
+          <a:fillRef idx="3">
+            <a:schemeClr val="accent1"/>
+          </a:fillRef>
+          <a:effectRef idx="2">
+            <a:schemeClr val="accent1"/>
+          </a:effectRef>
+          <a:fontRef idx="minor">
+            <a:schemeClr val="lt1"/>
+          </a:fontRef>
+        </p:style>
+        <p:txBody>
+          <a:bodyPr rtlCol="0" anchor="ctr" wrap="square"/>
+          <a:lstStyle/>
+          <a:p>
+            <a:pPr algn="ctr"/>
+          </a:p>
+        </p:txBody>
+      </p:sp>
+      <p:sp>
+        <p:nvSpPr>
+          <p:cNvPr id="16" name="Rectangle 15"/>
+          <p:cNvSpPr/>
+          <p:nvPr/>
+        </p:nvSpPr>
+        <p:spPr>
+          <a:xfrm>
+            <a:off x="457200" y="1783080"/>
+            <a:ext cx="5532120" cy="365760"/>
+          </a:xfrm>
+          <a:prstGeom prst="rect">
+            <a:avLst/>
+          </a:prstGeom>
+          <a:solidFill>
+            <a:srgbClr val="2F5D8C"/>
+          </a:solidFill>
+          <a:ln>
+            <a:noFill/>
+          </a:ln>
+          <a:effectLst/>
+        </p:spPr>
+        <p:style>
+          <a:lnRef idx="1">
+            <a:schemeClr val="accent1"/>
+          </a:lnRef>
+          <a:fillRef idx="3">
+            <a:schemeClr val="accent1"/>
+          </a:fillRef>
+          <a:effectRef idx="2">
+            <a:schemeClr val="accent1"/>
+          </a:effectRef>
+          <a:fontRef idx="minor">
+            <a:schemeClr val="lt1"/>
+          </a:fontRef>
+        </p:style>
+        <p:txBody>
+          <a:bodyPr rtlCol="0" anchor="ctr" wrap="square"/>
+          <a:lstStyle/>
+          <a:p>
+            <a:pPr algn="ctr"/>
+          </a:p>
+        </p:txBody>
+      </p:sp>
+      <p:sp>
+        <p:nvSpPr>
+          <p:cNvPr id="17" name="TextBox 16"/>
+          <p:cNvSpPr txBox="1"/>
+          <p:nvPr/>
+        </p:nvSpPr>
+        <p:spPr>
+          <a:xfrm>
+            <a:off x="566928" y="1819656"/>
+            <a:ext cx="5312664" cy="292608"/>
+          </a:xfrm>
+          <a:prstGeom prst="rect">
+            <a:avLst/>
+          </a:prstGeom>
+          <a:noFill/>
+        </p:spPr>
+        <p:txBody>
+          <a:bodyPr wrap="square">
+            <a:spAutoFit/>
+          </a:bodyPr>
+          <a:lstStyle/>
+          <a:p>
+            <a:r>
+              <a:rPr sz="1150" b="1">
+                <a:solidFill>
+                  <a:srgbClr val="FFFFFF"/>
+                </a:solidFill>
+                <a:latin typeface="微软雅黑"/>
+              </a:rPr>
+              <a:t>重点 · 必会必考（本课知识点全景）</a:t>
+            </a:r>
+          </a:p>
+        </p:txBody>
+      </p:sp>
+      <p:sp>
+        <p:nvSpPr>
+          <p:cNvPr id="18" name="TextBox 17"/>
+          <p:cNvSpPr txBox="1"/>
+          <p:nvPr/>
+        </p:nvSpPr>
+        <p:spPr>
+          <a:xfrm>
+            <a:off x="621792" y="2267712"/>
+            <a:ext cx="5257800" cy="2560320"/>
+          </a:xfrm>
+          <a:prstGeom prst="rect">
+            <a:avLst/>
+          </a:prstGeom>
+          <a:noFill/>
+        </p:spPr>
+        <p:txBody>
+          <a:bodyPr wrap="square">
+            <a:spAutoFit/>
+          </a:bodyPr>
+          <a:lstStyle/>
+          <a:p>
+            <a:r>
+              <a:rPr sz="950" b="0">
+                <a:solidFill>
+                  <a:srgbClr val="2B2F36"/>
+                </a:solidFill>
+                <a:latin typeface="微软雅黑"/>
+              </a:rPr>
+              <a:t>◆ B01 类与实例｜类=图纸，实例=按图纸造出的每台泵——一图多产品</a:t>
+            </a:r>
+          </a:p>
+          <a:p>
+            <a:r>
+              <a:rPr sz="950" b="0">
+                <a:solidFill>
+                  <a:srgbClr val="2B2F36"/>
+                </a:solidFill>
+                <a:latin typeface="微软雅黑"/>
+              </a:rPr>
+              <a:t>◆ B02 __init__与self｜self='我自己'；__init__=出厂设置，造时自动执行</a:t>
+            </a:r>
+          </a:p>
+          <a:p>
+            <a:r>
+              <a:rPr sz="950" b="0">
+                <a:solidFill>
+                  <a:srgbClr val="2B2F36"/>
+                </a:solidFill>
+                <a:latin typeface="微软雅黑"/>
+              </a:rPr>
+              <a:t>◆ B03 实例属性｜属性写在__init__里=每台设备自己的小本本</a:t>
+            </a:r>
+          </a:p>
+          <a:p>
+            <a:r>
+              <a:rPr sz="950" b="0">
+                <a:solidFill>
+                  <a:srgbClr val="2B2F36"/>
+                </a:solidFill>
+                <a:latin typeface="微软雅黑"/>
+              </a:rPr>
+              <a:t>◆ B04 方法调用｜方法=类里装的技能；d.start()=让这台设备执行</a:t>
+            </a:r>
+          </a:p>
+          <a:p>
+            <a:r>
+              <a:rPr sz="950" b="0">
+                <a:solidFill>
+                  <a:srgbClr val="2B2F36"/>
+                </a:solidFill>
+                <a:latin typeface="微软雅黑"/>
+              </a:rPr>
+              <a:t>◆ B05 __str__可读化｜__str__=设备的自我介绍：print时说人话不报内存地址</a:t>
+            </a:r>
+          </a:p>
+          <a:p>
+            <a:r>
+              <a:rPr sz="950" b="0">
+                <a:solidFill>
+                  <a:srgbClr val="2B2F36"/>
+                </a:solidFill>
+                <a:latin typeface="微软雅黑"/>
+              </a:rPr>
+              <a:t>◆ B06 状态校验｜状态机=设备只走合法路线：停机才能启动，运行中拒重复</a:t>
+            </a:r>
+          </a:p>
+        </p:txBody>
+      </p:sp>
+      <p:sp>
+        <p:nvSpPr>
+          <p:cNvPr id="19" name="Rectangle 18"/>
+          <p:cNvSpPr/>
+          <p:nvPr/>
+        </p:nvSpPr>
+        <p:spPr>
+          <a:xfrm>
+            <a:off x="6144768" y="1783080"/>
+            <a:ext cx="5586984" cy="1481328"/>
+          </a:xfrm>
+          <a:prstGeom prst="rect">
+            <a:avLst/>
+          </a:prstGeom>
+          <a:solidFill>
+            <a:srgbClr val="FFFFFF"/>
+          </a:solidFill>
+          <a:ln>
+            <a:solidFill>
+              <a:srgbClr val="D6DCE4"/>
+            </a:solidFill>
+          </a:ln>
+          <a:effectLst/>
+        </p:spPr>
+        <p:style>
+          <a:lnRef idx="1">
+            <a:schemeClr val="accent1"/>
+          </a:lnRef>
+          <a:fillRef idx="3">
+            <a:schemeClr val="accent1"/>
+          </a:fillRef>
+          <a:effectRef idx="2">
+            <a:schemeClr val="accent1"/>
+          </a:effectRef>
+          <a:fontRef idx="minor">
+            <a:schemeClr val="lt1"/>
+          </a:fontRef>
+        </p:style>
+        <p:txBody>
+          <a:bodyPr rtlCol="0" anchor="ctr" wrap="square"/>
+          <a:lstStyle/>
+          <a:p>
+            <a:pPr algn="ctr"/>
+          </a:p>
+        </p:txBody>
+      </p:sp>
+      <p:sp>
+        <p:nvSpPr>
+          <p:cNvPr id="20" name="Rectangle 19"/>
+          <p:cNvSpPr/>
+          <p:nvPr/>
+        </p:nvSpPr>
+        <p:spPr>
+          <a:xfrm>
+            <a:off x="6144768" y="1783080"/>
+            <a:ext cx="5586984" cy="365760"/>
+          </a:xfrm>
+          <a:prstGeom prst="rect">
+            <a:avLst/>
+          </a:prstGeom>
+          <a:solidFill>
+            <a:srgbClr val="8A4B2D"/>
+          </a:solidFill>
+          <a:ln>
+            <a:noFill/>
+          </a:ln>
+          <a:effectLst/>
+        </p:spPr>
+        <p:style>
+          <a:lnRef idx="1">
+            <a:schemeClr val="accent1"/>
+          </a:lnRef>
+          <a:fillRef idx="3">
+            <a:schemeClr val="accent1"/>
+          </a:fillRef>
+          <a:effectRef idx="2">
+            <a:schemeClr val="accent1"/>
+          </a:effectRef>
+          <a:fontRef idx="minor">
+            <a:schemeClr val="lt1"/>
+          </a:fontRef>
+        </p:style>
+        <p:txBody>
+          <a:bodyPr rtlCol="0" anchor="ctr" wrap="square"/>
+          <a:lstStyle/>
+          <a:p>
+            <a:pPr algn="ctr"/>
+          </a:p>
+        </p:txBody>
+      </p:sp>
+      <p:sp>
+        <p:nvSpPr>
+          <p:cNvPr id="21" name="TextBox 20"/>
+          <p:cNvSpPr txBox="1"/>
+          <p:nvPr/>
+        </p:nvSpPr>
+        <p:spPr>
+          <a:xfrm>
+            <a:off x="6254496" y="1819656"/>
+            <a:ext cx="5367528" cy="292608"/>
+          </a:xfrm>
+          <a:prstGeom prst="rect">
+            <a:avLst/>
+          </a:prstGeom>
+          <a:noFill/>
+        </p:spPr>
+        <p:txBody>
+          <a:bodyPr wrap="square">
+            <a:spAutoFit/>
+          </a:bodyPr>
+          <a:lstStyle/>
+          <a:p>
+            <a:r>
+              <a:rPr sz="1150" b="1">
+                <a:solidFill>
+                  <a:srgbClr val="FFFFFF"/>
+                </a:solidFill>
+                <a:latin typeface="微软雅黑"/>
+              </a:rPr>
+              <a:t>难点 · 易卡壳（下一页逐个击破）</a:t>
+            </a:r>
+          </a:p>
+        </p:txBody>
+      </p:sp>
+      <p:sp>
+        <p:nvSpPr>
+          <p:cNvPr id="22" name="TextBox 21"/>
+          <p:cNvSpPr txBox="1"/>
+          <p:nvPr/>
+        </p:nvSpPr>
+        <p:spPr>
+          <a:xfrm>
+            <a:off x="6309360" y="2231136"/>
+            <a:ext cx="5303520" cy="960120"/>
+          </a:xfrm>
+          <a:prstGeom prst="rect">
+            <a:avLst/>
+          </a:prstGeom>
+          <a:noFill/>
+        </p:spPr>
+        <p:txBody>
+          <a:bodyPr wrap="square">
+            <a:spAutoFit/>
+          </a:bodyPr>
+          <a:lstStyle/>
+          <a:p>
+            <a:r>
+              <a:rPr sz="900" b="0">
+                <a:solidFill>
+                  <a:srgbClr val="2B2F36"/>
+                </a:solidFill>
+                <a:latin typeface="微软雅黑"/>
+              </a:rPr>
+              <a:t>▲ 误区：改d1不影响d2——各实例各一份属性，图纸本身不存温度</a:t>
+            </a:r>
+          </a:p>
+          <a:p>
+            <a:r>
+              <a:rPr sz="900" b="0">
+                <a:solidFill>
+                  <a:srgbClr val="2B2F36"/>
+                </a:solidFill>
+                <a:latin typeface="微软雅黑"/>
+              </a:rPr>
+              <a:t>▲ 误区：方法漏写self→TypeError——调用时Python自动传实例</a:t>
+            </a:r>
+          </a:p>
+          <a:p>
+            <a:r>
+              <a:rPr sz="900" b="0">
+                <a:solidFill>
+                  <a:srgbClr val="2B2F36"/>
+                </a:solidFill>
+                <a:latin typeface="微软雅黑"/>
+              </a:rPr>
+              <a:t>▲ 误区：写在类下的属性是全员共享公告栏——改一处全变，慎用</a:t>
+            </a:r>
+          </a:p>
+        </p:txBody>
+      </p:sp>
+      <p:sp>
+        <p:nvSpPr>
+          <p:cNvPr id="23" name="Rectangle 22"/>
+          <p:cNvSpPr/>
+          <p:nvPr/>
+        </p:nvSpPr>
+        <p:spPr>
+          <a:xfrm>
+            <a:off x="6144768" y="3401568"/>
+            <a:ext cx="5586984" cy="1508760"/>
+          </a:xfrm>
+          <a:prstGeom prst="rect">
+            <a:avLst/>
+          </a:prstGeom>
+          <a:solidFill>
+            <a:srgbClr val="FFFFFF"/>
+          </a:solidFill>
+          <a:ln>
+            <a:solidFill>
+              <a:srgbClr val="D6DCE4"/>
+            </a:solidFill>
+          </a:ln>
+          <a:effectLst/>
+        </p:spPr>
+        <p:style>
+          <a:lnRef idx="1">
+            <a:schemeClr val="accent1"/>
+          </a:lnRef>
+          <a:fillRef idx="3">
+            <a:schemeClr val="accent1"/>
+          </a:fillRef>
+          <a:effectRef idx="2">
+            <a:schemeClr val="accent1"/>
+          </a:effectRef>
+          <a:fontRef idx="minor">
+            <a:schemeClr val="lt1"/>
+          </a:fontRef>
+        </p:style>
+        <p:txBody>
+          <a:bodyPr rtlCol="0" anchor="ctr" wrap="square"/>
+          <a:lstStyle/>
+          <a:p>
+            <a:pPr algn="ctr"/>
+          </a:p>
+        </p:txBody>
+      </p:sp>
+      <p:sp>
+        <p:nvSpPr>
+          <p:cNvPr id="24" name="Rectangle 23"/>
+          <p:cNvSpPr/>
+          <p:nvPr/>
+        </p:nvSpPr>
+        <p:spPr>
+          <a:xfrm>
+            <a:off x="6144768" y="3401568"/>
+            <a:ext cx="5586984" cy="365760"/>
+          </a:xfrm>
+          <a:prstGeom prst="rect">
+            <a:avLst/>
+          </a:prstGeom>
+          <a:solidFill>
+            <a:srgbClr val="9A3B3B"/>
+          </a:solidFill>
+          <a:ln>
+            <a:noFill/>
+          </a:ln>
+          <a:effectLst/>
+        </p:spPr>
+        <p:style>
+          <a:lnRef idx="1">
+            <a:schemeClr val="accent1"/>
+          </a:lnRef>
+          <a:fillRef idx="3">
+            <a:schemeClr val="accent1"/>
+          </a:fillRef>
+          <a:effectRef idx="2">
+            <a:schemeClr val="accent1"/>
+          </a:effectRef>
+          <a:fontRef idx="minor">
+            <a:schemeClr val="lt1"/>
+          </a:fontRef>
+        </p:style>
+        <p:txBody>
+          <a:bodyPr rtlCol="0" anchor="ctr" wrap="square"/>
+          <a:lstStyle/>
+          <a:p>
+            <a:pPr algn="ctr"/>
+          </a:p>
+        </p:txBody>
+      </p:sp>
+      <p:sp>
+        <p:nvSpPr>
+          <p:cNvPr id="25" name="TextBox 24"/>
+          <p:cNvSpPr txBox="1"/>
+          <p:nvPr/>
+        </p:nvSpPr>
+        <p:spPr>
+          <a:xfrm>
+            <a:off x="6254496" y="3438144"/>
+            <a:ext cx="5367528" cy="292608"/>
+          </a:xfrm>
+          <a:prstGeom prst="rect">
+            <a:avLst/>
+          </a:prstGeom>
+          <a:noFill/>
+        </p:spPr>
+        <p:txBody>
+          <a:bodyPr wrap="square">
+            <a:spAutoFit/>
+          </a:bodyPr>
+          <a:lstStyle/>
+          <a:p>
+            <a:r>
+              <a:rPr sz="1150" b="1">
+                <a:solidFill>
+                  <a:srgbClr val="FFFFFF"/>
+                </a:solidFill>
+                <a:latin typeface="微软雅黑"/>
+              </a:rPr>
+              <a:t>高频易错 · 动手前先记住</a:t>
+            </a:r>
+          </a:p>
+        </p:txBody>
+      </p:sp>
+      <p:sp>
+        <p:nvSpPr>
+          <p:cNvPr id="26" name="TextBox 25"/>
+          <p:cNvSpPr txBox="1"/>
+          <p:nvPr/>
+        </p:nvSpPr>
+        <p:spPr>
+          <a:xfrm>
+            <a:off x="6309360" y="3849624"/>
+            <a:ext cx="5303520" cy="960120"/>
+          </a:xfrm>
+          <a:prstGeom prst="rect">
+            <a:avLst/>
+          </a:prstGeom>
+          <a:noFill/>
+        </p:spPr>
+        <p:txBody>
+          <a:bodyPr wrap="square">
+            <a:spAutoFit/>
+          </a:bodyPr>
+          <a:lstStyle/>
+          <a:p>
+            <a:r>
+              <a:rPr sz="900" b="0">
+                <a:solidFill>
+                  <a:srgbClr val="2B2F36"/>
+                </a:solidFill>
+                <a:latin typeface="微软雅黑"/>
+              </a:rPr>
+              <a:t>✗ 漏self → 方法第一参数写self</a:t>
+            </a:r>
+          </a:p>
+          <a:p>
+            <a:r>
+              <a:rPr sz="900" b="0">
+                <a:solidFill>
+                  <a:srgbClr val="2B2F36"/>
+                </a:solidFill>
+                <a:latin typeface="微软雅黑"/>
+              </a:rPr>
+              <a:t>✗ 属性被共享 → 移入__init__</a:t>
+            </a:r>
+          </a:p>
+          <a:p>
+            <a:r>
+              <a:rPr sz="900" b="0">
+                <a:solidFill>
+                  <a:srgbClr val="2B2F36"/>
+                </a:solidFill>
+                <a:latin typeface="微软雅黑"/>
+              </a:rPr>
+              <a:t>✗ d.start无输出 → d.start()才调用</a:t>
+            </a:r>
+          </a:p>
+        </p:txBody>
+      </p:sp>
+      <p:sp>
+        <p:nvSpPr>
+          <p:cNvPr id="27" name="Rectangle 26"/>
+          <p:cNvSpPr/>
+          <p:nvPr/>
+        </p:nvSpPr>
+        <p:spPr>
+          <a:xfrm>
+            <a:off x="457200" y="5047488"/>
+            <a:ext cx="11274552" cy="1207008"/>
+          </a:xfrm>
+          <a:prstGeom prst="rect">
+            <a:avLst/>
+          </a:prstGeom>
+          <a:solidFill>
+            <a:srgbClr val="FFFFFF"/>
+          </a:solidFill>
+          <a:ln>
+            <a:solidFill>
+              <a:srgbClr val="D6DCE4"/>
+            </a:solidFill>
+          </a:ln>
+          <a:effectLst/>
+        </p:spPr>
+        <p:style>
+          <a:lnRef idx="1">
+            <a:schemeClr val="accent1"/>
+          </a:lnRef>
+          <a:fillRef idx="3">
+            <a:schemeClr val="accent1"/>
+          </a:fillRef>
+          <a:effectRef idx="2">
+            <a:schemeClr val="accent1"/>
+          </a:effectRef>
+          <a:fontRef idx="minor">
+            <a:schemeClr val="lt1"/>
+          </a:fontRef>
+        </p:style>
+        <p:txBody>
+          <a:bodyPr rtlCol="0" anchor="ctr" wrap="square"/>
+          <a:lstStyle/>
+          <a:p>
+            <a:pPr algn="ctr"/>
+          </a:p>
+        </p:txBody>
+      </p:sp>
+      <p:sp>
+        <p:nvSpPr>
+          <p:cNvPr id="28" name="Rectangle 27"/>
+          <p:cNvSpPr/>
+          <p:nvPr/>
+        </p:nvSpPr>
+        <p:spPr>
+          <a:xfrm>
+            <a:off x="457200" y="5047488"/>
+            <a:ext cx="11274552" cy="365760"/>
+          </a:xfrm>
+          <a:prstGeom prst="rect">
+            <a:avLst/>
+          </a:prstGeom>
+          <a:solidFill>
+            <a:srgbClr val="2E7D46"/>
+          </a:solidFill>
+          <a:ln>
+            <a:noFill/>
+          </a:ln>
+          <a:effectLst/>
+        </p:spPr>
+        <p:style>
+          <a:lnRef idx="1">
+            <a:schemeClr val="accent1"/>
+          </a:lnRef>
+          <a:fillRef idx="3">
+            <a:schemeClr val="accent1"/>
+          </a:fillRef>
+          <a:effectRef idx="2">
+            <a:schemeClr val="accent1"/>
+          </a:effectRef>
+          <a:fontRef idx="minor">
+            <a:schemeClr val="lt1"/>
+          </a:fontRef>
+        </p:style>
+        <p:txBody>
+          <a:bodyPr rtlCol="0" anchor="ctr" wrap="square"/>
+          <a:lstStyle/>
+          <a:p>
+            <a:pPr algn="ctr"/>
+          </a:p>
+        </p:txBody>
+      </p:sp>
+      <p:sp>
+        <p:nvSpPr>
+          <p:cNvPr id="29" name="TextBox 28"/>
+          <p:cNvSpPr txBox="1"/>
+          <p:nvPr/>
+        </p:nvSpPr>
+        <p:spPr>
+          <a:xfrm>
+            <a:off x="566928" y="5084064"/>
+            <a:ext cx="11055096" cy="292608"/>
+          </a:xfrm>
+          <a:prstGeom prst="rect">
+            <a:avLst/>
+          </a:prstGeom>
+          <a:noFill/>
+        </p:spPr>
+        <p:txBody>
+          <a:bodyPr wrap="square">
+            <a:spAutoFit/>
+          </a:bodyPr>
+          <a:lstStyle/>
+          <a:p>
+            <a:r>
+              <a:rPr sz="1150" b="1">
+                <a:solidFill>
+                  <a:srgbClr val="FFFFFF"/>
+                </a:solidFill>
+                <a:latin typeface="微软雅黑"/>
+              </a:rPr>
+              <a:t>达标自问 · 学没学会，问自己这四句（当堂评分同口径）</a:t>
+            </a:r>
+          </a:p>
+        </p:txBody>
+      </p:sp>
+      <p:sp>
+        <p:nvSpPr>
+          <p:cNvPr id="30" name="TextBox 29"/>
+          <p:cNvSpPr txBox="1"/>
+          <p:nvPr/>
+        </p:nvSpPr>
+        <p:spPr>
+          <a:xfrm>
+            <a:off x="621792" y="5458968"/>
+            <a:ext cx="10972800" cy="768096"/>
+          </a:xfrm>
+          <a:prstGeom prst="rect">
+            <a:avLst/>
+          </a:prstGeom>
+          <a:noFill/>
+        </p:spPr>
+        <p:txBody>
+          <a:bodyPr wrap="square">
+            <a:spAutoFit/>
+          </a:bodyPr>
+          <a:lstStyle/>
+          <a:p>
+            <a:r>
+              <a:rPr sz="900" b="0">
+                <a:solidFill>
+                  <a:srgbClr val="2B2F36"/>
+                </a:solidFill>
+                <a:latin typeface="微软雅黑"/>
+              </a:rPr>
+              <a:t>① 及格线我能过吗——1类+2属性+2方法+2实例</a:t>
+            </a:r>
+          </a:p>
+          <a:p>
+            <a:r>
+              <a:rPr sz="900" b="0">
+                <a:solidFill>
+                  <a:srgbClr val="2B2F36"/>
+                </a:solidFill>
+                <a:latin typeface="微软雅黑"/>
+              </a:rPr>
+              <a:t>② 优秀线我够吗——状态校验完善；内存图正确</a:t>
+            </a:r>
+          </a:p>
+          <a:p>
+            <a:r>
+              <a:rPr sz="900" b="0">
+                <a:solidFill>
+                  <a:srgbClr val="2B2F36"/>
+                </a:solidFill>
+                <a:latin typeface="微软雅黑"/>
+              </a:rPr>
+              <a:t>③ 技能点我能独立做出来吗——设计Device类(属性+方法)；创建多实例并演示属性隔离</a:t>
+            </a:r>
+          </a:p>
+          <a:p>
+            <a:r>
+              <a:rPr sz="900" b="0">
+                <a:solidFill>
+                  <a:srgbClr val="2B2F36"/>
+                </a:solidFill>
+                <a:latin typeface="微软雅黑"/>
+              </a:rPr>
+              <a:t>④ 报错了先查「常见错误速查」页再举手——错误信息逐字读一遍，八成自己能修</a:t>
+            </a:r>
+          </a:p>
+        </p:txBody>
+      </p:sp>
+      <p:sp>
+        <p:nvSpPr>
+          <p:cNvPr id="31" name="TextBox 30"/>
+          <p:cNvSpPr txBox="1"/>
+          <p:nvPr/>
+        </p:nvSpPr>
+        <p:spPr>
+          <a:xfrm>
+            <a:off x="457200" y="6281928"/>
+            <a:ext cx="9601200" cy="182880"/>
+          </a:xfrm>
+          <a:prstGeom prst="rect">
+            <a:avLst/>
+          </a:prstGeom>
+          <a:noFill/>
+        </p:spPr>
+        <p:txBody>
+          <a:bodyPr wrap="square">
+            <a:spAutoFit/>
+          </a:bodyPr>
+          <a:lstStyle/>
+          <a:p>
+            <a:r>
+              <a:rPr sz="750" b="0">
+                <a:solidFill>
+                  <a:srgbClr val="6B7280"/>
+                </a:solidFill>
+                <a:latin typeface="微软雅黑"/>
+              </a:rPr>
+              <a:t>素材来源：同周《第7次课-从图纸到对象：设备建模》知识卡与避坑清单（逐字摘录）</a:t>
+            </a:r>
+          </a:p>
+        </p:txBody>
+      </p:sp>
+    </p:spTree>
+  </p:cSld>
+  <p:clrMapOvr>
+    <a:masterClrMapping/>
+  </p:clrMapOvr>
+</p:sld>
+</file>
+
+<file path=ppt/slides/slide12.xml><?xml version="1.0" encoding="utf-8"?>
+<p:sld xmlns:a="http://schemas.openxmlformats.org/drawingml/2006/main" xmlns:p="http://schemas.openxmlformats.org/presentationml/2006/main" xmlns:r="http://schemas.openxmlformats.org/officeDocument/2006/relationships">
+  <p:cSld>
+    <p:spTree>
+      <p:nvGrpSpPr>
+        <p:cNvPr id="1" name=""/>
+        <p:cNvGrpSpPr/>
+        <p:nvPr/>
+      </p:nvGrpSpPr>
+      <p:grpSpPr/>
+      <p:sp>
+        <p:nvSpPr>
+          <p:cNvPr id="2" name="Rectangle 1"/>
+          <p:cNvSpPr/>
+          <p:nvPr/>
+        </p:nvSpPr>
+        <p:spPr>
+          <a:xfrm>
+            <a:off x="0" y="0"/>
+            <a:ext cx="12192000" cy="1150000"/>
+          </a:xfrm>
+          <a:prstGeom prst="rect">
+            <a:avLst/>
+          </a:prstGeom>
+          <a:solidFill>
+            <a:srgbClr val="010328"/>
+          </a:solidFill>
+          <a:ln>
+            <a:noFill/>
+          </a:ln>
+          <a:effectLst/>
+        </p:spPr>
+        <p:style>
+          <a:lnRef idx="1">
+            <a:schemeClr val="accent1"/>
+          </a:lnRef>
+          <a:fillRef idx="3">
+            <a:schemeClr val="accent1"/>
+          </a:fillRef>
+          <a:effectRef idx="2">
+            <a:schemeClr val="accent1"/>
+          </a:effectRef>
+          <a:fontRef idx="minor">
+            <a:schemeClr val="lt1"/>
+          </a:fontRef>
+        </p:style>
+        <p:txBody>
+          <a:bodyPr rtlCol="0" anchor="ctr"/>
+          <a:lstStyle/>
+          <a:p>
+            <a:pPr algn="ctr"/>
+          </a:p>
+        </p:txBody>
+      </p:sp>
+      <p:sp>
+        <p:nvSpPr>
+          <p:cNvPr id="3" name="Rectangle 2"/>
+          <p:cNvSpPr/>
+          <p:nvPr/>
+        </p:nvSpPr>
+        <p:spPr>
+          <a:xfrm>
+            <a:off x="0" y="1150000"/>
+            <a:ext cx="2600000" cy="70000"/>
+          </a:xfrm>
+          <a:prstGeom prst="rect">
+            <a:avLst/>
+          </a:prstGeom>
+          <a:solidFill>
+            <a:srgbClr val="F5670F"/>
+          </a:solidFill>
+          <a:ln>
+            <a:noFill/>
+          </a:ln>
+          <a:effectLst/>
+        </p:spPr>
+        <p:style>
+          <a:lnRef idx="1">
+            <a:schemeClr val="accent1"/>
+          </a:lnRef>
+          <a:fillRef idx="3">
+            <a:schemeClr val="accent1"/>
+          </a:fillRef>
+          <a:effectRef idx="2">
+            <a:schemeClr val="accent1"/>
+          </a:effectRef>
+          <a:fontRef idx="minor">
+            <a:schemeClr val="lt1"/>
+          </a:fontRef>
+        </p:style>
+        <p:txBody>
+          <a:bodyPr rtlCol="0" anchor="ctr"/>
+          <a:lstStyle/>
+          <a:p>
+            <a:pPr algn="ctr"/>
+          </a:p>
+        </p:txBody>
+      </p:sp>
+      <p:sp>
+        <p:nvSpPr>
+          <p:cNvPr id="4" name="TextBox 3"/>
+          <p:cNvSpPr txBox="1"/>
+          <p:nvPr/>
+        </p:nvSpPr>
+        <p:spPr>
+          <a:xfrm>
+            <a:off x="700000" y="300000"/>
+            <a:ext cx="10792000" cy="700000"/>
+          </a:xfrm>
+          <a:prstGeom prst="rect">
+            <a:avLst/>
+          </a:prstGeom>
+          <a:noFill/>
+        </p:spPr>
+        <p:txBody>
+          <a:bodyPr wrap="square" anchor="t">
+            <a:spAutoFit/>
+          </a:bodyPr>
+          <a:lstStyle/>
+          <a:p>
+            <a:pPr algn="l">
+              <a:lnSpc>
+                <a:spcPct val="110000"/>
+              </a:lnSpc>
+              <a:spcAft>
+                <a:spcPts val="600"/>
+              </a:spcAft>
+            </a:pPr>
+            <a:r>
+              <a:rPr sz="2400" b="1">
+                <a:solidFill>
+                  <a:srgbClr val="FFFFFF"/>
+                </a:solidFill>
+                <a:latin typeface="微软雅黑"/>
+              </a:rPr>
+              <a:t>难点逐个击破 · 零基础照做就能会</a:t>
+            </a:r>
+          </a:p>
+        </p:txBody>
+      </p:sp>
+      <p:sp>
+        <p:nvSpPr>
+          <p:cNvPr id="11" name="Rectangle 10"/>
+          <p:cNvSpPr/>
+          <p:nvPr/>
+        </p:nvSpPr>
+        <p:spPr>
+          <a:xfrm>
+            <a:off x="500000" y="6500000"/>
+            <a:ext cx="11100000" cy="20000"/>
+          </a:xfrm>
+          <a:prstGeom prst="rect">
+            <a:avLst/>
+          </a:prstGeom>
+          <a:solidFill>
+            <a:srgbClr val="C9D4EE"/>
+          </a:solidFill>
+          <a:ln>
+            <a:noFill/>
+          </a:ln>
+          <a:effectLst/>
+        </p:spPr>
+        <p:style>
+          <a:lnRef idx="1">
+            <a:schemeClr val="accent1"/>
+          </a:lnRef>
+          <a:fillRef idx="3">
+            <a:schemeClr val="accent1"/>
+          </a:fillRef>
+          <a:effectRef idx="2">
+            <a:schemeClr val="accent1"/>
+          </a:effectRef>
+          <a:fontRef idx="minor">
+            <a:schemeClr val="lt1"/>
+          </a:fontRef>
+        </p:style>
+        <p:txBody>
+          <a:bodyPr rtlCol="0" anchor="ctr"/>
+          <a:lstStyle/>
+          <a:p>
+            <a:pPr algn="ctr"/>
+          </a:p>
+        </p:txBody>
+      </p:sp>
+      <p:sp>
+        <p:nvSpPr>
+          <p:cNvPr id="12" name="TextBox 11"/>
+          <p:cNvSpPr txBox="1"/>
+          <p:nvPr/>
+        </p:nvSpPr>
+        <p:spPr>
+          <a:xfrm>
+            <a:off x="500000" y="6540000"/>
+            <a:ext cx="7000000" cy="300000"/>
+          </a:xfrm>
+          <a:prstGeom prst="rect">
+            <a:avLst/>
+          </a:prstGeom>
+          <a:noFill/>
+        </p:spPr>
+        <p:txBody>
+          <a:bodyPr wrap="square" anchor="t">
+            <a:spAutoFit/>
+          </a:bodyPr>
+          <a:lstStyle/>
+          <a:p>
+            <a:pPr algn="l">
+              <a:lnSpc>
+                <a:spcPct val="110000"/>
+              </a:lnSpc>
+              <a:spcAft>
+                <a:spcPts val="600"/>
+              </a:spcAft>
+            </a:pPr>
+            <a:r>
+              <a:rPr sz="1000" b="0">
+                <a:solidFill>
+                  <a:srgbClr val="8A97B5"/>
+                </a:solidFill>
+                <a:latin typeface="微软雅黑"/>
+              </a:rPr>
+              <a:t>两江智造集团 · Python编程基础</a:t>
+            </a:r>
+          </a:p>
+        </p:txBody>
+      </p:sp>
+      <p:sp>
+        <p:nvSpPr>
+          <p:cNvPr id="13" name="TextBox 12"/>
+          <p:cNvSpPr txBox="1"/>
+          <p:nvPr/>
+        </p:nvSpPr>
+        <p:spPr>
+          <a:xfrm>
+            <a:off x="10600000" y="6540000"/>
+            <a:ext cx="1000000" cy="300000"/>
+          </a:xfrm>
+          <a:prstGeom prst="rect">
+            <a:avLst/>
+          </a:prstGeom>
+          <a:noFill/>
+        </p:spPr>
+        <p:txBody>
+          <a:bodyPr wrap="square" anchor="t">
+            <a:spAutoFit/>
+          </a:bodyPr>
+          <a:lstStyle/>
+          <a:p>
+            <a:pPr algn="r">
+              <a:lnSpc>
+                <a:spcPct val="110000"/>
+              </a:lnSpc>
+              <a:spcAft>
+                <a:spcPts val="600"/>
+              </a:spcAft>
+            </a:pPr>
+            <a:r>
+              <a:rPr sz="1000" b="0">
+                <a:solidFill>
+                  <a:srgbClr val="8A97B5"/>
+                </a:solidFill>
+                <a:latin typeface="微软雅黑"/>
+              </a:rPr>
+              <a:t>6 / 13</a:t>
+            </a:r>
+          </a:p>
+        </p:txBody>
+      </p:sp>
+      <p:sp>
+        <p:nvSpPr>
+          <p:cNvPr id="14" name="TextBox 13"/>
+          <p:cNvSpPr txBox="1"/>
+          <p:nvPr/>
+        </p:nvSpPr>
+        <p:spPr>
+          <a:xfrm>
+            <a:off x="457200" y="1389888"/>
+            <a:ext cx="11274552" cy="274320"/>
+          </a:xfrm>
+          <a:prstGeom prst="rect">
+            <a:avLst/>
+          </a:prstGeom>
+          <a:noFill/>
+        </p:spPr>
+        <p:txBody>
+          <a:bodyPr wrap="square">
+            <a:spAutoFit/>
+          </a:bodyPr>
+          <a:lstStyle/>
+          <a:p>
+            <a:r>
+              <a:rPr sz="1050" b="0">
+                <a:solidFill>
+                  <a:srgbClr val="6B7280"/>
+                </a:solidFill>
+                <a:latin typeface="微软雅黑"/>
+              </a:rPr>
+              <a:t>每个难点四步走：先看「为什么容易栽」对号入座 → 记住「一招破解」→ 照「动手验证」做一遍 → 做不出回知识详解页。</a:t>
+            </a:r>
+          </a:p>
+        </p:txBody>
+      </p:sp>
+      <p:sp>
+        <p:nvSpPr>
+          <p:cNvPr id="15" name="Rectangle 14"/>
+          <p:cNvSpPr/>
+          <p:nvPr/>
+        </p:nvSpPr>
+        <p:spPr>
+          <a:xfrm>
+            <a:off x="457200" y="1783080"/>
+            <a:ext cx="11274552" cy="1481328"/>
+          </a:xfrm>
+          <a:prstGeom prst="rect">
+            <a:avLst/>
+          </a:prstGeom>
+          <a:solidFill>
+            <a:srgbClr val="F7F9FC"/>
+          </a:solidFill>
+          <a:ln>
+            <a:solidFill>
+              <a:srgbClr val="D6DCE4"/>
+            </a:solidFill>
+          </a:ln>
+          <a:effectLst/>
+        </p:spPr>
+        <p:style>
+          <a:lnRef idx="1">
+            <a:schemeClr val="accent1"/>
+          </a:lnRef>
+          <a:fillRef idx="3">
+            <a:schemeClr val="accent1"/>
+          </a:fillRef>
+          <a:effectRef idx="2">
+            <a:schemeClr val="accent1"/>
+          </a:effectRef>
+          <a:fontRef idx="minor">
+            <a:schemeClr val="lt1"/>
+          </a:fontRef>
+        </p:style>
+        <p:txBody>
+          <a:bodyPr rtlCol="0" anchor="ctr" wrap="square"/>
+          <a:lstStyle/>
+          <a:p>
+            <a:pPr algn="ctr"/>
+          </a:p>
+        </p:txBody>
+      </p:sp>
+      <p:sp>
+        <p:nvSpPr>
+          <p:cNvPr id="16" name="Rectangle 15"/>
+          <p:cNvSpPr/>
+          <p:nvPr/>
+        </p:nvSpPr>
+        <p:spPr>
+          <a:xfrm>
+            <a:off x="457200" y="1783080"/>
+            <a:ext cx="82296" cy="1481328"/>
+          </a:xfrm>
+          <a:prstGeom prst="rect">
+            <a:avLst/>
+          </a:prstGeom>
+          <a:solidFill>
+            <a:srgbClr val="8A4B2D"/>
+          </a:solidFill>
+          <a:ln>
+            <a:noFill/>
+          </a:ln>
+          <a:effectLst/>
+        </p:spPr>
+        <p:style>
+          <a:lnRef idx="1">
+            <a:schemeClr val="accent1"/>
+          </a:lnRef>
+          <a:fillRef idx="3">
+            <a:schemeClr val="accent1"/>
+          </a:fillRef>
+          <a:effectRef idx="2">
+            <a:schemeClr val="accent1"/>
+          </a:effectRef>
+          <a:fontRef idx="minor">
+            <a:schemeClr val="lt1"/>
+          </a:fontRef>
+        </p:style>
+        <p:txBody>
+          <a:bodyPr rtlCol="0" anchor="ctr" wrap="square"/>
+          <a:lstStyle/>
+          <a:p>
+            <a:pPr algn="ctr"/>
+          </a:p>
+        </p:txBody>
+      </p:sp>
+      <p:sp>
+        <p:nvSpPr>
+          <p:cNvPr id="17" name="TextBox 16"/>
+          <p:cNvSpPr txBox="1"/>
+          <p:nvPr/>
+        </p:nvSpPr>
+        <p:spPr>
+          <a:xfrm>
+            <a:off x="658368" y="1828800"/>
+            <a:ext cx="10972800" cy="274320"/>
+          </a:xfrm>
+          <a:prstGeom prst="rect">
+            <a:avLst/>
+          </a:prstGeom>
+          <a:noFill/>
+        </p:spPr>
+        <p:txBody>
+          <a:bodyPr wrap="square">
+            <a:spAutoFit/>
+          </a:bodyPr>
+          <a:lstStyle/>
+          <a:p>
+            <a:r>
+              <a:rPr sz="1100" b="1">
+                <a:solidFill>
+                  <a:srgbClr val="8A4B2D"/>
+                </a:solidFill>
+                <a:latin typeface="微软雅黑"/>
+              </a:rPr>
+              <a:t>难点1：B01 类与实例</a:t>
+            </a:r>
+          </a:p>
+        </p:txBody>
+      </p:sp>
+      <p:sp>
+        <p:nvSpPr>
+          <p:cNvPr id="18" name="TextBox 17"/>
+          <p:cNvSpPr txBox="1"/>
+          <p:nvPr/>
+        </p:nvSpPr>
+        <p:spPr>
+          <a:xfrm>
+            <a:off x="658368" y="2148840"/>
+            <a:ext cx="3566160" cy="219456"/>
+          </a:xfrm>
+          <a:prstGeom prst="rect">
+            <a:avLst/>
+          </a:prstGeom>
+          <a:noFill/>
+        </p:spPr>
+        <p:txBody>
+          <a:bodyPr wrap="square">
+            <a:spAutoFit/>
+          </a:bodyPr>
+          <a:lstStyle/>
+          <a:p>
+            <a:r>
+              <a:rPr sz="900" b="1">
+                <a:solidFill>
+                  <a:srgbClr val="B5533A"/>
+                </a:solidFill>
+                <a:latin typeface="微软雅黑"/>
+              </a:rPr>
+              <a:t>为什么容易栽</a:t>
+            </a:r>
+          </a:p>
+        </p:txBody>
+      </p:sp>
+      <p:sp>
+        <p:nvSpPr>
+          <p:cNvPr id="19" name="TextBox 18"/>
+          <p:cNvSpPr txBox="1"/>
+          <p:nvPr/>
+        </p:nvSpPr>
+        <p:spPr>
+          <a:xfrm>
+            <a:off x="658368" y="2386584"/>
+            <a:ext cx="3584448" cy="822960"/>
+          </a:xfrm>
+          <a:prstGeom prst="rect">
+            <a:avLst/>
+          </a:prstGeom>
+          <a:noFill/>
+        </p:spPr>
+        <p:txBody>
+          <a:bodyPr wrap="square">
+            <a:spAutoFit/>
+          </a:bodyPr>
+          <a:lstStyle/>
+          <a:p>
+            <a:r>
+              <a:rPr sz="850" b="0">
+                <a:solidFill>
+                  <a:srgbClr val="2B2F36"/>
+                </a:solidFill>
+                <a:latin typeface="微软雅黑"/>
+              </a:rPr>
+              <a:t>误区：改d1不影响d2——各实例各一份属性，图纸本身不存温度</a:t>
+            </a:r>
+          </a:p>
+        </p:txBody>
+      </p:sp>
+      <p:sp>
+        <p:nvSpPr>
+          <p:cNvPr id="20" name="TextBox 19"/>
+          <p:cNvSpPr txBox="1"/>
+          <p:nvPr/>
+        </p:nvSpPr>
+        <p:spPr>
+          <a:xfrm>
+            <a:off x="4334255" y="2148840"/>
+            <a:ext cx="3566160" cy="219456"/>
+          </a:xfrm>
+          <a:prstGeom prst="rect">
+            <a:avLst/>
+          </a:prstGeom>
+          <a:noFill/>
+        </p:spPr>
+        <p:txBody>
+          <a:bodyPr wrap="square">
+            <a:spAutoFit/>
+          </a:bodyPr>
+          <a:lstStyle/>
+          <a:p>
+            <a:r>
+              <a:rPr sz="900" b="1">
+                <a:solidFill>
+                  <a:srgbClr val="2E7D46"/>
+                </a:solidFill>
+                <a:latin typeface="微软雅黑"/>
+              </a:rPr>
+              <a:t>一招破解（记住这句）</a:t>
+            </a:r>
+          </a:p>
+        </p:txBody>
+      </p:sp>
+      <p:sp>
+        <p:nvSpPr>
+          <p:cNvPr id="21" name="TextBox 20"/>
+          <p:cNvSpPr txBox="1"/>
+          <p:nvPr/>
+        </p:nvSpPr>
+        <p:spPr>
+          <a:xfrm>
+            <a:off x="4334255" y="2386584"/>
+            <a:ext cx="3584448" cy="822960"/>
+          </a:xfrm>
+          <a:prstGeom prst="rect">
+            <a:avLst/>
+          </a:prstGeom>
+          <a:noFill/>
+        </p:spPr>
+        <p:txBody>
+          <a:bodyPr wrap="square">
+            <a:spAutoFit/>
+          </a:bodyPr>
+          <a:lstStyle/>
+          <a:p>
+            <a:r>
+              <a:rPr sz="850" b="0">
+                <a:solidFill>
+                  <a:srgbClr val="2B2F36"/>
+                </a:solidFill>
+                <a:latin typeface="微软雅黑"/>
+              </a:rPr>
+              <a:t>类=图纸，实例=按图纸造出的每台泵——一图多产品</a:t>
+            </a:r>
+          </a:p>
+        </p:txBody>
+      </p:sp>
+      <p:sp>
+        <p:nvSpPr>
+          <p:cNvPr id="22" name="TextBox 21"/>
+          <p:cNvSpPr txBox="1"/>
+          <p:nvPr/>
+        </p:nvSpPr>
+        <p:spPr>
+          <a:xfrm>
+            <a:off x="8010143" y="2148840"/>
+            <a:ext cx="3566160" cy="219456"/>
+          </a:xfrm>
+          <a:prstGeom prst="rect">
+            <a:avLst/>
+          </a:prstGeom>
+          <a:noFill/>
+        </p:spPr>
+        <p:txBody>
+          <a:bodyPr wrap="square">
+            <a:spAutoFit/>
+          </a:bodyPr>
+          <a:lstStyle/>
+          <a:p>
+            <a:r>
+              <a:rPr sz="900" b="1">
+                <a:solidFill>
+                  <a:srgbClr val="35506E"/>
+                </a:solidFill>
+                <a:latin typeface="微软雅黑"/>
+              </a:rPr>
+              <a:t>动手验证（照做一遍）</a:t>
+            </a:r>
+          </a:p>
+        </p:txBody>
+      </p:sp>
+      <p:sp>
+        <p:nvSpPr>
+          <p:cNvPr id="23" name="TextBox 22"/>
+          <p:cNvSpPr txBox="1"/>
+          <p:nvPr/>
+        </p:nvSpPr>
+        <p:spPr>
+          <a:xfrm>
+            <a:off x="8010143" y="2386584"/>
+            <a:ext cx="3584448" cy="822960"/>
+          </a:xfrm>
+          <a:prstGeom prst="rect">
+            <a:avLst/>
+          </a:prstGeom>
+          <a:noFill/>
+        </p:spPr>
+        <p:txBody>
+          <a:bodyPr wrap="square">
+            <a:spAutoFit/>
+          </a:bodyPr>
+          <a:lstStyle/>
+          <a:p>
+            <a:r>
+              <a:rPr sz="850" b="0">
+                <a:solidFill>
+                  <a:srgbClr val="2B2F36"/>
+                </a:solidFill>
+                <a:latin typeface="微软雅黑"/>
+              </a:rPr>
+              <a:t>一类设备抽象成类，每台设备是独立实例 class Device: … ；d1=Device('PUMP-03')</a:t>
+            </a:r>
+          </a:p>
+        </p:txBody>
+      </p:sp>
+      <p:sp>
+        <p:nvSpPr>
+          <p:cNvPr id="24" name="Rectangle 23"/>
+          <p:cNvSpPr/>
+          <p:nvPr/>
+        </p:nvSpPr>
+        <p:spPr>
+          <a:xfrm>
+            <a:off x="457200" y="3383280"/>
+            <a:ext cx="11274552" cy="1481328"/>
+          </a:xfrm>
+          <a:prstGeom prst="rect">
+            <a:avLst/>
+          </a:prstGeom>
+          <a:solidFill>
+            <a:srgbClr val="F7F9FC"/>
+          </a:solidFill>
+          <a:ln>
+            <a:solidFill>
+              <a:srgbClr val="D6DCE4"/>
+            </a:solidFill>
+          </a:ln>
+          <a:effectLst/>
+        </p:spPr>
+        <p:style>
+          <a:lnRef idx="1">
+            <a:schemeClr val="accent1"/>
+          </a:lnRef>
+          <a:fillRef idx="3">
+            <a:schemeClr val="accent1"/>
+          </a:fillRef>
+          <a:effectRef idx="2">
+            <a:schemeClr val="accent1"/>
+          </a:effectRef>
+          <a:fontRef idx="minor">
+            <a:schemeClr val="lt1"/>
+          </a:fontRef>
+        </p:style>
+        <p:txBody>
+          <a:bodyPr rtlCol="0" anchor="ctr" wrap="square"/>
+          <a:lstStyle/>
+          <a:p>
+            <a:pPr algn="ctr"/>
+          </a:p>
+        </p:txBody>
+      </p:sp>
+      <p:sp>
+        <p:nvSpPr>
+          <p:cNvPr id="25" name="Rectangle 24"/>
+          <p:cNvSpPr/>
+          <p:nvPr/>
+        </p:nvSpPr>
+        <p:spPr>
+          <a:xfrm>
+            <a:off x="457200" y="3383280"/>
+            <a:ext cx="82296" cy="1481328"/>
+          </a:xfrm>
+          <a:prstGeom prst="rect">
+            <a:avLst/>
+          </a:prstGeom>
+          <a:solidFill>
+            <a:srgbClr val="8A4B2D"/>
+          </a:solidFill>
+          <a:ln>
+            <a:noFill/>
+          </a:ln>
+          <a:effectLst/>
+        </p:spPr>
+        <p:style>
+          <a:lnRef idx="1">
+            <a:schemeClr val="accent1"/>
+          </a:lnRef>
+          <a:fillRef idx="3">
+            <a:schemeClr val="accent1"/>
+          </a:fillRef>
+          <a:effectRef idx="2">
+            <a:schemeClr val="accent1"/>
+          </a:effectRef>
+          <a:fontRef idx="minor">
+            <a:schemeClr val="lt1"/>
+          </a:fontRef>
+        </p:style>
+        <p:txBody>
+          <a:bodyPr rtlCol="0" anchor="ctr" wrap="square"/>
+          <a:lstStyle/>
+          <a:p>
+            <a:pPr algn="ctr"/>
+          </a:p>
+        </p:txBody>
+      </p:sp>
+      <p:sp>
+        <p:nvSpPr>
+          <p:cNvPr id="26" name="TextBox 25"/>
+          <p:cNvSpPr txBox="1"/>
+          <p:nvPr/>
+        </p:nvSpPr>
+        <p:spPr>
+          <a:xfrm>
+            <a:off x="658368" y="3429000"/>
+            <a:ext cx="10972800" cy="274320"/>
+          </a:xfrm>
+          <a:prstGeom prst="rect">
+            <a:avLst/>
+          </a:prstGeom>
+          <a:noFill/>
+        </p:spPr>
+        <p:txBody>
+          <a:bodyPr wrap="square">
+            <a:spAutoFit/>
+          </a:bodyPr>
+          <a:lstStyle/>
+          <a:p>
+            <a:r>
+              <a:rPr sz="1100" b="1">
+                <a:solidFill>
+                  <a:srgbClr val="8A4B2D"/>
+                </a:solidFill>
+                <a:latin typeface="微软雅黑"/>
+              </a:rPr>
+              <a:t>难点2：B02 __init__与self</a:t>
+            </a:r>
+          </a:p>
+        </p:txBody>
+      </p:sp>
+      <p:sp>
+        <p:nvSpPr>
+          <p:cNvPr id="27" name="TextBox 26"/>
+          <p:cNvSpPr txBox="1"/>
+          <p:nvPr/>
+        </p:nvSpPr>
+        <p:spPr>
+          <a:xfrm>
+            <a:off x="658368" y="3749040"/>
+            <a:ext cx="3566160" cy="219456"/>
+          </a:xfrm>
+          <a:prstGeom prst="rect">
+            <a:avLst/>
+          </a:prstGeom>
+          <a:noFill/>
+        </p:spPr>
+        <p:txBody>
+          <a:bodyPr wrap="square">
+            <a:spAutoFit/>
+          </a:bodyPr>
+          <a:lstStyle/>
+          <a:p>
+            <a:r>
+              <a:rPr sz="900" b="1">
+                <a:solidFill>
+                  <a:srgbClr val="B5533A"/>
+                </a:solidFill>
+                <a:latin typeface="微软雅黑"/>
+              </a:rPr>
+              <a:t>为什么容易栽</a:t>
+            </a:r>
+          </a:p>
+        </p:txBody>
+      </p:sp>
+      <p:sp>
+        <p:nvSpPr>
+          <p:cNvPr id="28" name="TextBox 27"/>
+          <p:cNvSpPr txBox="1"/>
+          <p:nvPr/>
+        </p:nvSpPr>
+        <p:spPr>
+          <a:xfrm>
+            <a:off x="658368" y="3986784"/>
+            <a:ext cx="3584448" cy="822960"/>
+          </a:xfrm>
+          <a:prstGeom prst="rect">
+            <a:avLst/>
+          </a:prstGeom>
+          <a:noFill/>
+        </p:spPr>
+        <p:txBody>
+          <a:bodyPr wrap="square">
+            <a:spAutoFit/>
+          </a:bodyPr>
+          <a:lstStyle/>
+          <a:p>
+            <a:r>
+              <a:rPr sz="850" b="0">
+                <a:solidFill>
+                  <a:srgbClr val="2B2F36"/>
+                </a:solidFill>
+                <a:latin typeface="微软雅黑"/>
+              </a:rPr>
+              <a:t>误区：方法漏写self→TypeError——调用时Python自动传实例</a:t>
+            </a:r>
+          </a:p>
+        </p:txBody>
+      </p:sp>
+      <p:sp>
+        <p:nvSpPr>
+          <p:cNvPr id="29" name="TextBox 28"/>
+          <p:cNvSpPr txBox="1"/>
+          <p:nvPr/>
+        </p:nvSpPr>
+        <p:spPr>
+          <a:xfrm>
+            <a:off x="4334255" y="3749040"/>
+            <a:ext cx="3566160" cy="219456"/>
+          </a:xfrm>
+          <a:prstGeom prst="rect">
+            <a:avLst/>
+          </a:prstGeom>
+          <a:noFill/>
+        </p:spPr>
+        <p:txBody>
+          <a:bodyPr wrap="square">
+            <a:spAutoFit/>
+          </a:bodyPr>
+          <a:lstStyle/>
+          <a:p>
+            <a:r>
+              <a:rPr sz="900" b="1">
+                <a:solidFill>
+                  <a:srgbClr val="2E7D46"/>
+                </a:solidFill>
+                <a:latin typeface="微软雅黑"/>
+              </a:rPr>
+              <a:t>一招破解（记住这句）</a:t>
+            </a:r>
+          </a:p>
+        </p:txBody>
+      </p:sp>
+      <p:sp>
+        <p:nvSpPr>
+          <p:cNvPr id="30" name="TextBox 29"/>
+          <p:cNvSpPr txBox="1"/>
+          <p:nvPr/>
+        </p:nvSpPr>
+        <p:spPr>
+          <a:xfrm>
+            <a:off x="4334255" y="3986784"/>
+            <a:ext cx="3584448" cy="822960"/>
+          </a:xfrm>
+          <a:prstGeom prst="rect">
+            <a:avLst/>
+          </a:prstGeom>
+          <a:noFill/>
+        </p:spPr>
+        <p:txBody>
+          <a:bodyPr wrap="square">
+            <a:spAutoFit/>
+          </a:bodyPr>
+          <a:lstStyle/>
+          <a:p>
+            <a:r>
+              <a:rPr sz="850" b="0">
+                <a:solidFill>
+                  <a:srgbClr val="2B2F36"/>
+                </a:solidFill>
+                <a:latin typeface="微软雅黑"/>
+              </a:rPr>
+              <a:t>self='我自己'；__init__=出厂设置，造时自动执行</a:t>
+            </a:r>
+          </a:p>
+        </p:txBody>
+      </p:sp>
+      <p:sp>
+        <p:nvSpPr>
+          <p:cNvPr id="31" name="TextBox 30"/>
+          <p:cNvSpPr txBox="1"/>
+          <p:nvPr/>
+        </p:nvSpPr>
+        <p:spPr>
+          <a:xfrm>
+            <a:off x="8010143" y="3749040"/>
+            <a:ext cx="3566160" cy="219456"/>
+          </a:xfrm>
+          <a:prstGeom prst="rect">
+            <a:avLst/>
+          </a:prstGeom>
+          <a:noFill/>
+        </p:spPr>
+        <p:txBody>
+          <a:bodyPr wrap="square">
+            <a:spAutoFit/>
+          </a:bodyPr>
+          <a:lstStyle/>
+          <a:p>
+            <a:r>
+              <a:rPr sz="900" b="1">
+                <a:solidFill>
+                  <a:srgbClr val="35506E"/>
+                </a:solidFill>
+                <a:latin typeface="微软雅黑"/>
+              </a:rPr>
+              <a:t>动手验证（照做一遍）</a:t>
+            </a:r>
+          </a:p>
+        </p:txBody>
+      </p:sp>
+      <p:sp>
+        <p:nvSpPr>
+          <p:cNvPr id="32" name="TextBox 31"/>
+          <p:cNvSpPr txBox="1"/>
+          <p:nvPr/>
+        </p:nvSpPr>
+        <p:spPr>
+          <a:xfrm>
+            <a:off x="8010143" y="3986784"/>
+            <a:ext cx="3584448" cy="822960"/>
+          </a:xfrm>
+          <a:prstGeom prst="rect">
+            <a:avLst/>
+          </a:prstGeom>
+          <a:noFill/>
+        </p:spPr>
+        <p:txBody>
+          <a:bodyPr wrap="square">
+            <a:spAutoFit/>
+          </a:bodyPr>
+          <a:lstStyle/>
+          <a:p>
+            <a:r>
+              <a:rPr sz="850" b="0">
+                <a:solidFill>
+                  <a:srgbClr val="2B2F36"/>
+                </a:solidFill>
+                <a:latin typeface="微软雅黑"/>
+              </a:rPr>
+              <a:t>出厂时写死编号型号——构造即初始化 def __init__(self, code): self.code=code</a:t>
+            </a:r>
+          </a:p>
+        </p:txBody>
+      </p:sp>
+      <p:sp>
+        <p:nvSpPr>
+          <p:cNvPr id="33" name="Rectangle 32"/>
+          <p:cNvSpPr/>
+          <p:nvPr/>
+        </p:nvSpPr>
+        <p:spPr>
+          <a:xfrm>
+            <a:off x="457200" y="4983480"/>
+            <a:ext cx="11274552" cy="1481328"/>
+          </a:xfrm>
+          <a:prstGeom prst="rect">
+            <a:avLst/>
+          </a:prstGeom>
+          <a:solidFill>
+            <a:srgbClr val="F7F9FC"/>
+          </a:solidFill>
+          <a:ln>
+            <a:solidFill>
+              <a:srgbClr val="D6DCE4"/>
+            </a:solidFill>
+          </a:ln>
+          <a:effectLst/>
+        </p:spPr>
+        <p:style>
+          <a:lnRef idx="1">
+            <a:schemeClr val="accent1"/>
+          </a:lnRef>
+          <a:fillRef idx="3">
+            <a:schemeClr val="accent1"/>
+          </a:fillRef>
+          <a:effectRef idx="2">
+            <a:schemeClr val="accent1"/>
+          </a:effectRef>
+          <a:fontRef idx="minor">
+            <a:schemeClr val="lt1"/>
+          </a:fontRef>
+        </p:style>
+        <p:txBody>
+          <a:bodyPr rtlCol="0" anchor="ctr" wrap="square"/>
+          <a:lstStyle/>
+          <a:p>
+            <a:pPr algn="ctr"/>
+          </a:p>
+        </p:txBody>
+      </p:sp>
+      <p:sp>
+        <p:nvSpPr>
+          <p:cNvPr id="34" name="Rectangle 33"/>
+          <p:cNvSpPr/>
+          <p:nvPr/>
+        </p:nvSpPr>
+        <p:spPr>
+          <a:xfrm>
+            <a:off x="457200" y="4983480"/>
+            <a:ext cx="82296" cy="1481328"/>
+          </a:xfrm>
+          <a:prstGeom prst="rect">
+            <a:avLst/>
+          </a:prstGeom>
+          <a:solidFill>
+            <a:srgbClr val="8A4B2D"/>
+          </a:solidFill>
+          <a:ln>
+            <a:noFill/>
+          </a:ln>
+          <a:effectLst/>
+        </p:spPr>
+        <p:style>
+          <a:lnRef idx="1">
+            <a:schemeClr val="accent1"/>
+          </a:lnRef>
+          <a:fillRef idx="3">
+            <a:schemeClr val="accent1"/>
+          </a:fillRef>
+          <a:effectRef idx="2">
+            <a:schemeClr val="accent1"/>
+          </a:effectRef>
+          <a:fontRef idx="minor">
+            <a:schemeClr val="lt1"/>
+          </a:fontRef>
+        </p:style>
+        <p:txBody>
+          <a:bodyPr rtlCol="0" anchor="ctr" wrap="square"/>
+          <a:lstStyle/>
+          <a:p>
+            <a:pPr algn="ctr"/>
+          </a:p>
+        </p:txBody>
+      </p:sp>
+      <p:sp>
+        <p:nvSpPr>
+          <p:cNvPr id="35" name="TextBox 34"/>
+          <p:cNvSpPr txBox="1"/>
+          <p:nvPr/>
+        </p:nvSpPr>
+        <p:spPr>
+          <a:xfrm>
+            <a:off x="658368" y="5029200"/>
+            <a:ext cx="10972800" cy="274320"/>
+          </a:xfrm>
+          <a:prstGeom prst="rect">
+            <a:avLst/>
+          </a:prstGeom>
+          <a:noFill/>
+        </p:spPr>
+        <p:txBody>
+          <a:bodyPr wrap="square">
+            <a:spAutoFit/>
+          </a:bodyPr>
+          <a:lstStyle/>
+          <a:p>
+            <a:r>
+              <a:rPr sz="1100" b="1">
+                <a:solidFill>
+                  <a:srgbClr val="8A4B2D"/>
+                </a:solidFill>
+                <a:latin typeface="微软雅黑"/>
+              </a:rPr>
+              <a:t>难点3：B03 实例属性</a:t>
+            </a:r>
+          </a:p>
+        </p:txBody>
+      </p:sp>
+      <p:sp>
+        <p:nvSpPr>
+          <p:cNvPr id="36" name="TextBox 35"/>
+          <p:cNvSpPr txBox="1"/>
+          <p:nvPr/>
+        </p:nvSpPr>
+        <p:spPr>
+          <a:xfrm>
+            <a:off x="658368" y="5349240"/>
+            <a:ext cx="3566160" cy="219456"/>
+          </a:xfrm>
+          <a:prstGeom prst="rect">
+            <a:avLst/>
+          </a:prstGeom>
+          <a:noFill/>
+        </p:spPr>
+        <p:txBody>
+          <a:bodyPr wrap="square">
+            <a:spAutoFit/>
+          </a:bodyPr>
+          <a:lstStyle/>
+          <a:p>
+            <a:r>
+              <a:rPr sz="900" b="1">
+                <a:solidFill>
+                  <a:srgbClr val="B5533A"/>
+                </a:solidFill>
+                <a:latin typeface="微软雅黑"/>
+              </a:rPr>
+              <a:t>为什么容易栽</a:t>
+            </a:r>
+          </a:p>
+        </p:txBody>
+      </p:sp>
+      <p:sp>
+        <p:nvSpPr>
+          <p:cNvPr id="37" name="TextBox 36"/>
+          <p:cNvSpPr txBox="1"/>
+          <p:nvPr/>
+        </p:nvSpPr>
+        <p:spPr>
+          <a:xfrm>
+            <a:off x="658368" y="5586984"/>
+            <a:ext cx="3584448" cy="822960"/>
+          </a:xfrm>
+          <a:prstGeom prst="rect">
+            <a:avLst/>
+          </a:prstGeom>
+          <a:noFill/>
+        </p:spPr>
+        <p:txBody>
+          <a:bodyPr wrap="square">
+            <a:spAutoFit/>
+          </a:bodyPr>
+          <a:lstStyle/>
+          <a:p>
+            <a:r>
+              <a:rPr sz="850" b="0">
+                <a:solidFill>
+                  <a:srgbClr val="2B2F36"/>
+                </a:solidFill>
+                <a:latin typeface="微软雅黑"/>
+              </a:rPr>
+              <a:t>误区：写在类下的属性是全员共享公告栏——改一处全变，慎用</a:t>
+            </a:r>
+          </a:p>
+        </p:txBody>
+      </p:sp>
+      <p:sp>
+        <p:nvSpPr>
+          <p:cNvPr id="38" name="TextBox 37"/>
+          <p:cNvSpPr txBox="1"/>
+          <p:nvPr/>
+        </p:nvSpPr>
+        <p:spPr>
+          <a:xfrm>
+            <a:off x="4334255" y="5349240"/>
+            <a:ext cx="3566160" cy="219456"/>
+          </a:xfrm>
+          <a:prstGeom prst="rect">
+            <a:avLst/>
+          </a:prstGeom>
+          <a:noFill/>
+        </p:spPr>
+        <p:txBody>
+          <a:bodyPr wrap="square">
+            <a:spAutoFit/>
+          </a:bodyPr>
+          <a:lstStyle/>
+          <a:p>
+            <a:r>
+              <a:rPr sz="900" b="1">
+                <a:solidFill>
+                  <a:srgbClr val="2E7D46"/>
+                </a:solidFill>
+                <a:latin typeface="微软雅黑"/>
+              </a:rPr>
+              <a:t>一招破解（记住这句）</a:t>
+            </a:r>
+          </a:p>
+        </p:txBody>
+      </p:sp>
+      <p:sp>
+        <p:nvSpPr>
+          <p:cNvPr id="39" name="TextBox 38"/>
+          <p:cNvSpPr txBox="1"/>
+          <p:nvPr/>
+        </p:nvSpPr>
+        <p:spPr>
+          <a:xfrm>
+            <a:off x="4334255" y="5586984"/>
+            <a:ext cx="3584448" cy="822960"/>
+          </a:xfrm>
+          <a:prstGeom prst="rect">
+            <a:avLst/>
+          </a:prstGeom>
+          <a:noFill/>
+        </p:spPr>
+        <p:txBody>
+          <a:bodyPr wrap="square">
+            <a:spAutoFit/>
+          </a:bodyPr>
+          <a:lstStyle/>
+          <a:p>
+            <a:r>
+              <a:rPr sz="850" b="0">
+                <a:solidFill>
+                  <a:srgbClr val="2B2F36"/>
+                </a:solidFill>
+                <a:latin typeface="微软雅黑"/>
+              </a:rPr>
+              <a:t>属性写在__init__里=每台设备自己的小本本</a:t>
+            </a:r>
+          </a:p>
+        </p:txBody>
+      </p:sp>
+      <p:sp>
+        <p:nvSpPr>
+          <p:cNvPr id="40" name="TextBox 39"/>
+          <p:cNvSpPr txBox="1"/>
+          <p:nvPr/>
+        </p:nvSpPr>
+        <p:spPr>
+          <a:xfrm>
+            <a:off x="8010143" y="5349240"/>
+            <a:ext cx="3566160" cy="219456"/>
+          </a:xfrm>
+          <a:prstGeom prst="rect">
+            <a:avLst/>
+          </a:prstGeom>
+          <a:noFill/>
+        </p:spPr>
+        <p:txBody>
+          <a:bodyPr wrap="square">
+            <a:spAutoFit/>
+          </a:bodyPr>
+          <a:lstStyle/>
+          <a:p>
+            <a:r>
+              <a:rPr sz="900" b="1">
+                <a:solidFill>
+                  <a:srgbClr val="35506E"/>
+                </a:solidFill>
+                <a:latin typeface="微软雅黑"/>
+              </a:rPr>
+              <a:t>动手验证（照做一遍）</a:t>
+            </a:r>
+          </a:p>
+        </p:txBody>
+      </p:sp>
+      <p:sp>
+        <p:nvSpPr>
+          <p:cNvPr id="41" name="TextBox 40"/>
+          <p:cNvSpPr txBox="1"/>
+          <p:nvPr/>
+        </p:nvSpPr>
+        <p:spPr>
+          <a:xfrm>
+            <a:off x="8010143" y="5586984"/>
+            <a:ext cx="3584448" cy="822960"/>
+          </a:xfrm>
+          <a:prstGeom prst="rect">
+            <a:avLst/>
+          </a:prstGeom>
+          <a:noFill/>
+        </p:spPr>
+        <p:txBody>
+          <a:bodyPr wrap="square">
+            <a:spAutoFit/>
+          </a:bodyPr>
+          <a:lstStyle/>
+          <a:p>
+            <a:r>
+              <a:rPr sz="850" b="0">
+                <a:solidFill>
+                  <a:srgbClr val="2B2F36"/>
+                </a:solidFill>
+                <a:latin typeface="微软雅黑"/>
+              </a:rPr>
+              <a:t>两台泵温度不同互不干扰——独立内存 d1.temp=78.5 与 d2.temp=81.0 各存各的</a:t>
+            </a:r>
+          </a:p>
+        </p:txBody>
+      </p:sp>
+    </p:spTree>
+  </p:cSld>
+  <p:clrMapOvr>
+    <a:masterClrMapping/>
+  </p:clrMapOvr>
+</p:sld>
+</file>
+
+<file path=ppt/slides/slide13.xml><?xml version="1.0" encoding="utf-8"?>
+<p:sld xmlns:a="http://schemas.openxmlformats.org/drawingml/2006/main" xmlns:p="http://schemas.openxmlformats.org/presentationml/2006/main" xmlns:r="http://schemas.openxmlformats.org/officeDocument/2006/relationships">
+  <p:cSld>
+    <p:spTree>
+      <p:nvGrpSpPr>
+        <p:cNvPr id="1" name=""/>
+        <p:cNvGrpSpPr/>
+        <p:nvPr/>
+      </p:nvGrpSpPr>
+      <p:grpSpPr/>
+      <p:sp>
+        <p:nvSpPr>
+          <p:cNvPr id="2" name="Rectangle 1"/>
+          <p:cNvSpPr/>
+          <p:nvPr/>
+        </p:nvSpPr>
+        <p:spPr>
+          <a:xfrm>
+            <a:off x="0" y="0"/>
+            <a:ext cx="12192000" cy="1150000"/>
+          </a:xfrm>
+          <a:prstGeom prst="rect">
+            <a:avLst/>
+          </a:prstGeom>
+          <a:solidFill>
+            <a:srgbClr val="010328"/>
+          </a:solidFill>
+          <a:ln>
+            <a:noFill/>
+          </a:ln>
+          <a:effectLst/>
+        </p:spPr>
+        <p:style>
+          <a:lnRef idx="1">
+            <a:schemeClr val="accent1"/>
+          </a:lnRef>
+          <a:fillRef idx="3">
+            <a:schemeClr val="accent1"/>
+          </a:fillRef>
+          <a:effectRef idx="2">
+            <a:schemeClr val="accent1"/>
+          </a:effectRef>
+          <a:fontRef idx="minor">
+            <a:schemeClr val="lt1"/>
+          </a:fontRef>
+        </p:style>
+        <p:txBody>
+          <a:bodyPr rtlCol="0" anchor="ctr"/>
+          <a:lstStyle/>
+          <a:p>
+            <a:pPr algn="ctr"/>
+          </a:p>
+        </p:txBody>
+      </p:sp>
+      <p:sp>
+        <p:nvSpPr>
+          <p:cNvPr id="3" name="Rectangle 2"/>
+          <p:cNvSpPr/>
+          <p:nvPr/>
+        </p:nvSpPr>
+        <p:spPr>
+          <a:xfrm>
+            <a:off x="0" y="1150000"/>
+            <a:ext cx="2600000" cy="70000"/>
+          </a:xfrm>
+          <a:prstGeom prst="rect">
+            <a:avLst/>
+          </a:prstGeom>
+          <a:solidFill>
+            <a:srgbClr val="F5670F"/>
+          </a:solidFill>
+          <a:ln>
+            <a:noFill/>
+          </a:ln>
+          <a:effectLst/>
+        </p:spPr>
+        <p:style>
+          <a:lnRef idx="1">
+            <a:schemeClr val="accent1"/>
+          </a:lnRef>
+          <a:fillRef idx="3">
+            <a:schemeClr val="accent1"/>
+          </a:fillRef>
+          <a:effectRef idx="2">
+            <a:schemeClr val="accent1"/>
+          </a:effectRef>
+          <a:fontRef idx="minor">
+            <a:schemeClr val="lt1"/>
+          </a:fontRef>
+        </p:style>
+        <p:txBody>
+          <a:bodyPr rtlCol="0" anchor="ctr"/>
+          <a:lstStyle/>
+          <a:p>
+            <a:pPr algn="ctr"/>
+          </a:p>
+        </p:txBody>
+      </p:sp>
+      <p:sp>
+        <p:nvSpPr>
+          <p:cNvPr id="4" name="TextBox 3"/>
+          <p:cNvSpPr txBox="1"/>
+          <p:nvPr/>
+        </p:nvSpPr>
+        <p:spPr>
+          <a:xfrm>
+            <a:off x="700000" y="300000"/>
+            <a:ext cx="10792000" cy="700000"/>
+          </a:xfrm>
+          <a:prstGeom prst="rect">
+            <a:avLst/>
+          </a:prstGeom>
+          <a:noFill/>
+        </p:spPr>
+        <p:txBody>
+          <a:bodyPr wrap="square" anchor="t">
+            <a:spAutoFit/>
+          </a:bodyPr>
+          <a:lstStyle/>
+          <a:p>
+            <a:pPr algn="l">
+              <a:lnSpc>
+                <a:spcPct val="110000"/>
+              </a:lnSpc>
+              <a:spcAft>
+                <a:spcPts val="600"/>
+              </a:spcAft>
+            </a:pPr>
+            <a:r>
+              <a:rPr sz="2400" b="1">
+                <a:solidFill>
+                  <a:srgbClr val="FFFFFF"/>
+                </a:solidFill>
+                <a:latin typeface="微软雅黑"/>
+              </a:rPr>
+              <a:t>承上启下 · 动手前避坑清单</a:t>
+            </a:r>
+          </a:p>
+        </p:txBody>
+      </p:sp>
+      <p:sp>
+        <p:nvSpPr>
+          <p:cNvPr id="11" name="Rectangle 10"/>
+          <p:cNvSpPr/>
+          <p:nvPr/>
+        </p:nvSpPr>
+        <p:spPr>
+          <a:xfrm>
+            <a:off x="500000" y="6500000"/>
+            <a:ext cx="11100000" cy="20000"/>
+          </a:xfrm>
+          <a:prstGeom prst="rect">
+            <a:avLst/>
+          </a:prstGeom>
+          <a:solidFill>
+            <a:srgbClr val="C9D4EE"/>
+          </a:solidFill>
+          <a:ln>
+            <a:noFill/>
+          </a:ln>
+          <a:effectLst/>
+        </p:spPr>
+        <p:style>
+          <a:lnRef idx="1">
+            <a:schemeClr val="accent1"/>
+          </a:lnRef>
+          <a:fillRef idx="3">
+            <a:schemeClr val="accent1"/>
+          </a:fillRef>
+          <a:effectRef idx="2">
+            <a:schemeClr val="accent1"/>
+          </a:effectRef>
+          <a:fontRef idx="minor">
+            <a:schemeClr val="lt1"/>
+          </a:fontRef>
+        </p:style>
+        <p:txBody>
+          <a:bodyPr rtlCol="0" anchor="ctr"/>
+          <a:lstStyle/>
+          <a:p>
+            <a:pPr algn="ctr"/>
+          </a:p>
+        </p:txBody>
+      </p:sp>
+      <p:sp>
+        <p:nvSpPr>
+          <p:cNvPr id="12" name="TextBox 11"/>
+          <p:cNvSpPr txBox="1"/>
+          <p:nvPr/>
+        </p:nvSpPr>
+        <p:spPr>
+          <a:xfrm>
+            <a:off x="500000" y="6540000"/>
+            <a:ext cx="7000000" cy="300000"/>
+          </a:xfrm>
+          <a:prstGeom prst="rect">
+            <a:avLst/>
+          </a:prstGeom>
+          <a:noFill/>
+        </p:spPr>
+        <p:txBody>
+          <a:bodyPr wrap="square" anchor="t">
+            <a:spAutoFit/>
+          </a:bodyPr>
+          <a:lstStyle/>
+          <a:p>
+            <a:pPr algn="l">
+              <a:lnSpc>
+                <a:spcPct val="110000"/>
+              </a:lnSpc>
+              <a:spcAft>
+                <a:spcPts val="600"/>
+              </a:spcAft>
+            </a:pPr>
+            <a:r>
+              <a:rPr sz="1000" b="0">
+                <a:solidFill>
+                  <a:srgbClr val="8A97B5"/>
+                </a:solidFill>
+                <a:latin typeface="微软雅黑"/>
+              </a:rPr>
+              <a:t>两江智造集团 · Python编程基础</a:t>
+            </a:r>
+          </a:p>
+        </p:txBody>
+      </p:sp>
+      <p:sp>
+        <p:nvSpPr>
+          <p:cNvPr id="13" name="TextBox 12"/>
+          <p:cNvSpPr txBox="1"/>
+          <p:nvPr/>
+        </p:nvSpPr>
+        <p:spPr>
+          <a:xfrm>
+            <a:off x="10600000" y="6540000"/>
+            <a:ext cx="1000000" cy="300000"/>
+          </a:xfrm>
+          <a:prstGeom prst="rect">
+            <a:avLst/>
+          </a:prstGeom>
+          <a:noFill/>
+        </p:spPr>
+        <p:txBody>
+          <a:bodyPr wrap="square" anchor="t">
+            <a:spAutoFit/>
+          </a:bodyPr>
+          <a:lstStyle/>
+          <a:p>
+            <a:pPr algn="r">
+              <a:lnSpc>
+                <a:spcPct val="110000"/>
+              </a:lnSpc>
+              <a:spcAft>
+                <a:spcPts val="600"/>
+              </a:spcAft>
+            </a:pPr>
+            <a:r>
+              <a:rPr sz="1000" b="0">
+                <a:solidFill>
+                  <a:srgbClr val="8A97B5"/>
+                </a:solidFill>
+                <a:latin typeface="微软雅黑"/>
+              </a:rPr>
+              <a:t>7 / 13</a:t>
+            </a:r>
+          </a:p>
+        </p:txBody>
+      </p:sp>
+      <p:sp>
+        <p:nvSpPr>
+          <p:cNvPr id="14" name="TextBox 13"/>
+          <p:cNvSpPr txBox="1"/>
+          <p:nvPr/>
+        </p:nvSpPr>
+        <p:spPr>
+          <a:xfrm>
+            <a:off x="457200" y="1389888"/>
+            <a:ext cx="11274552" cy="274320"/>
+          </a:xfrm>
+          <a:prstGeom prst="rect">
+            <a:avLst/>
+          </a:prstGeom>
+          <a:noFill/>
+        </p:spPr>
+        <p:txBody>
+          <a:bodyPr wrap="square">
+            <a:spAutoFit/>
+          </a:bodyPr>
+          <a:lstStyle/>
+          <a:p>
+            <a:r>
+              <a:rPr sz="1050" b="0">
+                <a:solidFill>
+                  <a:srgbClr val="6B7280"/>
+                </a:solidFill>
+                <a:latin typeface="微软雅黑"/>
+              </a:rPr>
+              <a:t>本讲是动手冲刺课：先把上周完整讲解里的高频翻车点过一遍，再开工——每条都是历届学生真实踩过的坑。</a:t>
+            </a:r>
+          </a:p>
+        </p:txBody>
+      </p:sp>
+      <p:sp>
+        <p:nvSpPr>
+          <p:cNvPr id="15" name="Rectangle 14"/>
+          <p:cNvSpPr/>
+          <p:nvPr/>
+        </p:nvSpPr>
+        <p:spPr>
+          <a:xfrm>
+            <a:off x="457200" y="1783080"/>
+            <a:ext cx="5532120" cy="2061972"/>
+          </a:xfrm>
+          <a:prstGeom prst="rect">
+            <a:avLst/>
+          </a:prstGeom>
+          <a:solidFill>
+            <a:srgbClr val="FFFFFF"/>
+          </a:solidFill>
+          <a:ln>
+            <a:solidFill>
+              <a:srgbClr val="D6DCE4"/>
+            </a:solidFill>
+          </a:ln>
+          <a:effectLst/>
+        </p:spPr>
+        <p:style>
+          <a:lnRef idx="1">
+            <a:schemeClr val="accent1"/>
+          </a:lnRef>
+          <a:fillRef idx="3">
+            <a:schemeClr val="accent1"/>
+          </a:fillRef>
+          <a:effectRef idx="2">
+            <a:schemeClr val="accent1"/>
+          </a:effectRef>
+          <a:fontRef idx="minor">
+            <a:schemeClr val="lt1"/>
+          </a:fontRef>
+        </p:style>
+        <p:txBody>
+          <a:bodyPr rtlCol="0" anchor="ctr" wrap="square"/>
+          <a:lstStyle/>
+          <a:p>
+            <a:pPr algn="ctr"/>
+          </a:p>
+        </p:txBody>
+      </p:sp>
+      <p:sp>
+        <p:nvSpPr>
+          <p:cNvPr id="16" name="Rectangle 15"/>
+          <p:cNvSpPr/>
+          <p:nvPr/>
+        </p:nvSpPr>
+        <p:spPr>
+          <a:xfrm>
+            <a:off x="457200" y="1783080"/>
+            <a:ext cx="82296" cy="2061972"/>
+          </a:xfrm>
+          <a:prstGeom prst="rect">
+            <a:avLst/>
+          </a:prstGeom>
+          <a:solidFill>
+            <a:srgbClr val="9A3B3B"/>
+          </a:solidFill>
+          <a:ln>
+            <a:noFill/>
+          </a:ln>
+          <a:effectLst/>
+        </p:spPr>
+        <p:style>
+          <a:lnRef idx="1">
+            <a:schemeClr val="accent1"/>
+          </a:lnRef>
+          <a:fillRef idx="3">
+            <a:schemeClr val="accent1"/>
+          </a:fillRef>
+          <a:effectRef idx="2">
+            <a:schemeClr val="accent1"/>
+          </a:effectRef>
+          <a:fontRef idx="minor">
+            <a:schemeClr val="lt1"/>
+          </a:fontRef>
+        </p:style>
+        <p:txBody>
+          <a:bodyPr rtlCol="0" anchor="ctr" wrap="square"/>
+          <a:lstStyle/>
+          <a:p>
+            <a:pPr algn="ctr"/>
+          </a:p>
+        </p:txBody>
+      </p:sp>
+      <p:sp>
+        <p:nvSpPr>
+          <p:cNvPr id="17" name="TextBox 16"/>
+          <p:cNvSpPr txBox="1"/>
+          <p:nvPr/>
+        </p:nvSpPr>
+        <p:spPr>
+          <a:xfrm>
+            <a:off x="658368" y="1847088"/>
+            <a:ext cx="5166359" cy="274320"/>
+          </a:xfrm>
+          <a:prstGeom prst="rect">
+            <a:avLst/>
+          </a:prstGeom>
+          <a:noFill/>
+        </p:spPr>
+        <p:txBody>
+          <a:bodyPr wrap="square">
+            <a:spAutoFit/>
+          </a:bodyPr>
+          <a:lstStyle/>
+          <a:p>
+            <a:r>
+              <a:rPr sz="1050" b="1">
+                <a:solidFill>
+                  <a:srgbClr val="B5533A"/>
+                </a:solidFill>
+                <a:latin typeface="微软雅黑"/>
+              </a:rPr>
+              <a:t>✗ 漏self</a:t>
+            </a:r>
+          </a:p>
+        </p:txBody>
+      </p:sp>
+      <p:sp>
+        <p:nvSpPr>
+          <p:cNvPr id="18" name="TextBox 17"/>
+          <p:cNvSpPr txBox="1"/>
+          <p:nvPr/>
+        </p:nvSpPr>
+        <p:spPr>
+          <a:xfrm>
+            <a:off x="658368" y="2167128"/>
+            <a:ext cx="5166359" cy="868680"/>
+          </a:xfrm>
+          <a:prstGeom prst="rect">
+            <a:avLst/>
+          </a:prstGeom>
+          <a:noFill/>
+        </p:spPr>
+        <p:txBody>
+          <a:bodyPr wrap="square">
+            <a:spAutoFit/>
+          </a:bodyPr>
+          <a:lstStyle/>
+          <a:p>
+            <a:r>
+              <a:rPr sz="900" b="0">
+                <a:solidFill>
+                  <a:srgbClr val="2B2F36"/>
+                </a:solidFill>
+                <a:latin typeface="微软雅黑"/>
+              </a:rPr>
+              <a:t>原因：调用报参数多一个</a:t>
+            </a:r>
+          </a:p>
+          <a:p>
+            <a:r>
+              <a:rPr sz="900" b="0">
+                <a:solidFill>
+                  <a:srgbClr val="2B2F36"/>
+                </a:solidFill>
+                <a:latin typeface="微软雅黑"/>
+              </a:rPr>
+              <a:t>✔ 解决：方法第一参数写self</a:t>
+            </a:r>
+          </a:p>
+        </p:txBody>
+      </p:sp>
+      <p:sp>
+        <p:nvSpPr>
+          <p:cNvPr id="19" name="Rectangle 18"/>
+          <p:cNvSpPr/>
+          <p:nvPr/>
+        </p:nvSpPr>
+        <p:spPr>
+          <a:xfrm>
+            <a:off x="6199632" y="1783080"/>
+            <a:ext cx="5532120" cy="2061972"/>
+          </a:xfrm>
+          <a:prstGeom prst="rect">
+            <a:avLst/>
+          </a:prstGeom>
+          <a:solidFill>
+            <a:srgbClr val="FFFFFF"/>
+          </a:solidFill>
+          <a:ln>
+            <a:solidFill>
+              <a:srgbClr val="D6DCE4"/>
+            </a:solidFill>
+          </a:ln>
+          <a:effectLst/>
+        </p:spPr>
+        <p:style>
+          <a:lnRef idx="1">
+            <a:schemeClr val="accent1"/>
+          </a:lnRef>
+          <a:fillRef idx="3">
+            <a:schemeClr val="accent1"/>
+          </a:fillRef>
+          <a:effectRef idx="2">
+            <a:schemeClr val="accent1"/>
+          </a:effectRef>
+          <a:fontRef idx="minor">
+            <a:schemeClr val="lt1"/>
+          </a:fontRef>
+        </p:style>
+        <p:txBody>
+          <a:bodyPr rtlCol="0" anchor="ctr" wrap="square"/>
+          <a:lstStyle/>
+          <a:p>
+            <a:pPr algn="ctr"/>
+          </a:p>
+        </p:txBody>
+      </p:sp>
+      <p:sp>
+        <p:nvSpPr>
+          <p:cNvPr id="20" name="Rectangle 19"/>
+          <p:cNvSpPr/>
+          <p:nvPr/>
+        </p:nvSpPr>
+        <p:spPr>
+          <a:xfrm>
+            <a:off x="6199632" y="1783080"/>
+            <a:ext cx="82296" cy="2061972"/>
+          </a:xfrm>
+          <a:prstGeom prst="rect">
+            <a:avLst/>
+          </a:prstGeom>
+          <a:solidFill>
+            <a:srgbClr val="9A3B3B"/>
+          </a:solidFill>
+          <a:ln>
+            <a:noFill/>
+          </a:ln>
+          <a:effectLst/>
+        </p:spPr>
+        <p:style>
+          <a:lnRef idx="1">
+            <a:schemeClr val="accent1"/>
+          </a:lnRef>
+          <a:fillRef idx="3">
+            <a:schemeClr val="accent1"/>
+          </a:fillRef>
+          <a:effectRef idx="2">
+            <a:schemeClr val="accent1"/>
+          </a:effectRef>
+          <a:fontRef idx="minor">
+            <a:schemeClr val="lt1"/>
+          </a:fontRef>
+        </p:style>
+        <p:txBody>
+          <a:bodyPr rtlCol="0" anchor="ctr" wrap="square"/>
+          <a:lstStyle/>
+          <a:p>
+            <a:pPr algn="ctr"/>
+          </a:p>
+        </p:txBody>
+      </p:sp>
+      <p:sp>
+        <p:nvSpPr>
+          <p:cNvPr id="21" name="TextBox 20"/>
+          <p:cNvSpPr txBox="1"/>
+          <p:nvPr/>
+        </p:nvSpPr>
+        <p:spPr>
+          <a:xfrm>
+            <a:off x="6400800" y="1847088"/>
+            <a:ext cx="5166359" cy="274320"/>
+          </a:xfrm>
+          <a:prstGeom prst="rect">
+            <a:avLst/>
+          </a:prstGeom>
+          <a:noFill/>
+        </p:spPr>
+        <p:txBody>
+          <a:bodyPr wrap="square">
+            <a:spAutoFit/>
+          </a:bodyPr>
+          <a:lstStyle/>
+          <a:p>
+            <a:r>
+              <a:rPr sz="1050" b="1">
+                <a:solidFill>
+                  <a:srgbClr val="B5533A"/>
+                </a:solidFill>
+                <a:latin typeface="微软雅黑"/>
+              </a:rPr>
+              <a:t>✗ 属性被共享</a:t>
+            </a:r>
+          </a:p>
+        </p:txBody>
+      </p:sp>
+      <p:sp>
+        <p:nvSpPr>
+          <p:cNvPr id="22" name="TextBox 21"/>
+          <p:cNvSpPr txBox="1"/>
+          <p:nvPr/>
+        </p:nvSpPr>
+        <p:spPr>
+          <a:xfrm>
+            <a:off x="6400800" y="2167128"/>
+            <a:ext cx="5166359" cy="868680"/>
+          </a:xfrm>
+          <a:prstGeom prst="rect">
+            <a:avLst/>
+          </a:prstGeom>
+          <a:noFill/>
+        </p:spPr>
+        <p:txBody>
+          <a:bodyPr wrap="square">
+            <a:spAutoFit/>
+          </a:bodyPr>
+          <a:lstStyle/>
+          <a:p>
+            <a:r>
+              <a:rPr sz="900" b="0">
+                <a:solidFill>
+                  <a:srgbClr val="2B2F36"/>
+                </a:solidFill>
+                <a:latin typeface="微软雅黑"/>
+              </a:rPr>
+              <a:t>原因：属性写在类体</a:t>
+            </a:r>
+          </a:p>
+          <a:p>
+            <a:r>
+              <a:rPr sz="900" b="0">
+                <a:solidFill>
+                  <a:srgbClr val="2B2F36"/>
+                </a:solidFill>
+                <a:latin typeface="微软雅黑"/>
+              </a:rPr>
+              <a:t>✔ 解决：移入__init__</a:t>
+            </a:r>
+          </a:p>
+        </p:txBody>
+      </p:sp>
+      <p:sp>
+        <p:nvSpPr>
+          <p:cNvPr id="23" name="Rectangle 22"/>
+          <p:cNvSpPr/>
+          <p:nvPr/>
+        </p:nvSpPr>
+        <p:spPr>
+          <a:xfrm>
+            <a:off x="457200" y="3973068"/>
+            <a:ext cx="5532120" cy="2061972"/>
+          </a:xfrm>
+          <a:prstGeom prst="rect">
+            <a:avLst/>
+          </a:prstGeom>
+          <a:solidFill>
+            <a:srgbClr val="FFFFFF"/>
+          </a:solidFill>
+          <a:ln>
+            <a:solidFill>
+              <a:srgbClr val="D6DCE4"/>
+            </a:solidFill>
+          </a:ln>
+          <a:effectLst/>
+        </p:spPr>
+        <p:style>
+          <a:lnRef idx="1">
+            <a:schemeClr val="accent1"/>
+          </a:lnRef>
+          <a:fillRef idx="3">
+            <a:schemeClr val="accent1"/>
+          </a:fillRef>
+          <a:effectRef idx="2">
+            <a:schemeClr val="accent1"/>
+          </a:effectRef>
+          <a:fontRef idx="minor">
+            <a:schemeClr val="lt1"/>
+          </a:fontRef>
+        </p:style>
+        <p:txBody>
+          <a:bodyPr rtlCol="0" anchor="ctr" wrap="square"/>
+          <a:lstStyle/>
+          <a:p>
+            <a:pPr algn="ctr"/>
+          </a:p>
+        </p:txBody>
+      </p:sp>
+      <p:sp>
+        <p:nvSpPr>
+          <p:cNvPr id="24" name="Rectangle 23"/>
+          <p:cNvSpPr/>
+          <p:nvPr/>
+        </p:nvSpPr>
+        <p:spPr>
+          <a:xfrm>
+            <a:off x="457200" y="3973068"/>
+            <a:ext cx="82296" cy="2061972"/>
+          </a:xfrm>
+          <a:prstGeom prst="rect">
+            <a:avLst/>
+          </a:prstGeom>
+          <a:solidFill>
+            <a:srgbClr val="9A3B3B"/>
+          </a:solidFill>
+          <a:ln>
+            <a:noFill/>
+          </a:ln>
+          <a:effectLst/>
+        </p:spPr>
+        <p:style>
+          <a:lnRef idx="1">
+            <a:schemeClr val="accent1"/>
+          </a:lnRef>
+          <a:fillRef idx="3">
+            <a:schemeClr val="accent1"/>
+          </a:fillRef>
+          <a:effectRef idx="2">
+            <a:schemeClr val="accent1"/>
+          </a:effectRef>
+          <a:fontRef idx="minor">
+            <a:schemeClr val="lt1"/>
+          </a:fontRef>
+        </p:style>
+        <p:txBody>
+          <a:bodyPr rtlCol="0" anchor="ctr" wrap="square"/>
+          <a:lstStyle/>
+          <a:p>
+            <a:pPr algn="ctr"/>
+          </a:p>
+        </p:txBody>
+      </p:sp>
+      <p:sp>
+        <p:nvSpPr>
+          <p:cNvPr id="25" name="TextBox 24"/>
+          <p:cNvSpPr txBox="1"/>
+          <p:nvPr/>
+        </p:nvSpPr>
+        <p:spPr>
+          <a:xfrm>
+            <a:off x="658368" y="4037076"/>
+            <a:ext cx="5166359" cy="274320"/>
+          </a:xfrm>
+          <a:prstGeom prst="rect">
+            <a:avLst/>
+          </a:prstGeom>
+          <a:noFill/>
+        </p:spPr>
+        <p:txBody>
+          <a:bodyPr wrap="square">
+            <a:spAutoFit/>
+          </a:bodyPr>
+          <a:lstStyle/>
+          <a:p>
+            <a:r>
+              <a:rPr sz="1050" b="1">
+                <a:solidFill>
+                  <a:srgbClr val="B5533A"/>
+                </a:solidFill>
+                <a:latin typeface="微软雅黑"/>
+              </a:rPr>
+              <a:t>✗ d.start无输出</a:t>
+            </a:r>
+          </a:p>
+        </p:txBody>
+      </p:sp>
+      <p:sp>
+        <p:nvSpPr>
+          <p:cNvPr id="26" name="TextBox 25"/>
+          <p:cNvSpPr txBox="1"/>
+          <p:nvPr/>
+        </p:nvSpPr>
+        <p:spPr>
+          <a:xfrm>
+            <a:off x="658368" y="4357116"/>
+            <a:ext cx="5166359" cy="868680"/>
+          </a:xfrm>
+          <a:prstGeom prst="rect">
+            <a:avLst/>
+          </a:prstGeom>
+          <a:noFill/>
+        </p:spPr>
+        <p:txBody>
+          <a:bodyPr wrap="square">
+            <a:spAutoFit/>
+          </a:bodyPr>
+          <a:lstStyle/>
+          <a:p>
+            <a:r>
+              <a:rPr sz="900" b="0">
+                <a:solidFill>
+                  <a:srgbClr val="2B2F36"/>
+                </a:solidFill>
+                <a:latin typeface="微软雅黑"/>
+              </a:rPr>
+              <a:t>原因：少了括号</a:t>
+            </a:r>
+          </a:p>
+          <a:p>
+            <a:r>
+              <a:rPr sz="900" b="0">
+                <a:solidFill>
+                  <a:srgbClr val="2B2F36"/>
+                </a:solidFill>
+                <a:latin typeface="微软雅黑"/>
+              </a:rPr>
+              <a:t>✔ 解决：d.start()才调用</a:t>
+            </a:r>
+          </a:p>
+        </p:txBody>
+      </p:sp>
+      <p:sp>
+        <p:nvSpPr>
+          <p:cNvPr id="27" name="TextBox 26"/>
+          <p:cNvSpPr txBox="1"/>
+          <p:nvPr/>
+        </p:nvSpPr>
+        <p:spPr>
+          <a:xfrm>
+            <a:off x="457200" y="6281928"/>
+            <a:ext cx="9601200" cy="182880"/>
+          </a:xfrm>
+          <a:prstGeom prst="rect">
+            <a:avLst/>
+          </a:prstGeom>
+          <a:noFill/>
+        </p:spPr>
+        <p:txBody>
+          <a:bodyPr wrap="square">
+            <a:spAutoFit/>
+          </a:bodyPr>
+          <a:lstStyle/>
+          <a:p>
+            <a:r>
+              <a:rPr sz="750" b="0">
+                <a:solidFill>
+                  <a:srgbClr val="6B7280"/>
+                </a:solidFill>
+                <a:latin typeface="微软雅黑"/>
+              </a:rPr>
+              <a:t>素材来源：同周《第7次课-从图纸到对象：设备建模》知识卡与避坑清单（逐字摘录）</a:t>
+            </a:r>
+          </a:p>
+        </p:txBody>
+      </p:sp>
+    </p:spTree>
+  </p:cSld>
+  <p:clrMapOvr>
+    <a:masterClrMapping/>
+  </p:clrMapOvr>
+</p:sld>
+</file>
+
 <file path=ppt/slides/slide2.xml><?xml version="1.0" encoding="utf-8"?>
 <p:sld xmlns:a="http://schemas.openxmlformats.org/drawingml/2006/main" xmlns:p="http://schemas.openxmlformats.org/presentationml/2006/main" xmlns:r="http://schemas.openxmlformats.org/officeDocument/2006/relationships">
   <p:cSld>
@@ -4438,102 +7694,14 @@
       <p:grpSpPr/>
       <p:sp>
         <p:nvSpPr>
-          <p:cNvPr id="2" name="Rectangle 1"/>
-          <p:cNvSpPr/>
-          <p:nvPr/>
-        </p:nvSpPr>
-        <p:spPr>
-          <a:xfrm>
-            <a:off x="0" y="0"/>
-            <a:ext cx="12192000" cy="1150000"/>
-          </a:xfrm>
-          <a:prstGeom prst="rect">
-            <a:avLst/>
-          </a:prstGeom>
-          <a:solidFill>
-            <a:srgbClr val="010328"/>
-          </a:solidFill>
-          <a:ln>
-            <a:noFill/>
-          </a:ln>
-          <a:effectLst/>
-        </p:spPr>
-        <p:style>
-          <a:lnRef idx="1">
-            <a:schemeClr val="accent1"/>
-          </a:lnRef>
-          <a:fillRef idx="3">
-            <a:schemeClr val="accent1"/>
-          </a:fillRef>
-          <a:effectRef idx="2">
-            <a:schemeClr val="accent1"/>
-          </a:effectRef>
-          <a:fontRef idx="minor">
-            <a:schemeClr val="lt1"/>
-          </a:fontRef>
-        </p:style>
-        <p:txBody>
-          <a:bodyPr rtlCol="0" anchor="ctr"/>
-          <a:lstStyle/>
-          <a:p>
-            <a:pPr algn="ctr"/>
-          </a:p>
-        </p:txBody>
-      </p:sp>
-      <p:sp>
-        <p:nvSpPr>
-          <p:cNvPr id="3" name="Rectangle 2"/>
-          <p:cNvSpPr/>
-          <p:nvPr/>
-        </p:nvSpPr>
-        <p:spPr>
-          <a:xfrm>
-            <a:off x="0" y="1150000"/>
-            <a:ext cx="2600000" cy="70000"/>
-          </a:xfrm>
-          <a:prstGeom prst="rect">
-            <a:avLst/>
-          </a:prstGeom>
-          <a:solidFill>
-            <a:srgbClr val="F5670F"/>
-          </a:solidFill>
-          <a:ln>
-            <a:noFill/>
-          </a:ln>
-          <a:effectLst/>
-        </p:spPr>
-        <p:style>
-          <a:lnRef idx="1">
-            <a:schemeClr val="accent1"/>
-          </a:lnRef>
-          <a:fillRef idx="3">
-            <a:schemeClr val="accent1"/>
-          </a:fillRef>
-          <a:effectRef idx="2">
-            <a:schemeClr val="accent1"/>
-          </a:effectRef>
-          <a:fontRef idx="minor">
-            <a:schemeClr val="lt1"/>
-          </a:fontRef>
-        </p:style>
-        <p:txBody>
-          <a:bodyPr rtlCol="0" anchor="ctr"/>
-          <a:lstStyle/>
-          <a:p>
-            <a:pPr algn="ctr"/>
-          </a:p>
-        </p:txBody>
-      </p:sp>
-      <p:sp>
-        <p:nvSpPr>
-          <p:cNvPr id="4" name="TextBox 3"/>
+          <p:cNvPr id="2" name="TextBox 1"/>
           <p:cNvSpPr txBox="1"/>
           <p:nvPr/>
         </p:nvSpPr>
         <p:spPr>
           <a:xfrm>
-            <a:off x="700000" y="300000"/>
-            <a:ext cx="10792000" cy="700000"/>
+            <a:off x="548640" y="320040"/>
+            <a:ext cx="11094720" cy="914400"/>
           </a:xfrm>
           <a:prstGeom prst="rect">
             <a:avLst/>
@@ -4541,353 +7709,98 @@
           <a:noFill/>
         </p:spPr>
         <p:txBody>
-          <a:bodyPr wrap="square" anchor="t">
+          <a:bodyPr wrap="none">
             <a:spAutoFit/>
           </a:bodyPr>
           <a:lstStyle/>
           <a:p>
-            <a:pPr algn="l">
-              <a:lnSpc>
-                <a:spcPct val="110000"/>
-              </a:lnSpc>
+            <a:r>
+              <a:rPr sz="3000" b="1"/>
+              <a:t>安全与合规警示（操作前必读）</a:t>
+            </a:r>
+          </a:p>
+        </p:txBody>
+      </p:sp>
+      <p:sp>
+        <p:nvSpPr>
+          <p:cNvPr id="3" name="TextBox 2"/>
+          <p:cNvSpPr txBox="1"/>
+          <p:nvPr/>
+        </p:nvSpPr>
+        <p:spPr>
+          <a:xfrm>
+            <a:off x="731520" y="1371600"/>
+            <a:ext cx="10728960" cy="4663440"/>
+          </a:xfrm>
+          <a:prstGeom prst="rect">
+            <a:avLst/>
+          </a:prstGeom>
+          <a:noFill/>
+        </p:spPr>
+        <p:txBody>
+          <a:bodyPr wrap="square">
+            <a:spAutoFit/>
+          </a:bodyPr>
+          <a:lstStyle/>
+          <a:p>
+            <a:pPr>
               <a:spcAft>
-                <a:spcPts val="600"/>
+                <a:spcPts val="1000"/>
               </a:spcAft>
             </a:pPr>
             <a:r>
-              <a:rPr sz="2400" b="1">
-                <a:solidFill>
-                  <a:srgbClr val="FFFFFF"/>
-                </a:solidFill>
-                <a:latin typeface="微软雅黑"/>
-              </a:rPr>
-              <a:t>任务情境（集团项目案例）</a:t>
-            </a:r>
-          </a:p>
-        </p:txBody>
-      </p:sp>
-      <p:sp>
-        <p:nvSpPr>
-          <p:cNvPr id="5" name="Rectangle 4"/>
-          <p:cNvSpPr/>
-          <p:nvPr/>
-        </p:nvSpPr>
-        <p:spPr>
-          <a:xfrm>
-            <a:off x="800000" y="1780000"/>
-            <a:ext cx="10600000" cy="700000"/>
-          </a:xfrm>
-          <a:prstGeom prst="rect">
-            <a:avLst/>
-          </a:prstGeom>
-          <a:solidFill>
-            <a:srgbClr val="010328"/>
-          </a:solidFill>
-          <a:ln>
-            <a:noFill/>
-          </a:ln>
-          <a:effectLst/>
-        </p:spPr>
-        <p:style>
-          <a:lnRef idx="1">
-            <a:schemeClr val="accent1"/>
-          </a:lnRef>
-          <a:fillRef idx="3">
-            <a:schemeClr val="accent1"/>
-          </a:fillRef>
-          <a:effectRef idx="2">
-            <a:schemeClr val="accent1"/>
-          </a:effectRef>
-          <a:fontRef idx="minor">
-            <a:schemeClr val="lt1"/>
-          </a:fontRef>
-        </p:style>
-        <p:txBody>
-          <a:bodyPr rtlCol="0" anchor="ctr"/>
-          <a:lstStyle/>
-          <a:p>
-            <a:pPr algn="ctr"/>
-          </a:p>
-        </p:txBody>
-      </p:sp>
-      <p:sp>
-        <p:nvSpPr>
-          <p:cNvPr id="6" name="TextBox 5"/>
-          <p:cNvSpPr txBox="1"/>
-          <p:nvPr/>
-        </p:nvSpPr>
-        <p:spPr>
-          <a:xfrm>
-            <a:off x="1000000" y="1880000"/>
-            <a:ext cx="10200000" cy="520000"/>
-          </a:xfrm>
-          <a:prstGeom prst="rect">
-            <a:avLst/>
-          </a:prstGeom>
-          <a:noFill/>
-        </p:spPr>
-        <p:txBody>
-          <a:bodyPr wrap="square" anchor="t">
-            <a:spAutoFit/>
-          </a:bodyPr>
-          <a:lstStyle/>
-          <a:p>
-            <a:pPr algn="l">
-              <a:lnSpc>
-                <a:spcPct val="110000"/>
-              </a:lnSpc>
+              <a:rPr sz="1800"/>
+              <a:t>1. 上机前确认本工位电源开关与急停位置，确认设备处于安全状态。</a:t>
+            </a:r>
+          </a:p>
+          <a:p>
+            <a:pPr>
               <a:spcAft>
-                <a:spcPts val="600"/>
+                <a:spcPts val="1000"/>
               </a:spcAft>
             </a:pPr>
             <a:r>
-              <a:rPr sz="1400" b="1">
-                <a:solidFill>
-                  <a:srgbClr val="FFFFFF"/>
-                </a:solidFill>
-                <a:latin typeface="微软雅黑"/>
-              </a:rPr>
-              <a:t>◆ 重庆两江智造集团 · 精密制造事业部</a:t>
-            </a:r>
-          </a:p>
-        </p:txBody>
-      </p:sp>
-      <p:sp>
-        <p:nvSpPr>
-          <p:cNvPr id="7" name="Rectangle 6"/>
-          <p:cNvSpPr/>
-          <p:nvPr/>
-        </p:nvSpPr>
-        <p:spPr>
-          <a:xfrm>
-            <a:off x="800000" y="2580000"/>
-            <a:ext cx="6300000" cy="3600000"/>
-          </a:xfrm>
-          <a:prstGeom prst="rect">
-            <a:avLst/>
-          </a:prstGeom>
-          <a:solidFill>
-            <a:srgbClr val="F7F9FD"/>
-          </a:solidFill>
-          <a:ln>
-            <a:solidFill>
-              <a:srgbClr val="0545E8"/>
-            </a:solidFill>
-          </a:ln>
-          <a:effectLst/>
-        </p:spPr>
-        <p:style>
-          <a:lnRef idx="1">
-            <a:schemeClr val="accent1"/>
-          </a:lnRef>
-          <a:fillRef idx="3">
-            <a:schemeClr val="accent1"/>
-          </a:fillRef>
-          <a:effectRef idx="2">
-            <a:schemeClr val="accent1"/>
-          </a:effectRef>
-          <a:fontRef idx="minor">
-            <a:schemeClr val="lt1"/>
-          </a:fontRef>
-        </p:style>
-        <p:txBody>
-          <a:bodyPr rtlCol="0" anchor="ctr"/>
-          <a:lstStyle/>
-          <a:p>
-            <a:pPr algn="ctr"/>
-          </a:p>
-        </p:txBody>
-      </p:sp>
-      <p:sp>
-        <p:nvSpPr>
-          <p:cNvPr id="8" name="TextBox 7"/>
-          <p:cNvSpPr txBox="1"/>
-          <p:nvPr/>
-        </p:nvSpPr>
-        <p:spPr>
-          <a:xfrm>
-            <a:off x="1000000" y="2740000"/>
-            <a:ext cx="5900000" cy="3300000"/>
-          </a:xfrm>
-          <a:prstGeom prst="rect">
-            <a:avLst/>
-          </a:prstGeom>
-          <a:noFill/>
-        </p:spPr>
-        <p:txBody>
-          <a:bodyPr wrap="square" anchor="t">
-            <a:spAutoFit/>
-          </a:bodyPr>
-          <a:lstStyle/>
-          <a:p>
-            <a:pPr algn="l">
-              <a:lnSpc>
-                <a:spcPct val="130000"/>
-              </a:lnSpc>
+              <a:rPr sz="1800"/>
+              <a:t>2. 涉及接线的操作一律先断电、后验电、再作业，禁止带电插拔。</a:t>
+            </a:r>
+          </a:p>
+          <a:p>
+            <a:pPr>
               <a:spcAft>
-                <a:spcPts val="600"/>
+                <a:spcPts val="1000"/>
               </a:spcAft>
             </a:pPr>
             <a:r>
-              <a:rPr sz="1450" b="0">
-                <a:solidFill>
-                  <a:srgbClr val="010328"/>
-                </a:solidFill>
-                <a:latin typeface="微软雅黑"/>
-              </a:rPr>
-              <a:t>台账、告警的数据散落各处，改一台设备要翻三个文件。李姐感叹：'要是设备信息能像身份证一样一人一张卡。'——工单0.3：学会用'类'给设备建模。</a:t>
-            </a:r>
-          </a:p>
-        </p:txBody>
-      </p:sp>
-      <p:pic>
-        <p:nvPicPr>
-          <p:cNvPr id="9" name="Picture 8" descr="W4_场景.png"/>
-          <p:cNvPicPr>
-            <a:picLocks noChangeAspect="1"/>
-          </p:cNvPicPr>
-          <p:nvPr/>
-        </p:nvPicPr>
-        <p:blipFill>
-          <a:blip r:embed="rId2"/>
-          <a:stretch>
-            <a:fillRect/>
-          </a:stretch>
-        </p:blipFill>
-        <p:spPr>
-          <a:xfrm>
-            <a:off x="7250000" y="2580000"/>
-            <a:ext cx="4150000" cy="3600000"/>
-          </a:xfrm>
-          <a:prstGeom prst="rect">
-            <a:avLst/>
-          </a:prstGeom>
-        </p:spPr>
-      </p:pic>
-      <p:sp>
-        <p:nvSpPr>
-          <p:cNvPr id="10" name="Rectangle 9"/>
-          <p:cNvSpPr/>
-          <p:nvPr/>
-        </p:nvSpPr>
-        <p:spPr>
-          <a:xfrm>
-            <a:off x="500000" y="6500000"/>
-            <a:ext cx="11100000" cy="20000"/>
-          </a:xfrm>
-          <a:prstGeom prst="rect">
-            <a:avLst/>
-          </a:prstGeom>
-          <a:solidFill>
-            <a:srgbClr val="C9D4EE"/>
-          </a:solidFill>
-          <a:ln>
-            <a:noFill/>
-          </a:ln>
-          <a:effectLst/>
-        </p:spPr>
-        <p:style>
-          <a:lnRef idx="1">
-            <a:schemeClr val="accent1"/>
-          </a:lnRef>
-          <a:fillRef idx="3">
-            <a:schemeClr val="accent1"/>
-          </a:fillRef>
-          <a:effectRef idx="2">
-            <a:schemeClr val="accent1"/>
-          </a:effectRef>
-          <a:fontRef idx="minor">
-            <a:schemeClr val="lt1"/>
-          </a:fontRef>
-        </p:style>
-        <p:txBody>
-          <a:bodyPr rtlCol="0" anchor="ctr"/>
-          <a:lstStyle/>
-          <a:p>
-            <a:pPr algn="ctr"/>
-          </a:p>
-        </p:txBody>
-      </p:sp>
-      <p:sp>
-        <p:nvSpPr>
-          <p:cNvPr id="11" name="TextBox 10"/>
-          <p:cNvSpPr txBox="1"/>
-          <p:nvPr/>
-        </p:nvSpPr>
-        <p:spPr>
-          <a:xfrm>
-            <a:off x="500000" y="6540000"/>
-            <a:ext cx="7000000" cy="300000"/>
-          </a:xfrm>
-          <a:prstGeom prst="rect">
-            <a:avLst/>
-          </a:prstGeom>
-          <a:noFill/>
-        </p:spPr>
-        <p:txBody>
-          <a:bodyPr wrap="square" anchor="t">
-            <a:spAutoFit/>
-          </a:bodyPr>
-          <a:lstStyle/>
-          <a:p>
-            <a:pPr algn="l">
-              <a:lnSpc>
-                <a:spcPct val="110000"/>
-              </a:lnSpc>
+              <a:rPr sz="1800"/>
+              <a:t>3. 身体任何部位不进入设备运动/散热区域，长发束起，不佩戴悬垂饰物。</a:t>
+            </a:r>
+          </a:p>
+          <a:p>
+            <a:pPr>
               <a:spcAft>
-                <a:spcPts val="600"/>
+                <a:spcPts val="1000"/>
               </a:spcAft>
             </a:pPr>
             <a:r>
-              <a:rPr sz="1000" b="0">
-                <a:solidFill>
-                  <a:srgbClr val="8A97B5"/>
-                </a:solidFill>
-                <a:latin typeface="微软雅黑"/>
-              </a:rPr>
-              <a:t>两江智造集团 · Python编程基础</a:t>
-            </a:r>
-          </a:p>
-        </p:txBody>
-      </p:sp>
-      <p:sp>
-        <p:nvSpPr>
-          <p:cNvPr id="12" name="TextBox 11"/>
-          <p:cNvSpPr txBox="1"/>
-          <p:nvPr/>
-        </p:nvSpPr>
-        <p:spPr>
-          <a:xfrm>
-            <a:off x="10600000" y="6540000"/>
-            <a:ext cx="1000000" cy="300000"/>
-          </a:xfrm>
-          <a:prstGeom prst="rect">
-            <a:avLst/>
-          </a:prstGeom>
-          <a:noFill/>
-        </p:spPr>
-        <p:txBody>
-          <a:bodyPr wrap="square" anchor="t">
-            <a:spAutoFit/>
-          </a:bodyPr>
-          <a:lstStyle/>
-          <a:p>
-            <a:pPr algn="r">
-              <a:lnSpc>
-                <a:spcPct val="110000"/>
-              </a:lnSpc>
+              <a:rPr sz="1800"/>
+              <a:t>4. 调试程序前先静态检查、再低速小样本试运行，确认无异常后放大规模。</a:t>
+            </a:r>
+          </a:p>
+          <a:p>
+            <a:pPr>
               <a:spcAft>
-                <a:spcPts val="600"/>
+                <a:spcPts val="1000"/>
               </a:spcAft>
             </a:pPr>
             <a:r>
-              <a:rPr sz="1000" b="0">
-                <a:solidFill>
-                  <a:srgbClr val="8A97B5"/>
-                </a:solidFill>
-                <a:latin typeface="微软雅黑"/>
-              </a:rPr>
-              <a:t>2 / 7</a:t>
+              <a:rPr sz="1800"/>
+              <a:t>5. 任何不确定或异常情况，立即停止操作并报告指导教师，不擅自处置。</a:t>
+            </a:r>
+          </a:p>
+          <a:p>
+            <a:r>
+              <a:rPr sz="1400" b="1"/>
+              <a:t>以上任一条违反，本次任务按课程标准「安全规范一票否决」条款记 0 分并中止实训。</a:t>
             </a:r>
           </a:p>
         </p:txBody>
@@ -5000,100 +7913,14 @@
       </p:sp>
       <p:sp>
         <p:nvSpPr>
-          <p:cNvPr id="4" name="Rectangle 3"/>
-          <p:cNvSpPr/>
-          <p:nvPr/>
-        </p:nvSpPr>
-        <p:spPr>
-          <a:xfrm>
-            <a:off x="600000" y="230000"/>
-            <a:ext cx="700000" cy="700000"/>
-          </a:xfrm>
-          <a:prstGeom prst="rect">
-            <a:avLst/>
-          </a:prstGeom>
-          <a:solidFill>
-            <a:srgbClr val="F5670F"/>
-          </a:solidFill>
-          <a:ln>
-            <a:noFill/>
-          </a:ln>
-          <a:effectLst/>
-        </p:spPr>
-        <p:style>
-          <a:lnRef idx="1">
-            <a:schemeClr val="accent1"/>
-          </a:lnRef>
-          <a:fillRef idx="3">
-            <a:schemeClr val="accent1"/>
-          </a:fillRef>
-          <a:effectRef idx="2">
-            <a:schemeClr val="accent1"/>
-          </a:effectRef>
-          <a:fontRef idx="minor">
-            <a:schemeClr val="lt1"/>
-          </a:fontRef>
-        </p:style>
-        <p:txBody>
-          <a:bodyPr rtlCol="0" anchor="ctr"/>
-          <a:lstStyle/>
-          <a:p>
-            <a:pPr algn="ctr"/>
-          </a:p>
-        </p:txBody>
-      </p:sp>
-      <p:sp>
-        <p:nvSpPr>
-          <p:cNvPr id="5" name="TextBox 4"/>
+          <p:cNvPr id="4" name="TextBox 3"/>
           <p:cNvSpPr txBox="1"/>
           <p:nvPr/>
         </p:nvSpPr>
         <p:spPr>
           <a:xfrm>
-            <a:off x="600000" y="255000"/>
-            <a:ext cx="700000" cy="660000"/>
-          </a:xfrm>
-          <a:prstGeom prst="rect">
-            <a:avLst/>
-          </a:prstGeom>
-          <a:noFill/>
-        </p:spPr>
-        <p:txBody>
-          <a:bodyPr wrap="square" anchor="t">
-            <a:spAutoFit/>
-          </a:bodyPr>
-          <a:lstStyle/>
-          <a:p>
-            <a:pPr algn="ctr">
-              <a:lnSpc>
-                <a:spcPct val="110000"/>
-              </a:lnSpc>
-              <a:spcAft>
-                <a:spcPts val="600"/>
-              </a:spcAft>
-            </a:pPr>
-            <a:r>
-              <a:rPr sz="2400" b="1">
-                <a:solidFill>
-                  <a:srgbClr val="FFFFFF"/>
-                </a:solidFill>
-                <a:latin typeface="微软雅黑"/>
-              </a:rPr>
-              <a:t>1</a:t>
-            </a:r>
-          </a:p>
-        </p:txBody>
-      </p:sp>
-      <p:sp>
-        <p:nvSpPr>
-          <p:cNvPr id="6" name="TextBox 5"/>
-          <p:cNvSpPr txBox="1"/>
-          <p:nvPr/>
-        </p:nvSpPr>
-        <p:spPr>
-          <a:xfrm>
-            <a:off x="1500000" y="300000"/>
-            <a:ext cx="9992000" cy="700000"/>
+            <a:off x="700000" y="300000"/>
+            <a:ext cx="10792000" cy="700000"/>
           </a:xfrm>
           <a:prstGeom prst="rect">
             <a:avLst/>
@@ -5121,27 +7948,27 @@
                 </a:solidFill>
                 <a:latin typeface="微软雅黑"/>
               </a:rPr>
-              <a:t>给设备装上行为（1）</a:t>
-            </a:r>
-          </a:p>
-        </p:txBody>
-      </p:sp>
-      <p:sp>
-        <p:nvSpPr>
-          <p:cNvPr id="7" name="Rectangle 6"/>
+              <a:t>任务情境（集团项目案例）</a:t>
+            </a:r>
+          </a:p>
+        </p:txBody>
+      </p:sp>
+      <p:sp>
+        <p:nvSpPr>
+          <p:cNvPr id="5" name="Rectangle 4"/>
           <p:cNvSpPr/>
           <p:nvPr/>
         </p:nvSpPr>
         <p:spPr>
           <a:xfrm>
-            <a:off x="820000" y="2160000"/>
-            <a:ext cx="120000" cy="120000"/>
+            <a:off x="800000" y="1780000"/>
+            <a:ext cx="10600000" cy="700000"/>
           </a:xfrm>
           <a:prstGeom prst="rect">
             <a:avLst/>
           </a:prstGeom>
           <a:solidFill>
-            <a:srgbClr val="F5670F"/>
+            <a:srgbClr val="010328"/>
           </a:solidFill>
           <a:ln>
             <a:noFill/>
@@ -5172,358 +7999,14 @@
       </p:sp>
       <p:sp>
         <p:nvSpPr>
-          <p:cNvPr id="8" name="TextBox 7"/>
+          <p:cNvPr id="6" name="TextBox 5"/>
           <p:cNvSpPr txBox="1"/>
           <p:nvPr/>
         </p:nvSpPr>
         <p:spPr>
           <a:xfrm>
-            <a:off x="1100000" y="2050000"/>
-            <a:ext cx="10200000" cy="900000"/>
-          </a:xfrm>
-          <a:prstGeom prst="rect">
-            <a:avLst/>
-          </a:prstGeom>
-          <a:noFill/>
-        </p:spPr>
-        <p:txBody>
-          <a:bodyPr wrap="square" anchor="t">
-            <a:spAutoFit/>
-          </a:bodyPr>
-          <a:lstStyle/>
-          <a:p>
-            <a:pPr algn="l">
-              <a:lnSpc>
-                <a:spcPct val="125000"/>
-              </a:lnSpc>
-              <a:spcAft>
-                <a:spcPts val="600"/>
-              </a:spcAft>
-            </a:pPr>
-            <a:r>
-              <a:rPr sz="1500" b="0">
-                <a:solidFill>
-                  <a:srgbClr val="010328"/>
-                </a:solidFill>
-                <a:latin typeface="微软雅黑"/>
-              </a:rPr>
-              <a:t>设备类设计：Device类（ID、名称、状态、温度属性；启动、停止、获取状态方法）；</a:t>
-            </a:r>
-          </a:p>
-        </p:txBody>
-      </p:sp>
-      <p:sp>
-        <p:nvSpPr>
-          <p:cNvPr id="9" name="Rectangle 8"/>
-          <p:cNvSpPr/>
-          <p:nvPr/>
-        </p:nvSpPr>
-        <p:spPr>
-          <a:xfrm>
-            <a:off x="820000" y="3100000"/>
-            <a:ext cx="120000" cy="120000"/>
-          </a:xfrm>
-          <a:prstGeom prst="rect">
-            <a:avLst/>
-          </a:prstGeom>
-          <a:solidFill>
-            <a:srgbClr val="F5670F"/>
-          </a:solidFill>
-          <a:ln>
-            <a:noFill/>
-          </a:ln>
-          <a:effectLst/>
-        </p:spPr>
-        <p:style>
-          <a:lnRef idx="1">
-            <a:schemeClr val="accent1"/>
-          </a:lnRef>
-          <a:fillRef idx="3">
-            <a:schemeClr val="accent1"/>
-          </a:fillRef>
-          <a:effectRef idx="2">
-            <a:schemeClr val="accent1"/>
-          </a:effectRef>
-          <a:fontRef idx="minor">
-            <a:schemeClr val="lt1"/>
-          </a:fontRef>
-        </p:style>
-        <p:txBody>
-          <a:bodyPr rtlCol="0" anchor="ctr"/>
-          <a:lstStyle/>
-          <a:p>
-            <a:pPr algn="ctr"/>
-          </a:p>
-        </p:txBody>
-      </p:sp>
-      <p:sp>
-        <p:nvSpPr>
-          <p:cNvPr id="10" name="TextBox 9"/>
-          <p:cNvSpPr txBox="1"/>
-          <p:nvPr/>
-        </p:nvSpPr>
-        <p:spPr>
-          <a:xfrm>
-            <a:off x="1100000" y="2990000"/>
-            <a:ext cx="10200000" cy="680000"/>
-          </a:xfrm>
-          <a:prstGeom prst="rect">
-            <a:avLst/>
-          </a:prstGeom>
-          <a:noFill/>
-        </p:spPr>
-        <p:txBody>
-          <a:bodyPr wrap="square" anchor="t">
-            <a:spAutoFit/>
-          </a:bodyPr>
-          <a:lstStyle/>
-          <a:p>
-            <a:pPr algn="l">
-              <a:lnSpc>
-                <a:spcPct val="125000"/>
-              </a:lnSpc>
-              <a:spcAft>
-                <a:spcPts val="600"/>
-              </a:spcAft>
-            </a:pPr>
-            <a:r>
-              <a:rPr sz="1500" b="0">
-                <a:solidFill>
-                  <a:srgbClr val="010328"/>
-                </a:solidFill>
-                <a:latin typeface="微软雅黑"/>
-              </a:rPr>
-              <a:t>工单项目0.3实操：创建多个设备对象实例，演示属性访问与方法调用；</a:t>
-            </a:r>
-          </a:p>
-        </p:txBody>
-      </p:sp>
-      <p:sp>
-        <p:nvSpPr>
-          <p:cNvPr id="11" name="Rectangle 10"/>
-          <p:cNvSpPr/>
-          <p:nvPr/>
-        </p:nvSpPr>
-        <p:spPr>
-          <a:xfrm>
-            <a:off x="820000" y="3780000"/>
-            <a:ext cx="120000" cy="120000"/>
-          </a:xfrm>
-          <a:prstGeom prst="rect">
-            <a:avLst/>
-          </a:prstGeom>
-          <a:solidFill>
-            <a:srgbClr val="F5670F"/>
-          </a:solidFill>
-          <a:ln>
-            <a:noFill/>
-          </a:ln>
-          <a:effectLst/>
-        </p:spPr>
-        <p:style>
-          <a:lnRef idx="1">
-            <a:schemeClr val="accent1"/>
-          </a:lnRef>
-          <a:fillRef idx="3">
-            <a:schemeClr val="accent1"/>
-          </a:fillRef>
-          <a:effectRef idx="2">
-            <a:schemeClr val="accent1"/>
-          </a:effectRef>
-          <a:fontRef idx="minor">
-            <a:schemeClr val="lt1"/>
-          </a:fontRef>
-        </p:style>
-        <p:txBody>
-          <a:bodyPr rtlCol="0" anchor="ctr"/>
-          <a:lstStyle/>
-          <a:p>
-            <a:pPr algn="ctr"/>
-          </a:p>
-        </p:txBody>
-      </p:sp>
-      <p:sp>
-        <p:nvSpPr>
-          <p:cNvPr id="12" name="TextBox 11"/>
-          <p:cNvSpPr txBox="1"/>
-          <p:nvPr/>
-        </p:nvSpPr>
-        <p:spPr>
-          <a:xfrm>
-            <a:off x="1100000" y="3670000"/>
-            <a:ext cx="10200000" cy="680000"/>
-          </a:xfrm>
-          <a:prstGeom prst="rect">
-            <a:avLst/>
-          </a:prstGeom>
-          <a:noFill/>
-        </p:spPr>
-        <p:txBody>
-          <a:bodyPr wrap="square" anchor="t">
-            <a:spAutoFit/>
-          </a:bodyPr>
-          <a:lstStyle/>
-          <a:p>
-            <a:pPr algn="l">
-              <a:lnSpc>
-                <a:spcPct val="125000"/>
-              </a:lnSpc>
-              <a:spcAft>
-                <a:spcPts val="600"/>
-              </a:spcAft>
-            </a:pPr>
-            <a:r>
-              <a:rPr sz="1500" b="0">
-                <a:solidFill>
-                  <a:srgbClr val="010328"/>
-                </a:solidFill>
-                <a:latin typeface="微软雅黑"/>
-              </a:rPr>
-              <a:t>面向对象价值讨论：为什么工业系统偏爱OOP（可扩展、易维护）；</a:t>
-            </a:r>
-          </a:p>
-        </p:txBody>
-      </p:sp>
-      <p:sp>
-        <p:nvSpPr>
-          <p:cNvPr id="13" name="Rectangle 12"/>
-          <p:cNvSpPr/>
-          <p:nvPr/>
-        </p:nvSpPr>
-        <p:spPr>
-          <a:xfrm>
-            <a:off x="820000" y="4460000"/>
-            <a:ext cx="120000" cy="120000"/>
-          </a:xfrm>
-          <a:prstGeom prst="rect">
-            <a:avLst/>
-          </a:prstGeom>
-          <a:solidFill>
-            <a:srgbClr val="F5670F"/>
-          </a:solidFill>
-          <a:ln>
-            <a:noFill/>
-          </a:ln>
-          <a:effectLst/>
-        </p:spPr>
-        <p:style>
-          <a:lnRef idx="1">
-            <a:schemeClr val="accent1"/>
-          </a:lnRef>
-          <a:fillRef idx="3">
-            <a:schemeClr val="accent1"/>
-          </a:fillRef>
-          <a:effectRef idx="2">
-            <a:schemeClr val="accent1"/>
-          </a:effectRef>
-          <a:fontRef idx="minor">
-            <a:schemeClr val="lt1"/>
-          </a:fontRef>
-        </p:style>
-        <p:txBody>
-          <a:bodyPr rtlCol="0" anchor="ctr"/>
-          <a:lstStyle/>
-          <a:p>
-            <a:pPr algn="ctr"/>
-          </a:p>
-        </p:txBody>
-      </p:sp>
-      <p:sp>
-        <p:nvSpPr>
-          <p:cNvPr id="14" name="TextBox 13"/>
-          <p:cNvSpPr txBox="1"/>
-          <p:nvPr/>
-        </p:nvSpPr>
-        <p:spPr>
-          <a:xfrm>
-            <a:off x="1100000" y="4350000"/>
-            <a:ext cx="10200000" cy="680000"/>
-          </a:xfrm>
-          <a:prstGeom prst="rect">
-            <a:avLst/>
-          </a:prstGeom>
-          <a:noFill/>
-        </p:spPr>
-        <p:txBody>
-          <a:bodyPr wrap="square" anchor="t">
-            <a:spAutoFit/>
-          </a:bodyPr>
-          <a:lstStyle/>
-          <a:p>
-            <a:pPr algn="l">
-              <a:lnSpc>
-                <a:spcPct val="125000"/>
-              </a:lnSpc>
-              <a:spcAft>
-                <a:spcPts val="600"/>
-              </a:spcAft>
-            </a:pPr>
-            <a:r>
-              <a:rPr sz="1500" b="0">
-                <a:solidFill>
-                  <a:srgbClr val="010328"/>
-                </a:solidFill>
-                <a:latin typeface="微软雅黑"/>
-              </a:rPr>
-              <a:t>本周不讲继承与多态，专注基本类设计（重点标注）。</a:t>
-            </a:r>
-          </a:p>
-        </p:txBody>
-      </p:sp>
-      <p:sp>
-        <p:nvSpPr>
-          <p:cNvPr id="15" name="Rectangle 14"/>
-          <p:cNvSpPr/>
-          <p:nvPr/>
-        </p:nvSpPr>
-        <p:spPr>
-          <a:xfrm>
-            <a:off x="500000" y="6500000"/>
-            <a:ext cx="11100000" cy="20000"/>
-          </a:xfrm>
-          <a:prstGeom prst="rect">
-            <a:avLst/>
-          </a:prstGeom>
-          <a:solidFill>
-            <a:srgbClr val="C9D4EE"/>
-          </a:solidFill>
-          <a:ln>
-            <a:noFill/>
-          </a:ln>
-          <a:effectLst/>
-        </p:spPr>
-        <p:style>
-          <a:lnRef idx="1">
-            <a:schemeClr val="accent1"/>
-          </a:lnRef>
-          <a:fillRef idx="3">
-            <a:schemeClr val="accent1"/>
-          </a:fillRef>
-          <a:effectRef idx="2">
-            <a:schemeClr val="accent1"/>
-          </a:effectRef>
-          <a:fontRef idx="minor">
-            <a:schemeClr val="lt1"/>
-          </a:fontRef>
-        </p:style>
-        <p:txBody>
-          <a:bodyPr rtlCol="0" anchor="ctr"/>
-          <a:lstStyle/>
-          <a:p>
-            <a:pPr algn="ctr"/>
-          </a:p>
-        </p:txBody>
-      </p:sp>
-      <p:sp>
-        <p:nvSpPr>
-          <p:cNvPr id="16" name="TextBox 15"/>
-          <p:cNvSpPr txBox="1"/>
-          <p:nvPr/>
-        </p:nvSpPr>
-        <p:spPr>
-          <a:xfrm>
-            <a:off x="500000" y="6540000"/>
-            <a:ext cx="7000000" cy="300000"/>
+            <a:off x="1000000" y="1880000"/>
+            <a:ext cx="10200000" cy="520000"/>
           </a:xfrm>
           <a:prstGeom prst="rect">
             <a:avLst/>
@@ -5545,6 +8028,204 @@
               </a:spcAft>
             </a:pPr>
             <a:r>
+              <a:rPr sz="1400" b="1">
+                <a:solidFill>
+                  <a:srgbClr val="FFFFFF"/>
+                </a:solidFill>
+                <a:latin typeface="微软雅黑"/>
+              </a:rPr>
+              <a:t>◆ 重庆两江智造集团 · 精密制造事业部</a:t>
+            </a:r>
+          </a:p>
+        </p:txBody>
+      </p:sp>
+      <p:sp>
+        <p:nvSpPr>
+          <p:cNvPr id="7" name="Rectangle 6"/>
+          <p:cNvSpPr/>
+          <p:nvPr/>
+        </p:nvSpPr>
+        <p:spPr>
+          <a:xfrm>
+            <a:off x="800000" y="2580000"/>
+            <a:ext cx="6300000" cy="3600000"/>
+          </a:xfrm>
+          <a:prstGeom prst="rect">
+            <a:avLst/>
+          </a:prstGeom>
+          <a:solidFill>
+            <a:srgbClr val="F7F9FD"/>
+          </a:solidFill>
+          <a:ln>
+            <a:solidFill>
+              <a:srgbClr val="0545E8"/>
+            </a:solidFill>
+          </a:ln>
+          <a:effectLst/>
+        </p:spPr>
+        <p:style>
+          <a:lnRef idx="1">
+            <a:schemeClr val="accent1"/>
+          </a:lnRef>
+          <a:fillRef idx="3">
+            <a:schemeClr val="accent1"/>
+          </a:fillRef>
+          <a:effectRef idx="2">
+            <a:schemeClr val="accent1"/>
+          </a:effectRef>
+          <a:fontRef idx="minor">
+            <a:schemeClr val="lt1"/>
+          </a:fontRef>
+        </p:style>
+        <p:txBody>
+          <a:bodyPr rtlCol="0" anchor="ctr"/>
+          <a:lstStyle/>
+          <a:p>
+            <a:pPr algn="ctr"/>
+          </a:p>
+        </p:txBody>
+      </p:sp>
+      <p:sp>
+        <p:nvSpPr>
+          <p:cNvPr id="8" name="TextBox 7"/>
+          <p:cNvSpPr txBox="1"/>
+          <p:nvPr/>
+        </p:nvSpPr>
+        <p:spPr>
+          <a:xfrm>
+            <a:off x="1000000" y="2740000"/>
+            <a:ext cx="5900000" cy="3300000"/>
+          </a:xfrm>
+          <a:prstGeom prst="rect">
+            <a:avLst/>
+          </a:prstGeom>
+          <a:noFill/>
+        </p:spPr>
+        <p:txBody>
+          <a:bodyPr wrap="square" anchor="t">
+            <a:spAutoFit/>
+          </a:bodyPr>
+          <a:lstStyle/>
+          <a:p>
+            <a:pPr algn="l">
+              <a:lnSpc>
+                <a:spcPct val="130000"/>
+              </a:lnSpc>
+              <a:spcAft>
+                <a:spcPts val="600"/>
+              </a:spcAft>
+            </a:pPr>
+            <a:r>
+              <a:rPr sz="1450" b="0">
+                <a:solidFill>
+                  <a:srgbClr val="010328"/>
+                </a:solidFill>
+                <a:latin typeface="微软雅黑"/>
+              </a:rPr>
+              <a:t>台账、告警的数据散落各处，改一台设备要翻三个文件。李姐感叹：'要是设备信息能像身份证一样一人一张卡。'——工单0.3：学会用'类'给设备建模。</a:t>
+            </a:r>
+          </a:p>
+        </p:txBody>
+      </p:sp>
+      <p:pic>
+        <p:nvPicPr>
+          <p:cNvPr id="9" name="Picture 8" descr="W4_场景.png"/>
+          <p:cNvPicPr>
+            <a:picLocks noChangeAspect="1"/>
+          </p:cNvPicPr>
+          <p:nvPr/>
+        </p:nvPicPr>
+        <p:blipFill>
+          <a:blip r:embed="rId2"/>
+          <a:stretch>
+            <a:fillRect/>
+          </a:stretch>
+        </p:blipFill>
+        <p:spPr>
+          <a:xfrm>
+            <a:off x="7250000" y="2580000"/>
+            <a:ext cx="4150000" cy="3600000"/>
+          </a:xfrm>
+          <a:prstGeom prst="rect">
+            <a:avLst/>
+          </a:prstGeom>
+        </p:spPr>
+      </p:pic>
+      <p:sp>
+        <p:nvSpPr>
+          <p:cNvPr id="10" name="Rectangle 9"/>
+          <p:cNvSpPr/>
+          <p:nvPr/>
+        </p:nvSpPr>
+        <p:spPr>
+          <a:xfrm>
+            <a:off x="500000" y="6500000"/>
+            <a:ext cx="11100000" cy="20000"/>
+          </a:xfrm>
+          <a:prstGeom prst="rect">
+            <a:avLst/>
+          </a:prstGeom>
+          <a:solidFill>
+            <a:srgbClr val="C9D4EE"/>
+          </a:solidFill>
+          <a:ln>
+            <a:noFill/>
+          </a:ln>
+          <a:effectLst/>
+        </p:spPr>
+        <p:style>
+          <a:lnRef idx="1">
+            <a:schemeClr val="accent1"/>
+          </a:lnRef>
+          <a:fillRef idx="3">
+            <a:schemeClr val="accent1"/>
+          </a:fillRef>
+          <a:effectRef idx="2">
+            <a:schemeClr val="accent1"/>
+          </a:effectRef>
+          <a:fontRef idx="minor">
+            <a:schemeClr val="lt1"/>
+          </a:fontRef>
+        </p:style>
+        <p:txBody>
+          <a:bodyPr rtlCol="0" anchor="ctr"/>
+          <a:lstStyle/>
+          <a:p>
+            <a:pPr algn="ctr"/>
+          </a:p>
+        </p:txBody>
+      </p:sp>
+      <p:sp>
+        <p:nvSpPr>
+          <p:cNvPr id="11" name="TextBox 10"/>
+          <p:cNvSpPr txBox="1"/>
+          <p:nvPr/>
+        </p:nvSpPr>
+        <p:spPr>
+          <a:xfrm>
+            <a:off x="500000" y="6540000"/>
+            <a:ext cx="7000000" cy="300000"/>
+          </a:xfrm>
+          <a:prstGeom prst="rect">
+            <a:avLst/>
+          </a:prstGeom>
+          <a:noFill/>
+        </p:spPr>
+        <p:txBody>
+          <a:bodyPr wrap="square" anchor="t">
+            <a:spAutoFit/>
+          </a:bodyPr>
+          <a:lstStyle/>
+          <a:p>
+            <a:pPr algn="l">
+              <a:lnSpc>
+                <a:spcPct val="110000"/>
+              </a:lnSpc>
+              <a:spcAft>
+                <a:spcPts val="600"/>
+              </a:spcAft>
+            </a:pPr>
+            <a:r>
               <a:rPr sz="1000" b="0">
                 <a:solidFill>
                   <a:srgbClr val="8A97B5"/>
@@ -5558,7 +8239,7 @@
       </p:sp>
       <p:sp>
         <p:nvSpPr>
-          <p:cNvPr id="17" name="TextBox 16"/>
+          <p:cNvPr id="12" name="TextBox 11"/>
           <p:cNvSpPr txBox="1"/>
           <p:nvPr/>
         </p:nvSpPr>
@@ -5593,7 +8274,7 @@
                 </a:solidFill>
                 <a:latin typeface="微软雅黑"/>
               </a:rPr>
-              <a:t>3 / 7</a:t>
+              <a:t>3 / 13</a:t>
             </a:r>
           </a:p>
         </p:txBody>
@@ -5706,14 +8387,100 @@
       </p:sp>
       <p:sp>
         <p:nvSpPr>
-          <p:cNvPr id="4" name="TextBox 3"/>
+          <p:cNvPr id="4" name="Rectangle 3"/>
+          <p:cNvSpPr/>
+          <p:nvPr/>
+        </p:nvSpPr>
+        <p:spPr>
+          <a:xfrm>
+            <a:off x="600000" y="230000"/>
+            <a:ext cx="700000" cy="700000"/>
+          </a:xfrm>
+          <a:prstGeom prst="rect">
+            <a:avLst/>
+          </a:prstGeom>
+          <a:solidFill>
+            <a:srgbClr val="F5670F"/>
+          </a:solidFill>
+          <a:ln>
+            <a:noFill/>
+          </a:ln>
+          <a:effectLst/>
+        </p:spPr>
+        <p:style>
+          <a:lnRef idx="1">
+            <a:schemeClr val="accent1"/>
+          </a:lnRef>
+          <a:fillRef idx="3">
+            <a:schemeClr val="accent1"/>
+          </a:fillRef>
+          <a:effectRef idx="2">
+            <a:schemeClr val="accent1"/>
+          </a:effectRef>
+          <a:fontRef idx="minor">
+            <a:schemeClr val="lt1"/>
+          </a:fontRef>
+        </p:style>
+        <p:txBody>
+          <a:bodyPr rtlCol="0" anchor="ctr"/>
+          <a:lstStyle/>
+          <a:p>
+            <a:pPr algn="ctr"/>
+          </a:p>
+        </p:txBody>
+      </p:sp>
+      <p:sp>
+        <p:nvSpPr>
+          <p:cNvPr id="5" name="TextBox 4"/>
           <p:cNvSpPr txBox="1"/>
           <p:nvPr/>
         </p:nvSpPr>
         <p:spPr>
           <a:xfrm>
-            <a:off x="700000" y="300000"/>
-            <a:ext cx="10792000" cy="700000"/>
+            <a:off x="600000" y="255000"/>
+            <a:ext cx="700000" cy="660000"/>
+          </a:xfrm>
+          <a:prstGeom prst="rect">
+            <a:avLst/>
+          </a:prstGeom>
+          <a:noFill/>
+        </p:spPr>
+        <p:txBody>
+          <a:bodyPr wrap="square" anchor="t">
+            <a:spAutoFit/>
+          </a:bodyPr>
+          <a:lstStyle/>
+          <a:p>
+            <a:pPr algn="ctr">
+              <a:lnSpc>
+                <a:spcPct val="110000"/>
+              </a:lnSpc>
+              <a:spcAft>
+                <a:spcPts val="600"/>
+              </a:spcAft>
+            </a:pPr>
+            <a:r>
+              <a:rPr sz="2400" b="1">
+                <a:solidFill>
+                  <a:srgbClr val="FFFFFF"/>
+                </a:solidFill>
+                <a:latin typeface="微软雅黑"/>
+              </a:rPr>
+              <a:t>1</a:t>
+            </a:r>
+          </a:p>
+        </p:txBody>
+      </p:sp>
+      <p:sp>
+        <p:nvSpPr>
+          <p:cNvPr id="6" name="TextBox 5"/>
+          <p:cNvSpPr txBox="1"/>
+          <p:nvPr/>
+        </p:nvSpPr>
+        <p:spPr>
+          <a:xfrm>
+            <a:off x="1500000" y="300000"/>
+            <a:ext cx="9992000" cy="700000"/>
           </a:xfrm>
           <a:prstGeom prst="rect">
             <a:avLst/>
@@ -5741,27 +8508,27 @@
                 </a:solidFill>
                 <a:latin typeface="微软雅黑"/>
               </a:rPr>
-              <a:t>实施任务：工单0.3《工业设备类设计》</a:t>
-            </a:r>
-          </a:p>
-        </p:txBody>
-      </p:sp>
-      <p:sp>
-        <p:nvSpPr>
-          <p:cNvPr id="5" name="Rectangle 4"/>
+              <a:t>给设备装上行为（1）</a:t>
+            </a:r>
+          </a:p>
+        </p:txBody>
+      </p:sp>
+      <p:sp>
+        <p:nvSpPr>
+          <p:cNvPr id="7" name="Rectangle 6"/>
           <p:cNvSpPr/>
           <p:nvPr/>
         </p:nvSpPr>
         <p:spPr>
           <a:xfrm>
-            <a:off x="800000" y="1950000"/>
-            <a:ext cx="6300000" cy="3900000"/>
+            <a:off x="820000" y="2160000"/>
+            <a:ext cx="120000" cy="120000"/>
           </a:xfrm>
           <a:prstGeom prst="rect">
             <a:avLst/>
           </a:prstGeom>
           <a:solidFill>
-            <a:srgbClr val="F3F6FD"/>
+            <a:srgbClr val="F5670F"/>
           </a:solidFill>
           <a:ln>
             <a:noFill/>
@@ -5792,14 +8559,14 @@
       </p:sp>
       <p:sp>
         <p:nvSpPr>
-          <p:cNvPr id="6" name="TextBox 5"/>
+          <p:cNvPr id="8" name="TextBox 7"/>
           <p:cNvSpPr txBox="1"/>
           <p:nvPr/>
         </p:nvSpPr>
         <p:spPr>
           <a:xfrm>
-            <a:off x="1000000" y="2100000"/>
-            <a:ext cx="5900000" cy="3600000"/>
+            <a:off x="1100000" y="2050000"/>
+            <a:ext cx="10200000" cy="900000"/>
           </a:xfrm>
           <a:prstGeom prst="rect">
             <a:avLst/>
@@ -5814,102 +8581,301 @@
           <a:p>
             <a:pPr algn="l">
               <a:lnSpc>
-                <a:spcPct val="130000"/>
+                <a:spcPct val="125000"/>
               </a:lnSpc>
               <a:spcAft>
                 <a:spcPts val="600"/>
               </a:spcAft>
             </a:pPr>
             <a:r>
-              <a:rPr sz="1500" b="1">
-                <a:solidFill>
-                  <a:srgbClr val="0545E8"/>
+              <a:rPr sz="1500" b="0">
+                <a:solidFill>
+                  <a:srgbClr val="010328"/>
                 </a:solidFill>
                 <a:latin typeface="微软雅黑"/>
               </a:rPr>
-              <a:t>实施步骤</a:t>
-            </a:r>
-          </a:p>
+              <a:t>设备类设计：Device类（ID、名称、状态、温度属性；启动、停止、获取状态方法）；</a:t>
+            </a:r>
+          </a:p>
+        </p:txBody>
+      </p:sp>
+      <p:sp>
+        <p:nvSpPr>
+          <p:cNvPr id="9" name="Rectangle 8"/>
+          <p:cNvSpPr/>
+          <p:nvPr/>
+        </p:nvSpPr>
+        <p:spPr>
+          <a:xfrm>
+            <a:off x="820000" y="3100000"/>
+            <a:ext cx="120000" cy="120000"/>
+          </a:xfrm>
+          <a:prstGeom prst="rect">
+            <a:avLst/>
+          </a:prstGeom>
+          <a:solidFill>
+            <a:srgbClr val="F5670F"/>
+          </a:solidFill>
+          <a:ln>
+            <a:noFill/>
+          </a:ln>
+          <a:effectLst/>
+        </p:spPr>
+        <p:style>
+          <a:lnRef idx="1">
+            <a:schemeClr val="accent1"/>
+          </a:lnRef>
+          <a:fillRef idx="3">
+            <a:schemeClr val="accent1"/>
+          </a:fillRef>
+          <a:effectRef idx="2">
+            <a:schemeClr val="accent1"/>
+          </a:effectRef>
+          <a:fontRef idx="minor">
+            <a:schemeClr val="lt1"/>
+          </a:fontRef>
+        </p:style>
+        <p:txBody>
+          <a:bodyPr rtlCol="0" anchor="ctr"/>
+          <a:lstStyle/>
+          <a:p>
+            <a:pPr algn="ctr"/>
+          </a:p>
+        </p:txBody>
+      </p:sp>
+      <p:sp>
+        <p:nvSpPr>
+          <p:cNvPr id="10" name="TextBox 9"/>
+          <p:cNvSpPr txBox="1"/>
+          <p:nvPr/>
+        </p:nvSpPr>
+        <p:spPr>
+          <a:xfrm>
+            <a:off x="1100000" y="2990000"/>
+            <a:ext cx="10200000" cy="680000"/>
+          </a:xfrm>
+          <a:prstGeom prst="rect">
+            <a:avLst/>
+          </a:prstGeom>
+          <a:noFill/>
+        </p:spPr>
+        <p:txBody>
+          <a:bodyPr wrap="square" anchor="t">
+            <a:spAutoFit/>
+          </a:bodyPr>
+          <a:lstStyle/>
           <a:p>
             <a:pPr algn="l">
               <a:lnSpc>
-                <a:spcPct val="130000"/>
+                <a:spcPct val="125000"/>
               </a:lnSpc>
               <a:spcAft>
                 <a:spcPts val="600"/>
               </a:spcAft>
             </a:pPr>
             <a:r>
-              <a:rPr sz="1400" b="0">
+              <a:rPr sz="1500" b="0">
                 <a:solidFill>
                   <a:srgbClr val="010328"/>
                 </a:solidFill>
                 <a:latin typeface="微软雅黑"/>
               </a:rPr>
-              <a:t>1. 方法含状态校验(重复启动提示)</a:t>
-            </a:r>
-          </a:p>
+              <a:t>工单项目0.3实操：创建多个设备对象实例，演示属性访问与方法调用；</a:t>
+            </a:r>
+          </a:p>
+        </p:txBody>
+      </p:sp>
+      <p:sp>
+        <p:nvSpPr>
+          <p:cNvPr id="11" name="Rectangle 10"/>
+          <p:cNvSpPr/>
+          <p:nvPr/>
+        </p:nvSpPr>
+        <p:spPr>
+          <a:xfrm>
+            <a:off x="820000" y="3780000"/>
+            <a:ext cx="120000" cy="120000"/>
+          </a:xfrm>
+          <a:prstGeom prst="rect">
+            <a:avLst/>
+          </a:prstGeom>
+          <a:solidFill>
+            <a:srgbClr val="F5670F"/>
+          </a:solidFill>
+          <a:ln>
+            <a:noFill/>
+          </a:ln>
+          <a:effectLst/>
+        </p:spPr>
+        <p:style>
+          <a:lnRef idx="1">
+            <a:schemeClr val="accent1"/>
+          </a:lnRef>
+          <a:fillRef idx="3">
+            <a:schemeClr val="accent1"/>
+          </a:fillRef>
+          <a:effectRef idx="2">
+            <a:schemeClr val="accent1"/>
+          </a:effectRef>
+          <a:fontRef idx="minor">
+            <a:schemeClr val="lt1"/>
+          </a:fontRef>
+        </p:style>
+        <p:txBody>
+          <a:bodyPr rtlCol="0" anchor="ctr"/>
+          <a:lstStyle/>
+          <a:p>
+            <a:pPr algn="ctr"/>
+          </a:p>
+        </p:txBody>
+      </p:sp>
+      <p:sp>
+        <p:nvSpPr>
+          <p:cNvPr id="12" name="TextBox 11"/>
+          <p:cNvSpPr txBox="1"/>
+          <p:nvPr/>
+        </p:nvSpPr>
+        <p:spPr>
+          <a:xfrm>
+            <a:off x="1100000" y="3670000"/>
+            <a:ext cx="10200000" cy="680000"/>
+          </a:xfrm>
+          <a:prstGeom prst="rect">
+            <a:avLst/>
+          </a:prstGeom>
+          <a:noFill/>
+        </p:spPr>
+        <p:txBody>
+          <a:bodyPr wrap="square" anchor="t">
+            <a:spAutoFit/>
+          </a:bodyPr>
+          <a:lstStyle/>
           <a:p>
             <a:pPr algn="l">
               <a:lnSpc>
-                <a:spcPct val="130000"/>
+                <a:spcPct val="125000"/>
               </a:lnSpc>
               <a:spcAft>
                 <a:spcPts val="600"/>
               </a:spcAft>
             </a:pPr>
             <a:r>
-              <a:rPr sz="1400" b="0">
+              <a:rPr sz="1500" b="0">
                 <a:solidFill>
                   <a:srgbClr val="010328"/>
                 </a:solidFill>
                 <a:latin typeface="微软雅黑"/>
               </a:rPr>
-              <a:t>2. print(对象)输出可读信息(__str__)</a:t>
-            </a:r>
-          </a:p>
+              <a:t>面向对象价值讨论：为什么工业系统偏爱OOP（可扩展、易维护）；</a:t>
+            </a:r>
+          </a:p>
+        </p:txBody>
+      </p:sp>
+      <p:sp>
+        <p:nvSpPr>
+          <p:cNvPr id="13" name="Rectangle 12"/>
+          <p:cNvSpPr/>
+          <p:nvPr/>
+        </p:nvSpPr>
+        <p:spPr>
+          <a:xfrm>
+            <a:off x="820000" y="4460000"/>
+            <a:ext cx="120000" cy="120000"/>
+          </a:xfrm>
+          <a:prstGeom prst="rect">
+            <a:avLst/>
+          </a:prstGeom>
+          <a:solidFill>
+            <a:srgbClr val="F5670F"/>
+          </a:solidFill>
+          <a:ln>
+            <a:noFill/>
+          </a:ln>
+          <a:effectLst/>
+        </p:spPr>
+        <p:style>
+          <a:lnRef idx="1">
+            <a:schemeClr val="accent1"/>
+          </a:lnRef>
+          <a:fillRef idx="3">
+            <a:schemeClr val="accent1"/>
+          </a:fillRef>
+          <a:effectRef idx="2">
+            <a:schemeClr val="accent1"/>
+          </a:effectRef>
+          <a:fontRef idx="minor">
+            <a:schemeClr val="lt1"/>
+          </a:fontRef>
+        </p:style>
+        <p:txBody>
+          <a:bodyPr rtlCol="0" anchor="ctr"/>
+          <a:lstStyle/>
+          <a:p>
+            <a:pPr algn="ctr"/>
+          </a:p>
+        </p:txBody>
+      </p:sp>
+      <p:sp>
+        <p:nvSpPr>
+          <p:cNvPr id="14" name="TextBox 13"/>
+          <p:cNvSpPr txBox="1"/>
+          <p:nvPr/>
+        </p:nvSpPr>
+        <p:spPr>
+          <a:xfrm>
+            <a:off x="1100000" y="4350000"/>
+            <a:ext cx="10200000" cy="680000"/>
+          </a:xfrm>
+          <a:prstGeom prst="rect">
+            <a:avLst/>
+          </a:prstGeom>
+          <a:noFill/>
+        </p:spPr>
+        <p:txBody>
+          <a:bodyPr wrap="square" anchor="t">
+            <a:spAutoFit/>
+          </a:bodyPr>
+          <a:lstStyle/>
           <a:p>
             <a:pPr algn="l">
               <a:lnSpc>
-                <a:spcPct val="130000"/>
+                <a:spcPct val="125000"/>
               </a:lnSpc>
               <a:spcAft>
                 <a:spcPts val="600"/>
               </a:spcAft>
             </a:pPr>
             <a:r>
-              <a:rPr sz="1400" b="0">
+              <a:rPr sz="1500" b="0">
                 <a:solidFill>
                   <a:srgbClr val="010328"/>
                 </a:solidFill>
                 <a:latin typeface="微软雅黑"/>
               </a:rPr>
-              <a:t>3. 对象内存图手绘(id观察)</a:t>
-            </a:r>
-          </a:p>
-        </p:txBody>
-      </p:sp>
-      <p:sp>
-        <p:nvSpPr>
-          <p:cNvPr id="7" name="Rectangle 6"/>
+              <a:t>本周不讲继承与多态，专注基本类设计（重点标注）。</a:t>
+            </a:r>
+          </a:p>
+        </p:txBody>
+      </p:sp>
+      <p:sp>
+        <p:nvSpPr>
+          <p:cNvPr id="15" name="Rectangle 14"/>
           <p:cNvSpPr/>
           <p:nvPr/>
         </p:nvSpPr>
         <p:spPr>
           <a:xfrm>
-            <a:off x="7400000" y="1950000"/>
-            <a:ext cx="4000000" cy="1850000"/>
+            <a:off x="500000" y="6500000"/>
+            <a:ext cx="11100000" cy="20000"/>
           </a:xfrm>
           <a:prstGeom prst="rect">
             <a:avLst/>
           </a:prstGeom>
           <a:solidFill>
-            <a:srgbClr val="E8F1E8"/>
+            <a:srgbClr val="C9D4EE"/>
           </a:solidFill>
           <a:ln>
-            <a:solidFill>
-              <a:srgbClr val="0475B6"/>
-            </a:solidFill>
+            <a:noFill/>
           </a:ln>
           <a:effectLst/>
         </p:spPr>
@@ -5937,14 +8903,14 @@
       </p:sp>
       <p:sp>
         <p:nvSpPr>
-          <p:cNvPr id="8" name="TextBox 7"/>
+          <p:cNvPr id="16" name="TextBox 15"/>
           <p:cNvSpPr txBox="1"/>
           <p:nvPr/>
         </p:nvSpPr>
         <p:spPr>
           <a:xfrm>
-            <a:off x="7550000" y="2080000"/>
-            <a:ext cx="3750000" cy="1650000"/>
+            <a:off x="500000" y="6540000"/>
+            <a:ext cx="7000000" cy="300000"/>
           </a:xfrm>
           <a:prstGeom prst="rect">
             <a:avLst/>
@@ -5966,218 +8932,6 @@
               </a:spcAft>
             </a:pPr>
             <a:r>
-              <a:rPr sz="1400" b="1">
-                <a:solidFill>
-                  <a:srgbClr val="0475B6"/>
-                </a:solidFill>
-                <a:latin typeface="微软雅黑"/>
-              </a:rPr>
-              <a:t>及格标准（D）</a:t>
-            </a:r>
-          </a:p>
-          <a:p>
-            <a:pPr algn="l">
-              <a:lnSpc>
-                <a:spcPct val="110000"/>
-              </a:lnSpc>
-              <a:spcAft>
-                <a:spcPts val="600"/>
-              </a:spcAft>
-            </a:pPr>
-            <a:r>
-              <a:rPr sz="1300" b="0">
-                <a:solidFill>
-                  <a:srgbClr val="010328"/>
-                </a:solidFill>
-                <a:latin typeface="微软雅黑"/>
-              </a:rPr>
-              <a:t>1类+2属性+2方法+2实例</a:t>
-            </a:r>
-          </a:p>
-        </p:txBody>
-      </p:sp>
-      <p:sp>
-        <p:nvSpPr>
-          <p:cNvPr id="9" name="Rectangle 8"/>
-          <p:cNvSpPr/>
-          <p:nvPr/>
-        </p:nvSpPr>
-        <p:spPr>
-          <a:xfrm>
-            <a:off x="7400000" y="3950000"/>
-            <a:ext cx="4000000" cy="1850000"/>
-          </a:xfrm>
-          <a:prstGeom prst="rect">
-            <a:avLst/>
-          </a:prstGeom>
-          <a:solidFill>
-            <a:srgbClr val="FDF0E6"/>
-          </a:solidFill>
-          <a:ln>
-            <a:solidFill>
-              <a:srgbClr val="F5670F"/>
-            </a:solidFill>
-          </a:ln>
-          <a:effectLst/>
-        </p:spPr>
-        <p:style>
-          <a:lnRef idx="1">
-            <a:schemeClr val="accent1"/>
-          </a:lnRef>
-          <a:fillRef idx="3">
-            <a:schemeClr val="accent1"/>
-          </a:fillRef>
-          <a:effectRef idx="2">
-            <a:schemeClr val="accent1"/>
-          </a:effectRef>
-          <a:fontRef idx="minor">
-            <a:schemeClr val="lt1"/>
-          </a:fontRef>
-        </p:style>
-        <p:txBody>
-          <a:bodyPr rtlCol="0" anchor="ctr"/>
-          <a:lstStyle/>
-          <a:p>
-            <a:pPr algn="ctr"/>
-          </a:p>
-        </p:txBody>
-      </p:sp>
-      <p:sp>
-        <p:nvSpPr>
-          <p:cNvPr id="10" name="TextBox 9"/>
-          <p:cNvSpPr txBox="1"/>
-          <p:nvPr/>
-        </p:nvSpPr>
-        <p:spPr>
-          <a:xfrm>
-            <a:off x="7550000" y="4080000"/>
-            <a:ext cx="3750000" cy="1650000"/>
-          </a:xfrm>
-          <a:prstGeom prst="rect">
-            <a:avLst/>
-          </a:prstGeom>
-          <a:noFill/>
-        </p:spPr>
-        <p:txBody>
-          <a:bodyPr wrap="square" anchor="t">
-            <a:spAutoFit/>
-          </a:bodyPr>
-          <a:lstStyle/>
-          <a:p>
-            <a:pPr algn="l">
-              <a:lnSpc>
-                <a:spcPct val="110000"/>
-              </a:lnSpc>
-              <a:spcAft>
-                <a:spcPts val="600"/>
-              </a:spcAft>
-            </a:pPr>
-            <a:r>
-              <a:rPr sz="1400" b="1">
-                <a:solidFill>
-                  <a:srgbClr val="F5670F"/>
-                </a:solidFill>
-                <a:latin typeface="微软雅黑"/>
-              </a:rPr>
-              <a:t>优秀标准（B+）</a:t>
-            </a:r>
-          </a:p>
-          <a:p>
-            <a:pPr algn="l">
-              <a:lnSpc>
-                <a:spcPct val="110000"/>
-              </a:lnSpc>
-              <a:spcAft>
-                <a:spcPts val="600"/>
-              </a:spcAft>
-            </a:pPr>
-            <a:r>
-              <a:rPr sz="1300" b="0">
-                <a:solidFill>
-                  <a:srgbClr val="010328"/>
-                </a:solidFill>
-                <a:latin typeface="微软雅黑"/>
-              </a:rPr>
-              <a:t>状态校验完善；内存图正确</a:t>
-            </a:r>
-          </a:p>
-        </p:txBody>
-      </p:sp>
-      <p:sp>
-        <p:nvSpPr>
-          <p:cNvPr id="11" name="Rectangle 10"/>
-          <p:cNvSpPr/>
-          <p:nvPr/>
-        </p:nvSpPr>
-        <p:spPr>
-          <a:xfrm>
-            <a:off x="500000" y="6500000"/>
-            <a:ext cx="11100000" cy="20000"/>
-          </a:xfrm>
-          <a:prstGeom prst="rect">
-            <a:avLst/>
-          </a:prstGeom>
-          <a:solidFill>
-            <a:srgbClr val="C9D4EE"/>
-          </a:solidFill>
-          <a:ln>
-            <a:noFill/>
-          </a:ln>
-          <a:effectLst/>
-        </p:spPr>
-        <p:style>
-          <a:lnRef idx="1">
-            <a:schemeClr val="accent1"/>
-          </a:lnRef>
-          <a:fillRef idx="3">
-            <a:schemeClr val="accent1"/>
-          </a:fillRef>
-          <a:effectRef idx="2">
-            <a:schemeClr val="accent1"/>
-          </a:effectRef>
-          <a:fontRef idx="minor">
-            <a:schemeClr val="lt1"/>
-          </a:fontRef>
-        </p:style>
-        <p:txBody>
-          <a:bodyPr rtlCol="0" anchor="ctr"/>
-          <a:lstStyle/>
-          <a:p>
-            <a:pPr algn="ctr"/>
-          </a:p>
-        </p:txBody>
-      </p:sp>
-      <p:sp>
-        <p:nvSpPr>
-          <p:cNvPr id="12" name="TextBox 11"/>
-          <p:cNvSpPr txBox="1"/>
-          <p:nvPr/>
-        </p:nvSpPr>
-        <p:spPr>
-          <a:xfrm>
-            <a:off x="500000" y="6540000"/>
-            <a:ext cx="7000000" cy="300000"/>
-          </a:xfrm>
-          <a:prstGeom prst="rect">
-            <a:avLst/>
-          </a:prstGeom>
-          <a:noFill/>
-        </p:spPr>
-        <p:txBody>
-          <a:bodyPr wrap="square" anchor="t">
-            <a:spAutoFit/>
-          </a:bodyPr>
-          <a:lstStyle/>
-          <a:p>
-            <a:pPr algn="l">
-              <a:lnSpc>
-                <a:spcPct val="110000"/>
-              </a:lnSpc>
-              <a:spcAft>
-                <a:spcPts val="600"/>
-              </a:spcAft>
-            </a:pPr>
-            <a:r>
               <a:rPr sz="1000" b="0">
                 <a:solidFill>
                   <a:srgbClr val="8A97B5"/>
@@ -6191,7 +8945,7 @@
       </p:sp>
       <p:sp>
         <p:nvSpPr>
-          <p:cNvPr id="13" name="TextBox 12"/>
+          <p:cNvPr id="17" name="TextBox 16"/>
           <p:cNvSpPr txBox="1"/>
           <p:nvPr/>
         </p:nvSpPr>
@@ -6226,7 +8980,7 @@
                 </a:solidFill>
                 <a:latin typeface="微软雅黑"/>
               </a:rPr>
-              <a:t>4 / 7</a:t>
+              <a:t>4 / 13</a:t>
             </a:r>
           </a:p>
         </p:txBody>
@@ -6374,7 +9128,7 @@
                 </a:solidFill>
                 <a:latin typeface="微软雅黑"/>
               </a:rPr>
-              <a:t>总结评价与课后任务</a:t>
+              <a:t>实施任务：工单0.3《工业设备类设计》</a:t>
             </a:r>
           </a:p>
         </p:txBody>
@@ -6388,7 +9142,7 @@
         <p:spPr>
           <a:xfrm>
             <a:off x="800000" y="1950000"/>
-            <a:ext cx="10600000" cy="1500000"/>
+            <a:ext cx="6300000" cy="3900000"/>
           </a:xfrm>
           <a:prstGeom prst="rect">
             <a:avLst/>
@@ -6431,8 +9185,153 @@
         </p:nvSpPr>
         <p:spPr>
           <a:xfrm>
-            <a:off x="1000000" y="2050000"/>
-            <a:ext cx="10300000" cy="1400000"/>
+            <a:off x="1000000" y="2100000"/>
+            <a:ext cx="5900000" cy="3600000"/>
+          </a:xfrm>
+          <a:prstGeom prst="rect">
+            <a:avLst/>
+          </a:prstGeom>
+          <a:noFill/>
+        </p:spPr>
+        <p:txBody>
+          <a:bodyPr wrap="square" anchor="t">
+            <a:spAutoFit/>
+          </a:bodyPr>
+          <a:lstStyle/>
+          <a:p>
+            <a:pPr algn="l">
+              <a:lnSpc>
+                <a:spcPct val="130000"/>
+              </a:lnSpc>
+              <a:spcAft>
+                <a:spcPts val="600"/>
+              </a:spcAft>
+            </a:pPr>
+            <a:r>
+              <a:rPr sz="1500" b="1">
+                <a:solidFill>
+                  <a:srgbClr val="0545E8"/>
+                </a:solidFill>
+                <a:latin typeface="微软雅黑"/>
+              </a:rPr>
+              <a:t>实施步骤</a:t>
+            </a:r>
+          </a:p>
+          <a:p>
+            <a:pPr algn="l">
+              <a:lnSpc>
+                <a:spcPct val="130000"/>
+              </a:lnSpc>
+              <a:spcAft>
+                <a:spcPts val="600"/>
+              </a:spcAft>
+            </a:pPr>
+            <a:r>
+              <a:rPr sz="1400" b="0">
+                <a:solidFill>
+                  <a:srgbClr val="010328"/>
+                </a:solidFill>
+                <a:latin typeface="微软雅黑"/>
+              </a:rPr>
+              <a:t>1. 方法含状态校验(重复启动提示)</a:t>
+            </a:r>
+          </a:p>
+          <a:p>
+            <a:pPr algn="l">
+              <a:lnSpc>
+                <a:spcPct val="130000"/>
+              </a:lnSpc>
+              <a:spcAft>
+                <a:spcPts val="600"/>
+              </a:spcAft>
+            </a:pPr>
+            <a:r>
+              <a:rPr sz="1400" b="0">
+                <a:solidFill>
+                  <a:srgbClr val="010328"/>
+                </a:solidFill>
+                <a:latin typeface="微软雅黑"/>
+              </a:rPr>
+              <a:t>2. print(对象)输出可读信息(__str__)</a:t>
+            </a:r>
+          </a:p>
+          <a:p>
+            <a:pPr algn="l">
+              <a:lnSpc>
+                <a:spcPct val="130000"/>
+              </a:lnSpc>
+              <a:spcAft>
+                <a:spcPts val="600"/>
+              </a:spcAft>
+            </a:pPr>
+            <a:r>
+              <a:rPr sz="1400" b="0">
+                <a:solidFill>
+                  <a:srgbClr val="010328"/>
+                </a:solidFill>
+                <a:latin typeface="微软雅黑"/>
+              </a:rPr>
+              <a:t>3. 对象内存图手绘(id观察)</a:t>
+            </a:r>
+          </a:p>
+        </p:txBody>
+      </p:sp>
+      <p:sp>
+        <p:nvSpPr>
+          <p:cNvPr id="7" name="Rectangle 6"/>
+          <p:cNvSpPr/>
+          <p:nvPr/>
+        </p:nvSpPr>
+        <p:spPr>
+          <a:xfrm>
+            <a:off x="7400000" y="1950000"/>
+            <a:ext cx="4000000" cy="1850000"/>
+          </a:xfrm>
+          <a:prstGeom prst="rect">
+            <a:avLst/>
+          </a:prstGeom>
+          <a:solidFill>
+            <a:srgbClr val="E8F1E8"/>
+          </a:solidFill>
+          <a:ln>
+            <a:solidFill>
+              <a:srgbClr val="0475B6"/>
+            </a:solidFill>
+          </a:ln>
+          <a:effectLst/>
+        </p:spPr>
+        <p:style>
+          <a:lnRef idx="1">
+            <a:schemeClr val="accent1"/>
+          </a:lnRef>
+          <a:fillRef idx="3">
+            <a:schemeClr val="accent1"/>
+          </a:fillRef>
+          <a:effectRef idx="2">
+            <a:schemeClr val="accent1"/>
+          </a:effectRef>
+          <a:fontRef idx="minor">
+            <a:schemeClr val="lt1"/>
+          </a:fontRef>
+        </p:style>
+        <p:txBody>
+          <a:bodyPr rtlCol="0" anchor="ctr"/>
+          <a:lstStyle/>
+          <a:p>
+            <a:pPr algn="ctr"/>
+          </a:p>
+        </p:txBody>
+      </p:sp>
+      <p:sp>
+        <p:nvSpPr>
+          <p:cNvPr id="8" name="TextBox 7"/>
+          <p:cNvSpPr txBox="1"/>
+          <p:nvPr/>
+        </p:nvSpPr>
+        <p:spPr>
+          <a:xfrm>
+            <a:off x="7550000" y="2080000"/>
+            <a:ext cx="3750000" cy="1650000"/>
           </a:xfrm>
           <a:prstGeom prst="rect">
             <a:avLst/>
@@ -6454,13 +9353,13 @@
               </a:spcAft>
             </a:pPr>
             <a:r>
-              <a:rPr sz="1500" b="1">
-                <a:solidFill>
-                  <a:srgbClr val="0545E8"/>
+              <a:rPr sz="1400" b="1">
+                <a:solidFill>
+                  <a:srgbClr val="0475B6"/>
                 </a:solidFill>
                 <a:latin typeface="微软雅黑"/>
               </a:rPr>
-              <a:t>评价（10分钟）：</a:t>
+              <a:t>及格标准（D）</a:t>
             </a:r>
           </a:p>
           <a:p>
@@ -6473,167 +9372,60 @@
               </a:spcAft>
             </a:pPr>
             <a:r>
-              <a:rPr sz="1400" b="0">
+              <a:rPr sz="1300" b="0">
                 <a:solidFill>
                   <a:srgbClr val="010328"/>
                 </a:solidFill>
                 <a:latin typeface="微软雅黑"/>
               </a:rPr>
-              <a:t>按D/C/B/A量表当堂评分；工单24小时内反馈评语与改进建议。</a:t>
-            </a:r>
-          </a:p>
-        </p:txBody>
-      </p:sp>
-      <p:sp>
-        <p:nvSpPr>
-          <p:cNvPr id="7" name="TextBox 6"/>
-          <p:cNvSpPr txBox="1"/>
-          <p:nvPr/>
-        </p:nvSpPr>
-        <p:spPr>
-          <a:xfrm>
-            <a:off x="850000" y="3700000"/>
-            <a:ext cx="10600000" cy="700000"/>
-          </a:xfrm>
-          <a:prstGeom prst="rect">
-            <a:avLst/>
-          </a:prstGeom>
-          <a:noFill/>
-        </p:spPr>
-        <p:txBody>
-          <a:bodyPr wrap="square" anchor="t">
-            <a:spAutoFit/>
-          </a:bodyPr>
-          <a:lstStyle/>
-          <a:p>
-            <a:pPr algn="l">
-              <a:lnSpc>
-                <a:spcPct val="120000"/>
-              </a:lnSpc>
-              <a:spcAft>
-                <a:spcPts val="600"/>
-              </a:spcAft>
-            </a:pPr>
-            <a:r>
-              <a:rPr sz="1400" b="1">
-                <a:solidFill>
-                  <a:srgbClr val="F5670F"/>
-                </a:solidFill>
-                <a:latin typeface="微软雅黑"/>
-              </a:rPr>
-              <a:t>1. </a:t>
-            </a:r>
-            <a:r>
-              <a:rPr sz="1400" b="0">
-                <a:solidFill>
-                  <a:srgbClr val="010328"/>
-                </a:solidFill>
-                <a:latin typeface="微软雅黑"/>
-              </a:rPr>
-              <a:t>1. 完成工单项目0.3《工业设备类设计》：及格标准1类+2属性+2方法+2实例；优秀标准≥3属性、≥3方法、3实例并使用__init__；</a:t>
-            </a:r>
-          </a:p>
-        </p:txBody>
-      </p:sp>
-      <p:sp>
-        <p:nvSpPr>
-          <p:cNvPr id="8" name="TextBox 7"/>
-          <p:cNvSpPr txBox="1"/>
-          <p:nvPr/>
-        </p:nvSpPr>
-        <p:spPr>
-          <a:xfrm>
-            <a:off x="850000" y="4420000"/>
-            <a:ext cx="10600000" cy="700000"/>
-          </a:xfrm>
-          <a:prstGeom prst="rect">
-            <a:avLst/>
-          </a:prstGeom>
-          <a:noFill/>
-        </p:spPr>
-        <p:txBody>
-          <a:bodyPr wrap="square" anchor="t">
-            <a:spAutoFit/>
-          </a:bodyPr>
-          <a:lstStyle/>
-          <a:p>
-            <a:pPr algn="l">
-              <a:lnSpc>
-                <a:spcPct val="120000"/>
-              </a:lnSpc>
-              <a:spcAft>
-                <a:spcPts val="600"/>
-              </a:spcAft>
-            </a:pPr>
-            <a:r>
-              <a:rPr sz="1400" b="1">
-                <a:solidFill>
-                  <a:srgbClr val="F5670F"/>
-                </a:solidFill>
-                <a:latin typeface="微软雅黑"/>
-              </a:rPr>
-              <a:t>2. </a:t>
-            </a:r>
-            <a:r>
-              <a:rPr sz="1400" b="0">
-                <a:solidFill>
-                  <a:srgbClr val="010328"/>
-                </a:solidFill>
-                <a:latin typeface="微软雅黑"/>
-              </a:rPr>
-              <a:t>2. 用自己的话写一段“什么是对象”的理解笔记；</a:t>
-            </a:r>
-          </a:p>
-        </p:txBody>
-      </p:sp>
-      <p:sp>
-        <p:nvSpPr>
-          <p:cNvPr id="9" name="TextBox 8"/>
-          <p:cNvSpPr txBox="1"/>
-          <p:nvPr/>
-        </p:nvSpPr>
-        <p:spPr>
-          <a:xfrm>
-            <a:off x="850000" y="5140000"/>
-            <a:ext cx="10600000" cy="700000"/>
-          </a:xfrm>
-          <a:prstGeom prst="rect">
-            <a:avLst/>
-          </a:prstGeom>
-          <a:noFill/>
-        </p:spPr>
-        <p:txBody>
-          <a:bodyPr wrap="square" anchor="t">
-            <a:spAutoFit/>
-          </a:bodyPr>
-          <a:lstStyle/>
-          <a:p>
-            <a:pPr algn="l">
-              <a:lnSpc>
-                <a:spcPct val="120000"/>
-              </a:lnSpc>
-              <a:spcAft>
-                <a:spcPts val="600"/>
-              </a:spcAft>
-            </a:pPr>
-            <a:r>
-              <a:rPr sz="1400" b="1">
-                <a:solidFill>
-                  <a:srgbClr val="F5670F"/>
-                </a:solidFill>
-                <a:latin typeface="微软雅黑"/>
-              </a:rPr>
-              <a:t>3. </a:t>
-            </a:r>
-            <a:r>
-              <a:rPr sz="1400" b="0">
-                <a:solidFill>
-                  <a:srgbClr val="010328"/>
-                </a:solidFill>
-                <a:latin typeface="微软雅黑"/>
-              </a:rPr>
-              <a:t>3. 预习继承的概念。</a:t>
-            </a:r>
+              <a:t>1类+2属性+2方法+2实例</a:t>
+            </a:r>
+          </a:p>
+        </p:txBody>
+      </p:sp>
+      <p:sp>
+        <p:nvSpPr>
+          <p:cNvPr id="9" name="Rectangle 8"/>
+          <p:cNvSpPr/>
+          <p:nvPr/>
+        </p:nvSpPr>
+        <p:spPr>
+          <a:xfrm>
+            <a:off x="7400000" y="3950000"/>
+            <a:ext cx="4000000" cy="1850000"/>
+          </a:xfrm>
+          <a:prstGeom prst="rect">
+            <a:avLst/>
+          </a:prstGeom>
+          <a:solidFill>
+            <a:srgbClr val="FDF0E6"/>
+          </a:solidFill>
+          <a:ln>
+            <a:solidFill>
+              <a:srgbClr val="F5670F"/>
+            </a:solidFill>
+          </a:ln>
+          <a:effectLst/>
+        </p:spPr>
+        <p:style>
+          <a:lnRef idx="1">
+            <a:schemeClr val="accent1"/>
+          </a:lnRef>
+          <a:fillRef idx="3">
+            <a:schemeClr val="accent1"/>
+          </a:fillRef>
+          <a:effectRef idx="2">
+            <a:schemeClr val="accent1"/>
+          </a:effectRef>
+          <a:fontRef idx="minor">
+            <a:schemeClr val="lt1"/>
+          </a:fontRef>
+        </p:style>
+        <p:txBody>
+          <a:bodyPr rtlCol="0" anchor="ctr"/>
+          <a:lstStyle/>
+          <a:p>
+            <a:pPr algn="ctr"/>
           </a:p>
         </p:txBody>
       </p:sp>
@@ -6645,8 +9437,8 @@
         </p:nvSpPr>
         <p:spPr>
           <a:xfrm>
-            <a:off x="850000" y="5960000"/>
-            <a:ext cx="10600000" cy="500000"/>
+            <a:off x="7550000" y="4080000"/>
+            <a:ext cx="3750000" cy="1650000"/>
           </a:xfrm>
           <a:prstGeom prst="rect">
             <a:avLst/>
@@ -6668,91 +9460,15 @@
               </a:spcAft>
             </a:pPr>
             <a:r>
-              <a:rPr sz="1300" b="1">
-                <a:solidFill>
-                  <a:srgbClr val="0475B6"/>
+              <a:rPr sz="1400" b="1">
+                <a:solidFill>
+                  <a:srgbClr val="F5670F"/>
                 </a:solidFill>
                 <a:latin typeface="微软雅黑"/>
               </a:rPr>
-              <a:t>下次课预告：</a:t>
-            </a:r>
-            <a:r>
-              <a:rPr sz="1300" b="0">
-                <a:solidFill>
-                  <a:srgbClr val="44546A"/>
-                </a:solidFill>
-                <a:latin typeface="微软雅黑"/>
-              </a:rPr>
-              <a:t>见下次课工单任务书</a:t>
-            </a:r>
-          </a:p>
-        </p:txBody>
-      </p:sp>
-      <p:sp>
-        <p:nvSpPr>
-          <p:cNvPr id="11" name="Rectangle 10"/>
-          <p:cNvSpPr/>
-          <p:nvPr/>
-        </p:nvSpPr>
-        <p:spPr>
-          <a:xfrm>
-            <a:off x="500000" y="6500000"/>
-            <a:ext cx="11100000" cy="20000"/>
-          </a:xfrm>
-          <a:prstGeom prst="rect">
-            <a:avLst/>
-          </a:prstGeom>
-          <a:solidFill>
-            <a:srgbClr val="C9D4EE"/>
-          </a:solidFill>
-          <a:ln>
-            <a:noFill/>
-          </a:ln>
-          <a:effectLst/>
-        </p:spPr>
-        <p:style>
-          <a:lnRef idx="1">
-            <a:schemeClr val="accent1"/>
-          </a:lnRef>
-          <a:fillRef idx="3">
-            <a:schemeClr val="accent1"/>
-          </a:fillRef>
-          <a:effectRef idx="2">
-            <a:schemeClr val="accent1"/>
-          </a:effectRef>
-          <a:fontRef idx="minor">
-            <a:schemeClr val="lt1"/>
-          </a:fontRef>
-        </p:style>
-        <p:txBody>
-          <a:bodyPr rtlCol="0" anchor="ctr"/>
-          <a:lstStyle/>
-          <a:p>
-            <a:pPr algn="ctr"/>
-          </a:p>
-        </p:txBody>
-      </p:sp>
-      <p:sp>
-        <p:nvSpPr>
-          <p:cNvPr id="12" name="TextBox 11"/>
-          <p:cNvSpPr txBox="1"/>
-          <p:nvPr/>
-        </p:nvSpPr>
-        <p:spPr>
-          <a:xfrm>
-            <a:off x="500000" y="6540000"/>
-            <a:ext cx="7000000" cy="300000"/>
-          </a:xfrm>
-          <a:prstGeom prst="rect">
-            <a:avLst/>
-          </a:prstGeom>
-          <a:noFill/>
-        </p:spPr>
-        <p:txBody>
-          <a:bodyPr wrap="square" anchor="t">
-            <a:spAutoFit/>
-          </a:bodyPr>
-          <a:lstStyle/>
+              <a:t>优秀标准（B+）</a:t>
+            </a:r>
+          </a:p>
           <a:p>
             <a:pPr algn="l">
               <a:lnSpc>
@@ -6763,6 +9479,92 @@
               </a:spcAft>
             </a:pPr>
             <a:r>
+              <a:rPr sz="1300" b="0">
+                <a:solidFill>
+                  <a:srgbClr val="010328"/>
+                </a:solidFill>
+                <a:latin typeface="微软雅黑"/>
+              </a:rPr>
+              <a:t>状态校验完善；内存图正确</a:t>
+            </a:r>
+          </a:p>
+        </p:txBody>
+      </p:sp>
+      <p:sp>
+        <p:nvSpPr>
+          <p:cNvPr id="11" name="Rectangle 10"/>
+          <p:cNvSpPr/>
+          <p:nvPr/>
+        </p:nvSpPr>
+        <p:spPr>
+          <a:xfrm>
+            <a:off x="500000" y="6500000"/>
+            <a:ext cx="11100000" cy="20000"/>
+          </a:xfrm>
+          <a:prstGeom prst="rect">
+            <a:avLst/>
+          </a:prstGeom>
+          <a:solidFill>
+            <a:srgbClr val="C9D4EE"/>
+          </a:solidFill>
+          <a:ln>
+            <a:noFill/>
+          </a:ln>
+          <a:effectLst/>
+        </p:spPr>
+        <p:style>
+          <a:lnRef idx="1">
+            <a:schemeClr val="accent1"/>
+          </a:lnRef>
+          <a:fillRef idx="3">
+            <a:schemeClr val="accent1"/>
+          </a:fillRef>
+          <a:effectRef idx="2">
+            <a:schemeClr val="accent1"/>
+          </a:effectRef>
+          <a:fontRef idx="minor">
+            <a:schemeClr val="lt1"/>
+          </a:fontRef>
+        </p:style>
+        <p:txBody>
+          <a:bodyPr rtlCol="0" anchor="ctr"/>
+          <a:lstStyle/>
+          <a:p>
+            <a:pPr algn="ctr"/>
+          </a:p>
+        </p:txBody>
+      </p:sp>
+      <p:sp>
+        <p:nvSpPr>
+          <p:cNvPr id="12" name="TextBox 11"/>
+          <p:cNvSpPr txBox="1"/>
+          <p:nvPr/>
+        </p:nvSpPr>
+        <p:spPr>
+          <a:xfrm>
+            <a:off x="500000" y="6540000"/>
+            <a:ext cx="7000000" cy="300000"/>
+          </a:xfrm>
+          <a:prstGeom prst="rect">
+            <a:avLst/>
+          </a:prstGeom>
+          <a:noFill/>
+        </p:spPr>
+        <p:txBody>
+          <a:bodyPr wrap="square" anchor="t">
+            <a:spAutoFit/>
+          </a:bodyPr>
+          <a:lstStyle/>
+          <a:p>
+            <a:pPr algn="l">
+              <a:lnSpc>
+                <a:spcPct val="110000"/>
+              </a:lnSpc>
+              <a:spcAft>
+                <a:spcPts val="600"/>
+              </a:spcAft>
+            </a:pPr>
+            <a:r>
               <a:rPr sz="1000" b="0">
                 <a:solidFill>
                   <a:srgbClr val="8A97B5"/>
@@ -6811,7 +9613,7 @@
                 </a:solidFill>
                 <a:latin typeface="微软雅黑"/>
               </a:rPr>
-              <a:t>5 / 7</a:t>
+              <a:t>8 / 13</a:t>
             </a:r>
           </a:p>
         </p:txBody>
@@ -6843,7 +9645,7 @@
         <p:spPr>
           <a:xfrm>
             <a:off x="0" y="0"/>
-            <a:ext cx="12192000" cy="6858000"/>
+            <a:ext cx="12192000" cy="1150000"/>
           </a:xfrm>
           <a:prstGeom prst="rect">
             <a:avLst/>
@@ -6886,8 +9688,8 @@
         </p:nvSpPr>
         <p:spPr>
           <a:xfrm>
-            <a:off x="0" y="2880360"/>
-            <a:ext cx="12192000" cy="50000"/>
+            <a:off x="0" y="1150000"/>
+            <a:ext cx="2600000" cy="70000"/>
           </a:xfrm>
           <a:prstGeom prst="rect">
             <a:avLst/>
@@ -6930,178 +9732,8 @@
         </p:nvSpPr>
         <p:spPr>
           <a:xfrm>
-            <a:off x="0" y="1645920"/>
-            <a:ext cx="12192000" cy="1500000"/>
-          </a:xfrm>
-          <a:prstGeom prst="rect">
-            <a:avLst/>
-          </a:prstGeom>
-          <a:noFill/>
-        </p:spPr>
-        <p:txBody>
-          <a:bodyPr wrap="square" anchor="t">
-            <a:spAutoFit/>
-          </a:bodyPr>
-          <a:lstStyle/>
-          <a:p>
-            <a:pPr algn="ctr">
-              <a:lnSpc>
-                <a:spcPct val="110000"/>
-              </a:lnSpc>
-              <a:spcAft>
-                <a:spcPts val="600"/>
-              </a:spcAft>
-            </a:pPr>
-            <a:r>
-              <a:rPr sz="5400" b="1">
-                <a:solidFill>
-                  <a:srgbClr val="FFFFFF"/>
-                </a:solidFill>
-                <a:latin typeface="微软雅黑"/>
-              </a:rPr>
-              <a:t>THANKS</a:t>
-            </a:r>
-          </a:p>
-        </p:txBody>
-      </p:sp>
-      <p:sp>
-        <p:nvSpPr>
-          <p:cNvPr id="5" name="TextBox 4"/>
-          <p:cNvSpPr txBox="1"/>
-          <p:nvPr/>
-        </p:nvSpPr>
-        <p:spPr>
-          <a:xfrm>
-            <a:off x="0" y="3429000"/>
-            <a:ext cx="12192000" cy="800000"/>
-          </a:xfrm>
-          <a:prstGeom prst="rect">
-            <a:avLst/>
-          </a:prstGeom>
-          <a:noFill/>
-        </p:spPr>
-        <p:txBody>
-          <a:bodyPr wrap="square" anchor="t">
-            <a:spAutoFit/>
-          </a:bodyPr>
-          <a:lstStyle/>
-          <a:p>
-            <a:pPr algn="ctr">
-              <a:lnSpc>
-                <a:spcPct val="110000"/>
-              </a:lnSpc>
-              <a:spcAft>
-                <a:spcPts val="600"/>
-              </a:spcAft>
-            </a:pPr>
-            <a:r>
-              <a:rPr sz="2200" b="1">
-                <a:solidFill>
-                  <a:srgbClr val="F5670F"/>
-                </a:solidFill>
-                <a:latin typeface="微软雅黑"/>
-              </a:rPr>
-              <a:t>感谢聆听 · 动手实践出真知</a:t>
-            </a:r>
-          </a:p>
-        </p:txBody>
-      </p:sp>
-      <p:sp>
-        <p:nvSpPr>
-          <p:cNvPr id="6" name="TextBox 5"/>
-          <p:cNvSpPr txBox="1"/>
-          <p:nvPr/>
-        </p:nvSpPr>
-        <p:spPr>
-          <a:xfrm>
-            <a:off x="0" y="4526280"/>
-            <a:ext cx="12192000" cy="600000"/>
-          </a:xfrm>
-          <a:prstGeom prst="rect">
-            <a:avLst/>
-          </a:prstGeom>
-          <a:noFill/>
-        </p:spPr>
-        <p:txBody>
-          <a:bodyPr wrap="square" anchor="t">
-            <a:spAutoFit/>
-          </a:bodyPr>
-          <a:lstStyle/>
-          <a:p>
-            <a:pPr algn="ctr">
-              <a:lnSpc>
-                <a:spcPct val="110000"/>
-              </a:lnSpc>
-              <a:spcAft>
-                <a:spcPts val="600"/>
-              </a:spcAft>
-            </a:pPr>
-            <a:r>
-              <a:rPr sz="1400" b="0">
-                <a:solidFill>
-                  <a:srgbClr val="BBC6E6"/>
-                </a:solidFill>
-                <a:latin typeface="微软雅黑"/>
-              </a:rPr>
-              <a:t>以生为本   |   做中学 · 学中做</a:t>
-            </a:r>
-          </a:p>
-        </p:txBody>
-      </p:sp>
-      <p:sp>
-        <p:nvSpPr>
-          <p:cNvPr id="7" name="Rectangle 6"/>
-          <p:cNvSpPr/>
-          <p:nvPr/>
-        </p:nvSpPr>
-        <p:spPr>
-          <a:xfrm>
-            <a:off x="500000" y="6500000"/>
-            <a:ext cx="11100000" cy="20000"/>
-          </a:xfrm>
-          <a:prstGeom prst="rect">
-            <a:avLst/>
-          </a:prstGeom>
-          <a:solidFill>
-            <a:srgbClr val="C9D4EE"/>
-          </a:solidFill>
-          <a:ln>
-            <a:noFill/>
-          </a:ln>
-          <a:effectLst/>
-        </p:spPr>
-        <p:style>
-          <a:lnRef idx="1">
-            <a:schemeClr val="accent1"/>
-          </a:lnRef>
-          <a:fillRef idx="3">
-            <a:schemeClr val="accent1"/>
-          </a:fillRef>
-          <a:effectRef idx="2">
-            <a:schemeClr val="accent1"/>
-          </a:effectRef>
-          <a:fontRef idx="minor">
-            <a:schemeClr val="lt1"/>
-          </a:fontRef>
-        </p:style>
-        <p:txBody>
-          <a:bodyPr rtlCol="0" anchor="ctr"/>
-          <a:lstStyle/>
-          <a:p>
-            <a:pPr algn="ctr"/>
-          </a:p>
-        </p:txBody>
-      </p:sp>
-      <p:sp>
-        <p:nvSpPr>
-          <p:cNvPr id="8" name="TextBox 7"/>
-          <p:cNvSpPr txBox="1"/>
-          <p:nvPr/>
-        </p:nvSpPr>
-        <p:spPr>
-          <a:xfrm>
-            <a:off x="500000" y="6540000"/>
-            <a:ext cx="7000000" cy="300000"/>
+            <a:off x="700000" y="300000"/>
+            <a:ext cx="10792000" cy="700000"/>
           </a:xfrm>
           <a:prstGeom prst="rect">
             <a:avLst/>
@@ -7123,6 +9755,401 @@
               </a:spcAft>
             </a:pPr>
             <a:r>
+              <a:rPr sz="2400" b="1">
+                <a:solidFill>
+                  <a:srgbClr val="FFFFFF"/>
+                </a:solidFill>
+                <a:latin typeface="微软雅黑"/>
+              </a:rPr>
+              <a:t>总结评价与课后任务</a:t>
+            </a:r>
+          </a:p>
+        </p:txBody>
+      </p:sp>
+      <p:sp>
+        <p:nvSpPr>
+          <p:cNvPr id="5" name="Rectangle 4"/>
+          <p:cNvSpPr/>
+          <p:nvPr/>
+        </p:nvSpPr>
+        <p:spPr>
+          <a:xfrm>
+            <a:off x="800000" y="1950000"/>
+            <a:ext cx="10600000" cy="1500000"/>
+          </a:xfrm>
+          <a:prstGeom prst="rect">
+            <a:avLst/>
+          </a:prstGeom>
+          <a:solidFill>
+            <a:srgbClr val="F3F6FD"/>
+          </a:solidFill>
+          <a:ln>
+            <a:noFill/>
+          </a:ln>
+          <a:effectLst/>
+        </p:spPr>
+        <p:style>
+          <a:lnRef idx="1">
+            <a:schemeClr val="accent1"/>
+          </a:lnRef>
+          <a:fillRef idx="3">
+            <a:schemeClr val="accent1"/>
+          </a:fillRef>
+          <a:effectRef idx="2">
+            <a:schemeClr val="accent1"/>
+          </a:effectRef>
+          <a:fontRef idx="minor">
+            <a:schemeClr val="lt1"/>
+          </a:fontRef>
+        </p:style>
+        <p:txBody>
+          <a:bodyPr rtlCol="0" anchor="ctr"/>
+          <a:lstStyle/>
+          <a:p>
+            <a:pPr algn="ctr"/>
+          </a:p>
+        </p:txBody>
+      </p:sp>
+      <p:sp>
+        <p:nvSpPr>
+          <p:cNvPr id="6" name="TextBox 5"/>
+          <p:cNvSpPr txBox="1"/>
+          <p:nvPr/>
+        </p:nvSpPr>
+        <p:spPr>
+          <a:xfrm>
+            <a:off x="1000000" y="2050000"/>
+            <a:ext cx="10300000" cy="1400000"/>
+          </a:xfrm>
+          <a:prstGeom prst="rect">
+            <a:avLst/>
+          </a:prstGeom>
+          <a:noFill/>
+        </p:spPr>
+        <p:txBody>
+          <a:bodyPr wrap="square" anchor="t">
+            <a:spAutoFit/>
+          </a:bodyPr>
+          <a:lstStyle/>
+          <a:p>
+            <a:pPr algn="l">
+              <a:lnSpc>
+                <a:spcPct val="110000"/>
+              </a:lnSpc>
+              <a:spcAft>
+                <a:spcPts val="600"/>
+              </a:spcAft>
+            </a:pPr>
+            <a:r>
+              <a:rPr sz="1500" b="1">
+                <a:solidFill>
+                  <a:srgbClr val="0545E8"/>
+                </a:solidFill>
+                <a:latin typeface="微软雅黑"/>
+              </a:rPr>
+              <a:t>评价（10分钟）：</a:t>
+            </a:r>
+          </a:p>
+          <a:p>
+            <a:pPr algn="l">
+              <a:lnSpc>
+                <a:spcPct val="110000"/>
+              </a:lnSpc>
+              <a:spcAft>
+                <a:spcPts val="600"/>
+              </a:spcAft>
+            </a:pPr>
+            <a:r>
+              <a:rPr sz="1400" b="0">
+                <a:solidFill>
+                  <a:srgbClr val="010328"/>
+                </a:solidFill>
+                <a:latin typeface="微软雅黑"/>
+              </a:rPr>
+              <a:t>按D/C/B/A量表当堂评分；工单24小时内反馈评语与改进建议。</a:t>
+            </a:r>
+          </a:p>
+        </p:txBody>
+      </p:sp>
+      <p:sp>
+        <p:nvSpPr>
+          <p:cNvPr id="7" name="TextBox 6"/>
+          <p:cNvSpPr txBox="1"/>
+          <p:nvPr/>
+        </p:nvSpPr>
+        <p:spPr>
+          <a:xfrm>
+            <a:off x="850000" y="3700000"/>
+            <a:ext cx="10600000" cy="700000"/>
+          </a:xfrm>
+          <a:prstGeom prst="rect">
+            <a:avLst/>
+          </a:prstGeom>
+          <a:noFill/>
+        </p:spPr>
+        <p:txBody>
+          <a:bodyPr wrap="square" anchor="t">
+            <a:spAutoFit/>
+          </a:bodyPr>
+          <a:lstStyle/>
+          <a:p>
+            <a:pPr algn="l">
+              <a:lnSpc>
+                <a:spcPct val="120000"/>
+              </a:lnSpc>
+              <a:spcAft>
+                <a:spcPts val="600"/>
+              </a:spcAft>
+            </a:pPr>
+            <a:r>
+              <a:rPr sz="1400" b="1">
+                <a:solidFill>
+                  <a:srgbClr val="F5670F"/>
+                </a:solidFill>
+                <a:latin typeface="微软雅黑"/>
+              </a:rPr>
+              <a:t>1. </a:t>
+            </a:r>
+            <a:r>
+              <a:rPr sz="1400" b="0">
+                <a:solidFill>
+                  <a:srgbClr val="010328"/>
+                </a:solidFill>
+                <a:latin typeface="微软雅黑"/>
+              </a:rPr>
+              <a:t>1. 完成工单项目0.3《工业设备类设计》：及格标准1类+2属性+2方法+2实例；优秀标准≥3属性、≥3方法、3实例并使用__init__；</a:t>
+            </a:r>
+          </a:p>
+        </p:txBody>
+      </p:sp>
+      <p:sp>
+        <p:nvSpPr>
+          <p:cNvPr id="8" name="TextBox 7"/>
+          <p:cNvSpPr txBox="1"/>
+          <p:nvPr/>
+        </p:nvSpPr>
+        <p:spPr>
+          <a:xfrm>
+            <a:off x="850000" y="4420000"/>
+            <a:ext cx="10600000" cy="700000"/>
+          </a:xfrm>
+          <a:prstGeom prst="rect">
+            <a:avLst/>
+          </a:prstGeom>
+          <a:noFill/>
+        </p:spPr>
+        <p:txBody>
+          <a:bodyPr wrap="square" anchor="t">
+            <a:spAutoFit/>
+          </a:bodyPr>
+          <a:lstStyle/>
+          <a:p>
+            <a:pPr algn="l">
+              <a:lnSpc>
+                <a:spcPct val="120000"/>
+              </a:lnSpc>
+              <a:spcAft>
+                <a:spcPts val="600"/>
+              </a:spcAft>
+            </a:pPr>
+            <a:r>
+              <a:rPr sz="1400" b="1">
+                <a:solidFill>
+                  <a:srgbClr val="F5670F"/>
+                </a:solidFill>
+                <a:latin typeface="微软雅黑"/>
+              </a:rPr>
+              <a:t>2. </a:t>
+            </a:r>
+            <a:r>
+              <a:rPr sz="1400" b="0">
+                <a:solidFill>
+                  <a:srgbClr val="010328"/>
+                </a:solidFill>
+                <a:latin typeface="微软雅黑"/>
+              </a:rPr>
+              <a:t>2. 用自己的话写一段“什么是对象”的理解笔记；</a:t>
+            </a:r>
+          </a:p>
+        </p:txBody>
+      </p:sp>
+      <p:sp>
+        <p:nvSpPr>
+          <p:cNvPr id="9" name="TextBox 8"/>
+          <p:cNvSpPr txBox="1"/>
+          <p:nvPr/>
+        </p:nvSpPr>
+        <p:spPr>
+          <a:xfrm>
+            <a:off x="850000" y="5140000"/>
+            <a:ext cx="10600000" cy="700000"/>
+          </a:xfrm>
+          <a:prstGeom prst="rect">
+            <a:avLst/>
+          </a:prstGeom>
+          <a:noFill/>
+        </p:spPr>
+        <p:txBody>
+          <a:bodyPr wrap="square" anchor="t">
+            <a:spAutoFit/>
+          </a:bodyPr>
+          <a:lstStyle/>
+          <a:p>
+            <a:pPr algn="l">
+              <a:lnSpc>
+                <a:spcPct val="120000"/>
+              </a:lnSpc>
+              <a:spcAft>
+                <a:spcPts val="600"/>
+              </a:spcAft>
+            </a:pPr>
+            <a:r>
+              <a:rPr sz="1400" b="1">
+                <a:solidFill>
+                  <a:srgbClr val="F5670F"/>
+                </a:solidFill>
+                <a:latin typeface="微软雅黑"/>
+              </a:rPr>
+              <a:t>3. </a:t>
+            </a:r>
+            <a:r>
+              <a:rPr sz="1400" b="0">
+                <a:solidFill>
+                  <a:srgbClr val="010328"/>
+                </a:solidFill>
+                <a:latin typeface="微软雅黑"/>
+              </a:rPr>
+              <a:t>3. 预习继承的概念。</a:t>
+            </a:r>
+          </a:p>
+        </p:txBody>
+      </p:sp>
+      <p:sp>
+        <p:nvSpPr>
+          <p:cNvPr id="10" name="TextBox 9"/>
+          <p:cNvSpPr txBox="1"/>
+          <p:nvPr/>
+        </p:nvSpPr>
+        <p:spPr>
+          <a:xfrm>
+            <a:off x="850000" y="5960000"/>
+            <a:ext cx="10600000" cy="500000"/>
+          </a:xfrm>
+          <a:prstGeom prst="rect">
+            <a:avLst/>
+          </a:prstGeom>
+          <a:noFill/>
+        </p:spPr>
+        <p:txBody>
+          <a:bodyPr wrap="square" anchor="t">
+            <a:spAutoFit/>
+          </a:bodyPr>
+          <a:lstStyle/>
+          <a:p>
+            <a:pPr algn="l">
+              <a:lnSpc>
+                <a:spcPct val="110000"/>
+              </a:lnSpc>
+              <a:spcAft>
+                <a:spcPts val="600"/>
+              </a:spcAft>
+            </a:pPr>
+            <a:r>
+              <a:rPr sz="1300" b="1">
+                <a:solidFill>
+                  <a:srgbClr val="0475B6"/>
+                </a:solidFill>
+                <a:latin typeface="微软雅黑"/>
+              </a:rPr>
+              <a:t>下次课预告：</a:t>
+            </a:r>
+            <a:r>
+              <a:rPr sz="1300" b="0">
+                <a:solidFill>
+                  <a:srgbClr val="44546A"/>
+                </a:solidFill>
+                <a:latin typeface="微软雅黑"/>
+              </a:rPr>
+              <a:t>见下次课工单任务书</a:t>
+            </a:r>
+          </a:p>
+        </p:txBody>
+      </p:sp>
+      <p:sp>
+        <p:nvSpPr>
+          <p:cNvPr id="11" name="Rectangle 10"/>
+          <p:cNvSpPr/>
+          <p:nvPr/>
+        </p:nvSpPr>
+        <p:spPr>
+          <a:xfrm>
+            <a:off x="500000" y="6500000"/>
+            <a:ext cx="11100000" cy="20000"/>
+          </a:xfrm>
+          <a:prstGeom prst="rect">
+            <a:avLst/>
+          </a:prstGeom>
+          <a:solidFill>
+            <a:srgbClr val="C9D4EE"/>
+          </a:solidFill>
+          <a:ln>
+            <a:noFill/>
+          </a:ln>
+          <a:effectLst/>
+        </p:spPr>
+        <p:style>
+          <a:lnRef idx="1">
+            <a:schemeClr val="accent1"/>
+          </a:lnRef>
+          <a:fillRef idx="3">
+            <a:schemeClr val="accent1"/>
+          </a:fillRef>
+          <a:effectRef idx="2">
+            <a:schemeClr val="accent1"/>
+          </a:effectRef>
+          <a:fontRef idx="minor">
+            <a:schemeClr val="lt1"/>
+          </a:fontRef>
+        </p:style>
+        <p:txBody>
+          <a:bodyPr rtlCol="0" anchor="ctr"/>
+          <a:lstStyle/>
+          <a:p>
+            <a:pPr algn="ctr"/>
+          </a:p>
+        </p:txBody>
+      </p:sp>
+      <p:sp>
+        <p:nvSpPr>
+          <p:cNvPr id="12" name="TextBox 11"/>
+          <p:cNvSpPr txBox="1"/>
+          <p:nvPr/>
+        </p:nvSpPr>
+        <p:spPr>
+          <a:xfrm>
+            <a:off x="500000" y="6540000"/>
+            <a:ext cx="7000000" cy="300000"/>
+          </a:xfrm>
+          <a:prstGeom prst="rect">
+            <a:avLst/>
+          </a:prstGeom>
+          <a:noFill/>
+        </p:spPr>
+        <p:txBody>
+          <a:bodyPr wrap="square" anchor="t">
+            <a:spAutoFit/>
+          </a:bodyPr>
+          <a:lstStyle/>
+          <a:p>
+            <a:pPr algn="l">
+              <a:lnSpc>
+                <a:spcPct val="110000"/>
+              </a:lnSpc>
+              <a:spcAft>
+                <a:spcPts val="600"/>
+              </a:spcAft>
+            </a:pPr>
+            <a:r>
               <a:rPr sz="1000" b="0">
                 <a:solidFill>
                   <a:srgbClr val="8A97B5"/>
@@ -7136,7 +10163,7 @@
       </p:sp>
       <p:sp>
         <p:nvSpPr>
-          <p:cNvPr id="9" name="TextBox 8"/>
+          <p:cNvPr id="13" name="TextBox 12"/>
           <p:cNvSpPr txBox="1"/>
           <p:nvPr/>
         </p:nvSpPr>
@@ -7151,7 +10178,7 @@
           <a:noFill/>
         </p:spPr>
         <p:txBody>
-          <a:bodyPr wrap="square" anchor="ctr">
+          <a:bodyPr wrap="square" anchor="t">
             <a:spAutoFit/>
           </a:bodyPr>
           <a:lstStyle/>
@@ -7171,7 +10198,7 @@
                 </a:solidFill>
                 <a:latin typeface="微软雅黑"/>
               </a:rPr>
-              <a:t>6 / 7</a:t>
+              <a:t>9 / 13</a:t>
             </a:r>
           </a:p>
         </p:txBody>
@@ -7203,7 +10230,7 @@
         <p:spPr>
           <a:xfrm>
             <a:off x="0" y="0"/>
-            <a:ext cx="12192000" cy="1150000"/>
+            <a:ext cx="12192000" cy="6858000"/>
           </a:xfrm>
           <a:prstGeom prst="rect">
             <a:avLst/>
@@ -7246,8 +10273,8 @@
         </p:nvSpPr>
         <p:spPr>
           <a:xfrm>
-            <a:off x="0" y="1150000"/>
-            <a:ext cx="2600000" cy="70000"/>
+            <a:off x="0" y="2880360"/>
+            <a:ext cx="12192000" cy="50000"/>
           </a:xfrm>
           <a:prstGeom prst="rect">
             <a:avLst/>
@@ -7290,8 +10317,178 @@
         </p:nvSpPr>
         <p:spPr>
           <a:xfrm>
-            <a:off x="700000" y="300000"/>
-            <a:ext cx="10792000" cy="700000"/>
+            <a:off x="0" y="1645920"/>
+            <a:ext cx="12192000" cy="1500000"/>
+          </a:xfrm>
+          <a:prstGeom prst="rect">
+            <a:avLst/>
+          </a:prstGeom>
+          <a:noFill/>
+        </p:spPr>
+        <p:txBody>
+          <a:bodyPr wrap="square" anchor="t">
+            <a:spAutoFit/>
+          </a:bodyPr>
+          <a:lstStyle/>
+          <a:p>
+            <a:pPr algn="ctr">
+              <a:lnSpc>
+                <a:spcPct val="110000"/>
+              </a:lnSpc>
+              <a:spcAft>
+                <a:spcPts val="600"/>
+              </a:spcAft>
+            </a:pPr>
+            <a:r>
+              <a:rPr sz="5400" b="1">
+                <a:solidFill>
+                  <a:srgbClr val="FFFFFF"/>
+                </a:solidFill>
+                <a:latin typeface="微软雅黑"/>
+              </a:rPr>
+              <a:t>THANKS</a:t>
+            </a:r>
+          </a:p>
+        </p:txBody>
+      </p:sp>
+      <p:sp>
+        <p:nvSpPr>
+          <p:cNvPr id="5" name="TextBox 4"/>
+          <p:cNvSpPr txBox="1"/>
+          <p:nvPr/>
+        </p:nvSpPr>
+        <p:spPr>
+          <a:xfrm>
+            <a:off x="0" y="3429000"/>
+            <a:ext cx="12192000" cy="800000"/>
+          </a:xfrm>
+          <a:prstGeom prst="rect">
+            <a:avLst/>
+          </a:prstGeom>
+          <a:noFill/>
+        </p:spPr>
+        <p:txBody>
+          <a:bodyPr wrap="square" anchor="t">
+            <a:spAutoFit/>
+          </a:bodyPr>
+          <a:lstStyle/>
+          <a:p>
+            <a:pPr algn="ctr">
+              <a:lnSpc>
+                <a:spcPct val="110000"/>
+              </a:lnSpc>
+              <a:spcAft>
+                <a:spcPts val="600"/>
+              </a:spcAft>
+            </a:pPr>
+            <a:r>
+              <a:rPr sz="2200" b="1">
+                <a:solidFill>
+                  <a:srgbClr val="F5670F"/>
+                </a:solidFill>
+                <a:latin typeface="微软雅黑"/>
+              </a:rPr>
+              <a:t>感谢聆听 · 动手实践出真知</a:t>
+            </a:r>
+          </a:p>
+        </p:txBody>
+      </p:sp>
+      <p:sp>
+        <p:nvSpPr>
+          <p:cNvPr id="6" name="TextBox 5"/>
+          <p:cNvSpPr txBox="1"/>
+          <p:nvPr/>
+        </p:nvSpPr>
+        <p:spPr>
+          <a:xfrm>
+            <a:off x="0" y="4526280"/>
+            <a:ext cx="12192000" cy="600000"/>
+          </a:xfrm>
+          <a:prstGeom prst="rect">
+            <a:avLst/>
+          </a:prstGeom>
+          <a:noFill/>
+        </p:spPr>
+        <p:txBody>
+          <a:bodyPr wrap="square" anchor="t">
+            <a:spAutoFit/>
+          </a:bodyPr>
+          <a:lstStyle/>
+          <a:p>
+            <a:pPr algn="ctr">
+              <a:lnSpc>
+                <a:spcPct val="110000"/>
+              </a:lnSpc>
+              <a:spcAft>
+                <a:spcPts val="600"/>
+              </a:spcAft>
+            </a:pPr>
+            <a:r>
+              <a:rPr sz="1400" b="0">
+                <a:solidFill>
+                  <a:srgbClr val="BBC6E6"/>
+                </a:solidFill>
+                <a:latin typeface="微软雅黑"/>
+              </a:rPr>
+              <a:t>以生为本   |   做中学 · 学中做</a:t>
+            </a:r>
+          </a:p>
+        </p:txBody>
+      </p:sp>
+      <p:sp>
+        <p:nvSpPr>
+          <p:cNvPr id="7" name="Rectangle 6"/>
+          <p:cNvSpPr/>
+          <p:nvPr/>
+        </p:nvSpPr>
+        <p:spPr>
+          <a:xfrm>
+            <a:off x="500000" y="6500000"/>
+            <a:ext cx="11100000" cy="20000"/>
+          </a:xfrm>
+          <a:prstGeom prst="rect">
+            <a:avLst/>
+          </a:prstGeom>
+          <a:solidFill>
+            <a:srgbClr val="C9D4EE"/>
+          </a:solidFill>
+          <a:ln>
+            <a:noFill/>
+          </a:ln>
+          <a:effectLst/>
+        </p:spPr>
+        <p:style>
+          <a:lnRef idx="1">
+            <a:schemeClr val="accent1"/>
+          </a:lnRef>
+          <a:fillRef idx="3">
+            <a:schemeClr val="accent1"/>
+          </a:fillRef>
+          <a:effectRef idx="2">
+            <a:schemeClr val="accent1"/>
+          </a:effectRef>
+          <a:fontRef idx="minor">
+            <a:schemeClr val="lt1"/>
+          </a:fontRef>
+        </p:style>
+        <p:txBody>
+          <a:bodyPr rtlCol="0" anchor="ctr"/>
+          <a:lstStyle/>
+          <a:p>
+            <a:pPr algn="ctr"/>
+          </a:p>
+        </p:txBody>
+      </p:sp>
+      <p:sp>
+        <p:nvSpPr>
+          <p:cNvPr id="8" name="TextBox 7"/>
+          <p:cNvSpPr txBox="1"/>
+          <p:nvPr/>
+        </p:nvSpPr>
+        <p:spPr>
+          <a:xfrm>
+            <a:off x="500000" y="6540000"/>
+            <a:ext cx="7000000" cy="300000"/>
           </a:xfrm>
           <a:prstGeom prst="rect">
             <a:avLst/>
@@ -7313,115 +10510,27 @@
               </a:spcAft>
             </a:pPr>
             <a:r>
-              <a:rPr sz="2400" b="1">
-                <a:solidFill>
-                  <a:srgbClr val="FFFFFF"/>
+              <a:rPr sz="1000" b="0">
+                <a:solidFill>
+                  <a:srgbClr val="8A97B5"/>
                 </a:solidFill>
                 <a:latin typeface="微软雅黑"/>
               </a:rPr>
-              <a:t>下次课预告（第5周）</a:t>
-            </a:r>
-          </a:p>
-        </p:txBody>
-      </p:sp>
-      <p:sp>
-        <p:nvSpPr>
-          <p:cNvPr id="5" name="Rectangle 4"/>
-          <p:cNvSpPr/>
-          <p:nvPr/>
-        </p:nvSpPr>
-        <p:spPr>
-          <a:xfrm>
-            <a:off x="760000" y="1900000"/>
-            <a:ext cx="10900000" cy="1600000"/>
-          </a:xfrm>
-          <a:prstGeom prst="rect">
-            <a:avLst/>
-          </a:prstGeom>
-          <a:solidFill>
-            <a:srgbClr val="F3F6FD"/>
-          </a:solidFill>
-          <a:ln>
-            <a:noFill/>
-          </a:ln>
-          <a:effectLst/>
-        </p:spPr>
-        <p:style>
-          <a:lnRef idx="1">
-            <a:schemeClr val="accent1"/>
-          </a:lnRef>
-          <a:fillRef idx="3">
-            <a:schemeClr val="accent1"/>
-          </a:fillRef>
-          <a:effectRef idx="2">
-            <a:schemeClr val="accent1"/>
-          </a:effectRef>
-          <a:fontRef idx="minor">
-            <a:schemeClr val="lt1"/>
-          </a:fontRef>
-        </p:style>
-        <p:txBody>
-          <a:bodyPr rtlCol="0" anchor="ctr"/>
-          <a:lstStyle/>
-          <a:p>
-            <a:pPr algn="ctr"/>
-          </a:p>
-        </p:txBody>
-      </p:sp>
-      <p:sp>
-        <p:nvSpPr>
-          <p:cNvPr id="6" name="Rectangle 5"/>
-          <p:cNvSpPr/>
-          <p:nvPr/>
-        </p:nvSpPr>
-        <p:spPr>
-          <a:xfrm>
-            <a:off x="760000" y="1900000"/>
-            <a:ext cx="150000" cy="1600000"/>
-          </a:xfrm>
-          <a:prstGeom prst="rect">
-            <a:avLst/>
-          </a:prstGeom>
-          <a:solidFill>
-            <a:srgbClr val="F5670F"/>
-          </a:solidFill>
-          <a:ln>
-            <a:noFill/>
-          </a:ln>
-          <a:effectLst/>
-        </p:spPr>
-        <p:style>
-          <a:lnRef idx="1">
-            <a:schemeClr val="accent1"/>
-          </a:lnRef>
-          <a:fillRef idx="3">
-            <a:schemeClr val="accent1"/>
-          </a:fillRef>
-          <a:effectRef idx="2">
-            <a:schemeClr val="accent1"/>
-          </a:effectRef>
-          <a:fontRef idx="minor">
-            <a:schemeClr val="lt1"/>
-          </a:fontRef>
-        </p:style>
-        <p:txBody>
-          <a:bodyPr rtlCol="0" anchor="ctr"/>
-          <a:lstStyle/>
-          <a:p>
-            <a:pPr algn="ctr"/>
-          </a:p>
-        </p:txBody>
-      </p:sp>
-      <p:sp>
-        <p:nvSpPr>
-          <p:cNvPr id="7" name="TextBox 6"/>
+              <a:t>两江智造集团 · Python编程基础</a:t>
+            </a:r>
+          </a:p>
+        </p:txBody>
+      </p:sp>
+      <p:sp>
+        <p:nvSpPr>
+          <p:cNvPr id="9" name="TextBox 8"/>
           <p:cNvSpPr txBox="1"/>
           <p:nvPr/>
         </p:nvSpPr>
         <p:spPr>
           <a:xfrm>
-            <a:off x="1020000" y="2050000"/>
-            <a:ext cx="10500000" cy="1400000"/>
+            <a:off x="10600000" y="6540000"/>
+            <a:ext cx="1000000" cy="300000"/>
           </a:xfrm>
           <a:prstGeom prst="rect">
             <a:avLst/>
@@ -7429,12 +10538,12 @@
           <a:noFill/>
         </p:spPr>
         <p:txBody>
-          <a:bodyPr wrap="square" anchor="t">
+          <a:bodyPr wrap="square" anchor="ctr">
             <a:spAutoFit/>
           </a:bodyPr>
           <a:lstStyle/>
           <a:p>
-            <a:pPr algn="l">
+            <a:pPr algn="r">
               <a:lnSpc>
                 <a:spcPct val="110000"/>
               </a:lnSpc>
@@ -7443,93 +10552,13 @@
               </a:spcAft>
             </a:pPr>
             <a:r>
-              <a:rPr sz="1700" b="1">
-                <a:solidFill>
-                  <a:srgbClr val="010328"/>
+              <a:rPr sz="1000" b="0">
+                <a:solidFill>
+                  <a:srgbClr val="8A97B5"/>
                 </a:solidFill>
                 <a:latin typeface="微软雅黑"/>
               </a:rPr>
-              <a:t>主题: 构建基类+两子类继承体系——应用：见工单star</a:t>
-            </a:r>
-          </a:p>
-          <a:p>
-            <a:pPr algn="l">
-              <a:lnSpc>
-                <a:spcPct val="110000"/>
-              </a:lnSpc>
-              <a:spcAft>
-                <a:spcPts val="600"/>
-              </a:spcAft>
-            </a:pPr>
-            <a:r>
-              <a:rPr sz="1300" b="0">
-                <a:solidFill>
-                  <a:srgbClr val="44546A"/>
-                </a:solidFill>
-                <a:latin typeface="微软雅黑"/>
-              </a:rPr>
-              <a:t>预习快问: 子类如何调用父类__init__？多态怎么理解？</a:t>
-            </a:r>
-          </a:p>
-        </p:txBody>
-      </p:sp>
-      <p:sp>
-        <p:nvSpPr>
-          <p:cNvPr id="8" name="TextBox 7"/>
-          <p:cNvSpPr txBox="1"/>
-          <p:nvPr/>
-        </p:nvSpPr>
-        <p:spPr>
-          <a:xfrm>
-            <a:off x="760000" y="3900000"/>
-            <a:ext cx="10900000" cy="900000"/>
-          </a:xfrm>
-          <a:prstGeom prst="rect">
-            <a:avLst/>
-          </a:prstGeom>
-          <a:noFill/>
-        </p:spPr>
-        <p:txBody>
-          <a:bodyPr wrap="square" anchor="t">
-            <a:spAutoFit/>
-          </a:bodyPr>
-          <a:lstStyle/>
-          <a:p>
-            <a:pPr algn="l">
-              <a:lnSpc>
-                <a:spcPct val="110000"/>
-              </a:lnSpc>
-              <a:spcAft>
-                <a:spcPts val="600"/>
-              </a:spcAft>
-            </a:pPr>
-            <a:r>
-              <a:rPr sz="1400" b="1">
-                <a:solidFill>
-                  <a:srgbClr val="0545E8"/>
-                </a:solidFill>
-                <a:latin typeface="微软雅黑"/>
-              </a:rPr>
-              <a:t>课前完成：导学单 + 预习自测 + starter环境自检</a:t>
-            </a:r>
-          </a:p>
-          <a:p>
-            <a:pPr algn="l">
-              <a:lnSpc>
-                <a:spcPct val="110000"/>
-              </a:lnSpc>
-              <a:spcAft>
-                <a:spcPts val="600"/>
-              </a:spcAft>
-            </a:pPr>
-            <a:r>
-              <a:rPr sz="1250" b="0">
-                <a:solidFill>
-                  <a:srgbClr val="44546A"/>
-                </a:solidFill>
-                <a:latin typeface="微软雅黑"/>
-              </a:rPr>
-              <a:t>带着问题来上课——Predict先于Run</a:t>
+              <a:t>10 / 13</a:t>
             </a:r>
           </a:p>
         </p:txBody>
@@ -7554,14 +10583,102 @@
       <p:grpSpPr/>
       <p:sp>
         <p:nvSpPr>
-          <p:cNvPr id="2" name="TextBox 1"/>
+          <p:cNvPr id="2" name="Rectangle 1"/>
+          <p:cNvSpPr/>
+          <p:nvPr/>
+        </p:nvSpPr>
+        <p:spPr>
+          <a:xfrm>
+            <a:off x="0" y="0"/>
+            <a:ext cx="12192000" cy="1150000"/>
+          </a:xfrm>
+          <a:prstGeom prst="rect">
+            <a:avLst/>
+          </a:prstGeom>
+          <a:solidFill>
+            <a:srgbClr val="010328"/>
+          </a:solidFill>
+          <a:ln>
+            <a:noFill/>
+          </a:ln>
+          <a:effectLst/>
+        </p:spPr>
+        <p:style>
+          <a:lnRef idx="1">
+            <a:schemeClr val="accent1"/>
+          </a:lnRef>
+          <a:fillRef idx="3">
+            <a:schemeClr val="accent1"/>
+          </a:fillRef>
+          <a:effectRef idx="2">
+            <a:schemeClr val="accent1"/>
+          </a:effectRef>
+          <a:fontRef idx="minor">
+            <a:schemeClr val="lt1"/>
+          </a:fontRef>
+        </p:style>
+        <p:txBody>
+          <a:bodyPr rtlCol="0" anchor="ctr"/>
+          <a:lstStyle/>
+          <a:p>
+            <a:pPr algn="ctr"/>
+          </a:p>
+        </p:txBody>
+      </p:sp>
+      <p:sp>
+        <p:nvSpPr>
+          <p:cNvPr id="3" name="Rectangle 2"/>
+          <p:cNvSpPr/>
+          <p:nvPr/>
+        </p:nvSpPr>
+        <p:spPr>
+          <a:xfrm>
+            <a:off x="0" y="1150000"/>
+            <a:ext cx="2600000" cy="70000"/>
+          </a:xfrm>
+          <a:prstGeom prst="rect">
+            <a:avLst/>
+          </a:prstGeom>
+          <a:solidFill>
+            <a:srgbClr val="F5670F"/>
+          </a:solidFill>
+          <a:ln>
+            <a:noFill/>
+          </a:ln>
+          <a:effectLst/>
+        </p:spPr>
+        <p:style>
+          <a:lnRef idx="1">
+            <a:schemeClr val="accent1"/>
+          </a:lnRef>
+          <a:fillRef idx="3">
+            <a:schemeClr val="accent1"/>
+          </a:fillRef>
+          <a:effectRef idx="2">
+            <a:schemeClr val="accent1"/>
+          </a:effectRef>
+          <a:fontRef idx="minor">
+            <a:schemeClr val="lt1"/>
+          </a:fontRef>
+        </p:style>
+        <p:txBody>
+          <a:bodyPr rtlCol="0" anchor="ctr"/>
+          <a:lstStyle/>
+          <a:p>
+            <a:pPr algn="ctr"/>
+          </a:p>
+        </p:txBody>
+      </p:sp>
+      <p:sp>
+        <p:nvSpPr>
+          <p:cNvPr id="4" name="TextBox 3"/>
           <p:cNvSpPr txBox="1"/>
           <p:nvPr/>
         </p:nvSpPr>
         <p:spPr>
           <a:xfrm>
-            <a:off x="548640" y="320040"/>
-            <a:ext cx="11094720" cy="914400"/>
+            <a:off x="700000" y="300000"/>
+            <a:ext cx="10792000" cy="700000"/>
           </a:xfrm>
           <a:prstGeom prst="rect">
             <a:avLst/>
@@ -7569,28 +10686,129 @@
           <a:noFill/>
         </p:spPr>
         <p:txBody>
-          <a:bodyPr wrap="none">
+          <a:bodyPr wrap="square" anchor="t">
             <a:spAutoFit/>
           </a:bodyPr>
           <a:lstStyle/>
           <a:p>
-            <a:r>
-              <a:rPr sz="3000" b="1"/>
-              <a:t>安全与合规警示（操作前必读）</a:t>
-            </a:r>
-          </a:p>
-        </p:txBody>
-      </p:sp>
-      <p:sp>
-        <p:nvSpPr>
-          <p:cNvPr id="3" name="TextBox 2"/>
+            <a:pPr algn="l">
+              <a:lnSpc>
+                <a:spcPct val="110000"/>
+              </a:lnSpc>
+              <a:spcAft>
+                <a:spcPts val="600"/>
+              </a:spcAft>
+            </a:pPr>
+            <a:r>
+              <a:rPr sz="2400" b="1">
+                <a:solidFill>
+                  <a:srgbClr val="FFFFFF"/>
+                </a:solidFill>
+                <a:latin typeface="微软雅黑"/>
+              </a:rPr>
+              <a:t>下次课预告（第5周）</a:t>
+            </a:r>
+          </a:p>
+        </p:txBody>
+      </p:sp>
+      <p:sp>
+        <p:nvSpPr>
+          <p:cNvPr id="5" name="Rectangle 4"/>
+          <p:cNvSpPr/>
+          <p:nvPr/>
+        </p:nvSpPr>
+        <p:spPr>
+          <a:xfrm>
+            <a:off x="760000" y="1900000"/>
+            <a:ext cx="10900000" cy="1600000"/>
+          </a:xfrm>
+          <a:prstGeom prst="rect">
+            <a:avLst/>
+          </a:prstGeom>
+          <a:solidFill>
+            <a:srgbClr val="F3F6FD"/>
+          </a:solidFill>
+          <a:ln>
+            <a:noFill/>
+          </a:ln>
+          <a:effectLst/>
+        </p:spPr>
+        <p:style>
+          <a:lnRef idx="1">
+            <a:schemeClr val="accent1"/>
+          </a:lnRef>
+          <a:fillRef idx="3">
+            <a:schemeClr val="accent1"/>
+          </a:fillRef>
+          <a:effectRef idx="2">
+            <a:schemeClr val="accent1"/>
+          </a:effectRef>
+          <a:fontRef idx="minor">
+            <a:schemeClr val="lt1"/>
+          </a:fontRef>
+        </p:style>
+        <p:txBody>
+          <a:bodyPr rtlCol="0" anchor="ctr"/>
+          <a:lstStyle/>
+          <a:p>
+            <a:pPr algn="ctr"/>
+          </a:p>
+        </p:txBody>
+      </p:sp>
+      <p:sp>
+        <p:nvSpPr>
+          <p:cNvPr id="6" name="Rectangle 5"/>
+          <p:cNvSpPr/>
+          <p:nvPr/>
+        </p:nvSpPr>
+        <p:spPr>
+          <a:xfrm>
+            <a:off x="760000" y="1900000"/>
+            <a:ext cx="150000" cy="1600000"/>
+          </a:xfrm>
+          <a:prstGeom prst="rect">
+            <a:avLst/>
+          </a:prstGeom>
+          <a:solidFill>
+            <a:srgbClr val="F5670F"/>
+          </a:solidFill>
+          <a:ln>
+            <a:noFill/>
+          </a:ln>
+          <a:effectLst/>
+        </p:spPr>
+        <p:style>
+          <a:lnRef idx="1">
+            <a:schemeClr val="accent1"/>
+          </a:lnRef>
+          <a:fillRef idx="3">
+            <a:schemeClr val="accent1"/>
+          </a:fillRef>
+          <a:effectRef idx="2">
+            <a:schemeClr val="accent1"/>
+          </a:effectRef>
+          <a:fontRef idx="minor">
+            <a:schemeClr val="lt1"/>
+          </a:fontRef>
+        </p:style>
+        <p:txBody>
+          <a:bodyPr rtlCol="0" anchor="ctr"/>
+          <a:lstStyle/>
+          <a:p>
+            <a:pPr algn="ctr"/>
+          </a:p>
+        </p:txBody>
+      </p:sp>
+      <p:sp>
+        <p:nvSpPr>
+          <p:cNvPr id="7" name="TextBox 6"/>
           <p:cNvSpPr txBox="1"/>
           <p:nvPr/>
         </p:nvSpPr>
         <p:spPr>
           <a:xfrm>
-            <a:off x="731520" y="1371600"/>
-            <a:ext cx="10728960" cy="4663440"/>
+            <a:off x="1020000" y="2050000"/>
+            <a:ext cx="10500000" cy="1400000"/>
           </a:xfrm>
           <a:prstGeom prst="rect">
             <a:avLst/>
@@ -7598,69 +10816,107 @@
           <a:noFill/>
         </p:spPr>
         <p:txBody>
-          <a:bodyPr wrap="square">
+          <a:bodyPr wrap="square" anchor="t">
             <a:spAutoFit/>
           </a:bodyPr>
           <a:lstStyle/>
           <a:p>
-            <a:pPr>
+            <a:pPr algn="l">
+              <a:lnSpc>
+                <a:spcPct val="110000"/>
+              </a:lnSpc>
               <a:spcAft>
-                <a:spcPts val="1000"/>
+                <a:spcPts val="600"/>
               </a:spcAft>
             </a:pPr>
             <a:r>
-              <a:rPr sz="1800"/>
-              <a:t>1. 上机前确认本工位电源开关与急停位置，确认设备处于安全状态。</a:t>
-            </a:r>
-          </a:p>
-          <a:p>
-            <a:pPr>
+              <a:rPr sz="1700" b="1">
+                <a:solidFill>
+                  <a:srgbClr val="010328"/>
+                </a:solidFill>
+                <a:latin typeface="微软雅黑"/>
+              </a:rPr>
+              <a:t>主题: 构建基类+两子类继承体系——应用：见工单star</a:t>
+            </a:r>
+          </a:p>
+          <a:p>
+            <a:pPr algn="l">
+              <a:lnSpc>
+                <a:spcPct val="110000"/>
+              </a:lnSpc>
               <a:spcAft>
-                <a:spcPts val="1000"/>
+                <a:spcPts val="600"/>
               </a:spcAft>
             </a:pPr>
             <a:r>
-              <a:rPr sz="1800"/>
-              <a:t>2. 涉及接线的操作一律先断电、后验电、再作业，禁止带电插拔。</a:t>
-            </a:r>
-          </a:p>
-          <a:p>
-            <a:pPr>
+              <a:rPr sz="1300" b="0">
+                <a:solidFill>
+                  <a:srgbClr val="44546A"/>
+                </a:solidFill>
+                <a:latin typeface="微软雅黑"/>
+              </a:rPr>
+              <a:t>预习快问: 子类如何调用父类__init__？多态怎么理解？</a:t>
+            </a:r>
+          </a:p>
+        </p:txBody>
+      </p:sp>
+      <p:sp>
+        <p:nvSpPr>
+          <p:cNvPr id="8" name="TextBox 7"/>
+          <p:cNvSpPr txBox="1"/>
+          <p:nvPr/>
+        </p:nvSpPr>
+        <p:spPr>
+          <a:xfrm>
+            <a:off x="760000" y="3900000"/>
+            <a:ext cx="10900000" cy="900000"/>
+          </a:xfrm>
+          <a:prstGeom prst="rect">
+            <a:avLst/>
+          </a:prstGeom>
+          <a:noFill/>
+        </p:spPr>
+        <p:txBody>
+          <a:bodyPr wrap="square" anchor="t">
+            <a:spAutoFit/>
+          </a:bodyPr>
+          <a:lstStyle/>
+          <a:p>
+            <a:pPr algn="l">
+              <a:lnSpc>
+                <a:spcPct val="110000"/>
+              </a:lnSpc>
               <a:spcAft>
-                <a:spcPts val="1000"/>
+                <a:spcPts val="600"/>
               </a:spcAft>
             </a:pPr>
             <a:r>
-              <a:rPr sz="1800"/>
-              <a:t>3. 身体任何部位不进入设备运动/散热区域，长发束起，不佩戴悬垂饰物。</a:t>
-            </a:r>
-          </a:p>
-          <a:p>
-            <a:pPr>
+              <a:rPr sz="1400" b="1">
+                <a:solidFill>
+                  <a:srgbClr val="0545E8"/>
+                </a:solidFill>
+                <a:latin typeface="微软雅黑"/>
+              </a:rPr>
+              <a:t>课前完成：导学单 + 预习自测 + starter环境自检</a:t>
+            </a:r>
+          </a:p>
+          <a:p>
+            <a:pPr algn="l">
+              <a:lnSpc>
+                <a:spcPct val="110000"/>
+              </a:lnSpc>
               <a:spcAft>
-                <a:spcPts val="1000"/>
+                <a:spcPts val="600"/>
               </a:spcAft>
             </a:pPr>
             <a:r>
-              <a:rPr sz="1800"/>
-              <a:t>4. 调试程序前先静态检查、再低速小样本试运行，确认无异常后放大规模。</a:t>
-            </a:r>
-          </a:p>
-          <a:p>
-            <a:pPr>
-              <a:spcAft>
-                <a:spcPts val="1000"/>
-              </a:spcAft>
-            </a:pPr>
-            <a:r>
-              <a:rPr sz="1800"/>
-              <a:t>5. 任何不确定或异常情况，立即停止操作并报告指导教师，不擅自处置。</a:t>
-            </a:r>
-          </a:p>
-          <a:p>
-            <a:r>
-              <a:rPr sz="1400" b="1"/>
-              <a:t>以上任一条违反，本次任务按课程标准「安全规范一票否决」条款记 0 分并中止实训。</a:t>
+              <a:rPr sz="1250" b="0">
+                <a:solidFill>
+                  <a:srgbClr val="44546A"/>
+                </a:solidFill>
+                <a:latin typeface="微软雅黑"/>
+              </a:rPr>
+              <a:t>带着问题来上课——Predict先于Run</a:t>
             </a:r>
           </a:p>
         </p:txBody>

--- a/V2授课PPT/W04-第8次课-给设备装上行为.pptx
+++ b/V2授课PPT/W04-第8次课-给设备装上行为.pptx
@@ -12,6 +12,8 @@
     <p:sldId id="370" r:id="rId18"/>
     <p:sldId id="371" r:id="rId19"/>
     <p:sldId id="372" r:id="rId20"/>
+    <p:sldId id="373" r:id="rId21"/>
+    <p:sldId id="374" r:id="rId22"/>
     <p:sldId id="319" r:id="rId71"/>
     <p:sldId id="338" r:id="rId90"/>
     <p:sldId id="365" r:id="rId117"/>
@@ -4327,14 +4329,102 @@
       <p:grpSpPr/>
       <p:sp>
         <p:nvSpPr>
-          <p:cNvPr id="2" name="TextBox 1"/>
+          <p:cNvPr id="2" name="Rectangle 1"/>
+          <p:cNvSpPr/>
+          <p:nvPr/>
+        </p:nvSpPr>
+        <p:spPr>
+          <a:xfrm>
+            <a:off x="0" y="0"/>
+            <a:ext cx="12192000" cy="1150000"/>
+          </a:xfrm>
+          <a:prstGeom prst="rect">
+            <a:avLst/>
+          </a:prstGeom>
+          <a:solidFill>
+            <a:srgbClr val="010328"/>
+          </a:solidFill>
+          <a:ln>
+            <a:noFill/>
+          </a:ln>
+          <a:effectLst/>
+        </p:spPr>
+        <p:style>
+          <a:lnRef idx="1">
+            <a:schemeClr val="accent1"/>
+          </a:lnRef>
+          <a:fillRef idx="3">
+            <a:schemeClr val="accent1"/>
+          </a:fillRef>
+          <a:effectRef idx="2">
+            <a:schemeClr val="accent1"/>
+          </a:effectRef>
+          <a:fontRef idx="minor">
+            <a:schemeClr val="lt1"/>
+          </a:fontRef>
+        </p:style>
+        <p:txBody>
+          <a:bodyPr rtlCol="0" anchor="ctr"/>
+          <a:lstStyle/>
+          <a:p>
+            <a:pPr algn="ctr"/>
+          </a:p>
+        </p:txBody>
+      </p:sp>
+      <p:sp>
+        <p:nvSpPr>
+          <p:cNvPr id="3" name="Rectangle 2"/>
+          <p:cNvSpPr/>
+          <p:nvPr/>
+        </p:nvSpPr>
+        <p:spPr>
+          <a:xfrm>
+            <a:off x="0" y="1150000"/>
+            <a:ext cx="2600000" cy="70000"/>
+          </a:xfrm>
+          <a:prstGeom prst="rect">
+            <a:avLst/>
+          </a:prstGeom>
+          <a:solidFill>
+            <a:srgbClr val="F5670F"/>
+          </a:solidFill>
+          <a:ln>
+            <a:noFill/>
+          </a:ln>
+          <a:effectLst/>
+        </p:spPr>
+        <p:style>
+          <a:lnRef idx="1">
+            <a:schemeClr val="accent1"/>
+          </a:lnRef>
+          <a:fillRef idx="3">
+            <a:schemeClr val="accent1"/>
+          </a:fillRef>
+          <a:effectRef idx="2">
+            <a:schemeClr val="accent1"/>
+          </a:effectRef>
+          <a:fontRef idx="minor">
+            <a:schemeClr val="lt1"/>
+          </a:fontRef>
+        </p:style>
+        <p:txBody>
+          <a:bodyPr rtlCol="0" anchor="ctr"/>
+          <a:lstStyle/>
+          <a:p>
+            <a:pPr algn="ctr"/>
+          </a:p>
+        </p:txBody>
+      </p:sp>
+      <p:sp>
+        <p:nvSpPr>
+          <p:cNvPr id="4" name="TextBox 3"/>
           <p:cNvSpPr txBox="1"/>
           <p:nvPr/>
         </p:nvSpPr>
         <p:spPr>
           <a:xfrm>
-            <a:off x="548640" y="320040"/>
-            <a:ext cx="11094720" cy="914400"/>
+            <a:off x="700000" y="300000"/>
+            <a:ext cx="10792000" cy="700000"/>
           </a:xfrm>
           <a:prstGeom prst="rect">
             <a:avLst/>
@@ -4342,28 +4432,85 @@
           <a:noFill/>
         </p:spPr>
         <p:txBody>
-          <a:bodyPr wrap="none">
+          <a:bodyPr wrap="square" anchor="t">
             <a:spAutoFit/>
           </a:bodyPr>
           <a:lstStyle/>
           <a:p>
-            <a:r>
-              <a:rPr sz="3000" b="1"/>
-              <a:t>本讲与岗位任务单的衔接</a:t>
-            </a:r>
-          </a:p>
-        </p:txBody>
-      </p:sp>
-      <p:sp>
-        <p:nvSpPr>
-          <p:cNvPr id="3" name="TextBox 2"/>
+            <a:pPr algn="l">
+              <a:lnSpc>
+                <a:spcPct val="110000"/>
+              </a:lnSpc>
+              <a:spcAft>
+                <a:spcPts val="600"/>
+              </a:spcAft>
+            </a:pPr>
+            <a:r>
+              <a:rPr sz="2400" b="1">
+                <a:solidFill>
+                  <a:srgbClr val="FFFFFF"/>
+                </a:solidFill>
+                <a:latin typeface="微软雅黑"/>
+              </a:rPr>
+              <a:t>实施任务：工单0.3《工业设备类设计》</a:t>
+            </a:r>
+          </a:p>
+        </p:txBody>
+      </p:sp>
+      <p:sp>
+        <p:nvSpPr>
+          <p:cNvPr id="5" name="Rectangle 4"/>
+          <p:cNvSpPr/>
+          <p:nvPr/>
+        </p:nvSpPr>
+        <p:spPr>
+          <a:xfrm>
+            <a:off x="800000" y="1950000"/>
+            <a:ext cx="6300000" cy="3900000"/>
+          </a:xfrm>
+          <a:prstGeom prst="rect">
+            <a:avLst/>
+          </a:prstGeom>
+          <a:solidFill>
+            <a:srgbClr val="F3F6FD"/>
+          </a:solidFill>
+          <a:ln>
+            <a:noFill/>
+          </a:ln>
+          <a:effectLst/>
+        </p:spPr>
+        <p:style>
+          <a:lnRef idx="1">
+            <a:schemeClr val="accent1"/>
+          </a:lnRef>
+          <a:fillRef idx="3">
+            <a:schemeClr val="accent1"/>
+          </a:fillRef>
+          <a:effectRef idx="2">
+            <a:schemeClr val="accent1"/>
+          </a:effectRef>
+          <a:fontRef idx="minor">
+            <a:schemeClr val="lt1"/>
+          </a:fontRef>
+        </p:style>
+        <p:txBody>
+          <a:bodyPr rtlCol="0" anchor="ctr"/>
+          <a:lstStyle/>
+          <a:p>
+            <a:pPr algn="ctr"/>
+          </a:p>
+        </p:txBody>
+      </p:sp>
+      <p:sp>
+        <p:nvSpPr>
+          <p:cNvPr id="6" name="TextBox 5"/>
           <p:cNvSpPr txBox="1"/>
           <p:nvPr/>
         </p:nvSpPr>
         <p:spPr>
           <a:xfrm>
-            <a:off x="731520" y="1371600"/>
-            <a:ext cx="10728960" cy="4663440"/>
+            <a:off x="1000000" y="2100000"/>
+            <a:ext cx="5900000" cy="3600000"/>
           </a:xfrm>
           <a:prstGeom prst="rect">
             <a:avLst/>
@@ -4371,52 +4518,426 @@
           <a:noFill/>
         </p:spPr>
         <p:txBody>
-          <a:bodyPr wrap="square">
+          <a:bodyPr wrap="square" anchor="t">
             <a:spAutoFit/>
           </a:bodyPr>
           <a:lstStyle/>
           <a:p>
-            <a:pPr>
+            <a:pPr algn="l">
+              <a:lnSpc>
+                <a:spcPct val="130000"/>
+              </a:lnSpc>
               <a:spcAft>
-                <a:spcPts val="1000"/>
+                <a:spcPts val="600"/>
               </a:spcAft>
             </a:pPr>
             <a:r>
-              <a:rPr sz="1800"/>
-              <a:t>本讲在工作过程系统化课程中承担的任务环节：任务实施</a:t>
-            </a:r>
-          </a:p>
-          <a:p>
-            <a:pPr>
+              <a:rPr sz="1500" b="1">
+                <a:solidFill>
+                  <a:srgbClr val="0545E8"/>
+                </a:solidFill>
+                <a:latin typeface="微软雅黑"/>
+              </a:rPr>
+              <a:t>实施步骤</a:t>
+            </a:r>
+          </a:p>
+          <a:p>
+            <a:pPr algn="l">
+              <a:lnSpc>
+                <a:spcPct val="130000"/>
+              </a:lnSpc>
               <a:spcAft>
-                <a:spcPts val="1000"/>
+                <a:spcPts val="600"/>
               </a:spcAft>
             </a:pPr>
             <a:r>
-              <a:rPr sz="1800"/>
-              <a:t>考核对齐：过程性成绩取自本讲工单第六节各模块得分合计（满分 100）。</a:t>
-            </a:r>
-          </a:p>
-          <a:p>
-            <a:pPr>
+              <a:rPr sz="1400" b="0">
+                <a:solidFill>
+                  <a:srgbClr val="010328"/>
+                </a:solidFill>
+                <a:latin typeface="微软雅黑"/>
+              </a:rPr>
+              <a:t>1. 方法含状态校验(重复启动提示)</a:t>
+            </a:r>
+          </a:p>
+          <a:p>
+            <a:pPr algn="l">
+              <a:lnSpc>
+                <a:spcPct val="130000"/>
+              </a:lnSpc>
               <a:spcAft>
-                <a:spcPts val="1000"/>
+                <a:spcPts val="600"/>
               </a:spcAft>
             </a:pPr>
             <a:r>
-              <a:rPr sz="1800"/>
-              <a:t>达标线：综合成绩≥60 分，且无安全红线一票否决记录</a:t>
-            </a:r>
-          </a:p>
-          <a:p>
-            <a:pPr>
+              <a:rPr sz="1400" b="0">
+                <a:solidFill>
+                  <a:srgbClr val="010328"/>
+                </a:solidFill>
+                <a:latin typeface="微软雅黑"/>
+              </a:rPr>
+              <a:t>2. print(对象)输出可读信息(__str__)</a:t>
+            </a:r>
+          </a:p>
+          <a:p>
+            <a:pPr algn="l">
+              <a:lnSpc>
+                <a:spcPct val="130000"/>
+              </a:lnSpc>
               <a:spcAft>
-                <a:spcPts val="1000"/>
+                <a:spcPts val="600"/>
               </a:spcAft>
             </a:pPr>
             <a:r>
-              <a:rPr sz="1800"/>
-              <a:t>无效工单判定：未打安全勾、无本人签字、无三方联签。</a:t>
+              <a:rPr sz="1400" b="0">
+                <a:solidFill>
+                  <a:srgbClr val="010328"/>
+                </a:solidFill>
+                <a:latin typeface="微软雅黑"/>
+              </a:rPr>
+              <a:t>3. 对象内存图手绘(id观察)</a:t>
+            </a:r>
+          </a:p>
+        </p:txBody>
+      </p:sp>
+      <p:sp>
+        <p:nvSpPr>
+          <p:cNvPr id="7" name="Rectangle 6"/>
+          <p:cNvSpPr/>
+          <p:nvPr/>
+        </p:nvSpPr>
+        <p:spPr>
+          <a:xfrm>
+            <a:off x="7400000" y="1950000"/>
+            <a:ext cx="4000000" cy="1850000"/>
+          </a:xfrm>
+          <a:prstGeom prst="rect">
+            <a:avLst/>
+          </a:prstGeom>
+          <a:solidFill>
+            <a:srgbClr val="E8F1E8"/>
+          </a:solidFill>
+          <a:ln>
+            <a:solidFill>
+              <a:srgbClr val="0475B6"/>
+            </a:solidFill>
+          </a:ln>
+          <a:effectLst/>
+        </p:spPr>
+        <p:style>
+          <a:lnRef idx="1">
+            <a:schemeClr val="accent1"/>
+          </a:lnRef>
+          <a:fillRef idx="3">
+            <a:schemeClr val="accent1"/>
+          </a:fillRef>
+          <a:effectRef idx="2">
+            <a:schemeClr val="accent1"/>
+          </a:effectRef>
+          <a:fontRef idx="minor">
+            <a:schemeClr val="lt1"/>
+          </a:fontRef>
+        </p:style>
+        <p:txBody>
+          <a:bodyPr rtlCol="0" anchor="ctr"/>
+          <a:lstStyle/>
+          <a:p>
+            <a:pPr algn="ctr"/>
+          </a:p>
+        </p:txBody>
+      </p:sp>
+      <p:sp>
+        <p:nvSpPr>
+          <p:cNvPr id="8" name="TextBox 7"/>
+          <p:cNvSpPr txBox="1"/>
+          <p:nvPr/>
+        </p:nvSpPr>
+        <p:spPr>
+          <a:xfrm>
+            <a:off x="7550000" y="2080000"/>
+            <a:ext cx="3750000" cy="1650000"/>
+          </a:xfrm>
+          <a:prstGeom prst="rect">
+            <a:avLst/>
+          </a:prstGeom>
+          <a:noFill/>
+        </p:spPr>
+        <p:txBody>
+          <a:bodyPr wrap="square" anchor="t">
+            <a:spAutoFit/>
+          </a:bodyPr>
+          <a:lstStyle/>
+          <a:p>
+            <a:pPr algn="l">
+              <a:lnSpc>
+                <a:spcPct val="110000"/>
+              </a:lnSpc>
+              <a:spcAft>
+                <a:spcPts val="600"/>
+              </a:spcAft>
+            </a:pPr>
+            <a:r>
+              <a:rPr sz="1400" b="1">
+                <a:solidFill>
+                  <a:srgbClr val="0475B6"/>
+                </a:solidFill>
+                <a:latin typeface="微软雅黑"/>
+              </a:rPr>
+              <a:t>及格标准（D）</a:t>
+            </a:r>
+          </a:p>
+          <a:p>
+            <a:pPr algn="l">
+              <a:lnSpc>
+                <a:spcPct val="110000"/>
+              </a:lnSpc>
+              <a:spcAft>
+                <a:spcPts val="600"/>
+              </a:spcAft>
+            </a:pPr>
+            <a:r>
+              <a:rPr sz="1300" b="0">
+                <a:solidFill>
+                  <a:srgbClr val="010328"/>
+                </a:solidFill>
+                <a:latin typeface="微软雅黑"/>
+              </a:rPr>
+              <a:t>1类+2属性+2方法+2实例</a:t>
+            </a:r>
+          </a:p>
+        </p:txBody>
+      </p:sp>
+      <p:sp>
+        <p:nvSpPr>
+          <p:cNvPr id="9" name="Rectangle 8"/>
+          <p:cNvSpPr/>
+          <p:nvPr/>
+        </p:nvSpPr>
+        <p:spPr>
+          <a:xfrm>
+            <a:off x="7400000" y="3950000"/>
+            <a:ext cx="4000000" cy="1850000"/>
+          </a:xfrm>
+          <a:prstGeom prst="rect">
+            <a:avLst/>
+          </a:prstGeom>
+          <a:solidFill>
+            <a:srgbClr val="FDF0E6"/>
+          </a:solidFill>
+          <a:ln>
+            <a:solidFill>
+              <a:srgbClr val="F5670F"/>
+            </a:solidFill>
+          </a:ln>
+          <a:effectLst/>
+        </p:spPr>
+        <p:style>
+          <a:lnRef idx="1">
+            <a:schemeClr val="accent1"/>
+          </a:lnRef>
+          <a:fillRef idx="3">
+            <a:schemeClr val="accent1"/>
+          </a:fillRef>
+          <a:effectRef idx="2">
+            <a:schemeClr val="accent1"/>
+          </a:effectRef>
+          <a:fontRef idx="minor">
+            <a:schemeClr val="lt1"/>
+          </a:fontRef>
+        </p:style>
+        <p:txBody>
+          <a:bodyPr rtlCol="0" anchor="ctr"/>
+          <a:lstStyle/>
+          <a:p>
+            <a:pPr algn="ctr"/>
+          </a:p>
+        </p:txBody>
+      </p:sp>
+      <p:sp>
+        <p:nvSpPr>
+          <p:cNvPr id="10" name="TextBox 9"/>
+          <p:cNvSpPr txBox="1"/>
+          <p:nvPr/>
+        </p:nvSpPr>
+        <p:spPr>
+          <a:xfrm>
+            <a:off x="7550000" y="4080000"/>
+            <a:ext cx="3750000" cy="1650000"/>
+          </a:xfrm>
+          <a:prstGeom prst="rect">
+            <a:avLst/>
+          </a:prstGeom>
+          <a:noFill/>
+        </p:spPr>
+        <p:txBody>
+          <a:bodyPr wrap="square" anchor="t">
+            <a:spAutoFit/>
+          </a:bodyPr>
+          <a:lstStyle/>
+          <a:p>
+            <a:pPr algn="l">
+              <a:lnSpc>
+                <a:spcPct val="110000"/>
+              </a:lnSpc>
+              <a:spcAft>
+                <a:spcPts val="600"/>
+              </a:spcAft>
+            </a:pPr>
+            <a:r>
+              <a:rPr sz="1400" b="1">
+                <a:solidFill>
+                  <a:srgbClr val="F5670F"/>
+                </a:solidFill>
+                <a:latin typeface="微软雅黑"/>
+              </a:rPr>
+              <a:t>优秀标准（B+）</a:t>
+            </a:r>
+          </a:p>
+          <a:p>
+            <a:pPr algn="l">
+              <a:lnSpc>
+                <a:spcPct val="110000"/>
+              </a:lnSpc>
+              <a:spcAft>
+                <a:spcPts val="600"/>
+              </a:spcAft>
+            </a:pPr>
+            <a:r>
+              <a:rPr sz="1300" b="0">
+                <a:solidFill>
+                  <a:srgbClr val="010328"/>
+                </a:solidFill>
+                <a:latin typeface="微软雅黑"/>
+              </a:rPr>
+              <a:t>状态校验完善；内存图正确</a:t>
+            </a:r>
+          </a:p>
+        </p:txBody>
+      </p:sp>
+      <p:sp>
+        <p:nvSpPr>
+          <p:cNvPr id="11" name="Rectangle 10"/>
+          <p:cNvSpPr/>
+          <p:nvPr/>
+        </p:nvSpPr>
+        <p:spPr>
+          <a:xfrm>
+            <a:off x="500000" y="6500000"/>
+            <a:ext cx="11100000" cy="20000"/>
+          </a:xfrm>
+          <a:prstGeom prst="rect">
+            <a:avLst/>
+          </a:prstGeom>
+          <a:solidFill>
+            <a:srgbClr val="C9D4EE"/>
+          </a:solidFill>
+          <a:ln>
+            <a:noFill/>
+          </a:ln>
+          <a:effectLst/>
+        </p:spPr>
+        <p:style>
+          <a:lnRef idx="1">
+            <a:schemeClr val="accent1"/>
+          </a:lnRef>
+          <a:fillRef idx="3">
+            <a:schemeClr val="accent1"/>
+          </a:fillRef>
+          <a:effectRef idx="2">
+            <a:schemeClr val="accent1"/>
+          </a:effectRef>
+          <a:fontRef idx="minor">
+            <a:schemeClr val="lt1"/>
+          </a:fontRef>
+        </p:style>
+        <p:txBody>
+          <a:bodyPr rtlCol="0" anchor="ctr"/>
+          <a:lstStyle/>
+          <a:p>
+            <a:pPr algn="ctr"/>
+          </a:p>
+        </p:txBody>
+      </p:sp>
+      <p:sp>
+        <p:nvSpPr>
+          <p:cNvPr id="12" name="TextBox 11"/>
+          <p:cNvSpPr txBox="1"/>
+          <p:nvPr/>
+        </p:nvSpPr>
+        <p:spPr>
+          <a:xfrm>
+            <a:off x="500000" y="6540000"/>
+            <a:ext cx="7000000" cy="300000"/>
+          </a:xfrm>
+          <a:prstGeom prst="rect">
+            <a:avLst/>
+          </a:prstGeom>
+          <a:noFill/>
+        </p:spPr>
+        <p:txBody>
+          <a:bodyPr wrap="square" anchor="t">
+            <a:spAutoFit/>
+          </a:bodyPr>
+          <a:lstStyle/>
+          <a:p>
+            <a:pPr algn="l">
+              <a:lnSpc>
+                <a:spcPct val="110000"/>
+              </a:lnSpc>
+              <a:spcAft>
+                <a:spcPts val="600"/>
+              </a:spcAft>
+            </a:pPr>
+            <a:r>
+              <a:rPr sz="1000" b="0">
+                <a:solidFill>
+                  <a:srgbClr val="8A97B5"/>
+                </a:solidFill>
+                <a:latin typeface="微软雅黑"/>
+              </a:rPr>
+              <a:t>两江智造集团 · Python编程基础</a:t>
+            </a:r>
+          </a:p>
+        </p:txBody>
+      </p:sp>
+      <p:sp>
+        <p:nvSpPr>
+          <p:cNvPr id="13" name="TextBox 12"/>
+          <p:cNvSpPr txBox="1"/>
+          <p:nvPr/>
+        </p:nvSpPr>
+        <p:spPr>
+          <a:xfrm>
+            <a:off x="10600000" y="6540000"/>
+            <a:ext cx="1000000" cy="300000"/>
+          </a:xfrm>
+          <a:prstGeom prst="rect">
+            <a:avLst/>
+          </a:prstGeom>
+          <a:noFill/>
+        </p:spPr>
+        <p:txBody>
+          <a:bodyPr wrap="square" anchor="t">
+            <a:spAutoFit/>
+          </a:bodyPr>
+          <a:lstStyle/>
+          <a:p>
+            <a:pPr algn="r">
+              <a:lnSpc>
+                <a:spcPct val="110000"/>
+              </a:lnSpc>
+              <a:spcAft>
+                <a:spcPts val="600"/>
+              </a:spcAft>
+            </a:pPr>
+            <a:r>
+              <a:rPr sz="1000" b="0">
+                <a:solidFill>
+                  <a:srgbClr val="8A97B5"/>
+                </a:solidFill>
+                <a:latin typeface="微软雅黑"/>
+              </a:rPr>
+              <a:t>10 / 15</a:t>
             </a:r>
           </a:p>
         </p:txBody>
@@ -4564,27 +5085,27 @@
                 </a:solidFill>
                 <a:latin typeface="微软雅黑"/>
               </a:rPr>
-              <a:t>本课重难点地图 · 老师划重点（动手前必看）</a:t>
-            </a:r>
-          </a:p>
-        </p:txBody>
-      </p:sp>
-      <p:sp>
-        <p:nvSpPr>
-          <p:cNvPr id="11" name="Rectangle 10"/>
+              <a:t>总结评价与课后任务</a:t>
+            </a:r>
+          </a:p>
+        </p:txBody>
+      </p:sp>
+      <p:sp>
+        <p:nvSpPr>
+          <p:cNvPr id="5" name="Rectangle 4"/>
           <p:cNvSpPr/>
           <p:nvPr/>
         </p:nvSpPr>
         <p:spPr>
           <a:xfrm>
-            <a:off x="500000" y="6500000"/>
-            <a:ext cx="11100000" cy="20000"/>
+            <a:off x="800000" y="1950000"/>
+            <a:ext cx="10600000" cy="1500000"/>
           </a:xfrm>
           <a:prstGeom prst="rect">
             <a:avLst/>
           </a:prstGeom>
           <a:solidFill>
-            <a:srgbClr val="C9D4EE"/>
+            <a:srgbClr val="F3F6FD"/>
           </a:solidFill>
           <a:ln>
             <a:noFill/>
@@ -4615,14 +5136,14 @@
       </p:sp>
       <p:sp>
         <p:nvSpPr>
-          <p:cNvPr id="12" name="TextBox 11"/>
+          <p:cNvPr id="6" name="TextBox 5"/>
           <p:cNvSpPr txBox="1"/>
           <p:nvPr/>
         </p:nvSpPr>
         <p:spPr>
           <a:xfrm>
-            <a:off x="500000" y="6540000"/>
-            <a:ext cx="7000000" cy="300000"/>
+            <a:off x="1000000" y="2050000"/>
+            <a:ext cx="10300000" cy="1400000"/>
           </a:xfrm>
           <a:prstGeom prst="rect">
             <a:avLst/>
@@ -4644,6 +5165,315 @@
               </a:spcAft>
             </a:pPr>
             <a:r>
+              <a:rPr sz="1500" b="1">
+                <a:solidFill>
+                  <a:srgbClr val="0545E8"/>
+                </a:solidFill>
+                <a:latin typeface="微软雅黑"/>
+              </a:rPr>
+              <a:t>评价（10分钟）：</a:t>
+            </a:r>
+          </a:p>
+          <a:p>
+            <a:pPr algn="l">
+              <a:lnSpc>
+                <a:spcPct val="110000"/>
+              </a:lnSpc>
+              <a:spcAft>
+                <a:spcPts val="600"/>
+              </a:spcAft>
+            </a:pPr>
+            <a:r>
+              <a:rPr sz="1400" b="0">
+                <a:solidFill>
+                  <a:srgbClr val="010328"/>
+                </a:solidFill>
+                <a:latin typeface="微软雅黑"/>
+              </a:rPr>
+              <a:t>按D/C/B/A量表当堂评分；工单24小时内反馈评语与改进建议。</a:t>
+            </a:r>
+          </a:p>
+        </p:txBody>
+      </p:sp>
+      <p:sp>
+        <p:nvSpPr>
+          <p:cNvPr id="7" name="TextBox 6"/>
+          <p:cNvSpPr txBox="1"/>
+          <p:nvPr/>
+        </p:nvSpPr>
+        <p:spPr>
+          <a:xfrm>
+            <a:off x="850000" y="3700000"/>
+            <a:ext cx="10600000" cy="700000"/>
+          </a:xfrm>
+          <a:prstGeom prst="rect">
+            <a:avLst/>
+          </a:prstGeom>
+          <a:noFill/>
+        </p:spPr>
+        <p:txBody>
+          <a:bodyPr wrap="square" anchor="t">
+            <a:spAutoFit/>
+          </a:bodyPr>
+          <a:lstStyle/>
+          <a:p>
+            <a:pPr algn="l">
+              <a:lnSpc>
+                <a:spcPct val="120000"/>
+              </a:lnSpc>
+              <a:spcAft>
+                <a:spcPts val="600"/>
+              </a:spcAft>
+            </a:pPr>
+            <a:r>
+              <a:rPr sz="1400" b="1">
+                <a:solidFill>
+                  <a:srgbClr val="F5670F"/>
+                </a:solidFill>
+                <a:latin typeface="微软雅黑"/>
+              </a:rPr>
+              <a:t>1. </a:t>
+            </a:r>
+            <a:r>
+              <a:rPr sz="1400" b="0">
+                <a:solidFill>
+                  <a:srgbClr val="010328"/>
+                </a:solidFill>
+                <a:latin typeface="微软雅黑"/>
+              </a:rPr>
+              <a:t>1. 完成工单项目0.3《工业设备类设计》：及格标准1类+2属性+2方法+2实例；优秀标准≥3属性、≥3方法、3实例并使用__init__；</a:t>
+            </a:r>
+          </a:p>
+        </p:txBody>
+      </p:sp>
+      <p:sp>
+        <p:nvSpPr>
+          <p:cNvPr id="8" name="TextBox 7"/>
+          <p:cNvSpPr txBox="1"/>
+          <p:nvPr/>
+        </p:nvSpPr>
+        <p:spPr>
+          <a:xfrm>
+            <a:off x="850000" y="4420000"/>
+            <a:ext cx="10600000" cy="700000"/>
+          </a:xfrm>
+          <a:prstGeom prst="rect">
+            <a:avLst/>
+          </a:prstGeom>
+          <a:noFill/>
+        </p:spPr>
+        <p:txBody>
+          <a:bodyPr wrap="square" anchor="t">
+            <a:spAutoFit/>
+          </a:bodyPr>
+          <a:lstStyle/>
+          <a:p>
+            <a:pPr algn="l">
+              <a:lnSpc>
+                <a:spcPct val="120000"/>
+              </a:lnSpc>
+              <a:spcAft>
+                <a:spcPts val="600"/>
+              </a:spcAft>
+            </a:pPr>
+            <a:r>
+              <a:rPr sz="1400" b="1">
+                <a:solidFill>
+                  <a:srgbClr val="F5670F"/>
+                </a:solidFill>
+                <a:latin typeface="微软雅黑"/>
+              </a:rPr>
+              <a:t>2. </a:t>
+            </a:r>
+            <a:r>
+              <a:rPr sz="1400" b="0">
+                <a:solidFill>
+                  <a:srgbClr val="010328"/>
+                </a:solidFill>
+                <a:latin typeface="微软雅黑"/>
+              </a:rPr>
+              <a:t>2. 用自己的话写一段“什么是对象”的理解笔记；</a:t>
+            </a:r>
+          </a:p>
+        </p:txBody>
+      </p:sp>
+      <p:sp>
+        <p:nvSpPr>
+          <p:cNvPr id="9" name="TextBox 8"/>
+          <p:cNvSpPr txBox="1"/>
+          <p:nvPr/>
+        </p:nvSpPr>
+        <p:spPr>
+          <a:xfrm>
+            <a:off x="850000" y="5140000"/>
+            <a:ext cx="10600000" cy="700000"/>
+          </a:xfrm>
+          <a:prstGeom prst="rect">
+            <a:avLst/>
+          </a:prstGeom>
+          <a:noFill/>
+        </p:spPr>
+        <p:txBody>
+          <a:bodyPr wrap="square" anchor="t">
+            <a:spAutoFit/>
+          </a:bodyPr>
+          <a:lstStyle/>
+          <a:p>
+            <a:pPr algn="l">
+              <a:lnSpc>
+                <a:spcPct val="120000"/>
+              </a:lnSpc>
+              <a:spcAft>
+                <a:spcPts val="600"/>
+              </a:spcAft>
+            </a:pPr>
+            <a:r>
+              <a:rPr sz="1400" b="1">
+                <a:solidFill>
+                  <a:srgbClr val="F5670F"/>
+                </a:solidFill>
+                <a:latin typeface="微软雅黑"/>
+              </a:rPr>
+              <a:t>3. </a:t>
+            </a:r>
+            <a:r>
+              <a:rPr sz="1400" b="0">
+                <a:solidFill>
+                  <a:srgbClr val="010328"/>
+                </a:solidFill>
+                <a:latin typeface="微软雅黑"/>
+              </a:rPr>
+              <a:t>3. 预习继承的概念。</a:t>
+            </a:r>
+          </a:p>
+        </p:txBody>
+      </p:sp>
+      <p:sp>
+        <p:nvSpPr>
+          <p:cNvPr id="10" name="TextBox 9"/>
+          <p:cNvSpPr txBox="1"/>
+          <p:nvPr/>
+        </p:nvSpPr>
+        <p:spPr>
+          <a:xfrm>
+            <a:off x="850000" y="5960000"/>
+            <a:ext cx="10600000" cy="500000"/>
+          </a:xfrm>
+          <a:prstGeom prst="rect">
+            <a:avLst/>
+          </a:prstGeom>
+          <a:noFill/>
+        </p:spPr>
+        <p:txBody>
+          <a:bodyPr wrap="square" anchor="t">
+            <a:spAutoFit/>
+          </a:bodyPr>
+          <a:lstStyle/>
+          <a:p>
+            <a:pPr algn="l">
+              <a:lnSpc>
+                <a:spcPct val="110000"/>
+              </a:lnSpc>
+              <a:spcAft>
+                <a:spcPts val="600"/>
+              </a:spcAft>
+            </a:pPr>
+            <a:r>
+              <a:rPr sz="1300" b="1">
+                <a:solidFill>
+                  <a:srgbClr val="0475B6"/>
+                </a:solidFill>
+                <a:latin typeface="微软雅黑"/>
+              </a:rPr>
+              <a:t>下次课预告：</a:t>
+            </a:r>
+            <a:r>
+              <a:rPr sz="1300" b="0">
+                <a:solidFill>
+                  <a:srgbClr val="44546A"/>
+                </a:solidFill>
+                <a:latin typeface="微软雅黑"/>
+              </a:rPr>
+              <a:t>见下次课工单任务书</a:t>
+            </a:r>
+          </a:p>
+        </p:txBody>
+      </p:sp>
+      <p:sp>
+        <p:nvSpPr>
+          <p:cNvPr id="11" name="Rectangle 10"/>
+          <p:cNvSpPr/>
+          <p:nvPr/>
+        </p:nvSpPr>
+        <p:spPr>
+          <a:xfrm>
+            <a:off x="500000" y="6500000"/>
+            <a:ext cx="11100000" cy="20000"/>
+          </a:xfrm>
+          <a:prstGeom prst="rect">
+            <a:avLst/>
+          </a:prstGeom>
+          <a:solidFill>
+            <a:srgbClr val="C9D4EE"/>
+          </a:solidFill>
+          <a:ln>
+            <a:noFill/>
+          </a:ln>
+          <a:effectLst/>
+        </p:spPr>
+        <p:style>
+          <a:lnRef idx="1">
+            <a:schemeClr val="accent1"/>
+          </a:lnRef>
+          <a:fillRef idx="3">
+            <a:schemeClr val="accent1"/>
+          </a:fillRef>
+          <a:effectRef idx="2">
+            <a:schemeClr val="accent1"/>
+          </a:effectRef>
+          <a:fontRef idx="minor">
+            <a:schemeClr val="lt1"/>
+          </a:fontRef>
+        </p:style>
+        <p:txBody>
+          <a:bodyPr rtlCol="0" anchor="ctr"/>
+          <a:lstStyle/>
+          <a:p>
+            <a:pPr algn="ctr"/>
+          </a:p>
+        </p:txBody>
+      </p:sp>
+      <p:sp>
+        <p:nvSpPr>
+          <p:cNvPr id="12" name="TextBox 11"/>
+          <p:cNvSpPr txBox="1"/>
+          <p:nvPr/>
+        </p:nvSpPr>
+        <p:spPr>
+          <a:xfrm>
+            <a:off x="500000" y="6540000"/>
+            <a:ext cx="7000000" cy="300000"/>
+          </a:xfrm>
+          <a:prstGeom prst="rect">
+            <a:avLst/>
+          </a:prstGeom>
+          <a:noFill/>
+        </p:spPr>
+        <p:txBody>
+          <a:bodyPr wrap="square" anchor="t">
+            <a:spAutoFit/>
+          </a:bodyPr>
+          <a:lstStyle/>
+          <a:p>
+            <a:pPr algn="l">
+              <a:lnSpc>
+                <a:spcPct val="110000"/>
+              </a:lnSpc>
+              <a:spcAft>
+                <a:spcPts val="600"/>
+              </a:spcAft>
+            </a:pPr>
+            <a:r>
               <a:rPr sz="1000" b="0">
                 <a:solidFill>
                   <a:srgbClr val="8A97B5"/>
@@ -4692,839 +5522,7 @@
                 </a:solidFill>
                 <a:latin typeface="微软雅黑"/>
               </a:rPr>
-              <a:t>5 / 13</a:t>
-            </a:r>
-          </a:p>
-        </p:txBody>
-      </p:sp>
-      <p:sp>
-        <p:nvSpPr>
-          <p:cNvPr id="14" name="TextBox 13"/>
-          <p:cNvSpPr txBox="1"/>
-          <p:nvPr/>
-        </p:nvSpPr>
-        <p:spPr>
-          <a:xfrm>
-            <a:off x="457200" y="1389888"/>
-            <a:ext cx="11274552" cy="274320"/>
-          </a:xfrm>
-          <a:prstGeom prst="rect">
-            <a:avLst/>
-          </a:prstGeom>
-          <a:noFill/>
-        </p:spPr>
-        <p:txBody>
-          <a:bodyPr wrap="square">
-            <a:spAutoFit/>
-          </a:bodyPr>
-          <a:lstStyle/>
-          <a:p>
-            <a:r>
-              <a:rPr sz="1050" b="0">
-                <a:solidFill>
-                  <a:srgbClr val="6B7280"/>
-                </a:solidFill>
-                <a:latin typeface="微软雅黑"/>
-              </a:rPr>
-              <a:t>动手前先看这页：重点要会什么、难点会卡在哪、哪里最容易错、学没学会怎么自测。</a:t>
-            </a:r>
-          </a:p>
-        </p:txBody>
-      </p:sp>
-      <p:sp>
-        <p:nvSpPr>
-          <p:cNvPr id="15" name="Rectangle 14"/>
-          <p:cNvSpPr/>
-          <p:nvPr/>
-        </p:nvSpPr>
-        <p:spPr>
-          <a:xfrm>
-            <a:off x="457200" y="1783080"/>
-            <a:ext cx="5532120" cy="3127248"/>
-          </a:xfrm>
-          <a:prstGeom prst="rect">
-            <a:avLst/>
-          </a:prstGeom>
-          <a:solidFill>
-            <a:srgbClr val="FFFFFF"/>
-          </a:solidFill>
-          <a:ln>
-            <a:solidFill>
-              <a:srgbClr val="D6DCE4"/>
-            </a:solidFill>
-          </a:ln>
-          <a:effectLst/>
-        </p:spPr>
-        <p:style>
-          <a:lnRef idx="1">
-            <a:schemeClr val="accent1"/>
-          </a:lnRef>
-          <a:fillRef idx="3">
-            <a:schemeClr val="accent1"/>
-          </a:fillRef>
-          <a:effectRef idx="2">
-            <a:schemeClr val="accent1"/>
-          </a:effectRef>
-          <a:fontRef idx="minor">
-            <a:schemeClr val="lt1"/>
-          </a:fontRef>
-        </p:style>
-        <p:txBody>
-          <a:bodyPr rtlCol="0" anchor="ctr" wrap="square"/>
-          <a:lstStyle/>
-          <a:p>
-            <a:pPr algn="ctr"/>
-          </a:p>
-        </p:txBody>
-      </p:sp>
-      <p:sp>
-        <p:nvSpPr>
-          <p:cNvPr id="16" name="Rectangle 15"/>
-          <p:cNvSpPr/>
-          <p:nvPr/>
-        </p:nvSpPr>
-        <p:spPr>
-          <a:xfrm>
-            <a:off x="457200" y="1783080"/>
-            <a:ext cx="5532120" cy="365760"/>
-          </a:xfrm>
-          <a:prstGeom prst="rect">
-            <a:avLst/>
-          </a:prstGeom>
-          <a:solidFill>
-            <a:srgbClr val="2F5D8C"/>
-          </a:solidFill>
-          <a:ln>
-            <a:noFill/>
-          </a:ln>
-          <a:effectLst/>
-        </p:spPr>
-        <p:style>
-          <a:lnRef idx="1">
-            <a:schemeClr val="accent1"/>
-          </a:lnRef>
-          <a:fillRef idx="3">
-            <a:schemeClr val="accent1"/>
-          </a:fillRef>
-          <a:effectRef idx="2">
-            <a:schemeClr val="accent1"/>
-          </a:effectRef>
-          <a:fontRef idx="minor">
-            <a:schemeClr val="lt1"/>
-          </a:fontRef>
-        </p:style>
-        <p:txBody>
-          <a:bodyPr rtlCol="0" anchor="ctr" wrap="square"/>
-          <a:lstStyle/>
-          <a:p>
-            <a:pPr algn="ctr"/>
-          </a:p>
-        </p:txBody>
-      </p:sp>
-      <p:sp>
-        <p:nvSpPr>
-          <p:cNvPr id="17" name="TextBox 16"/>
-          <p:cNvSpPr txBox="1"/>
-          <p:nvPr/>
-        </p:nvSpPr>
-        <p:spPr>
-          <a:xfrm>
-            <a:off x="566928" y="1819656"/>
-            <a:ext cx="5312664" cy="292608"/>
-          </a:xfrm>
-          <a:prstGeom prst="rect">
-            <a:avLst/>
-          </a:prstGeom>
-          <a:noFill/>
-        </p:spPr>
-        <p:txBody>
-          <a:bodyPr wrap="square">
-            <a:spAutoFit/>
-          </a:bodyPr>
-          <a:lstStyle/>
-          <a:p>
-            <a:r>
-              <a:rPr sz="1150" b="1">
-                <a:solidFill>
-                  <a:srgbClr val="FFFFFF"/>
-                </a:solidFill>
-                <a:latin typeface="微软雅黑"/>
-              </a:rPr>
-              <a:t>重点 · 必会必考（本课知识点全景）</a:t>
-            </a:r>
-          </a:p>
-        </p:txBody>
-      </p:sp>
-      <p:sp>
-        <p:nvSpPr>
-          <p:cNvPr id="18" name="TextBox 17"/>
-          <p:cNvSpPr txBox="1"/>
-          <p:nvPr/>
-        </p:nvSpPr>
-        <p:spPr>
-          <a:xfrm>
-            <a:off x="621792" y="2267712"/>
-            <a:ext cx="5257800" cy="2560320"/>
-          </a:xfrm>
-          <a:prstGeom prst="rect">
-            <a:avLst/>
-          </a:prstGeom>
-          <a:noFill/>
-        </p:spPr>
-        <p:txBody>
-          <a:bodyPr wrap="square">
-            <a:spAutoFit/>
-          </a:bodyPr>
-          <a:lstStyle/>
-          <a:p>
-            <a:r>
-              <a:rPr sz="950" b="0">
-                <a:solidFill>
-                  <a:srgbClr val="2B2F36"/>
-                </a:solidFill>
-                <a:latin typeface="微软雅黑"/>
-              </a:rPr>
-              <a:t>◆ B01 类与实例｜类=图纸，实例=按图纸造出的每台泵——一图多产品</a:t>
-            </a:r>
-          </a:p>
-          <a:p>
-            <a:r>
-              <a:rPr sz="950" b="0">
-                <a:solidFill>
-                  <a:srgbClr val="2B2F36"/>
-                </a:solidFill>
-                <a:latin typeface="微软雅黑"/>
-              </a:rPr>
-              <a:t>◆ B02 __init__与self｜self='我自己'；__init__=出厂设置，造时自动执行</a:t>
-            </a:r>
-          </a:p>
-          <a:p>
-            <a:r>
-              <a:rPr sz="950" b="0">
-                <a:solidFill>
-                  <a:srgbClr val="2B2F36"/>
-                </a:solidFill>
-                <a:latin typeface="微软雅黑"/>
-              </a:rPr>
-              <a:t>◆ B03 实例属性｜属性写在__init__里=每台设备自己的小本本</a:t>
-            </a:r>
-          </a:p>
-          <a:p>
-            <a:r>
-              <a:rPr sz="950" b="0">
-                <a:solidFill>
-                  <a:srgbClr val="2B2F36"/>
-                </a:solidFill>
-                <a:latin typeface="微软雅黑"/>
-              </a:rPr>
-              <a:t>◆ B04 方法调用｜方法=类里装的技能；d.start()=让这台设备执行</a:t>
-            </a:r>
-          </a:p>
-          <a:p>
-            <a:r>
-              <a:rPr sz="950" b="0">
-                <a:solidFill>
-                  <a:srgbClr val="2B2F36"/>
-                </a:solidFill>
-                <a:latin typeface="微软雅黑"/>
-              </a:rPr>
-              <a:t>◆ B05 __str__可读化｜__str__=设备的自我介绍：print时说人话不报内存地址</a:t>
-            </a:r>
-          </a:p>
-          <a:p>
-            <a:r>
-              <a:rPr sz="950" b="0">
-                <a:solidFill>
-                  <a:srgbClr val="2B2F36"/>
-                </a:solidFill>
-                <a:latin typeface="微软雅黑"/>
-              </a:rPr>
-              <a:t>◆ B06 状态校验｜状态机=设备只走合法路线：停机才能启动，运行中拒重复</a:t>
-            </a:r>
-          </a:p>
-        </p:txBody>
-      </p:sp>
-      <p:sp>
-        <p:nvSpPr>
-          <p:cNvPr id="19" name="Rectangle 18"/>
-          <p:cNvSpPr/>
-          <p:nvPr/>
-        </p:nvSpPr>
-        <p:spPr>
-          <a:xfrm>
-            <a:off x="6144768" y="1783080"/>
-            <a:ext cx="5586984" cy="1481328"/>
-          </a:xfrm>
-          <a:prstGeom prst="rect">
-            <a:avLst/>
-          </a:prstGeom>
-          <a:solidFill>
-            <a:srgbClr val="FFFFFF"/>
-          </a:solidFill>
-          <a:ln>
-            <a:solidFill>
-              <a:srgbClr val="D6DCE4"/>
-            </a:solidFill>
-          </a:ln>
-          <a:effectLst/>
-        </p:spPr>
-        <p:style>
-          <a:lnRef idx="1">
-            <a:schemeClr val="accent1"/>
-          </a:lnRef>
-          <a:fillRef idx="3">
-            <a:schemeClr val="accent1"/>
-          </a:fillRef>
-          <a:effectRef idx="2">
-            <a:schemeClr val="accent1"/>
-          </a:effectRef>
-          <a:fontRef idx="minor">
-            <a:schemeClr val="lt1"/>
-          </a:fontRef>
-        </p:style>
-        <p:txBody>
-          <a:bodyPr rtlCol="0" anchor="ctr" wrap="square"/>
-          <a:lstStyle/>
-          <a:p>
-            <a:pPr algn="ctr"/>
-          </a:p>
-        </p:txBody>
-      </p:sp>
-      <p:sp>
-        <p:nvSpPr>
-          <p:cNvPr id="20" name="Rectangle 19"/>
-          <p:cNvSpPr/>
-          <p:nvPr/>
-        </p:nvSpPr>
-        <p:spPr>
-          <a:xfrm>
-            <a:off x="6144768" y="1783080"/>
-            <a:ext cx="5586984" cy="365760"/>
-          </a:xfrm>
-          <a:prstGeom prst="rect">
-            <a:avLst/>
-          </a:prstGeom>
-          <a:solidFill>
-            <a:srgbClr val="8A4B2D"/>
-          </a:solidFill>
-          <a:ln>
-            <a:noFill/>
-          </a:ln>
-          <a:effectLst/>
-        </p:spPr>
-        <p:style>
-          <a:lnRef idx="1">
-            <a:schemeClr val="accent1"/>
-          </a:lnRef>
-          <a:fillRef idx="3">
-            <a:schemeClr val="accent1"/>
-          </a:fillRef>
-          <a:effectRef idx="2">
-            <a:schemeClr val="accent1"/>
-          </a:effectRef>
-          <a:fontRef idx="minor">
-            <a:schemeClr val="lt1"/>
-          </a:fontRef>
-        </p:style>
-        <p:txBody>
-          <a:bodyPr rtlCol="0" anchor="ctr" wrap="square"/>
-          <a:lstStyle/>
-          <a:p>
-            <a:pPr algn="ctr"/>
-          </a:p>
-        </p:txBody>
-      </p:sp>
-      <p:sp>
-        <p:nvSpPr>
-          <p:cNvPr id="21" name="TextBox 20"/>
-          <p:cNvSpPr txBox="1"/>
-          <p:nvPr/>
-        </p:nvSpPr>
-        <p:spPr>
-          <a:xfrm>
-            <a:off x="6254496" y="1819656"/>
-            <a:ext cx="5367528" cy="292608"/>
-          </a:xfrm>
-          <a:prstGeom prst="rect">
-            <a:avLst/>
-          </a:prstGeom>
-          <a:noFill/>
-        </p:spPr>
-        <p:txBody>
-          <a:bodyPr wrap="square">
-            <a:spAutoFit/>
-          </a:bodyPr>
-          <a:lstStyle/>
-          <a:p>
-            <a:r>
-              <a:rPr sz="1150" b="1">
-                <a:solidFill>
-                  <a:srgbClr val="FFFFFF"/>
-                </a:solidFill>
-                <a:latin typeface="微软雅黑"/>
-              </a:rPr>
-              <a:t>难点 · 易卡壳（下一页逐个击破）</a:t>
-            </a:r>
-          </a:p>
-        </p:txBody>
-      </p:sp>
-      <p:sp>
-        <p:nvSpPr>
-          <p:cNvPr id="22" name="TextBox 21"/>
-          <p:cNvSpPr txBox="1"/>
-          <p:nvPr/>
-        </p:nvSpPr>
-        <p:spPr>
-          <a:xfrm>
-            <a:off x="6309360" y="2231136"/>
-            <a:ext cx="5303520" cy="960120"/>
-          </a:xfrm>
-          <a:prstGeom prst="rect">
-            <a:avLst/>
-          </a:prstGeom>
-          <a:noFill/>
-        </p:spPr>
-        <p:txBody>
-          <a:bodyPr wrap="square">
-            <a:spAutoFit/>
-          </a:bodyPr>
-          <a:lstStyle/>
-          <a:p>
-            <a:r>
-              <a:rPr sz="900" b="0">
-                <a:solidFill>
-                  <a:srgbClr val="2B2F36"/>
-                </a:solidFill>
-                <a:latin typeface="微软雅黑"/>
-              </a:rPr>
-              <a:t>▲ 误区：改d1不影响d2——各实例各一份属性，图纸本身不存温度</a:t>
-            </a:r>
-          </a:p>
-          <a:p>
-            <a:r>
-              <a:rPr sz="900" b="0">
-                <a:solidFill>
-                  <a:srgbClr val="2B2F36"/>
-                </a:solidFill>
-                <a:latin typeface="微软雅黑"/>
-              </a:rPr>
-              <a:t>▲ 误区：方法漏写self→TypeError——调用时Python自动传实例</a:t>
-            </a:r>
-          </a:p>
-          <a:p>
-            <a:r>
-              <a:rPr sz="900" b="0">
-                <a:solidFill>
-                  <a:srgbClr val="2B2F36"/>
-                </a:solidFill>
-                <a:latin typeface="微软雅黑"/>
-              </a:rPr>
-              <a:t>▲ 误区：写在类下的属性是全员共享公告栏——改一处全变，慎用</a:t>
-            </a:r>
-          </a:p>
-        </p:txBody>
-      </p:sp>
-      <p:sp>
-        <p:nvSpPr>
-          <p:cNvPr id="23" name="Rectangle 22"/>
-          <p:cNvSpPr/>
-          <p:nvPr/>
-        </p:nvSpPr>
-        <p:spPr>
-          <a:xfrm>
-            <a:off x="6144768" y="3401568"/>
-            <a:ext cx="5586984" cy="1508760"/>
-          </a:xfrm>
-          <a:prstGeom prst="rect">
-            <a:avLst/>
-          </a:prstGeom>
-          <a:solidFill>
-            <a:srgbClr val="FFFFFF"/>
-          </a:solidFill>
-          <a:ln>
-            <a:solidFill>
-              <a:srgbClr val="D6DCE4"/>
-            </a:solidFill>
-          </a:ln>
-          <a:effectLst/>
-        </p:spPr>
-        <p:style>
-          <a:lnRef idx="1">
-            <a:schemeClr val="accent1"/>
-          </a:lnRef>
-          <a:fillRef idx="3">
-            <a:schemeClr val="accent1"/>
-          </a:fillRef>
-          <a:effectRef idx="2">
-            <a:schemeClr val="accent1"/>
-          </a:effectRef>
-          <a:fontRef idx="minor">
-            <a:schemeClr val="lt1"/>
-          </a:fontRef>
-        </p:style>
-        <p:txBody>
-          <a:bodyPr rtlCol="0" anchor="ctr" wrap="square"/>
-          <a:lstStyle/>
-          <a:p>
-            <a:pPr algn="ctr"/>
-          </a:p>
-        </p:txBody>
-      </p:sp>
-      <p:sp>
-        <p:nvSpPr>
-          <p:cNvPr id="24" name="Rectangle 23"/>
-          <p:cNvSpPr/>
-          <p:nvPr/>
-        </p:nvSpPr>
-        <p:spPr>
-          <a:xfrm>
-            <a:off x="6144768" y="3401568"/>
-            <a:ext cx="5586984" cy="365760"/>
-          </a:xfrm>
-          <a:prstGeom prst="rect">
-            <a:avLst/>
-          </a:prstGeom>
-          <a:solidFill>
-            <a:srgbClr val="9A3B3B"/>
-          </a:solidFill>
-          <a:ln>
-            <a:noFill/>
-          </a:ln>
-          <a:effectLst/>
-        </p:spPr>
-        <p:style>
-          <a:lnRef idx="1">
-            <a:schemeClr val="accent1"/>
-          </a:lnRef>
-          <a:fillRef idx="3">
-            <a:schemeClr val="accent1"/>
-          </a:fillRef>
-          <a:effectRef idx="2">
-            <a:schemeClr val="accent1"/>
-          </a:effectRef>
-          <a:fontRef idx="minor">
-            <a:schemeClr val="lt1"/>
-          </a:fontRef>
-        </p:style>
-        <p:txBody>
-          <a:bodyPr rtlCol="0" anchor="ctr" wrap="square"/>
-          <a:lstStyle/>
-          <a:p>
-            <a:pPr algn="ctr"/>
-          </a:p>
-        </p:txBody>
-      </p:sp>
-      <p:sp>
-        <p:nvSpPr>
-          <p:cNvPr id="25" name="TextBox 24"/>
-          <p:cNvSpPr txBox="1"/>
-          <p:nvPr/>
-        </p:nvSpPr>
-        <p:spPr>
-          <a:xfrm>
-            <a:off x="6254496" y="3438144"/>
-            <a:ext cx="5367528" cy="292608"/>
-          </a:xfrm>
-          <a:prstGeom prst="rect">
-            <a:avLst/>
-          </a:prstGeom>
-          <a:noFill/>
-        </p:spPr>
-        <p:txBody>
-          <a:bodyPr wrap="square">
-            <a:spAutoFit/>
-          </a:bodyPr>
-          <a:lstStyle/>
-          <a:p>
-            <a:r>
-              <a:rPr sz="1150" b="1">
-                <a:solidFill>
-                  <a:srgbClr val="FFFFFF"/>
-                </a:solidFill>
-                <a:latin typeface="微软雅黑"/>
-              </a:rPr>
-              <a:t>高频易错 · 动手前先记住</a:t>
-            </a:r>
-          </a:p>
-        </p:txBody>
-      </p:sp>
-      <p:sp>
-        <p:nvSpPr>
-          <p:cNvPr id="26" name="TextBox 25"/>
-          <p:cNvSpPr txBox="1"/>
-          <p:nvPr/>
-        </p:nvSpPr>
-        <p:spPr>
-          <a:xfrm>
-            <a:off x="6309360" y="3849624"/>
-            <a:ext cx="5303520" cy="960120"/>
-          </a:xfrm>
-          <a:prstGeom prst="rect">
-            <a:avLst/>
-          </a:prstGeom>
-          <a:noFill/>
-        </p:spPr>
-        <p:txBody>
-          <a:bodyPr wrap="square">
-            <a:spAutoFit/>
-          </a:bodyPr>
-          <a:lstStyle/>
-          <a:p>
-            <a:r>
-              <a:rPr sz="900" b="0">
-                <a:solidFill>
-                  <a:srgbClr val="2B2F36"/>
-                </a:solidFill>
-                <a:latin typeface="微软雅黑"/>
-              </a:rPr>
-              <a:t>✗ 漏self → 方法第一参数写self</a:t>
-            </a:r>
-          </a:p>
-          <a:p>
-            <a:r>
-              <a:rPr sz="900" b="0">
-                <a:solidFill>
-                  <a:srgbClr val="2B2F36"/>
-                </a:solidFill>
-                <a:latin typeface="微软雅黑"/>
-              </a:rPr>
-              <a:t>✗ 属性被共享 → 移入__init__</a:t>
-            </a:r>
-          </a:p>
-          <a:p>
-            <a:r>
-              <a:rPr sz="900" b="0">
-                <a:solidFill>
-                  <a:srgbClr val="2B2F36"/>
-                </a:solidFill>
-                <a:latin typeface="微软雅黑"/>
-              </a:rPr>
-              <a:t>✗ d.start无输出 → d.start()才调用</a:t>
-            </a:r>
-          </a:p>
-        </p:txBody>
-      </p:sp>
-      <p:sp>
-        <p:nvSpPr>
-          <p:cNvPr id="27" name="Rectangle 26"/>
-          <p:cNvSpPr/>
-          <p:nvPr/>
-        </p:nvSpPr>
-        <p:spPr>
-          <a:xfrm>
-            <a:off x="457200" y="5047488"/>
-            <a:ext cx="11274552" cy="1207008"/>
-          </a:xfrm>
-          <a:prstGeom prst="rect">
-            <a:avLst/>
-          </a:prstGeom>
-          <a:solidFill>
-            <a:srgbClr val="FFFFFF"/>
-          </a:solidFill>
-          <a:ln>
-            <a:solidFill>
-              <a:srgbClr val="D6DCE4"/>
-            </a:solidFill>
-          </a:ln>
-          <a:effectLst/>
-        </p:spPr>
-        <p:style>
-          <a:lnRef idx="1">
-            <a:schemeClr val="accent1"/>
-          </a:lnRef>
-          <a:fillRef idx="3">
-            <a:schemeClr val="accent1"/>
-          </a:fillRef>
-          <a:effectRef idx="2">
-            <a:schemeClr val="accent1"/>
-          </a:effectRef>
-          <a:fontRef idx="minor">
-            <a:schemeClr val="lt1"/>
-          </a:fontRef>
-        </p:style>
-        <p:txBody>
-          <a:bodyPr rtlCol="0" anchor="ctr" wrap="square"/>
-          <a:lstStyle/>
-          <a:p>
-            <a:pPr algn="ctr"/>
-          </a:p>
-        </p:txBody>
-      </p:sp>
-      <p:sp>
-        <p:nvSpPr>
-          <p:cNvPr id="28" name="Rectangle 27"/>
-          <p:cNvSpPr/>
-          <p:nvPr/>
-        </p:nvSpPr>
-        <p:spPr>
-          <a:xfrm>
-            <a:off x="457200" y="5047488"/>
-            <a:ext cx="11274552" cy="365760"/>
-          </a:xfrm>
-          <a:prstGeom prst="rect">
-            <a:avLst/>
-          </a:prstGeom>
-          <a:solidFill>
-            <a:srgbClr val="2E7D46"/>
-          </a:solidFill>
-          <a:ln>
-            <a:noFill/>
-          </a:ln>
-          <a:effectLst/>
-        </p:spPr>
-        <p:style>
-          <a:lnRef idx="1">
-            <a:schemeClr val="accent1"/>
-          </a:lnRef>
-          <a:fillRef idx="3">
-            <a:schemeClr val="accent1"/>
-          </a:fillRef>
-          <a:effectRef idx="2">
-            <a:schemeClr val="accent1"/>
-          </a:effectRef>
-          <a:fontRef idx="minor">
-            <a:schemeClr val="lt1"/>
-          </a:fontRef>
-        </p:style>
-        <p:txBody>
-          <a:bodyPr rtlCol="0" anchor="ctr" wrap="square"/>
-          <a:lstStyle/>
-          <a:p>
-            <a:pPr algn="ctr"/>
-          </a:p>
-        </p:txBody>
-      </p:sp>
-      <p:sp>
-        <p:nvSpPr>
-          <p:cNvPr id="29" name="TextBox 28"/>
-          <p:cNvSpPr txBox="1"/>
-          <p:nvPr/>
-        </p:nvSpPr>
-        <p:spPr>
-          <a:xfrm>
-            <a:off x="566928" y="5084064"/>
-            <a:ext cx="11055096" cy="292608"/>
-          </a:xfrm>
-          <a:prstGeom prst="rect">
-            <a:avLst/>
-          </a:prstGeom>
-          <a:noFill/>
-        </p:spPr>
-        <p:txBody>
-          <a:bodyPr wrap="square">
-            <a:spAutoFit/>
-          </a:bodyPr>
-          <a:lstStyle/>
-          <a:p>
-            <a:r>
-              <a:rPr sz="1150" b="1">
-                <a:solidFill>
-                  <a:srgbClr val="FFFFFF"/>
-                </a:solidFill>
-                <a:latin typeface="微软雅黑"/>
-              </a:rPr>
-              <a:t>达标自问 · 学没学会，问自己这四句（当堂评分同口径）</a:t>
-            </a:r>
-          </a:p>
-        </p:txBody>
-      </p:sp>
-      <p:sp>
-        <p:nvSpPr>
-          <p:cNvPr id="30" name="TextBox 29"/>
-          <p:cNvSpPr txBox="1"/>
-          <p:nvPr/>
-        </p:nvSpPr>
-        <p:spPr>
-          <a:xfrm>
-            <a:off x="621792" y="5458968"/>
-            <a:ext cx="10972800" cy="768096"/>
-          </a:xfrm>
-          <a:prstGeom prst="rect">
-            <a:avLst/>
-          </a:prstGeom>
-          <a:noFill/>
-        </p:spPr>
-        <p:txBody>
-          <a:bodyPr wrap="square">
-            <a:spAutoFit/>
-          </a:bodyPr>
-          <a:lstStyle/>
-          <a:p>
-            <a:r>
-              <a:rPr sz="900" b="0">
-                <a:solidFill>
-                  <a:srgbClr val="2B2F36"/>
-                </a:solidFill>
-                <a:latin typeface="微软雅黑"/>
-              </a:rPr>
-              <a:t>① 及格线我能过吗——1类+2属性+2方法+2实例</a:t>
-            </a:r>
-          </a:p>
-          <a:p>
-            <a:r>
-              <a:rPr sz="900" b="0">
-                <a:solidFill>
-                  <a:srgbClr val="2B2F36"/>
-                </a:solidFill>
-                <a:latin typeface="微软雅黑"/>
-              </a:rPr>
-              <a:t>② 优秀线我够吗——状态校验完善；内存图正确</a:t>
-            </a:r>
-          </a:p>
-          <a:p>
-            <a:r>
-              <a:rPr sz="900" b="0">
-                <a:solidFill>
-                  <a:srgbClr val="2B2F36"/>
-                </a:solidFill>
-                <a:latin typeface="微软雅黑"/>
-              </a:rPr>
-              <a:t>③ 技能点我能独立做出来吗——设计Device类(属性+方法)；创建多实例并演示属性隔离</a:t>
-            </a:r>
-          </a:p>
-          <a:p>
-            <a:r>
-              <a:rPr sz="900" b="0">
-                <a:solidFill>
-                  <a:srgbClr val="2B2F36"/>
-                </a:solidFill>
-                <a:latin typeface="微软雅黑"/>
-              </a:rPr>
-              <a:t>④ 报错了先查「常见错误速查」页再举手——错误信息逐字读一遍，八成自己能修</a:t>
-            </a:r>
-          </a:p>
-        </p:txBody>
-      </p:sp>
-      <p:sp>
-        <p:nvSpPr>
-          <p:cNvPr id="31" name="TextBox 30"/>
-          <p:cNvSpPr txBox="1"/>
-          <p:nvPr/>
-        </p:nvSpPr>
-        <p:spPr>
-          <a:xfrm>
-            <a:off x="457200" y="6281928"/>
-            <a:ext cx="9601200" cy="182880"/>
-          </a:xfrm>
-          <a:prstGeom prst="rect">
-            <a:avLst/>
-          </a:prstGeom>
-          <a:noFill/>
-        </p:spPr>
-        <p:txBody>
-          <a:bodyPr wrap="square">
-            <a:spAutoFit/>
-          </a:bodyPr>
-          <a:lstStyle/>
-          <a:p>
-            <a:r>
-              <a:rPr sz="750" b="0">
-                <a:solidFill>
-                  <a:srgbClr val="6B7280"/>
-                </a:solidFill>
-                <a:latin typeface="微软雅黑"/>
-              </a:rPr>
-              <a:t>素材来源：同周《第7次课-从图纸到对象：设备建模》知识卡与避坑清单（逐字摘录）</a:t>
+              <a:t>11 / 15</a:t>
             </a:r>
           </a:p>
         </p:txBody>
@@ -5556,7 +5554,7 @@
         <p:spPr>
           <a:xfrm>
             <a:off x="0" y="0"/>
-            <a:ext cx="12192000" cy="1150000"/>
+            <a:ext cx="12192000" cy="6858000"/>
           </a:xfrm>
           <a:prstGeom prst="rect">
             <a:avLst/>
@@ -5599,8 +5597,8 @@
         </p:nvSpPr>
         <p:spPr>
           <a:xfrm>
-            <a:off x="0" y="1150000"/>
-            <a:ext cx="2600000" cy="70000"/>
+            <a:off x="0" y="2880360"/>
+            <a:ext cx="12192000" cy="50000"/>
           </a:xfrm>
           <a:prstGeom prst="rect">
             <a:avLst/>
@@ -5643,8 +5641,178 @@
         </p:nvSpPr>
         <p:spPr>
           <a:xfrm>
-            <a:off x="700000" y="300000"/>
-            <a:ext cx="10792000" cy="700000"/>
+            <a:off x="0" y="1645920"/>
+            <a:ext cx="12192000" cy="1500000"/>
+          </a:xfrm>
+          <a:prstGeom prst="rect">
+            <a:avLst/>
+          </a:prstGeom>
+          <a:noFill/>
+        </p:spPr>
+        <p:txBody>
+          <a:bodyPr wrap="square" anchor="t">
+            <a:spAutoFit/>
+          </a:bodyPr>
+          <a:lstStyle/>
+          <a:p>
+            <a:pPr algn="ctr">
+              <a:lnSpc>
+                <a:spcPct val="110000"/>
+              </a:lnSpc>
+              <a:spcAft>
+                <a:spcPts val="600"/>
+              </a:spcAft>
+            </a:pPr>
+            <a:r>
+              <a:rPr sz="5400" b="1">
+                <a:solidFill>
+                  <a:srgbClr val="FFFFFF"/>
+                </a:solidFill>
+                <a:latin typeface="微软雅黑"/>
+              </a:rPr>
+              <a:t>THANKS</a:t>
+            </a:r>
+          </a:p>
+        </p:txBody>
+      </p:sp>
+      <p:sp>
+        <p:nvSpPr>
+          <p:cNvPr id="5" name="TextBox 4"/>
+          <p:cNvSpPr txBox="1"/>
+          <p:nvPr/>
+        </p:nvSpPr>
+        <p:spPr>
+          <a:xfrm>
+            <a:off x="0" y="3429000"/>
+            <a:ext cx="12192000" cy="800000"/>
+          </a:xfrm>
+          <a:prstGeom prst="rect">
+            <a:avLst/>
+          </a:prstGeom>
+          <a:noFill/>
+        </p:spPr>
+        <p:txBody>
+          <a:bodyPr wrap="square" anchor="t">
+            <a:spAutoFit/>
+          </a:bodyPr>
+          <a:lstStyle/>
+          <a:p>
+            <a:pPr algn="ctr">
+              <a:lnSpc>
+                <a:spcPct val="110000"/>
+              </a:lnSpc>
+              <a:spcAft>
+                <a:spcPts val="600"/>
+              </a:spcAft>
+            </a:pPr>
+            <a:r>
+              <a:rPr sz="2200" b="1">
+                <a:solidFill>
+                  <a:srgbClr val="F5670F"/>
+                </a:solidFill>
+                <a:latin typeface="微软雅黑"/>
+              </a:rPr>
+              <a:t>感谢聆听 · 动手实践出真知</a:t>
+            </a:r>
+          </a:p>
+        </p:txBody>
+      </p:sp>
+      <p:sp>
+        <p:nvSpPr>
+          <p:cNvPr id="6" name="TextBox 5"/>
+          <p:cNvSpPr txBox="1"/>
+          <p:nvPr/>
+        </p:nvSpPr>
+        <p:spPr>
+          <a:xfrm>
+            <a:off x="0" y="4526280"/>
+            <a:ext cx="12192000" cy="600000"/>
+          </a:xfrm>
+          <a:prstGeom prst="rect">
+            <a:avLst/>
+          </a:prstGeom>
+          <a:noFill/>
+        </p:spPr>
+        <p:txBody>
+          <a:bodyPr wrap="square" anchor="t">
+            <a:spAutoFit/>
+          </a:bodyPr>
+          <a:lstStyle/>
+          <a:p>
+            <a:pPr algn="ctr">
+              <a:lnSpc>
+                <a:spcPct val="110000"/>
+              </a:lnSpc>
+              <a:spcAft>
+                <a:spcPts val="600"/>
+              </a:spcAft>
+            </a:pPr>
+            <a:r>
+              <a:rPr sz="1400" b="0">
+                <a:solidFill>
+                  <a:srgbClr val="BBC6E6"/>
+                </a:solidFill>
+                <a:latin typeface="微软雅黑"/>
+              </a:rPr>
+              <a:t>以生为本   |   做中学 · 学中做</a:t>
+            </a:r>
+          </a:p>
+        </p:txBody>
+      </p:sp>
+      <p:sp>
+        <p:nvSpPr>
+          <p:cNvPr id="7" name="Rectangle 6"/>
+          <p:cNvSpPr/>
+          <p:nvPr/>
+        </p:nvSpPr>
+        <p:spPr>
+          <a:xfrm>
+            <a:off x="500000" y="6500000"/>
+            <a:ext cx="11100000" cy="20000"/>
+          </a:xfrm>
+          <a:prstGeom prst="rect">
+            <a:avLst/>
+          </a:prstGeom>
+          <a:solidFill>
+            <a:srgbClr val="C9D4EE"/>
+          </a:solidFill>
+          <a:ln>
+            <a:noFill/>
+          </a:ln>
+          <a:effectLst/>
+        </p:spPr>
+        <p:style>
+          <a:lnRef idx="1">
+            <a:schemeClr val="accent1"/>
+          </a:lnRef>
+          <a:fillRef idx="3">
+            <a:schemeClr val="accent1"/>
+          </a:fillRef>
+          <a:effectRef idx="2">
+            <a:schemeClr val="accent1"/>
+          </a:effectRef>
+          <a:fontRef idx="minor">
+            <a:schemeClr val="lt1"/>
+          </a:fontRef>
+        </p:style>
+        <p:txBody>
+          <a:bodyPr rtlCol="0" anchor="ctr"/>
+          <a:lstStyle/>
+          <a:p>
+            <a:pPr algn="ctr"/>
+          </a:p>
+        </p:txBody>
+      </p:sp>
+      <p:sp>
+        <p:nvSpPr>
+          <p:cNvPr id="8" name="TextBox 7"/>
+          <p:cNvSpPr txBox="1"/>
+          <p:nvPr/>
+        </p:nvSpPr>
+        <p:spPr>
+          <a:xfrm>
+            <a:off x="500000" y="6540000"/>
+            <a:ext cx="7000000" cy="300000"/>
           </a:xfrm>
           <a:prstGeom prst="rect">
             <a:avLst/>
@@ -5666,92 +5834,6 @@
               </a:spcAft>
             </a:pPr>
             <a:r>
-              <a:rPr sz="2400" b="1">
-                <a:solidFill>
-                  <a:srgbClr val="FFFFFF"/>
-                </a:solidFill>
-                <a:latin typeface="微软雅黑"/>
-              </a:rPr>
-              <a:t>难点逐个击破 · 零基础照做就能会</a:t>
-            </a:r>
-          </a:p>
-        </p:txBody>
-      </p:sp>
-      <p:sp>
-        <p:nvSpPr>
-          <p:cNvPr id="11" name="Rectangle 10"/>
-          <p:cNvSpPr/>
-          <p:nvPr/>
-        </p:nvSpPr>
-        <p:spPr>
-          <a:xfrm>
-            <a:off x="500000" y="6500000"/>
-            <a:ext cx="11100000" cy="20000"/>
-          </a:xfrm>
-          <a:prstGeom prst="rect">
-            <a:avLst/>
-          </a:prstGeom>
-          <a:solidFill>
-            <a:srgbClr val="C9D4EE"/>
-          </a:solidFill>
-          <a:ln>
-            <a:noFill/>
-          </a:ln>
-          <a:effectLst/>
-        </p:spPr>
-        <p:style>
-          <a:lnRef idx="1">
-            <a:schemeClr val="accent1"/>
-          </a:lnRef>
-          <a:fillRef idx="3">
-            <a:schemeClr val="accent1"/>
-          </a:fillRef>
-          <a:effectRef idx="2">
-            <a:schemeClr val="accent1"/>
-          </a:effectRef>
-          <a:fontRef idx="minor">
-            <a:schemeClr val="lt1"/>
-          </a:fontRef>
-        </p:style>
-        <p:txBody>
-          <a:bodyPr rtlCol="0" anchor="ctr"/>
-          <a:lstStyle/>
-          <a:p>
-            <a:pPr algn="ctr"/>
-          </a:p>
-        </p:txBody>
-      </p:sp>
-      <p:sp>
-        <p:nvSpPr>
-          <p:cNvPr id="12" name="TextBox 11"/>
-          <p:cNvSpPr txBox="1"/>
-          <p:nvPr/>
-        </p:nvSpPr>
-        <p:spPr>
-          <a:xfrm>
-            <a:off x="500000" y="6540000"/>
-            <a:ext cx="7000000" cy="300000"/>
-          </a:xfrm>
-          <a:prstGeom prst="rect">
-            <a:avLst/>
-          </a:prstGeom>
-          <a:noFill/>
-        </p:spPr>
-        <p:txBody>
-          <a:bodyPr wrap="square" anchor="t">
-            <a:spAutoFit/>
-          </a:bodyPr>
-          <a:lstStyle/>
-          <a:p>
-            <a:pPr algn="l">
-              <a:lnSpc>
-                <a:spcPct val="110000"/>
-              </a:lnSpc>
-              <a:spcAft>
-                <a:spcPts val="600"/>
-              </a:spcAft>
-            </a:pPr>
-            <a:r>
               <a:rPr sz="1000" b="0">
                 <a:solidFill>
                   <a:srgbClr val="8A97B5"/>
@@ -5765,7 +5847,7 @@
       </p:sp>
       <p:sp>
         <p:nvSpPr>
-          <p:cNvPr id="13" name="TextBox 12"/>
+          <p:cNvPr id="9" name="TextBox 8"/>
           <p:cNvSpPr txBox="1"/>
           <p:nvPr/>
         </p:nvSpPr>
@@ -5780,7 +5862,7 @@
           <a:noFill/>
         </p:spPr>
         <p:txBody>
-          <a:bodyPr wrap="square" anchor="t">
+          <a:bodyPr wrap="square" anchor="ctr">
             <a:spAutoFit/>
           </a:bodyPr>
           <a:lstStyle/>
@@ -5800,1025 +5882,7 @@
                 </a:solidFill>
                 <a:latin typeface="微软雅黑"/>
               </a:rPr>
-              <a:t>6 / 13</a:t>
-            </a:r>
-          </a:p>
-        </p:txBody>
-      </p:sp>
-      <p:sp>
-        <p:nvSpPr>
-          <p:cNvPr id="14" name="TextBox 13"/>
-          <p:cNvSpPr txBox="1"/>
-          <p:nvPr/>
-        </p:nvSpPr>
-        <p:spPr>
-          <a:xfrm>
-            <a:off x="457200" y="1389888"/>
-            <a:ext cx="11274552" cy="274320"/>
-          </a:xfrm>
-          <a:prstGeom prst="rect">
-            <a:avLst/>
-          </a:prstGeom>
-          <a:noFill/>
-        </p:spPr>
-        <p:txBody>
-          <a:bodyPr wrap="square">
-            <a:spAutoFit/>
-          </a:bodyPr>
-          <a:lstStyle/>
-          <a:p>
-            <a:r>
-              <a:rPr sz="1050" b="0">
-                <a:solidFill>
-                  <a:srgbClr val="6B7280"/>
-                </a:solidFill>
-                <a:latin typeface="微软雅黑"/>
-              </a:rPr>
-              <a:t>每个难点四步走：先看「为什么容易栽」对号入座 → 记住「一招破解」→ 照「动手验证」做一遍 → 做不出回知识详解页。</a:t>
-            </a:r>
-          </a:p>
-        </p:txBody>
-      </p:sp>
-      <p:sp>
-        <p:nvSpPr>
-          <p:cNvPr id="15" name="Rectangle 14"/>
-          <p:cNvSpPr/>
-          <p:nvPr/>
-        </p:nvSpPr>
-        <p:spPr>
-          <a:xfrm>
-            <a:off x="457200" y="1783080"/>
-            <a:ext cx="11274552" cy="1481328"/>
-          </a:xfrm>
-          <a:prstGeom prst="rect">
-            <a:avLst/>
-          </a:prstGeom>
-          <a:solidFill>
-            <a:srgbClr val="F7F9FC"/>
-          </a:solidFill>
-          <a:ln>
-            <a:solidFill>
-              <a:srgbClr val="D6DCE4"/>
-            </a:solidFill>
-          </a:ln>
-          <a:effectLst/>
-        </p:spPr>
-        <p:style>
-          <a:lnRef idx="1">
-            <a:schemeClr val="accent1"/>
-          </a:lnRef>
-          <a:fillRef idx="3">
-            <a:schemeClr val="accent1"/>
-          </a:fillRef>
-          <a:effectRef idx="2">
-            <a:schemeClr val="accent1"/>
-          </a:effectRef>
-          <a:fontRef idx="minor">
-            <a:schemeClr val="lt1"/>
-          </a:fontRef>
-        </p:style>
-        <p:txBody>
-          <a:bodyPr rtlCol="0" anchor="ctr" wrap="square"/>
-          <a:lstStyle/>
-          <a:p>
-            <a:pPr algn="ctr"/>
-          </a:p>
-        </p:txBody>
-      </p:sp>
-      <p:sp>
-        <p:nvSpPr>
-          <p:cNvPr id="16" name="Rectangle 15"/>
-          <p:cNvSpPr/>
-          <p:nvPr/>
-        </p:nvSpPr>
-        <p:spPr>
-          <a:xfrm>
-            <a:off x="457200" y="1783080"/>
-            <a:ext cx="82296" cy="1481328"/>
-          </a:xfrm>
-          <a:prstGeom prst="rect">
-            <a:avLst/>
-          </a:prstGeom>
-          <a:solidFill>
-            <a:srgbClr val="8A4B2D"/>
-          </a:solidFill>
-          <a:ln>
-            <a:noFill/>
-          </a:ln>
-          <a:effectLst/>
-        </p:spPr>
-        <p:style>
-          <a:lnRef idx="1">
-            <a:schemeClr val="accent1"/>
-          </a:lnRef>
-          <a:fillRef idx="3">
-            <a:schemeClr val="accent1"/>
-          </a:fillRef>
-          <a:effectRef idx="2">
-            <a:schemeClr val="accent1"/>
-          </a:effectRef>
-          <a:fontRef idx="minor">
-            <a:schemeClr val="lt1"/>
-          </a:fontRef>
-        </p:style>
-        <p:txBody>
-          <a:bodyPr rtlCol="0" anchor="ctr" wrap="square"/>
-          <a:lstStyle/>
-          <a:p>
-            <a:pPr algn="ctr"/>
-          </a:p>
-        </p:txBody>
-      </p:sp>
-      <p:sp>
-        <p:nvSpPr>
-          <p:cNvPr id="17" name="TextBox 16"/>
-          <p:cNvSpPr txBox="1"/>
-          <p:nvPr/>
-        </p:nvSpPr>
-        <p:spPr>
-          <a:xfrm>
-            <a:off x="658368" y="1828800"/>
-            <a:ext cx="10972800" cy="274320"/>
-          </a:xfrm>
-          <a:prstGeom prst="rect">
-            <a:avLst/>
-          </a:prstGeom>
-          <a:noFill/>
-        </p:spPr>
-        <p:txBody>
-          <a:bodyPr wrap="square">
-            <a:spAutoFit/>
-          </a:bodyPr>
-          <a:lstStyle/>
-          <a:p>
-            <a:r>
-              <a:rPr sz="1100" b="1">
-                <a:solidFill>
-                  <a:srgbClr val="8A4B2D"/>
-                </a:solidFill>
-                <a:latin typeface="微软雅黑"/>
-              </a:rPr>
-              <a:t>难点1：B01 类与实例</a:t>
-            </a:r>
-          </a:p>
-        </p:txBody>
-      </p:sp>
-      <p:sp>
-        <p:nvSpPr>
-          <p:cNvPr id="18" name="TextBox 17"/>
-          <p:cNvSpPr txBox="1"/>
-          <p:nvPr/>
-        </p:nvSpPr>
-        <p:spPr>
-          <a:xfrm>
-            <a:off x="658368" y="2148840"/>
-            <a:ext cx="3566160" cy="219456"/>
-          </a:xfrm>
-          <a:prstGeom prst="rect">
-            <a:avLst/>
-          </a:prstGeom>
-          <a:noFill/>
-        </p:spPr>
-        <p:txBody>
-          <a:bodyPr wrap="square">
-            <a:spAutoFit/>
-          </a:bodyPr>
-          <a:lstStyle/>
-          <a:p>
-            <a:r>
-              <a:rPr sz="900" b="1">
-                <a:solidFill>
-                  <a:srgbClr val="B5533A"/>
-                </a:solidFill>
-                <a:latin typeface="微软雅黑"/>
-              </a:rPr>
-              <a:t>为什么容易栽</a:t>
-            </a:r>
-          </a:p>
-        </p:txBody>
-      </p:sp>
-      <p:sp>
-        <p:nvSpPr>
-          <p:cNvPr id="19" name="TextBox 18"/>
-          <p:cNvSpPr txBox="1"/>
-          <p:nvPr/>
-        </p:nvSpPr>
-        <p:spPr>
-          <a:xfrm>
-            <a:off x="658368" y="2386584"/>
-            <a:ext cx="3584448" cy="822960"/>
-          </a:xfrm>
-          <a:prstGeom prst="rect">
-            <a:avLst/>
-          </a:prstGeom>
-          <a:noFill/>
-        </p:spPr>
-        <p:txBody>
-          <a:bodyPr wrap="square">
-            <a:spAutoFit/>
-          </a:bodyPr>
-          <a:lstStyle/>
-          <a:p>
-            <a:r>
-              <a:rPr sz="850" b="0">
-                <a:solidFill>
-                  <a:srgbClr val="2B2F36"/>
-                </a:solidFill>
-                <a:latin typeface="微软雅黑"/>
-              </a:rPr>
-              <a:t>误区：改d1不影响d2——各实例各一份属性，图纸本身不存温度</a:t>
-            </a:r>
-          </a:p>
-        </p:txBody>
-      </p:sp>
-      <p:sp>
-        <p:nvSpPr>
-          <p:cNvPr id="20" name="TextBox 19"/>
-          <p:cNvSpPr txBox="1"/>
-          <p:nvPr/>
-        </p:nvSpPr>
-        <p:spPr>
-          <a:xfrm>
-            <a:off x="4334255" y="2148840"/>
-            <a:ext cx="3566160" cy="219456"/>
-          </a:xfrm>
-          <a:prstGeom prst="rect">
-            <a:avLst/>
-          </a:prstGeom>
-          <a:noFill/>
-        </p:spPr>
-        <p:txBody>
-          <a:bodyPr wrap="square">
-            <a:spAutoFit/>
-          </a:bodyPr>
-          <a:lstStyle/>
-          <a:p>
-            <a:r>
-              <a:rPr sz="900" b="1">
-                <a:solidFill>
-                  <a:srgbClr val="2E7D46"/>
-                </a:solidFill>
-                <a:latin typeface="微软雅黑"/>
-              </a:rPr>
-              <a:t>一招破解（记住这句）</a:t>
-            </a:r>
-          </a:p>
-        </p:txBody>
-      </p:sp>
-      <p:sp>
-        <p:nvSpPr>
-          <p:cNvPr id="21" name="TextBox 20"/>
-          <p:cNvSpPr txBox="1"/>
-          <p:nvPr/>
-        </p:nvSpPr>
-        <p:spPr>
-          <a:xfrm>
-            <a:off x="4334255" y="2386584"/>
-            <a:ext cx="3584448" cy="822960"/>
-          </a:xfrm>
-          <a:prstGeom prst="rect">
-            <a:avLst/>
-          </a:prstGeom>
-          <a:noFill/>
-        </p:spPr>
-        <p:txBody>
-          <a:bodyPr wrap="square">
-            <a:spAutoFit/>
-          </a:bodyPr>
-          <a:lstStyle/>
-          <a:p>
-            <a:r>
-              <a:rPr sz="850" b="0">
-                <a:solidFill>
-                  <a:srgbClr val="2B2F36"/>
-                </a:solidFill>
-                <a:latin typeface="微软雅黑"/>
-              </a:rPr>
-              <a:t>类=图纸，实例=按图纸造出的每台泵——一图多产品</a:t>
-            </a:r>
-          </a:p>
-        </p:txBody>
-      </p:sp>
-      <p:sp>
-        <p:nvSpPr>
-          <p:cNvPr id="22" name="TextBox 21"/>
-          <p:cNvSpPr txBox="1"/>
-          <p:nvPr/>
-        </p:nvSpPr>
-        <p:spPr>
-          <a:xfrm>
-            <a:off x="8010143" y="2148840"/>
-            <a:ext cx="3566160" cy="219456"/>
-          </a:xfrm>
-          <a:prstGeom prst="rect">
-            <a:avLst/>
-          </a:prstGeom>
-          <a:noFill/>
-        </p:spPr>
-        <p:txBody>
-          <a:bodyPr wrap="square">
-            <a:spAutoFit/>
-          </a:bodyPr>
-          <a:lstStyle/>
-          <a:p>
-            <a:r>
-              <a:rPr sz="900" b="1">
-                <a:solidFill>
-                  <a:srgbClr val="35506E"/>
-                </a:solidFill>
-                <a:latin typeface="微软雅黑"/>
-              </a:rPr>
-              <a:t>动手验证（照做一遍）</a:t>
-            </a:r>
-          </a:p>
-        </p:txBody>
-      </p:sp>
-      <p:sp>
-        <p:nvSpPr>
-          <p:cNvPr id="23" name="TextBox 22"/>
-          <p:cNvSpPr txBox="1"/>
-          <p:nvPr/>
-        </p:nvSpPr>
-        <p:spPr>
-          <a:xfrm>
-            <a:off x="8010143" y="2386584"/>
-            <a:ext cx="3584448" cy="822960"/>
-          </a:xfrm>
-          <a:prstGeom prst="rect">
-            <a:avLst/>
-          </a:prstGeom>
-          <a:noFill/>
-        </p:spPr>
-        <p:txBody>
-          <a:bodyPr wrap="square">
-            <a:spAutoFit/>
-          </a:bodyPr>
-          <a:lstStyle/>
-          <a:p>
-            <a:r>
-              <a:rPr sz="850" b="0">
-                <a:solidFill>
-                  <a:srgbClr val="2B2F36"/>
-                </a:solidFill>
-                <a:latin typeface="微软雅黑"/>
-              </a:rPr>
-              <a:t>一类设备抽象成类，每台设备是独立实例 class Device: … ；d1=Device('PUMP-03')</a:t>
-            </a:r>
-          </a:p>
-        </p:txBody>
-      </p:sp>
-      <p:sp>
-        <p:nvSpPr>
-          <p:cNvPr id="24" name="Rectangle 23"/>
-          <p:cNvSpPr/>
-          <p:nvPr/>
-        </p:nvSpPr>
-        <p:spPr>
-          <a:xfrm>
-            <a:off x="457200" y="3383280"/>
-            <a:ext cx="11274552" cy="1481328"/>
-          </a:xfrm>
-          <a:prstGeom prst="rect">
-            <a:avLst/>
-          </a:prstGeom>
-          <a:solidFill>
-            <a:srgbClr val="F7F9FC"/>
-          </a:solidFill>
-          <a:ln>
-            <a:solidFill>
-              <a:srgbClr val="D6DCE4"/>
-            </a:solidFill>
-          </a:ln>
-          <a:effectLst/>
-        </p:spPr>
-        <p:style>
-          <a:lnRef idx="1">
-            <a:schemeClr val="accent1"/>
-          </a:lnRef>
-          <a:fillRef idx="3">
-            <a:schemeClr val="accent1"/>
-          </a:fillRef>
-          <a:effectRef idx="2">
-            <a:schemeClr val="accent1"/>
-          </a:effectRef>
-          <a:fontRef idx="minor">
-            <a:schemeClr val="lt1"/>
-          </a:fontRef>
-        </p:style>
-        <p:txBody>
-          <a:bodyPr rtlCol="0" anchor="ctr" wrap="square"/>
-          <a:lstStyle/>
-          <a:p>
-            <a:pPr algn="ctr"/>
-          </a:p>
-        </p:txBody>
-      </p:sp>
-      <p:sp>
-        <p:nvSpPr>
-          <p:cNvPr id="25" name="Rectangle 24"/>
-          <p:cNvSpPr/>
-          <p:nvPr/>
-        </p:nvSpPr>
-        <p:spPr>
-          <a:xfrm>
-            <a:off x="457200" y="3383280"/>
-            <a:ext cx="82296" cy="1481328"/>
-          </a:xfrm>
-          <a:prstGeom prst="rect">
-            <a:avLst/>
-          </a:prstGeom>
-          <a:solidFill>
-            <a:srgbClr val="8A4B2D"/>
-          </a:solidFill>
-          <a:ln>
-            <a:noFill/>
-          </a:ln>
-          <a:effectLst/>
-        </p:spPr>
-        <p:style>
-          <a:lnRef idx="1">
-            <a:schemeClr val="accent1"/>
-          </a:lnRef>
-          <a:fillRef idx="3">
-            <a:schemeClr val="accent1"/>
-          </a:fillRef>
-          <a:effectRef idx="2">
-            <a:schemeClr val="accent1"/>
-          </a:effectRef>
-          <a:fontRef idx="minor">
-            <a:schemeClr val="lt1"/>
-          </a:fontRef>
-        </p:style>
-        <p:txBody>
-          <a:bodyPr rtlCol="0" anchor="ctr" wrap="square"/>
-          <a:lstStyle/>
-          <a:p>
-            <a:pPr algn="ctr"/>
-          </a:p>
-        </p:txBody>
-      </p:sp>
-      <p:sp>
-        <p:nvSpPr>
-          <p:cNvPr id="26" name="TextBox 25"/>
-          <p:cNvSpPr txBox="1"/>
-          <p:nvPr/>
-        </p:nvSpPr>
-        <p:spPr>
-          <a:xfrm>
-            <a:off x="658368" y="3429000"/>
-            <a:ext cx="10972800" cy="274320"/>
-          </a:xfrm>
-          <a:prstGeom prst="rect">
-            <a:avLst/>
-          </a:prstGeom>
-          <a:noFill/>
-        </p:spPr>
-        <p:txBody>
-          <a:bodyPr wrap="square">
-            <a:spAutoFit/>
-          </a:bodyPr>
-          <a:lstStyle/>
-          <a:p>
-            <a:r>
-              <a:rPr sz="1100" b="1">
-                <a:solidFill>
-                  <a:srgbClr val="8A4B2D"/>
-                </a:solidFill>
-                <a:latin typeface="微软雅黑"/>
-              </a:rPr>
-              <a:t>难点2：B02 __init__与self</a:t>
-            </a:r>
-          </a:p>
-        </p:txBody>
-      </p:sp>
-      <p:sp>
-        <p:nvSpPr>
-          <p:cNvPr id="27" name="TextBox 26"/>
-          <p:cNvSpPr txBox="1"/>
-          <p:nvPr/>
-        </p:nvSpPr>
-        <p:spPr>
-          <a:xfrm>
-            <a:off x="658368" y="3749040"/>
-            <a:ext cx="3566160" cy="219456"/>
-          </a:xfrm>
-          <a:prstGeom prst="rect">
-            <a:avLst/>
-          </a:prstGeom>
-          <a:noFill/>
-        </p:spPr>
-        <p:txBody>
-          <a:bodyPr wrap="square">
-            <a:spAutoFit/>
-          </a:bodyPr>
-          <a:lstStyle/>
-          <a:p>
-            <a:r>
-              <a:rPr sz="900" b="1">
-                <a:solidFill>
-                  <a:srgbClr val="B5533A"/>
-                </a:solidFill>
-                <a:latin typeface="微软雅黑"/>
-              </a:rPr>
-              <a:t>为什么容易栽</a:t>
-            </a:r>
-          </a:p>
-        </p:txBody>
-      </p:sp>
-      <p:sp>
-        <p:nvSpPr>
-          <p:cNvPr id="28" name="TextBox 27"/>
-          <p:cNvSpPr txBox="1"/>
-          <p:nvPr/>
-        </p:nvSpPr>
-        <p:spPr>
-          <a:xfrm>
-            <a:off x="658368" y="3986784"/>
-            <a:ext cx="3584448" cy="822960"/>
-          </a:xfrm>
-          <a:prstGeom prst="rect">
-            <a:avLst/>
-          </a:prstGeom>
-          <a:noFill/>
-        </p:spPr>
-        <p:txBody>
-          <a:bodyPr wrap="square">
-            <a:spAutoFit/>
-          </a:bodyPr>
-          <a:lstStyle/>
-          <a:p>
-            <a:r>
-              <a:rPr sz="850" b="0">
-                <a:solidFill>
-                  <a:srgbClr val="2B2F36"/>
-                </a:solidFill>
-                <a:latin typeface="微软雅黑"/>
-              </a:rPr>
-              <a:t>误区：方法漏写self→TypeError——调用时Python自动传实例</a:t>
-            </a:r>
-          </a:p>
-        </p:txBody>
-      </p:sp>
-      <p:sp>
-        <p:nvSpPr>
-          <p:cNvPr id="29" name="TextBox 28"/>
-          <p:cNvSpPr txBox="1"/>
-          <p:nvPr/>
-        </p:nvSpPr>
-        <p:spPr>
-          <a:xfrm>
-            <a:off x="4334255" y="3749040"/>
-            <a:ext cx="3566160" cy="219456"/>
-          </a:xfrm>
-          <a:prstGeom prst="rect">
-            <a:avLst/>
-          </a:prstGeom>
-          <a:noFill/>
-        </p:spPr>
-        <p:txBody>
-          <a:bodyPr wrap="square">
-            <a:spAutoFit/>
-          </a:bodyPr>
-          <a:lstStyle/>
-          <a:p>
-            <a:r>
-              <a:rPr sz="900" b="1">
-                <a:solidFill>
-                  <a:srgbClr val="2E7D46"/>
-                </a:solidFill>
-                <a:latin typeface="微软雅黑"/>
-              </a:rPr>
-              <a:t>一招破解（记住这句）</a:t>
-            </a:r>
-          </a:p>
-        </p:txBody>
-      </p:sp>
-      <p:sp>
-        <p:nvSpPr>
-          <p:cNvPr id="30" name="TextBox 29"/>
-          <p:cNvSpPr txBox="1"/>
-          <p:nvPr/>
-        </p:nvSpPr>
-        <p:spPr>
-          <a:xfrm>
-            <a:off x="4334255" y="3986784"/>
-            <a:ext cx="3584448" cy="822960"/>
-          </a:xfrm>
-          <a:prstGeom prst="rect">
-            <a:avLst/>
-          </a:prstGeom>
-          <a:noFill/>
-        </p:spPr>
-        <p:txBody>
-          <a:bodyPr wrap="square">
-            <a:spAutoFit/>
-          </a:bodyPr>
-          <a:lstStyle/>
-          <a:p>
-            <a:r>
-              <a:rPr sz="850" b="0">
-                <a:solidFill>
-                  <a:srgbClr val="2B2F36"/>
-                </a:solidFill>
-                <a:latin typeface="微软雅黑"/>
-              </a:rPr>
-              <a:t>self='我自己'；__init__=出厂设置，造时自动执行</a:t>
-            </a:r>
-          </a:p>
-        </p:txBody>
-      </p:sp>
-      <p:sp>
-        <p:nvSpPr>
-          <p:cNvPr id="31" name="TextBox 30"/>
-          <p:cNvSpPr txBox="1"/>
-          <p:nvPr/>
-        </p:nvSpPr>
-        <p:spPr>
-          <a:xfrm>
-            <a:off x="8010143" y="3749040"/>
-            <a:ext cx="3566160" cy="219456"/>
-          </a:xfrm>
-          <a:prstGeom prst="rect">
-            <a:avLst/>
-          </a:prstGeom>
-          <a:noFill/>
-        </p:spPr>
-        <p:txBody>
-          <a:bodyPr wrap="square">
-            <a:spAutoFit/>
-          </a:bodyPr>
-          <a:lstStyle/>
-          <a:p>
-            <a:r>
-              <a:rPr sz="900" b="1">
-                <a:solidFill>
-                  <a:srgbClr val="35506E"/>
-                </a:solidFill>
-                <a:latin typeface="微软雅黑"/>
-              </a:rPr>
-              <a:t>动手验证（照做一遍）</a:t>
-            </a:r>
-          </a:p>
-        </p:txBody>
-      </p:sp>
-      <p:sp>
-        <p:nvSpPr>
-          <p:cNvPr id="32" name="TextBox 31"/>
-          <p:cNvSpPr txBox="1"/>
-          <p:nvPr/>
-        </p:nvSpPr>
-        <p:spPr>
-          <a:xfrm>
-            <a:off x="8010143" y="3986784"/>
-            <a:ext cx="3584448" cy="822960"/>
-          </a:xfrm>
-          <a:prstGeom prst="rect">
-            <a:avLst/>
-          </a:prstGeom>
-          <a:noFill/>
-        </p:spPr>
-        <p:txBody>
-          <a:bodyPr wrap="square">
-            <a:spAutoFit/>
-          </a:bodyPr>
-          <a:lstStyle/>
-          <a:p>
-            <a:r>
-              <a:rPr sz="850" b="0">
-                <a:solidFill>
-                  <a:srgbClr val="2B2F36"/>
-                </a:solidFill>
-                <a:latin typeface="微软雅黑"/>
-              </a:rPr>
-              <a:t>出厂时写死编号型号——构造即初始化 def __init__(self, code): self.code=code</a:t>
-            </a:r>
-          </a:p>
-        </p:txBody>
-      </p:sp>
-      <p:sp>
-        <p:nvSpPr>
-          <p:cNvPr id="33" name="Rectangle 32"/>
-          <p:cNvSpPr/>
-          <p:nvPr/>
-        </p:nvSpPr>
-        <p:spPr>
-          <a:xfrm>
-            <a:off x="457200" y="4983480"/>
-            <a:ext cx="11274552" cy="1481328"/>
-          </a:xfrm>
-          <a:prstGeom prst="rect">
-            <a:avLst/>
-          </a:prstGeom>
-          <a:solidFill>
-            <a:srgbClr val="F7F9FC"/>
-          </a:solidFill>
-          <a:ln>
-            <a:solidFill>
-              <a:srgbClr val="D6DCE4"/>
-            </a:solidFill>
-          </a:ln>
-          <a:effectLst/>
-        </p:spPr>
-        <p:style>
-          <a:lnRef idx="1">
-            <a:schemeClr val="accent1"/>
-          </a:lnRef>
-          <a:fillRef idx="3">
-            <a:schemeClr val="accent1"/>
-          </a:fillRef>
-          <a:effectRef idx="2">
-            <a:schemeClr val="accent1"/>
-          </a:effectRef>
-          <a:fontRef idx="minor">
-            <a:schemeClr val="lt1"/>
-          </a:fontRef>
-        </p:style>
-        <p:txBody>
-          <a:bodyPr rtlCol="0" anchor="ctr" wrap="square"/>
-          <a:lstStyle/>
-          <a:p>
-            <a:pPr algn="ctr"/>
-          </a:p>
-        </p:txBody>
-      </p:sp>
-      <p:sp>
-        <p:nvSpPr>
-          <p:cNvPr id="34" name="Rectangle 33"/>
-          <p:cNvSpPr/>
-          <p:nvPr/>
-        </p:nvSpPr>
-        <p:spPr>
-          <a:xfrm>
-            <a:off x="457200" y="4983480"/>
-            <a:ext cx="82296" cy="1481328"/>
-          </a:xfrm>
-          <a:prstGeom prst="rect">
-            <a:avLst/>
-          </a:prstGeom>
-          <a:solidFill>
-            <a:srgbClr val="8A4B2D"/>
-          </a:solidFill>
-          <a:ln>
-            <a:noFill/>
-          </a:ln>
-          <a:effectLst/>
-        </p:spPr>
-        <p:style>
-          <a:lnRef idx="1">
-            <a:schemeClr val="accent1"/>
-          </a:lnRef>
-          <a:fillRef idx="3">
-            <a:schemeClr val="accent1"/>
-          </a:fillRef>
-          <a:effectRef idx="2">
-            <a:schemeClr val="accent1"/>
-          </a:effectRef>
-          <a:fontRef idx="minor">
-            <a:schemeClr val="lt1"/>
-          </a:fontRef>
-        </p:style>
-        <p:txBody>
-          <a:bodyPr rtlCol="0" anchor="ctr" wrap="square"/>
-          <a:lstStyle/>
-          <a:p>
-            <a:pPr algn="ctr"/>
-          </a:p>
-        </p:txBody>
-      </p:sp>
-      <p:sp>
-        <p:nvSpPr>
-          <p:cNvPr id="35" name="TextBox 34"/>
-          <p:cNvSpPr txBox="1"/>
-          <p:nvPr/>
-        </p:nvSpPr>
-        <p:spPr>
-          <a:xfrm>
-            <a:off x="658368" y="5029200"/>
-            <a:ext cx="10972800" cy="274320"/>
-          </a:xfrm>
-          <a:prstGeom prst="rect">
-            <a:avLst/>
-          </a:prstGeom>
-          <a:noFill/>
-        </p:spPr>
-        <p:txBody>
-          <a:bodyPr wrap="square">
-            <a:spAutoFit/>
-          </a:bodyPr>
-          <a:lstStyle/>
-          <a:p>
-            <a:r>
-              <a:rPr sz="1100" b="1">
-                <a:solidFill>
-                  <a:srgbClr val="8A4B2D"/>
-                </a:solidFill>
-                <a:latin typeface="微软雅黑"/>
-              </a:rPr>
-              <a:t>难点3：B03 实例属性</a:t>
-            </a:r>
-          </a:p>
-        </p:txBody>
-      </p:sp>
-      <p:sp>
-        <p:nvSpPr>
-          <p:cNvPr id="36" name="TextBox 35"/>
-          <p:cNvSpPr txBox="1"/>
-          <p:nvPr/>
-        </p:nvSpPr>
-        <p:spPr>
-          <a:xfrm>
-            <a:off x="658368" y="5349240"/>
-            <a:ext cx="3566160" cy="219456"/>
-          </a:xfrm>
-          <a:prstGeom prst="rect">
-            <a:avLst/>
-          </a:prstGeom>
-          <a:noFill/>
-        </p:spPr>
-        <p:txBody>
-          <a:bodyPr wrap="square">
-            <a:spAutoFit/>
-          </a:bodyPr>
-          <a:lstStyle/>
-          <a:p>
-            <a:r>
-              <a:rPr sz="900" b="1">
-                <a:solidFill>
-                  <a:srgbClr val="B5533A"/>
-                </a:solidFill>
-                <a:latin typeface="微软雅黑"/>
-              </a:rPr>
-              <a:t>为什么容易栽</a:t>
-            </a:r>
-          </a:p>
-        </p:txBody>
-      </p:sp>
-      <p:sp>
-        <p:nvSpPr>
-          <p:cNvPr id="37" name="TextBox 36"/>
-          <p:cNvSpPr txBox="1"/>
-          <p:nvPr/>
-        </p:nvSpPr>
-        <p:spPr>
-          <a:xfrm>
-            <a:off x="658368" y="5586984"/>
-            <a:ext cx="3584448" cy="822960"/>
-          </a:xfrm>
-          <a:prstGeom prst="rect">
-            <a:avLst/>
-          </a:prstGeom>
-          <a:noFill/>
-        </p:spPr>
-        <p:txBody>
-          <a:bodyPr wrap="square">
-            <a:spAutoFit/>
-          </a:bodyPr>
-          <a:lstStyle/>
-          <a:p>
-            <a:r>
-              <a:rPr sz="850" b="0">
-                <a:solidFill>
-                  <a:srgbClr val="2B2F36"/>
-                </a:solidFill>
-                <a:latin typeface="微软雅黑"/>
-              </a:rPr>
-              <a:t>误区：写在类下的属性是全员共享公告栏——改一处全变，慎用</a:t>
-            </a:r>
-          </a:p>
-        </p:txBody>
-      </p:sp>
-      <p:sp>
-        <p:nvSpPr>
-          <p:cNvPr id="38" name="TextBox 37"/>
-          <p:cNvSpPr txBox="1"/>
-          <p:nvPr/>
-        </p:nvSpPr>
-        <p:spPr>
-          <a:xfrm>
-            <a:off x="4334255" y="5349240"/>
-            <a:ext cx="3566160" cy="219456"/>
-          </a:xfrm>
-          <a:prstGeom prst="rect">
-            <a:avLst/>
-          </a:prstGeom>
-          <a:noFill/>
-        </p:spPr>
-        <p:txBody>
-          <a:bodyPr wrap="square">
-            <a:spAutoFit/>
-          </a:bodyPr>
-          <a:lstStyle/>
-          <a:p>
-            <a:r>
-              <a:rPr sz="900" b="1">
-                <a:solidFill>
-                  <a:srgbClr val="2E7D46"/>
-                </a:solidFill>
-                <a:latin typeface="微软雅黑"/>
-              </a:rPr>
-              <a:t>一招破解（记住这句）</a:t>
-            </a:r>
-          </a:p>
-        </p:txBody>
-      </p:sp>
-      <p:sp>
-        <p:nvSpPr>
-          <p:cNvPr id="39" name="TextBox 38"/>
-          <p:cNvSpPr txBox="1"/>
-          <p:nvPr/>
-        </p:nvSpPr>
-        <p:spPr>
-          <a:xfrm>
-            <a:off x="4334255" y="5586984"/>
-            <a:ext cx="3584448" cy="822960"/>
-          </a:xfrm>
-          <a:prstGeom prst="rect">
-            <a:avLst/>
-          </a:prstGeom>
-          <a:noFill/>
-        </p:spPr>
-        <p:txBody>
-          <a:bodyPr wrap="square">
-            <a:spAutoFit/>
-          </a:bodyPr>
-          <a:lstStyle/>
-          <a:p>
-            <a:r>
-              <a:rPr sz="850" b="0">
-                <a:solidFill>
-                  <a:srgbClr val="2B2F36"/>
-                </a:solidFill>
-                <a:latin typeface="微软雅黑"/>
-              </a:rPr>
-              <a:t>属性写在__init__里=每台设备自己的小本本</a:t>
-            </a:r>
-          </a:p>
-        </p:txBody>
-      </p:sp>
-      <p:sp>
-        <p:nvSpPr>
-          <p:cNvPr id="40" name="TextBox 39"/>
-          <p:cNvSpPr txBox="1"/>
-          <p:nvPr/>
-        </p:nvSpPr>
-        <p:spPr>
-          <a:xfrm>
-            <a:off x="8010143" y="5349240"/>
-            <a:ext cx="3566160" cy="219456"/>
-          </a:xfrm>
-          <a:prstGeom prst="rect">
-            <a:avLst/>
-          </a:prstGeom>
-          <a:noFill/>
-        </p:spPr>
-        <p:txBody>
-          <a:bodyPr wrap="square">
-            <a:spAutoFit/>
-          </a:bodyPr>
-          <a:lstStyle/>
-          <a:p>
-            <a:r>
-              <a:rPr sz="900" b="1">
-                <a:solidFill>
-                  <a:srgbClr val="35506E"/>
-                </a:solidFill>
-                <a:latin typeface="微软雅黑"/>
-              </a:rPr>
-              <a:t>动手验证（照做一遍）</a:t>
-            </a:r>
-          </a:p>
-        </p:txBody>
-      </p:sp>
-      <p:sp>
-        <p:nvSpPr>
-          <p:cNvPr id="41" name="TextBox 40"/>
-          <p:cNvSpPr txBox="1"/>
-          <p:nvPr/>
-        </p:nvSpPr>
-        <p:spPr>
-          <a:xfrm>
-            <a:off x="8010143" y="5586984"/>
-            <a:ext cx="3584448" cy="822960"/>
-          </a:xfrm>
-          <a:prstGeom prst="rect">
-            <a:avLst/>
-          </a:prstGeom>
-          <a:noFill/>
-        </p:spPr>
-        <p:txBody>
-          <a:bodyPr wrap="square">
-            <a:spAutoFit/>
-          </a:bodyPr>
-          <a:lstStyle/>
-          <a:p>
-            <a:r>
-              <a:rPr sz="850" b="0">
-                <a:solidFill>
-                  <a:srgbClr val="2B2F36"/>
-                </a:solidFill>
-                <a:latin typeface="微软雅黑"/>
-              </a:rPr>
-              <a:t>两台泵温度不同互不干扰——独立内存 d1.temp=78.5 与 d2.temp=81.0 各存各的</a:t>
+              <a:t>12 / 15</a:t>
             </a:r>
           </a:p>
         </p:txBody>
@@ -6966,27 +6030,27 @@
                 </a:solidFill>
                 <a:latin typeface="微软雅黑"/>
               </a:rPr>
-              <a:t>承上启下 · 动手前避坑清单</a:t>
-            </a:r>
-          </a:p>
-        </p:txBody>
-      </p:sp>
-      <p:sp>
-        <p:nvSpPr>
-          <p:cNvPr id="11" name="Rectangle 10"/>
+              <a:t>下次课预告（第5周）</a:t>
+            </a:r>
+          </a:p>
+        </p:txBody>
+      </p:sp>
+      <p:sp>
+        <p:nvSpPr>
+          <p:cNvPr id="5" name="Rectangle 4"/>
           <p:cNvSpPr/>
           <p:nvPr/>
         </p:nvSpPr>
         <p:spPr>
           <a:xfrm>
-            <a:off x="500000" y="6500000"/>
-            <a:ext cx="11100000" cy="20000"/>
+            <a:off x="760000" y="1900000"/>
+            <a:ext cx="10900000" cy="1600000"/>
           </a:xfrm>
           <a:prstGeom prst="rect">
             <a:avLst/>
           </a:prstGeom>
           <a:solidFill>
-            <a:srgbClr val="C9D4EE"/>
+            <a:srgbClr val="F3F6FD"/>
           </a:solidFill>
           <a:ln>
             <a:noFill/>
@@ -7017,14 +6081,58 @@
       </p:sp>
       <p:sp>
         <p:nvSpPr>
-          <p:cNvPr id="12" name="TextBox 11"/>
+          <p:cNvPr id="6" name="Rectangle 5"/>
+          <p:cNvSpPr/>
+          <p:nvPr/>
+        </p:nvSpPr>
+        <p:spPr>
+          <a:xfrm>
+            <a:off x="760000" y="1900000"/>
+            <a:ext cx="150000" cy="1600000"/>
+          </a:xfrm>
+          <a:prstGeom prst="rect">
+            <a:avLst/>
+          </a:prstGeom>
+          <a:solidFill>
+            <a:srgbClr val="F5670F"/>
+          </a:solidFill>
+          <a:ln>
+            <a:noFill/>
+          </a:ln>
+          <a:effectLst/>
+        </p:spPr>
+        <p:style>
+          <a:lnRef idx="1">
+            <a:schemeClr val="accent1"/>
+          </a:lnRef>
+          <a:fillRef idx="3">
+            <a:schemeClr val="accent1"/>
+          </a:fillRef>
+          <a:effectRef idx="2">
+            <a:schemeClr val="accent1"/>
+          </a:effectRef>
+          <a:fontRef idx="minor">
+            <a:schemeClr val="lt1"/>
+          </a:fontRef>
+        </p:style>
+        <p:txBody>
+          <a:bodyPr rtlCol="0" anchor="ctr"/>
+          <a:lstStyle/>
+          <a:p>
+            <a:pPr algn="ctr"/>
+          </a:p>
+        </p:txBody>
+      </p:sp>
+      <p:sp>
+        <p:nvSpPr>
+          <p:cNvPr id="7" name="TextBox 6"/>
           <p:cNvSpPr txBox="1"/>
           <p:nvPr/>
         </p:nvSpPr>
         <p:spPr>
           <a:xfrm>
-            <a:off x="500000" y="6540000"/>
-            <a:ext cx="7000000" cy="300000"/>
+            <a:off x="1020000" y="2050000"/>
+            <a:ext cx="10500000" cy="1400000"/>
           </a:xfrm>
           <a:prstGeom prst="rect">
             <a:avLst/>
@@ -7046,40 +6154,17 @@
               </a:spcAft>
             </a:pPr>
             <a:r>
-              <a:rPr sz="1000" b="0">
-                <a:solidFill>
-                  <a:srgbClr val="8A97B5"/>
-                </a:solidFill>
-                <a:latin typeface="微软雅黑"/>
-              </a:rPr>
-              <a:t>两江智造集团 · Python编程基础</a:t>
-            </a:r>
-          </a:p>
-        </p:txBody>
-      </p:sp>
-      <p:sp>
-        <p:nvSpPr>
-          <p:cNvPr id="13" name="TextBox 12"/>
-          <p:cNvSpPr txBox="1"/>
-          <p:nvPr/>
-        </p:nvSpPr>
-        <p:spPr>
-          <a:xfrm>
-            <a:off x="10600000" y="6540000"/>
-            <a:ext cx="1000000" cy="300000"/>
-          </a:xfrm>
-          <a:prstGeom prst="rect">
-            <a:avLst/>
-          </a:prstGeom>
-          <a:noFill/>
-        </p:spPr>
-        <p:txBody>
-          <a:bodyPr wrap="square" anchor="t">
-            <a:spAutoFit/>
-          </a:bodyPr>
-          <a:lstStyle/>
-          <a:p>
-            <a:pPr algn="r">
+              <a:rPr sz="1700" b="1">
+                <a:solidFill>
+                  <a:srgbClr val="010328"/>
+                </a:solidFill>
+                <a:latin typeface="微软雅黑"/>
+              </a:rPr>
+              <a:t>主题: 构建基类+两子类继承体系——应用：见工单star</a:t>
+            </a:r>
+          </a:p>
+          <a:p>
+            <a:pPr algn="l">
               <a:lnSpc>
                 <a:spcPct val="110000"/>
               </a:lnSpc>
@@ -7088,27 +6173,135 @@
               </a:spcAft>
             </a:pPr>
             <a:r>
-              <a:rPr sz="1000" b="0">
-                <a:solidFill>
-                  <a:srgbClr val="8A97B5"/>
-                </a:solidFill>
-                <a:latin typeface="微软雅黑"/>
-              </a:rPr>
-              <a:t>7 / 13</a:t>
-            </a:r>
-          </a:p>
-        </p:txBody>
-      </p:sp>
-      <p:sp>
-        <p:nvSpPr>
-          <p:cNvPr id="14" name="TextBox 13"/>
+              <a:rPr sz="1300" b="0">
+                <a:solidFill>
+                  <a:srgbClr val="44546A"/>
+                </a:solidFill>
+                <a:latin typeface="微软雅黑"/>
+              </a:rPr>
+              <a:t>预习快问: 子类如何调用父类__init__？多态怎么理解？</a:t>
+            </a:r>
+          </a:p>
+        </p:txBody>
+      </p:sp>
+      <p:sp>
+        <p:nvSpPr>
+          <p:cNvPr id="8" name="TextBox 7"/>
           <p:cNvSpPr txBox="1"/>
           <p:nvPr/>
         </p:nvSpPr>
         <p:spPr>
           <a:xfrm>
-            <a:off x="457200" y="1389888"/>
-            <a:ext cx="11274552" cy="274320"/>
+            <a:off x="760000" y="3900000"/>
+            <a:ext cx="10900000" cy="900000"/>
+          </a:xfrm>
+          <a:prstGeom prst="rect">
+            <a:avLst/>
+          </a:prstGeom>
+          <a:noFill/>
+        </p:spPr>
+        <p:txBody>
+          <a:bodyPr wrap="square" anchor="t">
+            <a:spAutoFit/>
+          </a:bodyPr>
+          <a:lstStyle/>
+          <a:p>
+            <a:pPr algn="l">
+              <a:lnSpc>
+                <a:spcPct val="110000"/>
+              </a:lnSpc>
+              <a:spcAft>
+                <a:spcPts val="600"/>
+              </a:spcAft>
+            </a:pPr>
+            <a:r>
+              <a:rPr sz="1400" b="1">
+                <a:solidFill>
+                  <a:srgbClr val="0545E8"/>
+                </a:solidFill>
+                <a:latin typeface="微软雅黑"/>
+              </a:rPr>
+              <a:t>课前完成：导学单 + 预习自测 + starter环境自检</a:t>
+            </a:r>
+          </a:p>
+          <a:p>
+            <a:pPr algn="l">
+              <a:lnSpc>
+                <a:spcPct val="110000"/>
+              </a:lnSpc>
+              <a:spcAft>
+                <a:spcPts val="600"/>
+              </a:spcAft>
+            </a:pPr>
+            <a:r>
+              <a:rPr sz="1250" b="0">
+                <a:solidFill>
+                  <a:srgbClr val="44546A"/>
+                </a:solidFill>
+                <a:latin typeface="微软雅黑"/>
+              </a:rPr>
+              <a:t>带着问题来上课——Predict先于Run</a:t>
+            </a:r>
+          </a:p>
+        </p:txBody>
+      </p:sp>
+    </p:spTree>
+  </p:cSld>
+  <p:clrMapOvr>
+    <a:masterClrMapping/>
+  </p:clrMapOvr>
+</p:sld>
+</file>
+
+<file path=ppt/slides/slide14.xml><?xml version="1.0" encoding="utf-8"?>
+<p:sld xmlns:a="http://schemas.openxmlformats.org/drawingml/2006/main" xmlns:p="http://schemas.openxmlformats.org/presentationml/2006/main" xmlns:r="http://schemas.openxmlformats.org/officeDocument/2006/relationships">
+  <p:cSld>
+    <p:spTree>
+      <p:nvGrpSpPr>
+        <p:cNvPr id="1" name=""/>
+        <p:cNvGrpSpPr/>
+        <p:nvPr/>
+      </p:nvGrpSpPr>
+      <p:grpSpPr/>
+      <p:sp>
+        <p:nvSpPr>
+          <p:cNvPr id="2" name="TextBox 1"/>
+          <p:cNvSpPr txBox="1"/>
+          <p:nvPr/>
+        </p:nvSpPr>
+        <p:spPr>
+          <a:xfrm>
+            <a:off x="548640" y="320040"/>
+            <a:ext cx="11094720" cy="914400"/>
+          </a:xfrm>
+          <a:prstGeom prst="rect">
+            <a:avLst/>
+          </a:prstGeom>
+          <a:noFill/>
+        </p:spPr>
+        <p:txBody>
+          <a:bodyPr wrap="none">
+            <a:spAutoFit/>
+          </a:bodyPr>
+          <a:lstStyle/>
+          <a:p>
+            <a:r>
+              <a:rPr sz="3000" b="1"/>
+              <a:t>本任务六步法导航</a:t>
+            </a:r>
+          </a:p>
+        </p:txBody>
+      </p:sp>
+      <p:sp>
+        <p:nvSpPr>
+          <p:cNvPr id="3" name="TextBox 2"/>
+          <p:cNvSpPr txBox="1"/>
+          <p:nvPr/>
+        </p:nvSpPr>
+        <p:spPr>
+          <a:xfrm>
+            <a:off x="731520" y="1371600"/>
+            <a:ext cx="10728960" cy="4663440"/>
           </a:xfrm>
           <a:prstGeom prst="rect">
             <a:avLst/>
@@ -7121,118 +6314,108 @@
           </a:bodyPr>
           <a:lstStyle/>
           <a:p>
-            <a:r>
-              <a:rPr sz="1050" b="0">
-                <a:solidFill>
-                  <a:srgbClr val="6B7280"/>
-                </a:solidFill>
-                <a:latin typeface="微软雅黑"/>
-              </a:rPr>
-              <a:t>本讲是动手冲刺课：先把上周完整讲解里的高频翻车点过一遍，再开工——每条都是历届学生真实踩过的坑。</a:t>
-            </a:r>
-          </a:p>
-        </p:txBody>
-      </p:sp>
-      <p:sp>
-        <p:nvSpPr>
-          <p:cNvPr id="15" name="Rectangle 14"/>
-          <p:cNvSpPr/>
-          <p:nvPr/>
-        </p:nvSpPr>
-        <p:spPr>
-          <a:xfrm>
-            <a:off x="457200" y="1783080"/>
-            <a:ext cx="5532120" cy="2061972"/>
-          </a:xfrm>
-          <a:prstGeom prst="rect">
-            <a:avLst/>
-          </a:prstGeom>
-          <a:solidFill>
-            <a:srgbClr val="FFFFFF"/>
-          </a:solidFill>
-          <a:ln>
-            <a:solidFill>
-              <a:srgbClr val="D6DCE4"/>
-            </a:solidFill>
-          </a:ln>
-          <a:effectLst/>
-        </p:spPr>
-        <p:style>
-          <a:lnRef idx="1">
-            <a:schemeClr val="accent1"/>
-          </a:lnRef>
-          <a:fillRef idx="3">
-            <a:schemeClr val="accent1"/>
-          </a:fillRef>
-          <a:effectRef idx="2">
-            <a:schemeClr val="accent1"/>
-          </a:effectRef>
-          <a:fontRef idx="minor">
-            <a:schemeClr val="lt1"/>
-          </a:fontRef>
-        </p:style>
-        <p:txBody>
-          <a:bodyPr rtlCol="0" anchor="ctr" wrap="square"/>
-          <a:lstStyle/>
-          <a:p>
-            <a:pPr algn="ctr"/>
-          </a:p>
-        </p:txBody>
-      </p:sp>
-      <p:sp>
-        <p:nvSpPr>
-          <p:cNvPr id="16" name="Rectangle 15"/>
-          <p:cNvSpPr/>
-          <p:nvPr/>
-        </p:nvSpPr>
-        <p:spPr>
-          <a:xfrm>
-            <a:off x="457200" y="1783080"/>
-            <a:ext cx="82296" cy="2061972"/>
-          </a:xfrm>
-          <a:prstGeom prst="rect">
-            <a:avLst/>
-          </a:prstGeom>
-          <a:solidFill>
-            <a:srgbClr val="9A3B3B"/>
-          </a:solidFill>
-          <a:ln>
-            <a:noFill/>
-          </a:ln>
-          <a:effectLst/>
-        </p:spPr>
-        <p:style>
-          <a:lnRef idx="1">
-            <a:schemeClr val="accent1"/>
-          </a:lnRef>
-          <a:fillRef idx="3">
-            <a:schemeClr val="accent1"/>
-          </a:fillRef>
-          <a:effectRef idx="2">
-            <a:schemeClr val="accent1"/>
-          </a:effectRef>
-          <a:fontRef idx="minor">
-            <a:schemeClr val="lt1"/>
-          </a:fontRef>
-        </p:style>
-        <p:txBody>
-          <a:bodyPr rtlCol="0" anchor="ctr" wrap="square"/>
-          <a:lstStyle/>
-          <a:p>
-            <a:pPr algn="ctr"/>
-          </a:p>
-        </p:txBody>
-      </p:sp>
-      <p:sp>
-        <p:nvSpPr>
-          <p:cNvPr id="17" name="TextBox 16"/>
+            <a:pPr>
+              <a:spcAft>
+                <a:spcPts val="1000"/>
+              </a:spcAft>
+            </a:pPr>
+            <a:r>
+              <a:rPr sz="1800"/>
+              <a:t>六步法：资讯 → 计划 → 决策 → 实施 → 检查 → 评估</a:t>
+            </a:r>
+          </a:p>
+          <a:p>
+            <a:pPr>
+              <a:spcAft>
+                <a:spcPts val="1000"/>
+              </a:spcAft>
+            </a:pPr>
+            <a:r>
+              <a:rPr sz="1800"/>
+              <a:t>本讲对应工单：《程序设计基础》分层任务工单</a:t>
+            </a:r>
+          </a:p>
+          <a:p>
+            <a:pPr>
+              <a:spcAft>
+                <a:spcPts val="1000"/>
+              </a:spcAft>
+            </a:pPr>
+            <a:r>
+              <a:rPr sz="1800"/>
+              <a:t>课堂产出：工单第六节实施记录须当堂填写，含操作前安全打勾与学生本人签字。</a:t>
+            </a:r>
+          </a:p>
+          <a:p>
+            <a:pPr>
+              <a:spcAft>
+                <a:spcPts val="1000"/>
+              </a:spcAft>
+            </a:pPr>
+            <a:r>
+              <a:rPr sz="1800"/>
+              <a:t>课后交付：班组长／操作员／教师三方联签后交回，缺签视为未交付。</a:t>
+            </a:r>
+          </a:p>
+        </p:txBody>
+      </p:sp>
+    </p:spTree>
+  </p:cSld>
+  <p:clrMapOvr>
+    <a:masterClrMapping/>
+  </p:clrMapOvr>
+</p:sld>
+</file>
+
+<file path=ppt/slides/slide15.xml><?xml version="1.0" encoding="utf-8"?>
+<p:sld xmlns:a="http://schemas.openxmlformats.org/drawingml/2006/main" xmlns:p="http://schemas.openxmlformats.org/presentationml/2006/main" xmlns:r="http://schemas.openxmlformats.org/officeDocument/2006/relationships">
+  <p:cSld>
+    <p:spTree>
+      <p:nvGrpSpPr>
+        <p:cNvPr id="1" name=""/>
+        <p:cNvGrpSpPr/>
+        <p:nvPr/>
+      </p:nvGrpSpPr>
+      <p:grpSpPr/>
+      <p:sp>
+        <p:nvSpPr>
+          <p:cNvPr id="2" name="TextBox 1"/>
           <p:cNvSpPr txBox="1"/>
           <p:nvPr/>
         </p:nvSpPr>
         <p:spPr>
           <a:xfrm>
-            <a:off x="658368" y="1847088"/>
-            <a:ext cx="5166359" cy="274320"/>
+            <a:off x="548640" y="320040"/>
+            <a:ext cx="11094720" cy="914400"/>
+          </a:xfrm>
+          <a:prstGeom prst="rect">
+            <a:avLst/>
+          </a:prstGeom>
+          <a:noFill/>
+        </p:spPr>
+        <p:txBody>
+          <a:bodyPr wrap="none">
+            <a:spAutoFit/>
+          </a:bodyPr>
+          <a:lstStyle/>
+          <a:p>
+            <a:r>
+              <a:rPr sz="3000" b="1"/>
+              <a:t>本讲与岗位任务单的衔接</a:t>
+            </a:r>
+          </a:p>
+        </p:txBody>
+      </p:sp>
+      <p:sp>
+        <p:nvSpPr>
+          <p:cNvPr id="3" name="TextBox 2"/>
+          <p:cNvSpPr txBox="1"/>
+          <p:nvPr/>
+        </p:nvSpPr>
+        <p:spPr>
+          <a:xfrm>
+            <a:off x="731520" y="1371600"/>
+            <a:ext cx="10728960" cy="4663440"/>
           </a:xfrm>
           <a:prstGeom prst="rect">
             <a:avLst/>
@@ -7245,431 +6428,47 @@
           </a:bodyPr>
           <a:lstStyle/>
           <a:p>
-            <a:r>
-              <a:rPr sz="1050" b="1">
-                <a:solidFill>
-                  <a:srgbClr val="B5533A"/>
-                </a:solidFill>
-                <a:latin typeface="微软雅黑"/>
-              </a:rPr>
-              <a:t>✗ 漏self</a:t>
-            </a:r>
-          </a:p>
-        </p:txBody>
-      </p:sp>
-      <p:sp>
-        <p:nvSpPr>
-          <p:cNvPr id="18" name="TextBox 17"/>
-          <p:cNvSpPr txBox="1"/>
-          <p:nvPr/>
-        </p:nvSpPr>
-        <p:spPr>
-          <a:xfrm>
-            <a:off x="658368" y="2167128"/>
-            <a:ext cx="5166359" cy="868680"/>
-          </a:xfrm>
-          <a:prstGeom prst="rect">
-            <a:avLst/>
-          </a:prstGeom>
-          <a:noFill/>
-        </p:spPr>
-        <p:txBody>
-          <a:bodyPr wrap="square">
-            <a:spAutoFit/>
-          </a:bodyPr>
-          <a:lstStyle/>
-          <a:p>
-            <a:r>
-              <a:rPr sz="900" b="0">
-                <a:solidFill>
-                  <a:srgbClr val="2B2F36"/>
-                </a:solidFill>
-                <a:latin typeface="微软雅黑"/>
-              </a:rPr>
-              <a:t>原因：调用报参数多一个</a:t>
-            </a:r>
-          </a:p>
-          <a:p>
-            <a:r>
-              <a:rPr sz="900" b="0">
-                <a:solidFill>
-                  <a:srgbClr val="2B2F36"/>
-                </a:solidFill>
-                <a:latin typeface="微软雅黑"/>
-              </a:rPr>
-              <a:t>✔ 解决：方法第一参数写self</a:t>
-            </a:r>
-          </a:p>
-        </p:txBody>
-      </p:sp>
-      <p:sp>
-        <p:nvSpPr>
-          <p:cNvPr id="19" name="Rectangle 18"/>
-          <p:cNvSpPr/>
-          <p:nvPr/>
-        </p:nvSpPr>
-        <p:spPr>
-          <a:xfrm>
-            <a:off x="6199632" y="1783080"/>
-            <a:ext cx="5532120" cy="2061972"/>
-          </a:xfrm>
-          <a:prstGeom prst="rect">
-            <a:avLst/>
-          </a:prstGeom>
-          <a:solidFill>
-            <a:srgbClr val="FFFFFF"/>
-          </a:solidFill>
-          <a:ln>
-            <a:solidFill>
-              <a:srgbClr val="D6DCE4"/>
-            </a:solidFill>
-          </a:ln>
-          <a:effectLst/>
-        </p:spPr>
-        <p:style>
-          <a:lnRef idx="1">
-            <a:schemeClr val="accent1"/>
-          </a:lnRef>
-          <a:fillRef idx="3">
-            <a:schemeClr val="accent1"/>
-          </a:fillRef>
-          <a:effectRef idx="2">
-            <a:schemeClr val="accent1"/>
-          </a:effectRef>
-          <a:fontRef idx="minor">
-            <a:schemeClr val="lt1"/>
-          </a:fontRef>
-        </p:style>
-        <p:txBody>
-          <a:bodyPr rtlCol="0" anchor="ctr" wrap="square"/>
-          <a:lstStyle/>
-          <a:p>
-            <a:pPr algn="ctr"/>
-          </a:p>
-        </p:txBody>
-      </p:sp>
-      <p:sp>
-        <p:nvSpPr>
-          <p:cNvPr id="20" name="Rectangle 19"/>
-          <p:cNvSpPr/>
-          <p:nvPr/>
-        </p:nvSpPr>
-        <p:spPr>
-          <a:xfrm>
-            <a:off x="6199632" y="1783080"/>
-            <a:ext cx="82296" cy="2061972"/>
-          </a:xfrm>
-          <a:prstGeom prst="rect">
-            <a:avLst/>
-          </a:prstGeom>
-          <a:solidFill>
-            <a:srgbClr val="9A3B3B"/>
-          </a:solidFill>
-          <a:ln>
-            <a:noFill/>
-          </a:ln>
-          <a:effectLst/>
-        </p:spPr>
-        <p:style>
-          <a:lnRef idx="1">
-            <a:schemeClr val="accent1"/>
-          </a:lnRef>
-          <a:fillRef idx="3">
-            <a:schemeClr val="accent1"/>
-          </a:fillRef>
-          <a:effectRef idx="2">
-            <a:schemeClr val="accent1"/>
-          </a:effectRef>
-          <a:fontRef idx="minor">
-            <a:schemeClr val="lt1"/>
-          </a:fontRef>
-        </p:style>
-        <p:txBody>
-          <a:bodyPr rtlCol="0" anchor="ctr" wrap="square"/>
-          <a:lstStyle/>
-          <a:p>
-            <a:pPr algn="ctr"/>
-          </a:p>
-        </p:txBody>
-      </p:sp>
-      <p:sp>
-        <p:nvSpPr>
-          <p:cNvPr id="21" name="TextBox 20"/>
-          <p:cNvSpPr txBox="1"/>
-          <p:nvPr/>
-        </p:nvSpPr>
-        <p:spPr>
-          <a:xfrm>
-            <a:off x="6400800" y="1847088"/>
-            <a:ext cx="5166359" cy="274320"/>
-          </a:xfrm>
-          <a:prstGeom prst="rect">
-            <a:avLst/>
-          </a:prstGeom>
-          <a:noFill/>
-        </p:spPr>
-        <p:txBody>
-          <a:bodyPr wrap="square">
-            <a:spAutoFit/>
-          </a:bodyPr>
-          <a:lstStyle/>
-          <a:p>
-            <a:r>
-              <a:rPr sz="1050" b="1">
-                <a:solidFill>
-                  <a:srgbClr val="B5533A"/>
-                </a:solidFill>
-                <a:latin typeface="微软雅黑"/>
-              </a:rPr>
-              <a:t>✗ 属性被共享</a:t>
-            </a:r>
-          </a:p>
-        </p:txBody>
-      </p:sp>
-      <p:sp>
-        <p:nvSpPr>
-          <p:cNvPr id="22" name="TextBox 21"/>
-          <p:cNvSpPr txBox="1"/>
-          <p:nvPr/>
-        </p:nvSpPr>
-        <p:spPr>
-          <a:xfrm>
-            <a:off x="6400800" y="2167128"/>
-            <a:ext cx="5166359" cy="868680"/>
-          </a:xfrm>
-          <a:prstGeom prst="rect">
-            <a:avLst/>
-          </a:prstGeom>
-          <a:noFill/>
-        </p:spPr>
-        <p:txBody>
-          <a:bodyPr wrap="square">
-            <a:spAutoFit/>
-          </a:bodyPr>
-          <a:lstStyle/>
-          <a:p>
-            <a:r>
-              <a:rPr sz="900" b="0">
-                <a:solidFill>
-                  <a:srgbClr val="2B2F36"/>
-                </a:solidFill>
-                <a:latin typeface="微软雅黑"/>
-              </a:rPr>
-              <a:t>原因：属性写在类体</a:t>
-            </a:r>
-          </a:p>
-          <a:p>
-            <a:r>
-              <a:rPr sz="900" b="0">
-                <a:solidFill>
-                  <a:srgbClr val="2B2F36"/>
-                </a:solidFill>
-                <a:latin typeface="微软雅黑"/>
-              </a:rPr>
-              <a:t>✔ 解决：移入__init__</a:t>
-            </a:r>
-          </a:p>
-        </p:txBody>
-      </p:sp>
-      <p:sp>
-        <p:nvSpPr>
-          <p:cNvPr id="23" name="Rectangle 22"/>
-          <p:cNvSpPr/>
-          <p:nvPr/>
-        </p:nvSpPr>
-        <p:spPr>
-          <a:xfrm>
-            <a:off x="457200" y="3973068"/>
-            <a:ext cx="5532120" cy="2061972"/>
-          </a:xfrm>
-          <a:prstGeom prst="rect">
-            <a:avLst/>
-          </a:prstGeom>
-          <a:solidFill>
-            <a:srgbClr val="FFFFFF"/>
-          </a:solidFill>
-          <a:ln>
-            <a:solidFill>
-              <a:srgbClr val="D6DCE4"/>
-            </a:solidFill>
-          </a:ln>
-          <a:effectLst/>
-        </p:spPr>
-        <p:style>
-          <a:lnRef idx="1">
-            <a:schemeClr val="accent1"/>
-          </a:lnRef>
-          <a:fillRef idx="3">
-            <a:schemeClr val="accent1"/>
-          </a:fillRef>
-          <a:effectRef idx="2">
-            <a:schemeClr val="accent1"/>
-          </a:effectRef>
-          <a:fontRef idx="minor">
-            <a:schemeClr val="lt1"/>
-          </a:fontRef>
-        </p:style>
-        <p:txBody>
-          <a:bodyPr rtlCol="0" anchor="ctr" wrap="square"/>
-          <a:lstStyle/>
-          <a:p>
-            <a:pPr algn="ctr"/>
-          </a:p>
-        </p:txBody>
-      </p:sp>
-      <p:sp>
-        <p:nvSpPr>
-          <p:cNvPr id="24" name="Rectangle 23"/>
-          <p:cNvSpPr/>
-          <p:nvPr/>
-        </p:nvSpPr>
-        <p:spPr>
-          <a:xfrm>
-            <a:off x="457200" y="3973068"/>
-            <a:ext cx="82296" cy="2061972"/>
-          </a:xfrm>
-          <a:prstGeom prst="rect">
-            <a:avLst/>
-          </a:prstGeom>
-          <a:solidFill>
-            <a:srgbClr val="9A3B3B"/>
-          </a:solidFill>
-          <a:ln>
-            <a:noFill/>
-          </a:ln>
-          <a:effectLst/>
-        </p:spPr>
-        <p:style>
-          <a:lnRef idx="1">
-            <a:schemeClr val="accent1"/>
-          </a:lnRef>
-          <a:fillRef idx="3">
-            <a:schemeClr val="accent1"/>
-          </a:fillRef>
-          <a:effectRef idx="2">
-            <a:schemeClr val="accent1"/>
-          </a:effectRef>
-          <a:fontRef idx="minor">
-            <a:schemeClr val="lt1"/>
-          </a:fontRef>
-        </p:style>
-        <p:txBody>
-          <a:bodyPr rtlCol="0" anchor="ctr" wrap="square"/>
-          <a:lstStyle/>
-          <a:p>
-            <a:pPr algn="ctr"/>
-          </a:p>
-        </p:txBody>
-      </p:sp>
-      <p:sp>
-        <p:nvSpPr>
-          <p:cNvPr id="25" name="TextBox 24"/>
-          <p:cNvSpPr txBox="1"/>
-          <p:nvPr/>
-        </p:nvSpPr>
-        <p:spPr>
-          <a:xfrm>
-            <a:off x="658368" y="4037076"/>
-            <a:ext cx="5166359" cy="274320"/>
-          </a:xfrm>
-          <a:prstGeom prst="rect">
-            <a:avLst/>
-          </a:prstGeom>
-          <a:noFill/>
-        </p:spPr>
-        <p:txBody>
-          <a:bodyPr wrap="square">
-            <a:spAutoFit/>
-          </a:bodyPr>
-          <a:lstStyle/>
-          <a:p>
-            <a:r>
-              <a:rPr sz="1050" b="1">
-                <a:solidFill>
-                  <a:srgbClr val="B5533A"/>
-                </a:solidFill>
-                <a:latin typeface="微软雅黑"/>
-              </a:rPr>
-              <a:t>✗ d.start无输出</a:t>
-            </a:r>
-          </a:p>
-        </p:txBody>
-      </p:sp>
-      <p:sp>
-        <p:nvSpPr>
-          <p:cNvPr id="26" name="TextBox 25"/>
-          <p:cNvSpPr txBox="1"/>
-          <p:nvPr/>
-        </p:nvSpPr>
-        <p:spPr>
-          <a:xfrm>
-            <a:off x="658368" y="4357116"/>
-            <a:ext cx="5166359" cy="868680"/>
-          </a:xfrm>
-          <a:prstGeom prst="rect">
-            <a:avLst/>
-          </a:prstGeom>
-          <a:noFill/>
-        </p:spPr>
-        <p:txBody>
-          <a:bodyPr wrap="square">
-            <a:spAutoFit/>
-          </a:bodyPr>
-          <a:lstStyle/>
-          <a:p>
-            <a:r>
-              <a:rPr sz="900" b="0">
-                <a:solidFill>
-                  <a:srgbClr val="2B2F36"/>
-                </a:solidFill>
-                <a:latin typeface="微软雅黑"/>
-              </a:rPr>
-              <a:t>原因：少了括号</a:t>
-            </a:r>
-          </a:p>
-          <a:p>
-            <a:r>
-              <a:rPr sz="900" b="0">
-                <a:solidFill>
-                  <a:srgbClr val="2B2F36"/>
-                </a:solidFill>
-                <a:latin typeface="微软雅黑"/>
-              </a:rPr>
-              <a:t>✔ 解决：d.start()才调用</a:t>
-            </a:r>
-          </a:p>
-        </p:txBody>
-      </p:sp>
-      <p:sp>
-        <p:nvSpPr>
-          <p:cNvPr id="27" name="TextBox 26"/>
-          <p:cNvSpPr txBox="1"/>
-          <p:nvPr/>
-        </p:nvSpPr>
-        <p:spPr>
-          <a:xfrm>
-            <a:off x="457200" y="6281928"/>
-            <a:ext cx="9601200" cy="182880"/>
-          </a:xfrm>
-          <a:prstGeom prst="rect">
-            <a:avLst/>
-          </a:prstGeom>
-          <a:noFill/>
-        </p:spPr>
-        <p:txBody>
-          <a:bodyPr wrap="square">
-            <a:spAutoFit/>
-          </a:bodyPr>
-          <a:lstStyle/>
-          <a:p>
-            <a:r>
-              <a:rPr sz="750" b="0">
-                <a:solidFill>
-                  <a:srgbClr val="6B7280"/>
-                </a:solidFill>
-                <a:latin typeface="微软雅黑"/>
-              </a:rPr>
-              <a:t>素材来源：同周《第7次课-从图纸到对象：设备建模》知识卡与避坑清单（逐字摘录）</a:t>
+            <a:pPr>
+              <a:spcAft>
+                <a:spcPts val="1000"/>
+              </a:spcAft>
+            </a:pPr>
+            <a:r>
+              <a:rPr sz="1800"/>
+              <a:t>本讲在工作过程系统化课程中承担的任务环节：任务实施</a:t>
+            </a:r>
+          </a:p>
+          <a:p>
+            <a:pPr>
+              <a:spcAft>
+                <a:spcPts val="1000"/>
+              </a:spcAft>
+            </a:pPr>
+            <a:r>
+              <a:rPr sz="1800"/>
+              <a:t>考核对齐：过程性成绩取自本讲工单第六节各模块得分合计（满分 100）。</a:t>
+            </a:r>
+          </a:p>
+          <a:p>
+            <a:pPr>
+              <a:spcAft>
+                <a:spcPts val="1000"/>
+              </a:spcAft>
+            </a:pPr>
+            <a:r>
+              <a:rPr sz="1800"/>
+              <a:t>达标线：综合成绩≥60 分，且无安全红线一票否决记录</a:t>
+            </a:r>
+          </a:p>
+          <a:p>
+            <a:pPr>
+              <a:spcAft>
+                <a:spcPts val="1000"/>
+              </a:spcAft>
+            </a:pPr>
+            <a:r>
+              <a:rPr sz="1800"/>
+              <a:t>无效工单判定：未打安全勾、无本人签字、无三方联签。</a:t>
             </a:r>
           </a:p>
         </p:txBody>
@@ -8274,7 +7073,7 @@
                 </a:solidFill>
                 <a:latin typeface="微软雅黑"/>
               </a:rPr>
-              <a:t>3 / 13</a:t>
+              <a:t>3 / 15</a:t>
             </a:r>
           </a:p>
         </p:txBody>
@@ -8980,7 +7779,7 @@
                 </a:solidFill>
                 <a:latin typeface="微软雅黑"/>
               </a:rPr>
-              <a:t>4 / 13</a:t>
+              <a:t>4 / 15</a:t>
             </a:r>
           </a:p>
         </p:txBody>
@@ -9128,27 +7927,27 @@
                 </a:solidFill>
                 <a:latin typeface="微软雅黑"/>
               </a:rPr>
-              <a:t>实施任务：工单0.3《工业设备类设计》</a:t>
-            </a:r>
-          </a:p>
-        </p:txBody>
-      </p:sp>
-      <p:sp>
-        <p:nvSpPr>
-          <p:cNvPr id="5" name="Rectangle 4"/>
+              <a:t>本课重难点地图 · 老师划重点（动手前必看）</a:t>
+            </a:r>
+          </a:p>
+        </p:txBody>
+      </p:sp>
+      <p:sp>
+        <p:nvSpPr>
+          <p:cNvPr id="11" name="Rectangle 10"/>
           <p:cNvSpPr/>
           <p:nvPr/>
         </p:nvSpPr>
         <p:spPr>
           <a:xfrm>
-            <a:off x="800000" y="1950000"/>
-            <a:ext cx="6300000" cy="3900000"/>
+            <a:off x="500000" y="6500000"/>
+            <a:ext cx="11100000" cy="20000"/>
           </a:xfrm>
           <a:prstGeom prst="rect">
             <a:avLst/>
           </a:prstGeom>
           <a:solidFill>
-            <a:srgbClr val="F3F6FD"/>
+            <a:srgbClr val="C9D4EE"/>
           </a:solidFill>
           <a:ln>
             <a:noFill/>
@@ -9179,159 +7978,14 @@
       </p:sp>
       <p:sp>
         <p:nvSpPr>
-          <p:cNvPr id="6" name="TextBox 5"/>
+          <p:cNvPr id="12" name="TextBox 11"/>
           <p:cNvSpPr txBox="1"/>
           <p:nvPr/>
         </p:nvSpPr>
         <p:spPr>
           <a:xfrm>
-            <a:off x="1000000" y="2100000"/>
-            <a:ext cx="5900000" cy="3600000"/>
-          </a:xfrm>
-          <a:prstGeom prst="rect">
-            <a:avLst/>
-          </a:prstGeom>
-          <a:noFill/>
-        </p:spPr>
-        <p:txBody>
-          <a:bodyPr wrap="square" anchor="t">
-            <a:spAutoFit/>
-          </a:bodyPr>
-          <a:lstStyle/>
-          <a:p>
-            <a:pPr algn="l">
-              <a:lnSpc>
-                <a:spcPct val="130000"/>
-              </a:lnSpc>
-              <a:spcAft>
-                <a:spcPts val="600"/>
-              </a:spcAft>
-            </a:pPr>
-            <a:r>
-              <a:rPr sz="1500" b="1">
-                <a:solidFill>
-                  <a:srgbClr val="0545E8"/>
-                </a:solidFill>
-                <a:latin typeface="微软雅黑"/>
-              </a:rPr>
-              <a:t>实施步骤</a:t>
-            </a:r>
-          </a:p>
-          <a:p>
-            <a:pPr algn="l">
-              <a:lnSpc>
-                <a:spcPct val="130000"/>
-              </a:lnSpc>
-              <a:spcAft>
-                <a:spcPts val="600"/>
-              </a:spcAft>
-            </a:pPr>
-            <a:r>
-              <a:rPr sz="1400" b="0">
-                <a:solidFill>
-                  <a:srgbClr val="010328"/>
-                </a:solidFill>
-                <a:latin typeface="微软雅黑"/>
-              </a:rPr>
-              <a:t>1. 方法含状态校验(重复启动提示)</a:t>
-            </a:r>
-          </a:p>
-          <a:p>
-            <a:pPr algn="l">
-              <a:lnSpc>
-                <a:spcPct val="130000"/>
-              </a:lnSpc>
-              <a:spcAft>
-                <a:spcPts val="600"/>
-              </a:spcAft>
-            </a:pPr>
-            <a:r>
-              <a:rPr sz="1400" b="0">
-                <a:solidFill>
-                  <a:srgbClr val="010328"/>
-                </a:solidFill>
-                <a:latin typeface="微软雅黑"/>
-              </a:rPr>
-              <a:t>2. print(对象)输出可读信息(__str__)</a:t>
-            </a:r>
-          </a:p>
-          <a:p>
-            <a:pPr algn="l">
-              <a:lnSpc>
-                <a:spcPct val="130000"/>
-              </a:lnSpc>
-              <a:spcAft>
-                <a:spcPts val="600"/>
-              </a:spcAft>
-            </a:pPr>
-            <a:r>
-              <a:rPr sz="1400" b="0">
-                <a:solidFill>
-                  <a:srgbClr val="010328"/>
-                </a:solidFill>
-                <a:latin typeface="微软雅黑"/>
-              </a:rPr>
-              <a:t>3. 对象内存图手绘(id观察)</a:t>
-            </a:r>
-          </a:p>
-        </p:txBody>
-      </p:sp>
-      <p:sp>
-        <p:nvSpPr>
-          <p:cNvPr id="7" name="Rectangle 6"/>
-          <p:cNvSpPr/>
-          <p:nvPr/>
-        </p:nvSpPr>
-        <p:spPr>
-          <a:xfrm>
-            <a:off x="7400000" y="1950000"/>
-            <a:ext cx="4000000" cy="1850000"/>
-          </a:xfrm>
-          <a:prstGeom prst="rect">
-            <a:avLst/>
-          </a:prstGeom>
-          <a:solidFill>
-            <a:srgbClr val="E8F1E8"/>
-          </a:solidFill>
-          <a:ln>
-            <a:solidFill>
-              <a:srgbClr val="0475B6"/>
-            </a:solidFill>
-          </a:ln>
-          <a:effectLst/>
-        </p:spPr>
-        <p:style>
-          <a:lnRef idx="1">
-            <a:schemeClr val="accent1"/>
-          </a:lnRef>
-          <a:fillRef idx="3">
-            <a:schemeClr val="accent1"/>
-          </a:fillRef>
-          <a:effectRef idx="2">
-            <a:schemeClr val="accent1"/>
-          </a:effectRef>
-          <a:fontRef idx="minor">
-            <a:schemeClr val="lt1"/>
-          </a:fontRef>
-        </p:style>
-        <p:txBody>
-          <a:bodyPr rtlCol="0" anchor="ctr"/>
-          <a:lstStyle/>
-          <a:p>
-            <a:pPr algn="ctr"/>
-          </a:p>
-        </p:txBody>
-      </p:sp>
-      <p:sp>
-        <p:nvSpPr>
-          <p:cNvPr id="8" name="TextBox 7"/>
-          <p:cNvSpPr txBox="1"/>
-          <p:nvPr/>
-        </p:nvSpPr>
-        <p:spPr>
-          <a:xfrm>
-            <a:off x="7550000" y="2080000"/>
-            <a:ext cx="3750000" cy="1650000"/>
+            <a:off x="500000" y="6540000"/>
+            <a:ext cx="7000000" cy="300000"/>
           </a:xfrm>
           <a:prstGeom prst="rect">
             <a:avLst/>
@@ -9353,218 +8007,6 @@
               </a:spcAft>
             </a:pPr>
             <a:r>
-              <a:rPr sz="1400" b="1">
-                <a:solidFill>
-                  <a:srgbClr val="0475B6"/>
-                </a:solidFill>
-                <a:latin typeface="微软雅黑"/>
-              </a:rPr>
-              <a:t>及格标准（D）</a:t>
-            </a:r>
-          </a:p>
-          <a:p>
-            <a:pPr algn="l">
-              <a:lnSpc>
-                <a:spcPct val="110000"/>
-              </a:lnSpc>
-              <a:spcAft>
-                <a:spcPts val="600"/>
-              </a:spcAft>
-            </a:pPr>
-            <a:r>
-              <a:rPr sz="1300" b="0">
-                <a:solidFill>
-                  <a:srgbClr val="010328"/>
-                </a:solidFill>
-                <a:latin typeface="微软雅黑"/>
-              </a:rPr>
-              <a:t>1类+2属性+2方法+2实例</a:t>
-            </a:r>
-          </a:p>
-        </p:txBody>
-      </p:sp>
-      <p:sp>
-        <p:nvSpPr>
-          <p:cNvPr id="9" name="Rectangle 8"/>
-          <p:cNvSpPr/>
-          <p:nvPr/>
-        </p:nvSpPr>
-        <p:spPr>
-          <a:xfrm>
-            <a:off x="7400000" y="3950000"/>
-            <a:ext cx="4000000" cy="1850000"/>
-          </a:xfrm>
-          <a:prstGeom prst="rect">
-            <a:avLst/>
-          </a:prstGeom>
-          <a:solidFill>
-            <a:srgbClr val="FDF0E6"/>
-          </a:solidFill>
-          <a:ln>
-            <a:solidFill>
-              <a:srgbClr val="F5670F"/>
-            </a:solidFill>
-          </a:ln>
-          <a:effectLst/>
-        </p:spPr>
-        <p:style>
-          <a:lnRef idx="1">
-            <a:schemeClr val="accent1"/>
-          </a:lnRef>
-          <a:fillRef idx="3">
-            <a:schemeClr val="accent1"/>
-          </a:fillRef>
-          <a:effectRef idx="2">
-            <a:schemeClr val="accent1"/>
-          </a:effectRef>
-          <a:fontRef idx="minor">
-            <a:schemeClr val="lt1"/>
-          </a:fontRef>
-        </p:style>
-        <p:txBody>
-          <a:bodyPr rtlCol="0" anchor="ctr"/>
-          <a:lstStyle/>
-          <a:p>
-            <a:pPr algn="ctr"/>
-          </a:p>
-        </p:txBody>
-      </p:sp>
-      <p:sp>
-        <p:nvSpPr>
-          <p:cNvPr id="10" name="TextBox 9"/>
-          <p:cNvSpPr txBox="1"/>
-          <p:nvPr/>
-        </p:nvSpPr>
-        <p:spPr>
-          <a:xfrm>
-            <a:off x="7550000" y="4080000"/>
-            <a:ext cx="3750000" cy="1650000"/>
-          </a:xfrm>
-          <a:prstGeom prst="rect">
-            <a:avLst/>
-          </a:prstGeom>
-          <a:noFill/>
-        </p:spPr>
-        <p:txBody>
-          <a:bodyPr wrap="square" anchor="t">
-            <a:spAutoFit/>
-          </a:bodyPr>
-          <a:lstStyle/>
-          <a:p>
-            <a:pPr algn="l">
-              <a:lnSpc>
-                <a:spcPct val="110000"/>
-              </a:lnSpc>
-              <a:spcAft>
-                <a:spcPts val="600"/>
-              </a:spcAft>
-            </a:pPr>
-            <a:r>
-              <a:rPr sz="1400" b="1">
-                <a:solidFill>
-                  <a:srgbClr val="F5670F"/>
-                </a:solidFill>
-                <a:latin typeface="微软雅黑"/>
-              </a:rPr>
-              <a:t>优秀标准（B+）</a:t>
-            </a:r>
-          </a:p>
-          <a:p>
-            <a:pPr algn="l">
-              <a:lnSpc>
-                <a:spcPct val="110000"/>
-              </a:lnSpc>
-              <a:spcAft>
-                <a:spcPts val="600"/>
-              </a:spcAft>
-            </a:pPr>
-            <a:r>
-              <a:rPr sz="1300" b="0">
-                <a:solidFill>
-                  <a:srgbClr val="010328"/>
-                </a:solidFill>
-                <a:latin typeface="微软雅黑"/>
-              </a:rPr>
-              <a:t>状态校验完善；内存图正确</a:t>
-            </a:r>
-          </a:p>
-        </p:txBody>
-      </p:sp>
-      <p:sp>
-        <p:nvSpPr>
-          <p:cNvPr id="11" name="Rectangle 10"/>
-          <p:cNvSpPr/>
-          <p:nvPr/>
-        </p:nvSpPr>
-        <p:spPr>
-          <a:xfrm>
-            <a:off x="500000" y="6500000"/>
-            <a:ext cx="11100000" cy="20000"/>
-          </a:xfrm>
-          <a:prstGeom prst="rect">
-            <a:avLst/>
-          </a:prstGeom>
-          <a:solidFill>
-            <a:srgbClr val="C9D4EE"/>
-          </a:solidFill>
-          <a:ln>
-            <a:noFill/>
-          </a:ln>
-          <a:effectLst/>
-        </p:spPr>
-        <p:style>
-          <a:lnRef idx="1">
-            <a:schemeClr val="accent1"/>
-          </a:lnRef>
-          <a:fillRef idx="3">
-            <a:schemeClr val="accent1"/>
-          </a:fillRef>
-          <a:effectRef idx="2">
-            <a:schemeClr val="accent1"/>
-          </a:effectRef>
-          <a:fontRef idx="minor">
-            <a:schemeClr val="lt1"/>
-          </a:fontRef>
-        </p:style>
-        <p:txBody>
-          <a:bodyPr rtlCol="0" anchor="ctr"/>
-          <a:lstStyle/>
-          <a:p>
-            <a:pPr algn="ctr"/>
-          </a:p>
-        </p:txBody>
-      </p:sp>
-      <p:sp>
-        <p:nvSpPr>
-          <p:cNvPr id="12" name="TextBox 11"/>
-          <p:cNvSpPr txBox="1"/>
-          <p:nvPr/>
-        </p:nvSpPr>
-        <p:spPr>
-          <a:xfrm>
-            <a:off x="500000" y="6540000"/>
-            <a:ext cx="7000000" cy="300000"/>
-          </a:xfrm>
-          <a:prstGeom prst="rect">
-            <a:avLst/>
-          </a:prstGeom>
-          <a:noFill/>
-        </p:spPr>
-        <p:txBody>
-          <a:bodyPr wrap="square" anchor="t">
-            <a:spAutoFit/>
-          </a:bodyPr>
-          <a:lstStyle/>
-          <a:p>
-            <a:pPr algn="l">
-              <a:lnSpc>
-                <a:spcPct val="110000"/>
-              </a:lnSpc>
-              <a:spcAft>
-                <a:spcPts val="600"/>
-              </a:spcAft>
-            </a:pPr>
-            <a:r>
               <a:rPr sz="1000" b="0">
                 <a:solidFill>
                   <a:srgbClr val="8A97B5"/>
@@ -9613,7 +8055,839 @@
                 </a:solidFill>
                 <a:latin typeface="微软雅黑"/>
               </a:rPr>
-              <a:t>8 / 13</a:t>
+              <a:t>5 / 15</a:t>
+            </a:r>
+          </a:p>
+        </p:txBody>
+      </p:sp>
+      <p:sp>
+        <p:nvSpPr>
+          <p:cNvPr id="14" name="TextBox 13"/>
+          <p:cNvSpPr txBox="1"/>
+          <p:nvPr/>
+        </p:nvSpPr>
+        <p:spPr>
+          <a:xfrm>
+            <a:off x="457200" y="1389888"/>
+            <a:ext cx="11274552" cy="274320"/>
+          </a:xfrm>
+          <a:prstGeom prst="rect">
+            <a:avLst/>
+          </a:prstGeom>
+          <a:noFill/>
+        </p:spPr>
+        <p:txBody>
+          <a:bodyPr wrap="square">
+            <a:spAutoFit/>
+          </a:bodyPr>
+          <a:lstStyle/>
+          <a:p>
+            <a:r>
+              <a:rPr sz="1050" b="0">
+                <a:solidFill>
+                  <a:srgbClr val="6B7280"/>
+                </a:solidFill>
+                <a:latin typeface="微软雅黑"/>
+              </a:rPr>
+              <a:t>动手前先看这页：重点要会什么、难点会卡在哪、哪里最容易错、学没学会怎么自测。</a:t>
+            </a:r>
+          </a:p>
+        </p:txBody>
+      </p:sp>
+      <p:sp>
+        <p:nvSpPr>
+          <p:cNvPr id="15" name="Rectangle 14"/>
+          <p:cNvSpPr/>
+          <p:nvPr/>
+        </p:nvSpPr>
+        <p:spPr>
+          <a:xfrm>
+            <a:off x="457200" y="1783080"/>
+            <a:ext cx="5532120" cy="3127248"/>
+          </a:xfrm>
+          <a:prstGeom prst="rect">
+            <a:avLst/>
+          </a:prstGeom>
+          <a:solidFill>
+            <a:srgbClr val="FFFFFF"/>
+          </a:solidFill>
+          <a:ln>
+            <a:solidFill>
+              <a:srgbClr val="D6DCE4"/>
+            </a:solidFill>
+          </a:ln>
+          <a:effectLst/>
+        </p:spPr>
+        <p:style>
+          <a:lnRef idx="1">
+            <a:schemeClr val="accent1"/>
+          </a:lnRef>
+          <a:fillRef idx="3">
+            <a:schemeClr val="accent1"/>
+          </a:fillRef>
+          <a:effectRef idx="2">
+            <a:schemeClr val="accent1"/>
+          </a:effectRef>
+          <a:fontRef idx="minor">
+            <a:schemeClr val="lt1"/>
+          </a:fontRef>
+        </p:style>
+        <p:txBody>
+          <a:bodyPr rtlCol="0" anchor="ctr" wrap="square"/>
+          <a:lstStyle/>
+          <a:p>
+            <a:pPr algn="ctr"/>
+          </a:p>
+        </p:txBody>
+      </p:sp>
+      <p:sp>
+        <p:nvSpPr>
+          <p:cNvPr id="16" name="Rectangle 15"/>
+          <p:cNvSpPr/>
+          <p:nvPr/>
+        </p:nvSpPr>
+        <p:spPr>
+          <a:xfrm>
+            <a:off x="457200" y="1783080"/>
+            <a:ext cx="5532120" cy="365760"/>
+          </a:xfrm>
+          <a:prstGeom prst="rect">
+            <a:avLst/>
+          </a:prstGeom>
+          <a:solidFill>
+            <a:srgbClr val="2F5D8C"/>
+          </a:solidFill>
+          <a:ln>
+            <a:noFill/>
+          </a:ln>
+          <a:effectLst/>
+        </p:spPr>
+        <p:style>
+          <a:lnRef idx="1">
+            <a:schemeClr val="accent1"/>
+          </a:lnRef>
+          <a:fillRef idx="3">
+            <a:schemeClr val="accent1"/>
+          </a:fillRef>
+          <a:effectRef idx="2">
+            <a:schemeClr val="accent1"/>
+          </a:effectRef>
+          <a:fontRef idx="minor">
+            <a:schemeClr val="lt1"/>
+          </a:fontRef>
+        </p:style>
+        <p:txBody>
+          <a:bodyPr rtlCol="0" anchor="ctr" wrap="square"/>
+          <a:lstStyle/>
+          <a:p>
+            <a:pPr algn="ctr"/>
+          </a:p>
+        </p:txBody>
+      </p:sp>
+      <p:sp>
+        <p:nvSpPr>
+          <p:cNvPr id="17" name="TextBox 16"/>
+          <p:cNvSpPr txBox="1"/>
+          <p:nvPr/>
+        </p:nvSpPr>
+        <p:spPr>
+          <a:xfrm>
+            <a:off x="566928" y="1819656"/>
+            <a:ext cx="5312664" cy="292608"/>
+          </a:xfrm>
+          <a:prstGeom prst="rect">
+            <a:avLst/>
+          </a:prstGeom>
+          <a:noFill/>
+        </p:spPr>
+        <p:txBody>
+          <a:bodyPr wrap="square">
+            <a:spAutoFit/>
+          </a:bodyPr>
+          <a:lstStyle/>
+          <a:p>
+            <a:r>
+              <a:rPr sz="1150" b="1">
+                <a:solidFill>
+                  <a:srgbClr val="FFFFFF"/>
+                </a:solidFill>
+                <a:latin typeface="微软雅黑"/>
+              </a:rPr>
+              <a:t>重点 · 必会必考（本课知识点全景）</a:t>
+            </a:r>
+          </a:p>
+        </p:txBody>
+      </p:sp>
+      <p:sp>
+        <p:nvSpPr>
+          <p:cNvPr id="18" name="TextBox 17"/>
+          <p:cNvSpPr txBox="1"/>
+          <p:nvPr/>
+        </p:nvSpPr>
+        <p:spPr>
+          <a:xfrm>
+            <a:off x="621792" y="2267712"/>
+            <a:ext cx="5257800" cy="2560320"/>
+          </a:xfrm>
+          <a:prstGeom prst="rect">
+            <a:avLst/>
+          </a:prstGeom>
+          <a:noFill/>
+        </p:spPr>
+        <p:txBody>
+          <a:bodyPr wrap="square">
+            <a:spAutoFit/>
+          </a:bodyPr>
+          <a:lstStyle/>
+          <a:p>
+            <a:r>
+              <a:rPr sz="950" b="0">
+                <a:solidFill>
+                  <a:srgbClr val="2B2F36"/>
+                </a:solidFill>
+                <a:latin typeface="微软雅黑"/>
+              </a:rPr>
+              <a:t>◆ B01 类与实例｜类=图纸，实例=按图纸造出的每台泵——一图多产品</a:t>
+            </a:r>
+          </a:p>
+          <a:p>
+            <a:r>
+              <a:rPr sz="950" b="0">
+                <a:solidFill>
+                  <a:srgbClr val="2B2F36"/>
+                </a:solidFill>
+                <a:latin typeface="微软雅黑"/>
+              </a:rPr>
+              <a:t>◆ B02 __init__与self｜self='我自己'；__init__=出厂设置，造时自动执行</a:t>
+            </a:r>
+          </a:p>
+          <a:p>
+            <a:r>
+              <a:rPr sz="950" b="0">
+                <a:solidFill>
+                  <a:srgbClr val="2B2F36"/>
+                </a:solidFill>
+                <a:latin typeface="微软雅黑"/>
+              </a:rPr>
+              <a:t>◆ B03 实例属性｜属性写在__init__里=每台设备自己的小本本</a:t>
+            </a:r>
+          </a:p>
+          <a:p>
+            <a:r>
+              <a:rPr sz="950" b="0">
+                <a:solidFill>
+                  <a:srgbClr val="2B2F36"/>
+                </a:solidFill>
+                <a:latin typeface="微软雅黑"/>
+              </a:rPr>
+              <a:t>◆ B04 方法调用｜方法=类里装的技能；d.start()=让这台设备执行</a:t>
+            </a:r>
+          </a:p>
+          <a:p>
+            <a:r>
+              <a:rPr sz="950" b="0">
+                <a:solidFill>
+                  <a:srgbClr val="2B2F36"/>
+                </a:solidFill>
+                <a:latin typeface="微软雅黑"/>
+              </a:rPr>
+              <a:t>◆ B05 __str__可读化｜__str__=设备的自我介绍：print时说人话不报内存地址</a:t>
+            </a:r>
+          </a:p>
+          <a:p>
+            <a:r>
+              <a:rPr sz="950" b="0">
+                <a:solidFill>
+                  <a:srgbClr val="2B2F36"/>
+                </a:solidFill>
+                <a:latin typeface="微软雅黑"/>
+              </a:rPr>
+              <a:t>◆ B06 状态校验｜状态机=设备只走合法路线：停机才能启动，运行中拒重复</a:t>
+            </a:r>
+          </a:p>
+        </p:txBody>
+      </p:sp>
+      <p:sp>
+        <p:nvSpPr>
+          <p:cNvPr id="19" name="Rectangle 18"/>
+          <p:cNvSpPr/>
+          <p:nvPr/>
+        </p:nvSpPr>
+        <p:spPr>
+          <a:xfrm>
+            <a:off x="6144768" y="1783080"/>
+            <a:ext cx="5586984" cy="1481328"/>
+          </a:xfrm>
+          <a:prstGeom prst="rect">
+            <a:avLst/>
+          </a:prstGeom>
+          <a:solidFill>
+            <a:srgbClr val="FFFFFF"/>
+          </a:solidFill>
+          <a:ln>
+            <a:solidFill>
+              <a:srgbClr val="D6DCE4"/>
+            </a:solidFill>
+          </a:ln>
+          <a:effectLst/>
+        </p:spPr>
+        <p:style>
+          <a:lnRef idx="1">
+            <a:schemeClr val="accent1"/>
+          </a:lnRef>
+          <a:fillRef idx="3">
+            <a:schemeClr val="accent1"/>
+          </a:fillRef>
+          <a:effectRef idx="2">
+            <a:schemeClr val="accent1"/>
+          </a:effectRef>
+          <a:fontRef idx="minor">
+            <a:schemeClr val="lt1"/>
+          </a:fontRef>
+        </p:style>
+        <p:txBody>
+          <a:bodyPr rtlCol="0" anchor="ctr" wrap="square"/>
+          <a:lstStyle/>
+          <a:p>
+            <a:pPr algn="ctr"/>
+          </a:p>
+        </p:txBody>
+      </p:sp>
+      <p:sp>
+        <p:nvSpPr>
+          <p:cNvPr id="20" name="Rectangle 19"/>
+          <p:cNvSpPr/>
+          <p:nvPr/>
+        </p:nvSpPr>
+        <p:spPr>
+          <a:xfrm>
+            <a:off x="6144768" y="1783080"/>
+            <a:ext cx="5586984" cy="365760"/>
+          </a:xfrm>
+          <a:prstGeom prst="rect">
+            <a:avLst/>
+          </a:prstGeom>
+          <a:solidFill>
+            <a:srgbClr val="8A4B2D"/>
+          </a:solidFill>
+          <a:ln>
+            <a:noFill/>
+          </a:ln>
+          <a:effectLst/>
+        </p:spPr>
+        <p:style>
+          <a:lnRef idx="1">
+            <a:schemeClr val="accent1"/>
+          </a:lnRef>
+          <a:fillRef idx="3">
+            <a:schemeClr val="accent1"/>
+          </a:fillRef>
+          <a:effectRef idx="2">
+            <a:schemeClr val="accent1"/>
+          </a:effectRef>
+          <a:fontRef idx="minor">
+            <a:schemeClr val="lt1"/>
+          </a:fontRef>
+        </p:style>
+        <p:txBody>
+          <a:bodyPr rtlCol="0" anchor="ctr" wrap="square"/>
+          <a:lstStyle/>
+          <a:p>
+            <a:pPr algn="ctr"/>
+          </a:p>
+        </p:txBody>
+      </p:sp>
+      <p:sp>
+        <p:nvSpPr>
+          <p:cNvPr id="21" name="TextBox 20"/>
+          <p:cNvSpPr txBox="1"/>
+          <p:nvPr/>
+        </p:nvSpPr>
+        <p:spPr>
+          <a:xfrm>
+            <a:off x="6254496" y="1819656"/>
+            <a:ext cx="5367528" cy="292608"/>
+          </a:xfrm>
+          <a:prstGeom prst="rect">
+            <a:avLst/>
+          </a:prstGeom>
+          <a:noFill/>
+        </p:spPr>
+        <p:txBody>
+          <a:bodyPr wrap="square">
+            <a:spAutoFit/>
+          </a:bodyPr>
+          <a:lstStyle/>
+          <a:p>
+            <a:r>
+              <a:rPr sz="1150" b="1">
+                <a:solidFill>
+                  <a:srgbClr val="FFFFFF"/>
+                </a:solidFill>
+                <a:latin typeface="微软雅黑"/>
+              </a:rPr>
+              <a:t>难点 · 易卡壳（下一页逐个击破）</a:t>
+            </a:r>
+          </a:p>
+        </p:txBody>
+      </p:sp>
+      <p:sp>
+        <p:nvSpPr>
+          <p:cNvPr id="22" name="TextBox 21"/>
+          <p:cNvSpPr txBox="1"/>
+          <p:nvPr/>
+        </p:nvSpPr>
+        <p:spPr>
+          <a:xfrm>
+            <a:off x="6309360" y="2231136"/>
+            <a:ext cx="5303520" cy="960120"/>
+          </a:xfrm>
+          <a:prstGeom prst="rect">
+            <a:avLst/>
+          </a:prstGeom>
+          <a:noFill/>
+        </p:spPr>
+        <p:txBody>
+          <a:bodyPr wrap="square">
+            <a:spAutoFit/>
+          </a:bodyPr>
+          <a:lstStyle/>
+          <a:p>
+            <a:r>
+              <a:rPr sz="900" b="0">
+                <a:solidFill>
+                  <a:srgbClr val="2B2F36"/>
+                </a:solidFill>
+                <a:latin typeface="微软雅黑"/>
+              </a:rPr>
+              <a:t>▲ 误区：改d1不影响d2——各实例各一份属性，图纸本身不存温度</a:t>
+            </a:r>
+          </a:p>
+          <a:p>
+            <a:r>
+              <a:rPr sz="900" b="0">
+                <a:solidFill>
+                  <a:srgbClr val="2B2F36"/>
+                </a:solidFill>
+                <a:latin typeface="微软雅黑"/>
+              </a:rPr>
+              <a:t>▲ 误区：方法漏写self→TypeError——调用时Python自动传实例</a:t>
+            </a:r>
+          </a:p>
+          <a:p>
+            <a:r>
+              <a:rPr sz="900" b="0">
+                <a:solidFill>
+                  <a:srgbClr val="2B2F36"/>
+                </a:solidFill>
+                <a:latin typeface="微软雅黑"/>
+              </a:rPr>
+              <a:t>▲ 误区：写在类下的属性是全员共享公告栏——改一处全变，慎用</a:t>
+            </a:r>
+          </a:p>
+        </p:txBody>
+      </p:sp>
+      <p:sp>
+        <p:nvSpPr>
+          <p:cNvPr id="23" name="Rectangle 22"/>
+          <p:cNvSpPr/>
+          <p:nvPr/>
+        </p:nvSpPr>
+        <p:spPr>
+          <a:xfrm>
+            <a:off x="6144768" y="3401568"/>
+            <a:ext cx="5586984" cy="1508760"/>
+          </a:xfrm>
+          <a:prstGeom prst="rect">
+            <a:avLst/>
+          </a:prstGeom>
+          <a:solidFill>
+            <a:srgbClr val="FFFFFF"/>
+          </a:solidFill>
+          <a:ln>
+            <a:solidFill>
+              <a:srgbClr val="D6DCE4"/>
+            </a:solidFill>
+          </a:ln>
+          <a:effectLst/>
+        </p:spPr>
+        <p:style>
+          <a:lnRef idx="1">
+            <a:schemeClr val="accent1"/>
+          </a:lnRef>
+          <a:fillRef idx="3">
+            <a:schemeClr val="accent1"/>
+          </a:fillRef>
+          <a:effectRef idx="2">
+            <a:schemeClr val="accent1"/>
+          </a:effectRef>
+          <a:fontRef idx="minor">
+            <a:schemeClr val="lt1"/>
+          </a:fontRef>
+        </p:style>
+        <p:txBody>
+          <a:bodyPr rtlCol="0" anchor="ctr" wrap="square"/>
+          <a:lstStyle/>
+          <a:p>
+            <a:pPr algn="ctr"/>
+          </a:p>
+        </p:txBody>
+      </p:sp>
+      <p:sp>
+        <p:nvSpPr>
+          <p:cNvPr id="24" name="Rectangle 23"/>
+          <p:cNvSpPr/>
+          <p:nvPr/>
+        </p:nvSpPr>
+        <p:spPr>
+          <a:xfrm>
+            <a:off x="6144768" y="3401568"/>
+            <a:ext cx="5586984" cy="365760"/>
+          </a:xfrm>
+          <a:prstGeom prst="rect">
+            <a:avLst/>
+          </a:prstGeom>
+          <a:solidFill>
+            <a:srgbClr val="9A3B3B"/>
+          </a:solidFill>
+          <a:ln>
+            <a:noFill/>
+          </a:ln>
+          <a:effectLst/>
+        </p:spPr>
+        <p:style>
+          <a:lnRef idx="1">
+            <a:schemeClr val="accent1"/>
+          </a:lnRef>
+          <a:fillRef idx="3">
+            <a:schemeClr val="accent1"/>
+          </a:fillRef>
+          <a:effectRef idx="2">
+            <a:schemeClr val="accent1"/>
+          </a:effectRef>
+          <a:fontRef idx="minor">
+            <a:schemeClr val="lt1"/>
+          </a:fontRef>
+        </p:style>
+        <p:txBody>
+          <a:bodyPr rtlCol="0" anchor="ctr" wrap="square"/>
+          <a:lstStyle/>
+          <a:p>
+            <a:pPr algn="ctr"/>
+          </a:p>
+        </p:txBody>
+      </p:sp>
+      <p:sp>
+        <p:nvSpPr>
+          <p:cNvPr id="25" name="TextBox 24"/>
+          <p:cNvSpPr txBox="1"/>
+          <p:nvPr/>
+        </p:nvSpPr>
+        <p:spPr>
+          <a:xfrm>
+            <a:off x="6254496" y="3438144"/>
+            <a:ext cx="5367528" cy="292608"/>
+          </a:xfrm>
+          <a:prstGeom prst="rect">
+            <a:avLst/>
+          </a:prstGeom>
+          <a:noFill/>
+        </p:spPr>
+        <p:txBody>
+          <a:bodyPr wrap="square">
+            <a:spAutoFit/>
+          </a:bodyPr>
+          <a:lstStyle/>
+          <a:p>
+            <a:r>
+              <a:rPr sz="1150" b="1">
+                <a:solidFill>
+                  <a:srgbClr val="FFFFFF"/>
+                </a:solidFill>
+                <a:latin typeface="微软雅黑"/>
+              </a:rPr>
+              <a:t>高频易错 · 动手前先记住</a:t>
+            </a:r>
+          </a:p>
+        </p:txBody>
+      </p:sp>
+      <p:sp>
+        <p:nvSpPr>
+          <p:cNvPr id="26" name="TextBox 25"/>
+          <p:cNvSpPr txBox="1"/>
+          <p:nvPr/>
+        </p:nvSpPr>
+        <p:spPr>
+          <a:xfrm>
+            <a:off x="6309360" y="3849624"/>
+            <a:ext cx="5303520" cy="960120"/>
+          </a:xfrm>
+          <a:prstGeom prst="rect">
+            <a:avLst/>
+          </a:prstGeom>
+          <a:noFill/>
+        </p:spPr>
+        <p:txBody>
+          <a:bodyPr wrap="square">
+            <a:spAutoFit/>
+          </a:bodyPr>
+          <a:lstStyle/>
+          <a:p>
+            <a:r>
+              <a:rPr sz="900" b="0">
+                <a:solidFill>
+                  <a:srgbClr val="2B2F36"/>
+                </a:solidFill>
+                <a:latin typeface="微软雅黑"/>
+              </a:rPr>
+              <a:t>✗ 漏self → 方法第一参数写self</a:t>
+            </a:r>
+          </a:p>
+          <a:p>
+            <a:r>
+              <a:rPr sz="900" b="0">
+                <a:solidFill>
+                  <a:srgbClr val="2B2F36"/>
+                </a:solidFill>
+                <a:latin typeface="微软雅黑"/>
+              </a:rPr>
+              <a:t>✗ 属性被共享 → 移入__init__</a:t>
+            </a:r>
+          </a:p>
+          <a:p>
+            <a:r>
+              <a:rPr sz="900" b="0">
+                <a:solidFill>
+                  <a:srgbClr val="2B2F36"/>
+                </a:solidFill>
+                <a:latin typeface="微软雅黑"/>
+              </a:rPr>
+              <a:t>✗ d.start无输出 → d.start()才调用</a:t>
+            </a:r>
+          </a:p>
+        </p:txBody>
+      </p:sp>
+      <p:sp>
+        <p:nvSpPr>
+          <p:cNvPr id="27" name="Rectangle 26"/>
+          <p:cNvSpPr/>
+          <p:nvPr/>
+        </p:nvSpPr>
+        <p:spPr>
+          <a:xfrm>
+            <a:off x="457200" y="5047488"/>
+            <a:ext cx="11274552" cy="1207008"/>
+          </a:xfrm>
+          <a:prstGeom prst="rect">
+            <a:avLst/>
+          </a:prstGeom>
+          <a:solidFill>
+            <a:srgbClr val="FFFFFF"/>
+          </a:solidFill>
+          <a:ln>
+            <a:solidFill>
+              <a:srgbClr val="D6DCE4"/>
+            </a:solidFill>
+          </a:ln>
+          <a:effectLst/>
+        </p:spPr>
+        <p:style>
+          <a:lnRef idx="1">
+            <a:schemeClr val="accent1"/>
+          </a:lnRef>
+          <a:fillRef idx="3">
+            <a:schemeClr val="accent1"/>
+          </a:fillRef>
+          <a:effectRef idx="2">
+            <a:schemeClr val="accent1"/>
+          </a:effectRef>
+          <a:fontRef idx="minor">
+            <a:schemeClr val="lt1"/>
+          </a:fontRef>
+        </p:style>
+        <p:txBody>
+          <a:bodyPr rtlCol="0" anchor="ctr" wrap="square"/>
+          <a:lstStyle/>
+          <a:p>
+            <a:pPr algn="ctr"/>
+          </a:p>
+        </p:txBody>
+      </p:sp>
+      <p:sp>
+        <p:nvSpPr>
+          <p:cNvPr id="28" name="Rectangle 27"/>
+          <p:cNvSpPr/>
+          <p:nvPr/>
+        </p:nvSpPr>
+        <p:spPr>
+          <a:xfrm>
+            <a:off x="457200" y="5047488"/>
+            <a:ext cx="11274552" cy="365760"/>
+          </a:xfrm>
+          <a:prstGeom prst="rect">
+            <a:avLst/>
+          </a:prstGeom>
+          <a:solidFill>
+            <a:srgbClr val="2E7D46"/>
+          </a:solidFill>
+          <a:ln>
+            <a:noFill/>
+          </a:ln>
+          <a:effectLst/>
+        </p:spPr>
+        <p:style>
+          <a:lnRef idx="1">
+            <a:schemeClr val="accent1"/>
+          </a:lnRef>
+          <a:fillRef idx="3">
+            <a:schemeClr val="accent1"/>
+          </a:fillRef>
+          <a:effectRef idx="2">
+            <a:schemeClr val="accent1"/>
+          </a:effectRef>
+          <a:fontRef idx="minor">
+            <a:schemeClr val="lt1"/>
+          </a:fontRef>
+        </p:style>
+        <p:txBody>
+          <a:bodyPr rtlCol="0" anchor="ctr" wrap="square"/>
+          <a:lstStyle/>
+          <a:p>
+            <a:pPr algn="ctr"/>
+          </a:p>
+        </p:txBody>
+      </p:sp>
+      <p:sp>
+        <p:nvSpPr>
+          <p:cNvPr id="29" name="TextBox 28"/>
+          <p:cNvSpPr txBox="1"/>
+          <p:nvPr/>
+        </p:nvSpPr>
+        <p:spPr>
+          <a:xfrm>
+            <a:off x="566928" y="5084064"/>
+            <a:ext cx="11055096" cy="292608"/>
+          </a:xfrm>
+          <a:prstGeom prst="rect">
+            <a:avLst/>
+          </a:prstGeom>
+          <a:noFill/>
+        </p:spPr>
+        <p:txBody>
+          <a:bodyPr wrap="square">
+            <a:spAutoFit/>
+          </a:bodyPr>
+          <a:lstStyle/>
+          <a:p>
+            <a:r>
+              <a:rPr sz="1150" b="1">
+                <a:solidFill>
+                  <a:srgbClr val="FFFFFF"/>
+                </a:solidFill>
+                <a:latin typeface="微软雅黑"/>
+              </a:rPr>
+              <a:t>达标自问 · 学没学会，问自己这四句（当堂评分同口径）</a:t>
+            </a:r>
+          </a:p>
+        </p:txBody>
+      </p:sp>
+      <p:sp>
+        <p:nvSpPr>
+          <p:cNvPr id="30" name="TextBox 29"/>
+          <p:cNvSpPr txBox="1"/>
+          <p:nvPr/>
+        </p:nvSpPr>
+        <p:spPr>
+          <a:xfrm>
+            <a:off x="621792" y="5458968"/>
+            <a:ext cx="10972800" cy="768096"/>
+          </a:xfrm>
+          <a:prstGeom prst="rect">
+            <a:avLst/>
+          </a:prstGeom>
+          <a:noFill/>
+        </p:spPr>
+        <p:txBody>
+          <a:bodyPr wrap="square">
+            <a:spAutoFit/>
+          </a:bodyPr>
+          <a:lstStyle/>
+          <a:p>
+            <a:r>
+              <a:rPr sz="900" b="0">
+                <a:solidFill>
+                  <a:srgbClr val="2B2F36"/>
+                </a:solidFill>
+                <a:latin typeface="微软雅黑"/>
+              </a:rPr>
+              <a:t>① 及格线我能过吗——1类+2属性+2方法+2实例</a:t>
+            </a:r>
+          </a:p>
+          <a:p>
+            <a:r>
+              <a:rPr sz="900" b="0">
+                <a:solidFill>
+                  <a:srgbClr val="2B2F36"/>
+                </a:solidFill>
+                <a:latin typeface="微软雅黑"/>
+              </a:rPr>
+              <a:t>② 优秀线我够吗——状态校验完善；内存图正确</a:t>
+            </a:r>
+          </a:p>
+          <a:p>
+            <a:r>
+              <a:rPr sz="900" b="0">
+                <a:solidFill>
+                  <a:srgbClr val="2B2F36"/>
+                </a:solidFill>
+                <a:latin typeface="微软雅黑"/>
+              </a:rPr>
+              <a:t>③ 技能点我能独立做出来吗——设计Device类(属性+方法)；创建多实例并演示属性隔离</a:t>
+            </a:r>
+          </a:p>
+          <a:p>
+            <a:r>
+              <a:rPr sz="900" b="0">
+                <a:solidFill>
+                  <a:srgbClr val="2B2F36"/>
+                </a:solidFill>
+                <a:latin typeface="微软雅黑"/>
+              </a:rPr>
+              <a:t>④ 报错了先查「常见错误速查」页再举手——错误信息逐字读一遍，八成自己能修</a:t>
+            </a:r>
+          </a:p>
+        </p:txBody>
+      </p:sp>
+      <p:sp>
+        <p:nvSpPr>
+          <p:cNvPr id="31" name="TextBox 30"/>
+          <p:cNvSpPr txBox="1"/>
+          <p:nvPr/>
+        </p:nvSpPr>
+        <p:spPr>
+          <a:xfrm>
+            <a:off x="457200" y="6281928"/>
+            <a:ext cx="9601200" cy="182880"/>
+          </a:xfrm>
+          <a:prstGeom prst="rect">
+            <a:avLst/>
+          </a:prstGeom>
+          <a:noFill/>
+        </p:spPr>
+        <p:txBody>
+          <a:bodyPr wrap="square">
+            <a:spAutoFit/>
+          </a:bodyPr>
+          <a:lstStyle/>
+          <a:p>
+            <a:r>
+              <a:rPr sz="900" b="0">
+                <a:solidFill>
+                  <a:srgbClr val="6B7280"/>
+                </a:solidFill>
+                <a:latin typeface="微软雅黑"/>
+              </a:rPr>
+              <a:t>素材来源：同周《第7次课-从图纸到对象：设备建模》知识卡与避坑清单（逐字摘录）</a:t>
             </a:r>
           </a:p>
         </p:txBody>
@@ -9761,27 +9035,27 @@
                 </a:solidFill>
                 <a:latin typeface="微软雅黑"/>
               </a:rPr>
-              <a:t>总结评价与课后任务</a:t>
-            </a:r>
-          </a:p>
-        </p:txBody>
-      </p:sp>
-      <p:sp>
-        <p:nvSpPr>
-          <p:cNvPr id="5" name="Rectangle 4"/>
+              <a:t>难点逐个击破 · 零基础照做就能会</a:t>
+            </a:r>
+          </a:p>
+        </p:txBody>
+      </p:sp>
+      <p:sp>
+        <p:nvSpPr>
+          <p:cNvPr id="11" name="Rectangle 10"/>
           <p:cNvSpPr/>
           <p:nvPr/>
         </p:nvSpPr>
         <p:spPr>
           <a:xfrm>
-            <a:off x="800000" y="1950000"/>
-            <a:ext cx="10600000" cy="1500000"/>
+            <a:off x="500000" y="6500000"/>
+            <a:ext cx="11100000" cy="20000"/>
           </a:xfrm>
           <a:prstGeom prst="rect">
             <a:avLst/>
           </a:prstGeom>
           <a:solidFill>
-            <a:srgbClr val="F3F6FD"/>
+            <a:srgbClr val="C9D4EE"/>
           </a:solidFill>
           <a:ln>
             <a:noFill/>
@@ -9812,14 +9086,14 @@
       </p:sp>
       <p:sp>
         <p:nvSpPr>
-          <p:cNvPr id="6" name="TextBox 5"/>
+          <p:cNvPr id="12" name="TextBox 11"/>
           <p:cNvSpPr txBox="1"/>
           <p:nvPr/>
         </p:nvSpPr>
         <p:spPr>
           <a:xfrm>
-            <a:off x="1000000" y="2050000"/>
-            <a:ext cx="10300000" cy="1400000"/>
+            <a:off x="500000" y="6540000"/>
+            <a:ext cx="7000000" cy="300000"/>
           </a:xfrm>
           <a:prstGeom prst="rect">
             <a:avLst/>
@@ -9841,315 +9115,6 @@
               </a:spcAft>
             </a:pPr>
             <a:r>
-              <a:rPr sz="1500" b="1">
-                <a:solidFill>
-                  <a:srgbClr val="0545E8"/>
-                </a:solidFill>
-                <a:latin typeface="微软雅黑"/>
-              </a:rPr>
-              <a:t>评价（10分钟）：</a:t>
-            </a:r>
-          </a:p>
-          <a:p>
-            <a:pPr algn="l">
-              <a:lnSpc>
-                <a:spcPct val="110000"/>
-              </a:lnSpc>
-              <a:spcAft>
-                <a:spcPts val="600"/>
-              </a:spcAft>
-            </a:pPr>
-            <a:r>
-              <a:rPr sz="1400" b="0">
-                <a:solidFill>
-                  <a:srgbClr val="010328"/>
-                </a:solidFill>
-                <a:latin typeface="微软雅黑"/>
-              </a:rPr>
-              <a:t>按D/C/B/A量表当堂评分；工单24小时内反馈评语与改进建议。</a:t>
-            </a:r>
-          </a:p>
-        </p:txBody>
-      </p:sp>
-      <p:sp>
-        <p:nvSpPr>
-          <p:cNvPr id="7" name="TextBox 6"/>
-          <p:cNvSpPr txBox="1"/>
-          <p:nvPr/>
-        </p:nvSpPr>
-        <p:spPr>
-          <a:xfrm>
-            <a:off x="850000" y="3700000"/>
-            <a:ext cx="10600000" cy="700000"/>
-          </a:xfrm>
-          <a:prstGeom prst="rect">
-            <a:avLst/>
-          </a:prstGeom>
-          <a:noFill/>
-        </p:spPr>
-        <p:txBody>
-          <a:bodyPr wrap="square" anchor="t">
-            <a:spAutoFit/>
-          </a:bodyPr>
-          <a:lstStyle/>
-          <a:p>
-            <a:pPr algn="l">
-              <a:lnSpc>
-                <a:spcPct val="120000"/>
-              </a:lnSpc>
-              <a:spcAft>
-                <a:spcPts val="600"/>
-              </a:spcAft>
-            </a:pPr>
-            <a:r>
-              <a:rPr sz="1400" b="1">
-                <a:solidFill>
-                  <a:srgbClr val="F5670F"/>
-                </a:solidFill>
-                <a:latin typeface="微软雅黑"/>
-              </a:rPr>
-              <a:t>1. </a:t>
-            </a:r>
-            <a:r>
-              <a:rPr sz="1400" b="0">
-                <a:solidFill>
-                  <a:srgbClr val="010328"/>
-                </a:solidFill>
-                <a:latin typeface="微软雅黑"/>
-              </a:rPr>
-              <a:t>1. 完成工单项目0.3《工业设备类设计》：及格标准1类+2属性+2方法+2实例；优秀标准≥3属性、≥3方法、3实例并使用__init__；</a:t>
-            </a:r>
-          </a:p>
-        </p:txBody>
-      </p:sp>
-      <p:sp>
-        <p:nvSpPr>
-          <p:cNvPr id="8" name="TextBox 7"/>
-          <p:cNvSpPr txBox="1"/>
-          <p:nvPr/>
-        </p:nvSpPr>
-        <p:spPr>
-          <a:xfrm>
-            <a:off x="850000" y="4420000"/>
-            <a:ext cx="10600000" cy="700000"/>
-          </a:xfrm>
-          <a:prstGeom prst="rect">
-            <a:avLst/>
-          </a:prstGeom>
-          <a:noFill/>
-        </p:spPr>
-        <p:txBody>
-          <a:bodyPr wrap="square" anchor="t">
-            <a:spAutoFit/>
-          </a:bodyPr>
-          <a:lstStyle/>
-          <a:p>
-            <a:pPr algn="l">
-              <a:lnSpc>
-                <a:spcPct val="120000"/>
-              </a:lnSpc>
-              <a:spcAft>
-                <a:spcPts val="600"/>
-              </a:spcAft>
-            </a:pPr>
-            <a:r>
-              <a:rPr sz="1400" b="1">
-                <a:solidFill>
-                  <a:srgbClr val="F5670F"/>
-                </a:solidFill>
-                <a:latin typeface="微软雅黑"/>
-              </a:rPr>
-              <a:t>2. </a:t>
-            </a:r>
-            <a:r>
-              <a:rPr sz="1400" b="0">
-                <a:solidFill>
-                  <a:srgbClr val="010328"/>
-                </a:solidFill>
-                <a:latin typeface="微软雅黑"/>
-              </a:rPr>
-              <a:t>2. 用自己的话写一段“什么是对象”的理解笔记；</a:t>
-            </a:r>
-          </a:p>
-        </p:txBody>
-      </p:sp>
-      <p:sp>
-        <p:nvSpPr>
-          <p:cNvPr id="9" name="TextBox 8"/>
-          <p:cNvSpPr txBox="1"/>
-          <p:nvPr/>
-        </p:nvSpPr>
-        <p:spPr>
-          <a:xfrm>
-            <a:off x="850000" y="5140000"/>
-            <a:ext cx="10600000" cy="700000"/>
-          </a:xfrm>
-          <a:prstGeom prst="rect">
-            <a:avLst/>
-          </a:prstGeom>
-          <a:noFill/>
-        </p:spPr>
-        <p:txBody>
-          <a:bodyPr wrap="square" anchor="t">
-            <a:spAutoFit/>
-          </a:bodyPr>
-          <a:lstStyle/>
-          <a:p>
-            <a:pPr algn="l">
-              <a:lnSpc>
-                <a:spcPct val="120000"/>
-              </a:lnSpc>
-              <a:spcAft>
-                <a:spcPts val="600"/>
-              </a:spcAft>
-            </a:pPr>
-            <a:r>
-              <a:rPr sz="1400" b="1">
-                <a:solidFill>
-                  <a:srgbClr val="F5670F"/>
-                </a:solidFill>
-                <a:latin typeface="微软雅黑"/>
-              </a:rPr>
-              <a:t>3. </a:t>
-            </a:r>
-            <a:r>
-              <a:rPr sz="1400" b="0">
-                <a:solidFill>
-                  <a:srgbClr val="010328"/>
-                </a:solidFill>
-                <a:latin typeface="微软雅黑"/>
-              </a:rPr>
-              <a:t>3. 预习继承的概念。</a:t>
-            </a:r>
-          </a:p>
-        </p:txBody>
-      </p:sp>
-      <p:sp>
-        <p:nvSpPr>
-          <p:cNvPr id="10" name="TextBox 9"/>
-          <p:cNvSpPr txBox="1"/>
-          <p:nvPr/>
-        </p:nvSpPr>
-        <p:spPr>
-          <a:xfrm>
-            <a:off x="850000" y="5960000"/>
-            <a:ext cx="10600000" cy="500000"/>
-          </a:xfrm>
-          <a:prstGeom prst="rect">
-            <a:avLst/>
-          </a:prstGeom>
-          <a:noFill/>
-        </p:spPr>
-        <p:txBody>
-          <a:bodyPr wrap="square" anchor="t">
-            <a:spAutoFit/>
-          </a:bodyPr>
-          <a:lstStyle/>
-          <a:p>
-            <a:pPr algn="l">
-              <a:lnSpc>
-                <a:spcPct val="110000"/>
-              </a:lnSpc>
-              <a:spcAft>
-                <a:spcPts val="600"/>
-              </a:spcAft>
-            </a:pPr>
-            <a:r>
-              <a:rPr sz="1300" b="1">
-                <a:solidFill>
-                  <a:srgbClr val="0475B6"/>
-                </a:solidFill>
-                <a:latin typeface="微软雅黑"/>
-              </a:rPr>
-              <a:t>下次课预告：</a:t>
-            </a:r>
-            <a:r>
-              <a:rPr sz="1300" b="0">
-                <a:solidFill>
-                  <a:srgbClr val="44546A"/>
-                </a:solidFill>
-                <a:latin typeface="微软雅黑"/>
-              </a:rPr>
-              <a:t>见下次课工单任务书</a:t>
-            </a:r>
-          </a:p>
-        </p:txBody>
-      </p:sp>
-      <p:sp>
-        <p:nvSpPr>
-          <p:cNvPr id="11" name="Rectangle 10"/>
-          <p:cNvSpPr/>
-          <p:nvPr/>
-        </p:nvSpPr>
-        <p:spPr>
-          <a:xfrm>
-            <a:off x="500000" y="6500000"/>
-            <a:ext cx="11100000" cy="20000"/>
-          </a:xfrm>
-          <a:prstGeom prst="rect">
-            <a:avLst/>
-          </a:prstGeom>
-          <a:solidFill>
-            <a:srgbClr val="C9D4EE"/>
-          </a:solidFill>
-          <a:ln>
-            <a:noFill/>
-          </a:ln>
-          <a:effectLst/>
-        </p:spPr>
-        <p:style>
-          <a:lnRef idx="1">
-            <a:schemeClr val="accent1"/>
-          </a:lnRef>
-          <a:fillRef idx="3">
-            <a:schemeClr val="accent1"/>
-          </a:fillRef>
-          <a:effectRef idx="2">
-            <a:schemeClr val="accent1"/>
-          </a:effectRef>
-          <a:fontRef idx="minor">
-            <a:schemeClr val="lt1"/>
-          </a:fontRef>
-        </p:style>
-        <p:txBody>
-          <a:bodyPr rtlCol="0" anchor="ctr"/>
-          <a:lstStyle/>
-          <a:p>
-            <a:pPr algn="ctr"/>
-          </a:p>
-        </p:txBody>
-      </p:sp>
-      <p:sp>
-        <p:nvSpPr>
-          <p:cNvPr id="12" name="TextBox 11"/>
-          <p:cNvSpPr txBox="1"/>
-          <p:nvPr/>
-        </p:nvSpPr>
-        <p:spPr>
-          <a:xfrm>
-            <a:off x="500000" y="6540000"/>
-            <a:ext cx="7000000" cy="300000"/>
-          </a:xfrm>
-          <a:prstGeom prst="rect">
-            <a:avLst/>
-          </a:prstGeom>
-          <a:noFill/>
-        </p:spPr>
-        <p:txBody>
-          <a:bodyPr wrap="square" anchor="t">
-            <a:spAutoFit/>
-          </a:bodyPr>
-          <a:lstStyle/>
-          <a:p>
-            <a:pPr algn="l">
-              <a:lnSpc>
-                <a:spcPct val="110000"/>
-              </a:lnSpc>
-              <a:spcAft>
-                <a:spcPts val="600"/>
-              </a:spcAft>
-            </a:pPr>
-            <a:r>
               <a:rPr sz="1000" b="0">
                 <a:solidFill>
                   <a:srgbClr val="8A97B5"/>
@@ -10198,7 +9163,1025 @@
                 </a:solidFill>
                 <a:latin typeface="微软雅黑"/>
               </a:rPr>
-              <a:t>9 / 13</a:t>
+              <a:t>6 / 15</a:t>
+            </a:r>
+          </a:p>
+        </p:txBody>
+      </p:sp>
+      <p:sp>
+        <p:nvSpPr>
+          <p:cNvPr id="14" name="TextBox 13"/>
+          <p:cNvSpPr txBox="1"/>
+          <p:nvPr/>
+        </p:nvSpPr>
+        <p:spPr>
+          <a:xfrm>
+            <a:off x="457200" y="1389888"/>
+            <a:ext cx="11274552" cy="274320"/>
+          </a:xfrm>
+          <a:prstGeom prst="rect">
+            <a:avLst/>
+          </a:prstGeom>
+          <a:noFill/>
+        </p:spPr>
+        <p:txBody>
+          <a:bodyPr wrap="square">
+            <a:spAutoFit/>
+          </a:bodyPr>
+          <a:lstStyle/>
+          <a:p>
+            <a:r>
+              <a:rPr sz="1050" b="0">
+                <a:solidFill>
+                  <a:srgbClr val="6B7280"/>
+                </a:solidFill>
+                <a:latin typeface="微软雅黑"/>
+              </a:rPr>
+              <a:t>每个难点四步走：先看「为什么容易栽」对号入座 → 记住「一招破解」→ 照「动手验证」做一遍 → 做不出回知识详解页。</a:t>
+            </a:r>
+          </a:p>
+        </p:txBody>
+      </p:sp>
+      <p:sp>
+        <p:nvSpPr>
+          <p:cNvPr id="15" name="Rectangle 14"/>
+          <p:cNvSpPr/>
+          <p:nvPr/>
+        </p:nvSpPr>
+        <p:spPr>
+          <a:xfrm>
+            <a:off x="457200" y="1783080"/>
+            <a:ext cx="11274552" cy="1481328"/>
+          </a:xfrm>
+          <a:prstGeom prst="rect">
+            <a:avLst/>
+          </a:prstGeom>
+          <a:solidFill>
+            <a:srgbClr val="F7F9FC"/>
+          </a:solidFill>
+          <a:ln>
+            <a:solidFill>
+              <a:srgbClr val="D6DCE4"/>
+            </a:solidFill>
+          </a:ln>
+          <a:effectLst/>
+        </p:spPr>
+        <p:style>
+          <a:lnRef idx="1">
+            <a:schemeClr val="accent1"/>
+          </a:lnRef>
+          <a:fillRef idx="3">
+            <a:schemeClr val="accent1"/>
+          </a:fillRef>
+          <a:effectRef idx="2">
+            <a:schemeClr val="accent1"/>
+          </a:effectRef>
+          <a:fontRef idx="minor">
+            <a:schemeClr val="lt1"/>
+          </a:fontRef>
+        </p:style>
+        <p:txBody>
+          <a:bodyPr rtlCol="0" anchor="ctr" wrap="square"/>
+          <a:lstStyle/>
+          <a:p>
+            <a:pPr algn="ctr"/>
+          </a:p>
+        </p:txBody>
+      </p:sp>
+      <p:sp>
+        <p:nvSpPr>
+          <p:cNvPr id="16" name="Rectangle 15"/>
+          <p:cNvSpPr/>
+          <p:nvPr/>
+        </p:nvSpPr>
+        <p:spPr>
+          <a:xfrm>
+            <a:off x="457200" y="1783080"/>
+            <a:ext cx="82296" cy="1481328"/>
+          </a:xfrm>
+          <a:prstGeom prst="rect">
+            <a:avLst/>
+          </a:prstGeom>
+          <a:solidFill>
+            <a:srgbClr val="8A4B2D"/>
+          </a:solidFill>
+          <a:ln>
+            <a:noFill/>
+          </a:ln>
+          <a:effectLst/>
+        </p:spPr>
+        <p:style>
+          <a:lnRef idx="1">
+            <a:schemeClr val="accent1"/>
+          </a:lnRef>
+          <a:fillRef idx="3">
+            <a:schemeClr val="accent1"/>
+          </a:fillRef>
+          <a:effectRef idx="2">
+            <a:schemeClr val="accent1"/>
+          </a:effectRef>
+          <a:fontRef idx="minor">
+            <a:schemeClr val="lt1"/>
+          </a:fontRef>
+        </p:style>
+        <p:txBody>
+          <a:bodyPr rtlCol="0" anchor="ctr" wrap="square"/>
+          <a:lstStyle/>
+          <a:p>
+            <a:pPr algn="ctr"/>
+          </a:p>
+        </p:txBody>
+      </p:sp>
+      <p:sp>
+        <p:nvSpPr>
+          <p:cNvPr id="17" name="TextBox 16"/>
+          <p:cNvSpPr txBox="1"/>
+          <p:nvPr/>
+        </p:nvSpPr>
+        <p:spPr>
+          <a:xfrm>
+            <a:off x="658368" y="1828800"/>
+            <a:ext cx="10972800" cy="274320"/>
+          </a:xfrm>
+          <a:prstGeom prst="rect">
+            <a:avLst/>
+          </a:prstGeom>
+          <a:noFill/>
+        </p:spPr>
+        <p:txBody>
+          <a:bodyPr wrap="square">
+            <a:spAutoFit/>
+          </a:bodyPr>
+          <a:lstStyle/>
+          <a:p>
+            <a:r>
+              <a:rPr sz="1100" b="1">
+                <a:solidFill>
+                  <a:srgbClr val="8A4B2D"/>
+                </a:solidFill>
+                <a:latin typeface="微软雅黑"/>
+              </a:rPr>
+              <a:t>难点1：B01 类与实例</a:t>
+            </a:r>
+          </a:p>
+        </p:txBody>
+      </p:sp>
+      <p:sp>
+        <p:nvSpPr>
+          <p:cNvPr id="18" name="TextBox 17"/>
+          <p:cNvSpPr txBox="1"/>
+          <p:nvPr/>
+        </p:nvSpPr>
+        <p:spPr>
+          <a:xfrm>
+            <a:off x="658368" y="2148840"/>
+            <a:ext cx="3566160" cy="219456"/>
+          </a:xfrm>
+          <a:prstGeom prst="rect">
+            <a:avLst/>
+          </a:prstGeom>
+          <a:noFill/>
+        </p:spPr>
+        <p:txBody>
+          <a:bodyPr wrap="square">
+            <a:spAutoFit/>
+          </a:bodyPr>
+          <a:lstStyle/>
+          <a:p>
+            <a:r>
+              <a:rPr sz="900" b="1">
+                <a:solidFill>
+                  <a:srgbClr val="B5533A"/>
+                </a:solidFill>
+                <a:latin typeface="微软雅黑"/>
+              </a:rPr>
+              <a:t>为什么容易栽</a:t>
+            </a:r>
+          </a:p>
+        </p:txBody>
+      </p:sp>
+      <p:sp>
+        <p:nvSpPr>
+          <p:cNvPr id="19" name="TextBox 18"/>
+          <p:cNvSpPr txBox="1"/>
+          <p:nvPr/>
+        </p:nvSpPr>
+        <p:spPr>
+          <a:xfrm>
+            <a:off x="658368" y="2386584"/>
+            <a:ext cx="3584448" cy="822960"/>
+          </a:xfrm>
+          <a:prstGeom prst="rect">
+            <a:avLst/>
+          </a:prstGeom>
+          <a:noFill/>
+        </p:spPr>
+        <p:txBody>
+          <a:bodyPr wrap="square">
+            <a:spAutoFit/>
+          </a:bodyPr>
+          <a:lstStyle/>
+          <a:p>
+            <a:r>
+              <a:rPr sz="900" b="0">
+                <a:solidFill>
+                  <a:srgbClr val="2B2F36"/>
+                </a:solidFill>
+                <a:latin typeface="微软雅黑"/>
+              </a:rPr>
+              <a:t>误区：改d1不影响d2——各实例各一份属性，图纸本身不存温度</a:t>
+            </a:r>
+          </a:p>
+        </p:txBody>
+      </p:sp>
+      <p:sp>
+        <p:nvSpPr>
+          <p:cNvPr id="20" name="TextBox 19"/>
+          <p:cNvSpPr txBox="1"/>
+          <p:nvPr/>
+        </p:nvSpPr>
+        <p:spPr>
+          <a:xfrm>
+            <a:off x="4334255" y="2148840"/>
+            <a:ext cx="3566160" cy="219456"/>
+          </a:xfrm>
+          <a:prstGeom prst="rect">
+            <a:avLst/>
+          </a:prstGeom>
+          <a:noFill/>
+        </p:spPr>
+        <p:txBody>
+          <a:bodyPr wrap="square">
+            <a:spAutoFit/>
+          </a:bodyPr>
+          <a:lstStyle/>
+          <a:p>
+            <a:r>
+              <a:rPr sz="900" b="1">
+                <a:solidFill>
+                  <a:srgbClr val="2E7D46"/>
+                </a:solidFill>
+                <a:latin typeface="微软雅黑"/>
+              </a:rPr>
+              <a:t>一招破解（记住这句）</a:t>
+            </a:r>
+          </a:p>
+        </p:txBody>
+      </p:sp>
+      <p:sp>
+        <p:nvSpPr>
+          <p:cNvPr id="21" name="TextBox 20"/>
+          <p:cNvSpPr txBox="1"/>
+          <p:nvPr/>
+        </p:nvSpPr>
+        <p:spPr>
+          <a:xfrm>
+            <a:off x="4334255" y="2386584"/>
+            <a:ext cx="3584448" cy="822960"/>
+          </a:xfrm>
+          <a:prstGeom prst="rect">
+            <a:avLst/>
+          </a:prstGeom>
+          <a:noFill/>
+        </p:spPr>
+        <p:txBody>
+          <a:bodyPr wrap="square">
+            <a:spAutoFit/>
+          </a:bodyPr>
+          <a:lstStyle/>
+          <a:p>
+            <a:r>
+              <a:rPr sz="900" b="0">
+                <a:solidFill>
+                  <a:srgbClr val="2B2F36"/>
+                </a:solidFill>
+                <a:latin typeface="微软雅黑"/>
+              </a:rPr>
+              <a:t>类=图纸，实例=按图纸造出的每台泵——一图多产品</a:t>
+            </a:r>
+          </a:p>
+        </p:txBody>
+      </p:sp>
+      <p:sp>
+        <p:nvSpPr>
+          <p:cNvPr id="22" name="TextBox 21"/>
+          <p:cNvSpPr txBox="1"/>
+          <p:nvPr/>
+        </p:nvSpPr>
+        <p:spPr>
+          <a:xfrm>
+            <a:off x="8010143" y="2148840"/>
+            <a:ext cx="3566160" cy="219456"/>
+          </a:xfrm>
+          <a:prstGeom prst="rect">
+            <a:avLst/>
+          </a:prstGeom>
+          <a:noFill/>
+        </p:spPr>
+        <p:txBody>
+          <a:bodyPr wrap="square">
+            <a:spAutoFit/>
+          </a:bodyPr>
+          <a:lstStyle/>
+          <a:p>
+            <a:r>
+              <a:rPr sz="900" b="1">
+                <a:solidFill>
+                  <a:srgbClr val="35506E"/>
+                </a:solidFill>
+                <a:latin typeface="微软雅黑"/>
+              </a:rPr>
+              <a:t>动手验证（照做一遍）</a:t>
+            </a:r>
+          </a:p>
+        </p:txBody>
+      </p:sp>
+      <p:sp>
+        <p:nvSpPr>
+          <p:cNvPr id="23" name="TextBox 22"/>
+          <p:cNvSpPr txBox="1"/>
+          <p:nvPr/>
+        </p:nvSpPr>
+        <p:spPr>
+          <a:xfrm>
+            <a:off x="8010143" y="2386584"/>
+            <a:ext cx="3584448" cy="822960"/>
+          </a:xfrm>
+          <a:prstGeom prst="rect">
+            <a:avLst/>
+          </a:prstGeom>
+          <a:noFill/>
+        </p:spPr>
+        <p:txBody>
+          <a:bodyPr wrap="square">
+            <a:spAutoFit/>
+          </a:bodyPr>
+          <a:lstStyle/>
+          <a:p>
+            <a:r>
+              <a:rPr sz="900" b="0">
+                <a:solidFill>
+                  <a:srgbClr val="2B2F36"/>
+                </a:solidFill>
+                <a:latin typeface="微软雅黑"/>
+              </a:rPr>
+              <a:t>一类设备抽象成类，每台设备是独立实例 class Device: … ；d1=Device('PUMP-03')</a:t>
+            </a:r>
+          </a:p>
+        </p:txBody>
+      </p:sp>
+      <p:sp>
+        <p:nvSpPr>
+          <p:cNvPr id="24" name="Rectangle 23"/>
+          <p:cNvSpPr/>
+          <p:nvPr/>
+        </p:nvSpPr>
+        <p:spPr>
+          <a:xfrm>
+            <a:off x="457200" y="3383280"/>
+            <a:ext cx="11274552" cy="1481328"/>
+          </a:xfrm>
+          <a:prstGeom prst="rect">
+            <a:avLst/>
+          </a:prstGeom>
+          <a:solidFill>
+            <a:srgbClr val="F7F9FC"/>
+          </a:solidFill>
+          <a:ln>
+            <a:solidFill>
+              <a:srgbClr val="D6DCE4"/>
+            </a:solidFill>
+          </a:ln>
+          <a:effectLst/>
+        </p:spPr>
+        <p:style>
+          <a:lnRef idx="1">
+            <a:schemeClr val="accent1"/>
+          </a:lnRef>
+          <a:fillRef idx="3">
+            <a:schemeClr val="accent1"/>
+          </a:fillRef>
+          <a:effectRef idx="2">
+            <a:schemeClr val="accent1"/>
+          </a:effectRef>
+          <a:fontRef idx="minor">
+            <a:schemeClr val="lt1"/>
+          </a:fontRef>
+        </p:style>
+        <p:txBody>
+          <a:bodyPr rtlCol="0" anchor="ctr" wrap="square"/>
+          <a:lstStyle/>
+          <a:p>
+            <a:pPr algn="ctr"/>
+          </a:p>
+        </p:txBody>
+      </p:sp>
+      <p:sp>
+        <p:nvSpPr>
+          <p:cNvPr id="25" name="Rectangle 24"/>
+          <p:cNvSpPr/>
+          <p:nvPr/>
+        </p:nvSpPr>
+        <p:spPr>
+          <a:xfrm>
+            <a:off x="457200" y="3383280"/>
+            <a:ext cx="82296" cy="1481328"/>
+          </a:xfrm>
+          <a:prstGeom prst="rect">
+            <a:avLst/>
+          </a:prstGeom>
+          <a:solidFill>
+            <a:srgbClr val="8A4B2D"/>
+          </a:solidFill>
+          <a:ln>
+            <a:noFill/>
+          </a:ln>
+          <a:effectLst/>
+        </p:spPr>
+        <p:style>
+          <a:lnRef idx="1">
+            <a:schemeClr val="accent1"/>
+          </a:lnRef>
+          <a:fillRef idx="3">
+            <a:schemeClr val="accent1"/>
+          </a:fillRef>
+          <a:effectRef idx="2">
+            <a:schemeClr val="accent1"/>
+          </a:effectRef>
+          <a:fontRef idx="minor">
+            <a:schemeClr val="lt1"/>
+          </a:fontRef>
+        </p:style>
+        <p:txBody>
+          <a:bodyPr rtlCol="0" anchor="ctr" wrap="square"/>
+          <a:lstStyle/>
+          <a:p>
+            <a:pPr algn="ctr"/>
+          </a:p>
+        </p:txBody>
+      </p:sp>
+      <p:sp>
+        <p:nvSpPr>
+          <p:cNvPr id="26" name="TextBox 25"/>
+          <p:cNvSpPr txBox="1"/>
+          <p:nvPr/>
+        </p:nvSpPr>
+        <p:spPr>
+          <a:xfrm>
+            <a:off x="658368" y="3429000"/>
+            <a:ext cx="10972800" cy="274320"/>
+          </a:xfrm>
+          <a:prstGeom prst="rect">
+            <a:avLst/>
+          </a:prstGeom>
+          <a:noFill/>
+        </p:spPr>
+        <p:txBody>
+          <a:bodyPr wrap="square">
+            <a:spAutoFit/>
+          </a:bodyPr>
+          <a:lstStyle/>
+          <a:p>
+            <a:r>
+              <a:rPr sz="1100" b="1">
+                <a:solidFill>
+                  <a:srgbClr val="8A4B2D"/>
+                </a:solidFill>
+                <a:latin typeface="微软雅黑"/>
+              </a:rPr>
+              <a:t>难点2：B02 __init__与self</a:t>
+            </a:r>
+          </a:p>
+        </p:txBody>
+      </p:sp>
+      <p:sp>
+        <p:nvSpPr>
+          <p:cNvPr id="27" name="TextBox 26"/>
+          <p:cNvSpPr txBox="1"/>
+          <p:nvPr/>
+        </p:nvSpPr>
+        <p:spPr>
+          <a:xfrm>
+            <a:off x="658368" y="3749040"/>
+            <a:ext cx="3566160" cy="219456"/>
+          </a:xfrm>
+          <a:prstGeom prst="rect">
+            <a:avLst/>
+          </a:prstGeom>
+          <a:noFill/>
+        </p:spPr>
+        <p:txBody>
+          <a:bodyPr wrap="square">
+            <a:spAutoFit/>
+          </a:bodyPr>
+          <a:lstStyle/>
+          <a:p>
+            <a:r>
+              <a:rPr sz="900" b="1">
+                <a:solidFill>
+                  <a:srgbClr val="B5533A"/>
+                </a:solidFill>
+                <a:latin typeface="微软雅黑"/>
+              </a:rPr>
+              <a:t>为什么容易栽</a:t>
+            </a:r>
+          </a:p>
+        </p:txBody>
+      </p:sp>
+      <p:sp>
+        <p:nvSpPr>
+          <p:cNvPr id="28" name="TextBox 27"/>
+          <p:cNvSpPr txBox="1"/>
+          <p:nvPr/>
+        </p:nvSpPr>
+        <p:spPr>
+          <a:xfrm>
+            <a:off x="658368" y="3986784"/>
+            <a:ext cx="3584448" cy="822960"/>
+          </a:xfrm>
+          <a:prstGeom prst="rect">
+            <a:avLst/>
+          </a:prstGeom>
+          <a:noFill/>
+        </p:spPr>
+        <p:txBody>
+          <a:bodyPr wrap="square">
+            <a:spAutoFit/>
+          </a:bodyPr>
+          <a:lstStyle/>
+          <a:p>
+            <a:r>
+              <a:rPr sz="900" b="0">
+                <a:solidFill>
+                  <a:srgbClr val="2B2F36"/>
+                </a:solidFill>
+                <a:latin typeface="微软雅黑"/>
+              </a:rPr>
+              <a:t>误区：方法漏写self→TypeError——调用时Python自动传实例</a:t>
+            </a:r>
+          </a:p>
+        </p:txBody>
+      </p:sp>
+      <p:sp>
+        <p:nvSpPr>
+          <p:cNvPr id="29" name="TextBox 28"/>
+          <p:cNvSpPr txBox="1"/>
+          <p:nvPr/>
+        </p:nvSpPr>
+        <p:spPr>
+          <a:xfrm>
+            <a:off x="4334255" y="3749040"/>
+            <a:ext cx="3566160" cy="219456"/>
+          </a:xfrm>
+          <a:prstGeom prst="rect">
+            <a:avLst/>
+          </a:prstGeom>
+          <a:noFill/>
+        </p:spPr>
+        <p:txBody>
+          <a:bodyPr wrap="square">
+            <a:spAutoFit/>
+          </a:bodyPr>
+          <a:lstStyle/>
+          <a:p>
+            <a:r>
+              <a:rPr sz="900" b="1">
+                <a:solidFill>
+                  <a:srgbClr val="2E7D46"/>
+                </a:solidFill>
+                <a:latin typeface="微软雅黑"/>
+              </a:rPr>
+              <a:t>一招破解（记住这句）</a:t>
+            </a:r>
+          </a:p>
+        </p:txBody>
+      </p:sp>
+      <p:sp>
+        <p:nvSpPr>
+          <p:cNvPr id="30" name="TextBox 29"/>
+          <p:cNvSpPr txBox="1"/>
+          <p:nvPr/>
+        </p:nvSpPr>
+        <p:spPr>
+          <a:xfrm>
+            <a:off x="4334255" y="3986784"/>
+            <a:ext cx="3584448" cy="822960"/>
+          </a:xfrm>
+          <a:prstGeom prst="rect">
+            <a:avLst/>
+          </a:prstGeom>
+          <a:noFill/>
+        </p:spPr>
+        <p:txBody>
+          <a:bodyPr wrap="square">
+            <a:spAutoFit/>
+          </a:bodyPr>
+          <a:lstStyle/>
+          <a:p>
+            <a:r>
+              <a:rPr sz="900" b="0">
+                <a:solidFill>
+                  <a:srgbClr val="2B2F36"/>
+                </a:solidFill>
+                <a:latin typeface="微软雅黑"/>
+              </a:rPr>
+              <a:t>self='我自己'；__init__=出厂设置，造时自动执行</a:t>
+            </a:r>
+          </a:p>
+        </p:txBody>
+      </p:sp>
+      <p:sp>
+        <p:nvSpPr>
+          <p:cNvPr id="31" name="TextBox 30"/>
+          <p:cNvSpPr txBox="1"/>
+          <p:nvPr/>
+        </p:nvSpPr>
+        <p:spPr>
+          <a:xfrm>
+            <a:off x="8010143" y="3749040"/>
+            <a:ext cx="3566160" cy="219456"/>
+          </a:xfrm>
+          <a:prstGeom prst="rect">
+            <a:avLst/>
+          </a:prstGeom>
+          <a:noFill/>
+        </p:spPr>
+        <p:txBody>
+          <a:bodyPr wrap="square">
+            <a:spAutoFit/>
+          </a:bodyPr>
+          <a:lstStyle/>
+          <a:p>
+            <a:r>
+              <a:rPr sz="900" b="1">
+                <a:solidFill>
+                  <a:srgbClr val="35506E"/>
+                </a:solidFill>
+                <a:latin typeface="微软雅黑"/>
+              </a:rPr>
+              <a:t>动手验证（照做一遍）</a:t>
+            </a:r>
+          </a:p>
+        </p:txBody>
+      </p:sp>
+      <p:sp>
+        <p:nvSpPr>
+          <p:cNvPr id="32" name="TextBox 31"/>
+          <p:cNvSpPr txBox="1"/>
+          <p:nvPr/>
+        </p:nvSpPr>
+        <p:spPr>
+          <a:xfrm>
+            <a:off x="8010143" y="3986784"/>
+            <a:ext cx="3584448" cy="822960"/>
+          </a:xfrm>
+          <a:prstGeom prst="rect">
+            <a:avLst/>
+          </a:prstGeom>
+          <a:noFill/>
+        </p:spPr>
+        <p:txBody>
+          <a:bodyPr wrap="square">
+            <a:spAutoFit/>
+          </a:bodyPr>
+          <a:lstStyle/>
+          <a:p>
+            <a:r>
+              <a:rPr sz="900" b="0">
+                <a:solidFill>
+                  <a:srgbClr val="2B2F36"/>
+                </a:solidFill>
+                <a:latin typeface="微软雅黑"/>
+              </a:rPr>
+              <a:t>出厂时写死编号型号——构造即初始化 def __init__(self, code): self.code=code</a:t>
+            </a:r>
+          </a:p>
+        </p:txBody>
+      </p:sp>
+      <p:sp>
+        <p:nvSpPr>
+          <p:cNvPr id="33" name="Rectangle 32"/>
+          <p:cNvSpPr/>
+          <p:nvPr/>
+        </p:nvSpPr>
+        <p:spPr>
+          <a:xfrm>
+            <a:off x="457200" y="4983480"/>
+            <a:ext cx="11274552" cy="1481328"/>
+          </a:xfrm>
+          <a:prstGeom prst="rect">
+            <a:avLst/>
+          </a:prstGeom>
+          <a:solidFill>
+            <a:srgbClr val="F7F9FC"/>
+          </a:solidFill>
+          <a:ln>
+            <a:solidFill>
+              <a:srgbClr val="D6DCE4"/>
+            </a:solidFill>
+          </a:ln>
+          <a:effectLst/>
+        </p:spPr>
+        <p:style>
+          <a:lnRef idx="1">
+            <a:schemeClr val="accent1"/>
+          </a:lnRef>
+          <a:fillRef idx="3">
+            <a:schemeClr val="accent1"/>
+          </a:fillRef>
+          <a:effectRef idx="2">
+            <a:schemeClr val="accent1"/>
+          </a:effectRef>
+          <a:fontRef idx="minor">
+            <a:schemeClr val="lt1"/>
+          </a:fontRef>
+        </p:style>
+        <p:txBody>
+          <a:bodyPr rtlCol="0" anchor="ctr" wrap="square"/>
+          <a:lstStyle/>
+          <a:p>
+            <a:pPr algn="ctr"/>
+          </a:p>
+        </p:txBody>
+      </p:sp>
+      <p:sp>
+        <p:nvSpPr>
+          <p:cNvPr id="34" name="Rectangle 33"/>
+          <p:cNvSpPr/>
+          <p:nvPr/>
+        </p:nvSpPr>
+        <p:spPr>
+          <a:xfrm>
+            <a:off x="457200" y="4983480"/>
+            <a:ext cx="82296" cy="1481328"/>
+          </a:xfrm>
+          <a:prstGeom prst="rect">
+            <a:avLst/>
+          </a:prstGeom>
+          <a:solidFill>
+            <a:srgbClr val="8A4B2D"/>
+          </a:solidFill>
+          <a:ln>
+            <a:noFill/>
+          </a:ln>
+          <a:effectLst/>
+        </p:spPr>
+        <p:style>
+          <a:lnRef idx="1">
+            <a:schemeClr val="accent1"/>
+          </a:lnRef>
+          <a:fillRef idx="3">
+            <a:schemeClr val="accent1"/>
+          </a:fillRef>
+          <a:effectRef idx="2">
+            <a:schemeClr val="accent1"/>
+          </a:effectRef>
+          <a:fontRef idx="minor">
+            <a:schemeClr val="lt1"/>
+          </a:fontRef>
+        </p:style>
+        <p:txBody>
+          <a:bodyPr rtlCol="0" anchor="ctr" wrap="square"/>
+          <a:lstStyle/>
+          <a:p>
+            <a:pPr algn="ctr"/>
+          </a:p>
+        </p:txBody>
+      </p:sp>
+      <p:sp>
+        <p:nvSpPr>
+          <p:cNvPr id="35" name="TextBox 34"/>
+          <p:cNvSpPr txBox="1"/>
+          <p:nvPr/>
+        </p:nvSpPr>
+        <p:spPr>
+          <a:xfrm>
+            <a:off x="658368" y="5029200"/>
+            <a:ext cx="10972800" cy="274320"/>
+          </a:xfrm>
+          <a:prstGeom prst="rect">
+            <a:avLst/>
+          </a:prstGeom>
+          <a:noFill/>
+        </p:spPr>
+        <p:txBody>
+          <a:bodyPr wrap="square">
+            <a:spAutoFit/>
+          </a:bodyPr>
+          <a:lstStyle/>
+          <a:p>
+            <a:r>
+              <a:rPr sz="1100" b="1">
+                <a:solidFill>
+                  <a:srgbClr val="8A4B2D"/>
+                </a:solidFill>
+                <a:latin typeface="微软雅黑"/>
+              </a:rPr>
+              <a:t>难点3：B03 实例属性</a:t>
+            </a:r>
+          </a:p>
+        </p:txBody>
+      </p:sp>
+      <p:sp>
+        <p:nvSpPr>
+          <p:cNvPr id="36" name="TextBox 35"/>
+          <p:cNvSpPr txBox="1"/>
+          <p:nvPr/>
+        </p:nvSpPr>
+        <p:spPr>
+          <a:xfrm>
+            <a:off x="658368" y="5349240"/>
+            <a:ext cx="3566160" cy="219456"/>
+          </a:xfrm>
+          <a:prstGeom prst="rect">
+            <a:avLst/>
+          </a:prstGeom>
+          <a:noFill/>
+        </p:spPr>
+        <p:txBody>
+          <a:bodyPr wrap="square">
+            <a:spAutoFit/>
+          </a:bodyPr>
+          <a:lstStyle/>
+          <a:p>
+            <a:r>
+              <a:rPr sz="900" b="1">
+                <a:solidFill>
+                  <a:srgbClr val="B5533A"/>
+                </a:solidFill>
+                <a:latin typeface="微软雅黑"/>
+              </a:rPr>
+              <a:t>为什么容易栽</a:t>
+            </a:r>
+          </a:p>
+        </p:txBody>
+      </p:sp>
+      <p:sp>
+        <p:nvSpPr>
+          <p:cNvPr id="37" name="TextBox 36"/>
+          <p:cNvSpPr txBox="1"/>
+          <p:nvPr/>
+        </p:nvSpPr>
+        <p:spPr>
+          <a:xfrm>
+            <a:off x="658368" y="5586984"/>
+            <a:ext cx="3584448" cy="822960"/>
+          </a:xfrm>
+          <a:prstGeom prst="rect">
+            <a:avLst/>
+          </a:prstGeom>
+          <a:noFill/>
+        </p:spPr>
+        <p:txBody>
+          <a:bodyPr wrap="square">
+            <a:spAutoFit/>
+          </a:bodyPr>
+          <a:lstStyle/>
+          <a:p>
+            <a:r>
+              <a:rPr sz="900" b="0">
+                <a:solidFill>
+                  <a:srgbClr val="2B2F36"/>
+                </a:solidFill>
+                <a:latin typeface="微软雅黑"/>
+              </a:rPr>
+              <a:t>误区：写在类下的属性是全员共享公告栏——改一处全变，慎用</a:t>
+            </a:r>
+          </a:p>
+        </p:txBody>
+      </p:sp>
+      <p:sp>
+        <p:nvSpPr>
+          <p:cNvPr id="38" name="TextBox 37"/>
+          <p:cNvSpPr txBox="1"/>
+          <p:nvPr/>
+        </p:nvSpPr>
+        <p:spPr>
+          <a:xfrm>
+            <a:off x="4334255" y="5349240"/>
+            <a:ext cx="3566160" cy="219456"/>
+          </a:xfrm>
+          <a:prstGeom prst="rect">
+            <a:avLst/>
+          </a:prstGeom>
+          <a:noFill/>
+        </p:spPr>
+        <p:txBody>
+          <a:bodyPr wrap="square">
+            <a:spAutoFit/>
+          </a:bodyPr>
+          <a:lstStyle/>
+          <a:p>
+            <a:r>
+              <a:rPr sz="900" b="1">
+                <a:solidFill>
+                  <a:srgbClr val="2E7D46"/>
+                </a:solidFill>
+                <a:latin typeface="微软雅黑"/>
+              </a:rPr>
+              <a:t>一招破解（记住这句）</a:t>
+            </a:r>
+          </a:p>
+        </p:txBody>
+      </p:sp>
+      <p:sp>
+        <p:nvSpPr>
+          <p:cNvPr id="39" name="TextBox 38"/>
+          <p:cNvSpPr txBox="1"/>
+          <p:nvPr/>
+        </p:nvSpPr>
+        <p:spPr>
+          <a:xfrm>
+            <a:off x="4334255" y="5586984"/>
+            <a:ext cx="3584448" cy="822960"/>
+          </a:xfrm>
+          <a:prstGeom prst="rect">
+            <a:avLst/>
+          </a:prstGeom>
+          <a:noFill/>
+        </p:spPr>
+        <p:txBody>
+          <a:bodyPr wrap="square">
+            <a:spAutoFit/>
+          </a:bodyPr>
+          <a:lstStyle/>
+          <a:p>
+            <a:r>
+              <a:rPr sz="900" b="0">
+                <a:solidFill>
+                  <a:srgbClr val="2B2F36"/>
+                </a:solidFill>
+                <a:latin typeface="微软雅黑"/>
+              </a:rPr>
+              <a:t>属性写在__init__里=每台设备自己的小本本</a:t>
+            </a:r>
+          </a:p>
+        </p:txBody>
+      </p:sp>
+      <p:sp>
+        <p:nvSpPr>
+          <p:cNvPr id="40" name="TextBox 39"/>
+          <p:cNvSpPr txBox="1"/>
+          <p:nvPr/>
+        </p:nvSpPr>
+        <p:spPr>
+          <a:xfrm>
+            <a:off x="8010143" y="5349240"/>
+            <a:ext cx="3566160" cy="219456"/>
+          </a:xfrm>
+          <a:prstGeom prst="rect">
+            <a:avLst/>
+          </a:prstGeom>
+          <a:noFill/>
+        </p:spPr>
+        <p:txBody>
+          <a:bodyPr wrap="square">
+            <a:spAutoFit/>
+          </a:bodyPr>
+          <a:lstStyle/>
+          <a:p>
+            <a:r>
+              <a:rPr sz="900" b="1">
+                <a:solidFill>
+                  <a:srgbClr val="35506E"/>
+                </a:solidFill>
+                <a:latin typeface="微软雅黑"/>
+              </a:rPr>
+              <a:t>动手验证（照做一遍）</a:t>
+            </a:r>
+          </a:p>
+        </p:txBody>
+      </p:sp>
+      <p:sp>
+        <p:nvSpPr>
+          <p:cNvPr id="41" name="TextBox 40"/>
+          <p:cNvSpPr txBox="1"/>
+          <p:nvPr/>
+        </p:nvSpPr>
+        <p:spPr>
+          <a:xfrm>
+            <a:off x="8010143" y="5586984"/>
+            <a:ext cx="3584448" cy="822960"/>
+          </a:xfrm>
+          <a:prstGeom prst="rect">
+            <a:avLst/>
+          </a:prstGeom>
+          <a:noFill/>
+        </p:spPr>
+        <p:txBody>
+          <a:bodyPr wrap="square">
+            <a:spAutoFit/>
+          </a:bodyPr>
+          <a:lstStyle/>
+          <a:p>
+            <a:r>
+              <a:rPr sz="900" b="0">
+                <a:solidFill>
+                  <a:srgbClr val="2B2F36"/>
+                </a:solidFill>
+                <a:latin typeface="微软雅黑"/>
+              </a:rPr>
+              <a:t>两台泵温度不同互不干扰——独立内存 d1.temp=78.5 与 d2.temp=81.0 各存各的</a:t>
             </a:r>
           </a:p>
         </p:txBody>
@@ -10230,7 +10213,7 @@
         <p:spPr>
           <a:xfrm>
             <a:off x="0" y="0"/>
-            <a:ext cx="12192000" cy="6858000"/>
+            <a:ext cx="12192000" cy="1150000"/>
           </a:xfrm>
           <a:prstGeom prst="rect">
             <a:avLst/>
@@ -10273,8 +10256,8 @@
         </p:nvSpPr>
         <p:spPr>
           <a:xfrm>
-            <a:off x="0" y="2880360"/>
-            <a:ext cx="12192000" cy="50000"/>
+            <a:off x="0" y="1150000"/>
+            <a:ext cx="2600000" cy="70000"/>
           </a:xfrm>
           <a:prstGeom prst="rect">
             <a:avLst/>
@@ -10317,178 +10300,8 @@
         </p:nvSpPr>
         <p:spPr>
           <a:xfrm>
-            <a:off x="0" y="1645920"/>
-            <a:ext cx="12192000" cy="1500000"/>
-          </a:xfrm>
-          <a:prstGeom prst="rect">
-            <a:avLst/>
-          </a:prstGeom>
-          <a:noFill/>
-        </p:spPr>
-        <p:txBody>
-          <a:bodyPr wrap="square" anchor="t">
-            <a:spAutoFit/>
-          </a:bodyPr>
-          <a:lstStyle/>
-          <a:p>
-            <a:pPr algn="ctr">
-              <a:lnSpc>
-                <a:spcPct val="110000"/>
-              </a:lnSpc>
-              <a:spcAft>
-                <a:spcPts val="600"/>
-              </a:spcAft>
-            </a:pPr>
-            <a:r>
-              <a:rPr sz="5400" b="1">
-                <a:solidFill>
-                  <a:srgbClr val="FFFFFF"/>
-                </a:solidFill>
-                <a:latin typeface="微软雅黑"/>
-              </a:rPr>
-              <a:t>THANKS</a:t>
-            </a:r>
-          </a:p>
-        </p:txBody>
-      </p:sp>
-      <p:sp>
-        <p:nvSpPr>
-          <p:cNvPr id="5" name="TextBox 4"/>
-          <p:cNvSpPr txBox="1"/>
-          <p:nvPr/>
-        </p:nvSpPr>
-        <p:spPr>
-          <a:xfrm>
-            <a:off x="0" y="3429000"/>
-            <a:ext cx="12192000" cy="800000"/>
-          </a:xfrm>
-          <a:prstGeom prst="rect">
-            <a:avLst/>
-          </a:prstGeom>
-          <a:noFill/>
-        </p:spPr>
-        <p:txBody>
-          <a:bodyPr wrap="square" anchor="t">
-            <a:spAutoFit/>
-          </a:bodyPr>
-          <a:lstStyle/>
-          <a:p>
-            <a:pPr algn="ctr">
-              <a:lnSpc>
-                <a:spcPct val="110000"/>
-              </a:lnSpc>
-              <a:spcAft>
-                <a:spcPts val="600"/>
-              </a:spcAft>
-            </a:pPr>
-            <a:r>
-              <a:rPr sz="2200" b="1">
-                <a:solidFill>
-                  <a:srgbClr val="F5670F"/>
-                </a:solidFill>
-                <a:latin typeface="微软雅黑"/>
-              </a:rPr>
-              <a:t>感谢聆听 · 动手实践出真知</a:t>
-            </a:r>
-          </a:p>
-        </p:txBody>
-      </p:sp>
-      <p:sp>
-        <p:nvSpPr>
-          <p:cNvPr id="6" name="TextBox 5"/>
-          <p:cNvSpPr txBox="1"/>
-          <p:nvPr/>
-        </p:nvSpPr>
-        <p:spPr>
-          <a:xfrm>
-            <a:off x="0" y="4526280"/>
-            <a:ext cx="12192000" cy="600000"/>
-          </a:xfrm>
-          <a:prstGeom prst="rect">
-            <a:avLst/>
-          </a:prstGeom>
-          <a:noFill/>
-        </p:spPr>
-        <p:txBody>
-          <a:bodyPr wrap="square" anchor="t">
-            <a:spAutoFit/>
-          </a:bodyPr>
-          <a:lstStyle/>
-          <a:p>
-            <a:pPr algn="ctr">
-              <a:lnSpc>
-                <a:spcPct val="110000"/>
-              </a:lnSpc>
-              <a:spcAft>
-                <a:spcPts val="600"/>
-              </a:spcAft>
-            </a:pPr>
-            <a:r>
-              <a:rPr sz="1400" b="0">
-                <a:solidFill>
-                  <a:srgbClr val="BBC6E6"/>
-                </a:solidFill>
-                <a:latin typeface="微软雅黑"/>
-              </a:rPr>
-              <a:t>以生为本   |   做中学 · 学中做</a:t>
-            </a:r>
-          </a:p>
-        </p:txBody>
-      </p:sp>
-      <p:sp>
-        <p:nvSpPr>
-          <p:cNvPr id="7" name="Rectangle 6"/>
-          <p:cNvSpPr/>
-          <p:nvPr/>
-        </p:nvSpPr>
-        <p:spPr>
-          <a:xfrm>
-            <a:off x="500000" y="6500000"/>
-            <a:ext cx="11100000" cy="20000"/>
-          </a:xfrm>
-          <a:prstGeom prst="rect">
-            <a:avLst/>
-          </a:prstGeom>
-          <a:solidFill>
-            <a:srgbClr val="C9D4EE"/>
-          </a:solidFill>
-          <a:ln>
-            <a:noFill/>
-          </a:ln>
-          <a:effectLst/>
-        </p:spPr>
-        <p:style>
-          <a:lnRef idx="1">
-            <a:schemeClr val="accent1"/>
-          </a:lnRef>
-          <a:fillRef idx="3">
-            <a:schemeClr val="accent1"/>
-          </a:fillRef>
-          <a:effectRef idx="2">
-            <a:schemeClr val="accent1"/>
-          </a:effectRef>
-          <a:fontRef idx="minor">
-            <a:schemeClr val="lt1"/>
-          </a:fontRef>
-        </p:style>
-        <p:txBody>
-          <a:bodyPr rtlCol="0" anchor="ctr"/>
-          <a:lstStyle/>
-          <a:p>
-            <a:pPr algn="ctr"/>
-          </a:p>
-        </p:txBody>
-      </p:sp>
-      <p:sp>
-        <p:nvSpPr>
-          <p:cNvPr id="8" name="TextBox 7"/>
-          <p:cNvSpPr txBox="1"/>
-          <p:nvPr/>
-        </p:nvSpPr>
-        <p:spPr>
-          <a:xfrm>
-            <a:off x="500000" y="6540000"/>
-            <a:ext cx="7000000" cy="300000"/>
+            <a:off x="700000" y="300000"/>
+            <a:ext cx="10792000" cy="700000"/>
           </a:xfrm>
           <a:prstGeom prst="rect">
             <a:avLst/>
@@ -10510,6 +10323,92 @@
               </a:spcAft>
             </a:pPr>
             <a:r>
+              <a:rPr sz="2400" b="1">
+                <a:solidFill>
+                  <a:srgbClr val="FFFFFF"/>
+                </a:solidFill>
+                <a:latin typeface="微软雅黑"/>
+              </a:rPr>
+              <a:t>承上启下 · 动手前避坑清单</a:t>
+            </a:r>
+          </a:p>
+        </p:txBody>
+      </p:sp>
+      <p:sp>
+        <p:nvSpPr>
+          <p:cNvPr id="11" name="Rectangle 10"/>
+          <p:cNvSpPr/>
+          <p:nvPr/>
+        </p:nvSpPr>
+        <p:spPr>
+          <a:xfrm>
+            <a:off x="500000" y="6500000"/>
+            <a:ext cx="11100000" cy="20000"/>
+          </a:xfrm>
+          <a:prstGeom prst="rect">
+            <a:avLst/>
+          </a:prstGeom>
+          <a:solidFill>
+            <a:srgbClr val="C9D4EE"/>
+          </a:solidFill>
+          <a:ln>
+            <a:noFill/>
+          </a:ln>
+          <a:effectLst/>
+        </p:spPr>
+        <p:style>
+          <a:lnRef idx="1">
+            <a:schemeClr val="accent1"/>
+          </a:lnRef>
+          <a:fillRef idx="3">
+            <a:schemeClr val="accent1"/>
+          </a:fillRef>
+          <a:effectRef idx="2">
+            <a:schemeClr val="accent1"/>
+          </a:effectRef>
+          <a:fontRef idx="minor">
+            <a:schemeClr val="lt1"/>
+          </a:fontRef>
+        </p:style>
+        <p:txBody>
+          <a:bodyPr rtlCol="0" anchor="ctr"/>
+          <a:lstStyle/>
+          <a:p>
+            <a:pPr algn="ctr"/>
+          </a:p>
+        </p:txBody>
+      </p:sp>
+      <p:sp>
+        <p:nvSpPr>
+          <p:cNvPr id="12" name="TextBox 11"/>
+          <p:cNvSpPr txBox="1"/>
+          <p:nvPr/>
+        </p:nvSpPr>
+        <p:spPr>
+          <a:xfrm>
+            <a:off x="500000" y="6540000"/>
+            <a:ext cx="7000000" cy="300000"/>
+          </a:xfrm>
+          <a:prstGeom prst="rect">
+            <a:avLst/>
+          </a:prstGeom>
+          <a:noFill/>
+        </p:spPr>
+        <p:txBody>
+          <a:bodyPr wrap="square" anchor="t">
+            <a:spAutoFit/>
+          </a:bodyPr>
+          <a:lstStyle/>
+          <a:p>
+            <a:pPr algn="l">
+              <a:lnSpc>
+                <a:spcPct val="110000"/>
+              </a:lnSpc>
+              <a:spcAft>
+                <a:spcPts val="600"/>
+              </a:spcAft>
+            </a:pPr>
+            <a:r>
               <a:rPr sz="1000" b="0">
                 <a:solidFill>
                   <a:srgbClr val="8A97B5"/>
@@ -10523,7 +10422,7 @@
       </p:sp>
       <p:sp>
         <p:nvSpPr>
-          <p:cNvPr id="9" name="TextBox 8"/>
+          <p:cNvPr id="13" name="TextBox 12"/>
           <p:cNvSpPr txBox="1"/>
           <p:nvPr/>
         </p:nvSpPr>
@@ -10538,7 +10437,7 @@
           <a:noFill/>
         </p:spPr>
         <p:txBody>
-          <a:bodyPr wrap="square" anchor="ctr">
+          <a:bodyPr wrap="square" anchor="t">
             <a:spAutoFit/>
           </a:bodyPr>
           <a:lstStyle/>
@@ -10558,7 +10457,582 @@
                 </a:solidFill>
                 <a:latin typeface="微软雅黑"/>
               </a:rPr>
-              <a:t>10 / 13</a:t>
+              <a:t>7 / 15</a:t>
+            </a:r>
+          </a:p>
+        </p:txBody>
+      </p:sp>
+      <p:sp>
+        <p:nvSpPr>
+          <p:cNvPr id="14" name="TextBox 13"/>
+          <p:cNvSpPr txBox="1"/>
+          <p:nvPr/>
+        </p:nvSpPr>
+        <p:spPr>
+          <a:xfrm>
+            <a:off x="457200" y="1389888"/>
+            <a:ext cx="11274552" cy="274320"/>
+          </a:xfrm>
+          <a:prstGeom prst="rect">
+            <a:avLst/>
+          </a:prstGeom>
+          <a:noFill/>
+        </p:spPr>
+        <p:txBody>
+          <a:bodyPr wrap="square">
+            <a:spAutoFit/>
+          </a:bodyPr>
+          <a:lstStyle/>
+          <a:p>
+            <a:r>
+              <a:rPr sz="1050" b="0">
+                <a:solidFill>
+                  <a:srgbClr val="6B7280"/>
+                </a:solidFill>
+                <a:latin typeface="微软雅黑"/>
+              </a:rPr>
+              <a:t>本讲是动手冲刺课：先把上周完整讲解里的高频翻车点过一遍，再开工——每条都是历届学生真实踩过的坑。</a:t>
+            </a:r>
+          </a:p>
+        </p:txBody>
+      </p:sp>
+      <p:sp>
+        <p:nvSpPr>
+          <p:cNvPr id="15" name="Rectangle 14"/>
+          <p:cNvSpPr/>
+          <p:nvPr/>
+        </p:nvSpPr>
+        <p:spPr>
+          <a:xfrm>
+            <a:off x="457200" y="1783080"/>
+            <a:ext cx="5532120" cy="2061972"/>
+          </a:xfrm>
+          <a:prstGeom prst="rect">
+            <a:avLst/>
+          </a:prstGeom>
+          <a:solidFill>
+            <a:srgbClr val="FFFFFF"/>
+          </a:solidFill>
+          <a:ln>
+            <a:solidFill>
+              <a:srgbClr val="D6DCE4"/>
+            </a:solidFill>
+          </a:ln>
+          <a:effectLst/>
+        </p:spPr>
+        <p:style>
+          <a:lnRef idx="1">
+            <a:schemeClr val="accent1"/>
+          </a:lnRef>
+          <a:fillRef idx="3">
+            <a:schemeClr val="accent1"/>
+          </a:fillRef>
+          <a:effectRef idx="2">
+            <a:schemeClr val="accent1"/>
+          </a:effectRef>
+          <a:fontRef idx="minor">
+            <a:schemeClr val="lt1"/>
+          </a:fontRef>
+        </p:style>
+        <p:txBody>
+          <a:bodyPr rtlCol="0" anchor="ctr" wrap="square"/>
+          <a:lstStyle/>
+          <a:p>
+            <a:pPr algn="ctr"/>
+          </a:p>
+        </p:txBody>
+      </p:sp>
+      <p:sp>
+        <p:nvSpPr>
+          <p:cNvPr id="16" name="Rectangle 15"/>
+          <p:cNvSpPr/>
+          <p:nvPr/>
+        </p:nvSpPr>
+        <p:spPr>
+          <a:xfrm>
+            <a:off x="457200" y="1783080"/>
+            <a:ext cx="82296" cy="2061972"/>
+          </a:xfrm>
+          <a:prstGeom prst="rect">
+            <a:avLst/>
+          </a:prstGeom>
+          <a:solidFill>
+            <a:srgbClr val="9A3B3B"/>
+          </a:solidFill>
+          <a:ln>
+            <a:noFill/>
+          </a:ln>
+          <a:effectLst/>
+        </p:spPr>
+        <p:style>
+          <a:lnRef idx="1">
+            <a:schemeClr val="accent1"/>
+          </a:lnRef>
+          <a:fillRef idx="3">
+            <a:schemeClr val="accent1"/>
+          </a:fillRef>
+          <a:effectRef idx="2">
+            <a:schemeClr val="accent1"/>
+          </a:effectRef>
+          <a:fontRef idx="minor">
+            <a:schemeClr val="lt1"/>
+          </a:fontRef>
+        </p:style>
+        <p:txBody>
+          <a:bodyPr rtlCol="0" anchor="ctr" wrap="square"/>
+          <a:lstStyle/>
+          <a:p>
+            <a:pPr algn="ctr"/>
+          </a:p>
+        </p:txBody>
+      </p:sp>
+      <p:sp>
+        <p:nvSpPr>
+          <p:cNvPr id="17" name="TextBox 16"/>
+          <p:cNvSpPr txBox="1"/>
+          <p:nvPr/>
+        </p:nvSpPr>
+        <p:spPr>
+          <a:xfrm>
+            <a:off x="658368" y="1847088"/>
+            <a:ext cx="5166359" cy="274320"/>
+          </a:xfrm>
+          <a:prstGeom prst="rect">
+            <a:avLst/>
+          </a:prstGeom>
+          <a:noFill/>
+        </p:spPr>
+        <p:txBody>
+          <a:bodyPr wrap="square">
+            <a:spAutoFit/>
+          </a:bodyPr>
+          <a:lstStyle/>
+          <a:p>
+            <a:r>
+              <a:rPr sz="1050" b="1">
+                <a:solidFill>
+                  <a:srgbClr val="B5533A"/>
+                </a:solidFill>
+                <a:latin typeface="微软雅黑"/>
+              </a:rPr>
+              <a:t>✗ 漏self</a:t>
+            </a:r>
+          </a:p>
+        </p:txBody>
+      </p:sp>
+      <p:sp>
+        <p:nvSpPr>
+          <p:cNvPr id="18" name="TextBox 17"/>
+          <p:cNvSpPr txBox="1"/>
+          <p:nvPr/>
+        </p:nvSpPr>
+        <p:spPr>
+          <a:xfrm>
+            <a:off x="658368" y="2167128"/>
+            <a:ext cx="5166359" cy="868680"/>
+          </a:xfrm>
+          <a:prstGeom prst="rect">
+            <a:avLst/>
+          </a:prstGeom>
+          <a:noFill/>
+        </p:spPr>
+        <p:txBody>
+          <a:bodyPr wrap="square">
+            <a:spAutoFit/>
+          </a:bodyPr>
+          <a:lstStyle/>
+          <a:p>
+            <a:r>
+              <a:rPr sz="900" b="0">
+                <a:solidFill>
+                  <a:srgbClr val="2B2F36"/>
+                </a:solidFill>
+                <a:latin typeface="微软雅黑"/>
+              </a:rPr>
+              <a:t>原因：调用报参数多一个</a:t>
+            </a:r>
+          </a:p>
+          <a:p>
+            <a:r>
+              <a:rPr sz="900" b="0">
+                <a:solidFill>
+                  <a:srgbClr val="2B2F36"/>
+                </a:solidFill>
+                <a:latin typeface="微软雅黑"/>
+              </a:rPr>
+              <a:t>✔ 解决：方法第一参数写self</a:t>
+            </a:r>
+          </a:p>
+        </p:txBody>
+      </p:sp>
+      <p:sp>
+        <p:nvSpPr>
+          <p:cNvPr id="19" name="Rectangle 18"/>
+          <p:cNvSpPr/>
+          <p:nvPr/>
+        </p:nvSpPr>
+        <p:spPr>
+          <a:xfrm>
+            <a:off x="6199632" y="1783080"/>
+            <a:ext cx="5532120" cy="2061972"/>
+          </a:xfrm>
+          <a:prstGeom prst="rect">
+            <a:avLst/>
+          </a:prstGeom>
+          <a:solidFill>
+            <a:srgbClr val="FFFFFF"/>
+          </a:solidFill>
+          <a:ln>
+            <a:solidFill>
+              <a:srgbClr val="D6DCE4"/>
+            </a:solidFill>
+          </a:ln>
+          <a:effectLst/>
+        </p:spPr>
+        <p:style>
+          <a:lnRef idx="1">
+            <a:schemeClr val="accent1"/>
+          </a:lnRef>
+          <a:fillRef idx="3">
+            <a:schemeClr val="accent1"/>
+          </a:fillRef>
+          <a:effectRef idx="2">
+            <a:schemeClr val="accent1"/>
+          </a:effectRef>
+          <a:fontRef idx="minor">
+            <a:schemeClr val="lt1"/>
+          </a:fontRef>
+        </p:style>
+        <p:txBody>
+          <a:bodyPr rtlCol="0" anchor="ctr" wrap="square"/>
+          <a:lstStyle/>
+          <a:p>
+            <a:pPr algn="ctr"/>
+          </a:p>
+        </p:txBody>
+      </p:sp>
+      <p:sp>
+        <p:nvSpPr>
+          <p:cNvPr id="20" name="Rectangle 19"/>
+          <p:cNvSpPr/>
+          <p:nvPr/>
+        </p:nvSpPr>
+        <p:spPr>
+          <a:xfrm>
+            <a:off x="6199632" y="1783080"/>
+            <a:ext cx="82296" cy="2061972"/>
+          </a:xfrm>
+          <a:prstGeom prst="rect">
+            <a:avLst/>
+          </a:prstGeom>
+          <a:solidFill>
+            <a:srgbClr val="9A3B3B"/>
+          </a:solidFill>
+          <a:ln>
+            <a:noFill/>
+          </a:ln>
+          <a:effectLst/>
+        </p:spPr>
+        <p:style>
+          <a:lnRef idx="1">
+            <a:schemeClr val="accent1"/>
+          </a:lnRef>
+          <a:fillRef idx="3">
+            <a:schemeClr val="accent1"/>
+          </a:fillRef>
+          <a:effectRef idx="2">
+            <a:schemeClr val="accent1"/>
+          </a:effectRef>
+          <a:fontRef idx="minor">
+            <a:schemeClr val="lt1"/>
+          </a:fontRef>
+        </p:style>
+        <p:txBody>
+          <a:bodyPr rtlCol="0" anchor="ctr" wrap="square"/>
+          <a:lstStyle/>
+          <a:p>
+            <a:pPr algn="ctr"/>
+          </a:p>
+        </p:txBody>
+      </p:sp>
+      <p:sp>
+        <p:nvSpPr>
+          <p:cNvPr id="21" name="TextBox 20"/>
+          <p:cNvSpPr txBox="1"/>
+          <p:nvPr/>
+        </p:nvSpPr>
+        <p:spPr>
+          <a:xfrm>
+            <a:off x="6400800" y="1847088"/>
+            <a:ext cx="5166359" cy="274320"/>
+          </a:xfrm>
+          <a:prstGeom prst="rect">
+            <a:avLst/>
+          </a:prstGeom>
+          <a:noFill/>
+        </p:spPr>
+        <p:txBody>
+          <a:bodyPr wrap="square">
+            <a:spAutoFit/>
+          </a:bodyPr>
+          <a:lstStyle/>
+          <a:p>
+            <a:r>
+              <a:rPr sz="1050" b="1">
+                <a:solidFill>
+                  <a:srgbClr val="B5533A"/>
+                </a:solidFill>
+                <a:latin typeface="微软雅黑"/>
+              </a:rPr>
+              <a:t>✗ 属性被共享</a:t>
+            </a:r>
+          </a:p>
+        </p:txBody>
+      </p:sp>
+      <p:sp>
+        <p:nvSpPr>
+          <p:cNvPr id="22" name="TextBox 21"/>
+          <p:cNvSpPr txBox="1"/>
+          <p:nvPr/>
+        </p:nvSpPr>
+        <p:spPr>
+          <a:xfrm>
+            <a:off x="6400800" y="2167128"/>
+            <a:ext cx="5166359" cy="868680"/>
+          </a:xfrm>
+          <a:prstGeom prst="rect">
+            <a:avLst/>
+          </a:prstGeom>
+          <a:noFill/>
+        </p:spPr>
+        <p:txBody>
+          <a:bodyPr wrap="square">
+            <a:spAutoFit/>
+          </a:bodyPr>
+          <a:lstStyle/>
+          <a:p>
+            <a:r>
+              <a:rPr sz="900" b="0">
+                <a:solidFill>
+                  <a:srgbClr val="2B2F36"/>
+                </a:solidFill>
+                <a:latin typeface="微软雅黑"/>
+              </a:rPr>
+              <a:t>原因：属性写在类体</a:t>
+            </a:r>
+          </a:p>
+          <a:p>
+            <a:r>
+              <a:rPr sz="900" b="0">
+                <a:solidFill>
+                  <a:srgbClr val="2B2F36"/>
+                </a:solidFill>
+                <a:latin typeface="微软雅黑"/>
+              </a:rPr>
+              <a:t>✔ 解决：移入__init__</a:t>
+            </a:r>
+          </a:p>
+        </p:txBody>
+      </p:sp>
+      <p:sp>
+        <p:nvSpPr>
+          <p:cNvPr id="23" name="Rectangle 22"/>
+          <p:cNvSpPr/>
+          <p:nvPr/>
+        </p:nvSpPr>
+        <p:spPr>
+          <a:xfrm>
+            <a:off x="457200" y="3973068"/>
+            <a:ext cx="5532120" cy="2061972"/>
+          </a:xfrm>
+          <a:prstGeom prst="rect">
+            <a:avLst/>
+          </a:prstGeom>
+          <a:solidFill>
+            <a:srgbClr val="FFFFFF"/>
+          </a:solidFill>
+          <a:ln>
+            <a:solidFill>
+              <a:srgbClr val="D6DCE4"/>
+            </a:solidFill>
+          </a:ln>
+          <a:effectLst/>
+        </p:spPr>
+        <p:style>
+          <a:lnRef idx="1">
+            <a:schemeClr val="accent1"/>
+          </a:lnRef>
+          <a:fillRef idx="3">
+            <a:schemeClr val="accent1"/>
+          </a:fillRef>
+          <a:effectRef idx="2">
+            <a:schemeClr val="accent1"/>
+          </a:effectRef>
+          <a:fontRef idx="minor">
+            <a:schemeClr val="lt1"/>
+          </a:fontRef>
+        </p:style>
+        <p:txBody>
+          <a:bodyPr rtlCol="0" anchor="ctr" wrap="square"/>
+          <a:lstStyle/>
+          <a:p>
+            <a:pPr algn="ctr"/>
+          </a:p>
+        </p:txBody>
+      </p:sp>
+      <p:sp>
+        <p:nvSpPr>
+          <p:cNvPr id="24" name="Rectangle 23"/>
+          <p:cNvSpPr/>
+          <p:nvPr/>
+        </p:nvSpPr>
+        <p:spPr>
+          <a:xfrm>
+            <a:off x="457200" y="3973068"/>
+            <a:ext cx="82296" cy="2061972"/>
+          </a:xfrm>
+          <a:prstGeom prst="rect">
+            <a:avLst/>
+          </a:prstGeom>
+          <a:solidFill>
+            <a:srgbClr val="9A3B3B"/>
+          </a:solidFill>
+          <a:ln>
+            <a:noFill/>
+          </a:ln>
+          <a:effectLst/>
+        </p:spPr>
+        <p:style>
+          <a:lnRef idx="1">
+            <a:schemeClr val="accent1"/>
+          </a:lnRef>
+          <a:fillRef idx="3">
+            <a:schemeClr val="accent1"/>
+          </a:fillRef>
+          <a:effectRef idx="2">
+            <a:schemeClr val="accent1"/>
+          </a:effectRef>
+          <a:fontRef idx="minor">
+            <a:schemeClr val="lt1"/>
+          </a:fontRef>
+        </p:style>
+        <p:txBody>
+          <a:bodyPr rtlCol="0" anchor="ctr" wrap="square"/>
+          <a:lstStyle/>
+          <a:p>
+            <a:pPr algn="ctr"/>
+          </a:p>
+        </p:txBody>
+      </p:sp>
+      <p:sp>
+        <p:nvSpPr>
+          <p:cNvPr id="25" name="TextBox 24"/>
+          <p:cNvSpPr txBox="1"/>
+          <p:nvPr/>
+        </p:nvSpPr>
+        <p:spPr>
+          <a:xfrm>
+            <a:off x="658368" y="4037076"/>
+            <a:ext cx="5166359" cy="274320"/>
+          </a:xfrm>
+          <a:prstGeom prst="rect">
+            <a:avLst/>
+          </a:prstGeom>
+          <a:noFill/>
+        </p:spPr>
+        <p:txBody>
+          <a:bodyPr wrap="square">
+            <a:spAutoFit/>
+          </a:bodyPr>
+          <a:lstStyle/>
+          <a:p>
+            <a:r>
+              <a:rPr sz="1050" b="1">
+                <a:solidFill>
+                  <a:srgbClr val="B5533A"/>
+                </a:solidFill>
+                <a:latin typeface="微软雅黑"/>
+              </a:rPr>
+              <a:t>✗ d.start无输出</a:t>
+            </a:r>
+          </a:p>
+        </p:txBody>
+      </p:sp>
+      <p:sp>
+        <p:nvSpPr>
+          <p:cNvPr id="26" name="TextBox 25"/>
+          <p:cNvSpPr txBox="1"/>
+          <p:nvPr/>
+        </p:nvSpPr>
+        <p:spPr>
+          <a:xfrm>
+            <a:off x="658368" y="4357116"/>
+            <a:ext cx="5166359" cy="868680"/>
+          </a:xfrm>
+          <a:prstGeom prst="rect">
+            <a:avLst/>
+          </a:prstGeom>
+          <a:noFill/>
+        </p:spPr>
+        <p:txBody>
+          <a:bodyPr wrap="square">
+            <a:spAutoFit/>
+          </a:bodyPr>
+          <a:lstStyle/>
+          <a:p>
+            <a:r>
+              <a:rPr sz="900" b="0">
+                <a:solidFill>
+                  <a:srgbClr val="2B2F36"/>
+                </a:solidFill>
+                <a:latin typeface="微软雅黑"/>
+              </a:rPr>
+              <a:t>原因：少了括号</a:t>
+            </a:r>
+          </a:p>
+          <a:p>
+            <a:r>
+              <a:rPr sz="900" b="0">
+                <a:solidFill>
+                  <a:srgbClr val="2B2F36"/>
+                </a:solidFill>
+                <a:latin typeface="微软雅黑"/>
+              </a:rPr>
+              <a:t>✔ 解决：d.start()才调用</a:t>
+            </a:r>
+          </a:p>
+        </p:txBody>
+      </p:sp>
+      <p:sp>
+        <p:nvSpPr>
+          <p:cNvPr id="27" name="TextBox 26"/>
+          <p:cNvSpPr txBox="1"/>
+          <p:nvPr/>
+        </p:nvSpPr>
+        <p:spPr>
+          <a:xfrm>
+            <a:off x="457200" y="6281928"/>
+            <a:ext cx="9601200" cy="182880"/>
+          </a:xfrm>
+          <a:prstGeom prst="rect">
+            <a:avLst/>
+          </a:prstGeom>
+          <a:noFill/>
+        </p:spPr>
+        <p:txBody>
+          <a:bodyPr wrap="square">
+            <a:spAutoFit/>
+          </a:bodyPr>
+          <a:lstStyle/>
+          <a:p>
+            <a:r>
+              <a:rPr sz="900" b="0">
+                <a:solidFill>
+                  <a:srgbClr val="6B7280"/>
+                </a:solidFill>
+                <a:latin typeface="微软雅黑"/>
+              </a:rPr>
+              <a:t>素材来源：同周《第7次课-从图纸到对象：设备建模》知识卡与避坑清单（逐字摘录）</a:t>
             </a:r>
           </a:p>
         </p:txBody>
@@ -10706,27 +11180,27 @@
                 </a:solidFill>
                 <a:latin typeface="微软雅黑"/>
               </a:rPr>
-              <a:t>下次课预告（第5周）</a:t>
-            </a:r>
-          </a:p>
-        </p:txBody>
-      </p:sp>
-      <p:sp>
-        <p:nvSpPr>
-          <p:cNvPr id="5" name="Rectangle 4"/>
+              <a:t>本课知识速览卡 · 边做边对照</a:t>
+            </a:r>
+          </a:p>
+        </p:txBody>
+      </p:sp>
+      <p:sp>
+        <p:nvSpPr>
+          <p:cNvPr id="11" name="Rectangle 10"/>
           <p:cNvSpPr/>
           <p:nvPr/>
         </p:nvSpPr>
         <p:spPr>
           <a:xfrm>
-            <a:off x="760000" y="1900000"/>
-            <a:ext cx="10900000" cy="1600000"/>
+            <a:off x="500000" y="6500000"/>
+            <a:ext cx="11100000" cy="20000"/>
           </a:xfrm>
           <a:prstGeom prst="rect">
             <a:avLst/>
           </a:prstGeom>
           <a:solidFill>
-            <a:srgbClr val="F3F6FD"/>
+            <a:srgbClr val="C9D4EE"/>
           </a:solidFill>
           <a:ln>
             <a:noFill/>
@@ -10757,58 +11231,14 @@
       </p:sp>
       <p:sp>
         <p:nvSpPr>
-          <p:cNvPr id="6" name="Rectangle 5"/>
-          <p:cNvSpPr/>
-          <p:nvPr/>
-        </p:nvSpPr>
-        <p:spPr>
-          <a:xfrm>
-            <a:off x="760000" y="1900000"/>
-            <a:ext cx="150000" cy="1600000"/>
-          </a:xfrm>
-          <a:prstGeom prst="rect">
-            <a:avLst/>
-          </a:prstGeom>
-          <a:solidFill>
-            <a:srgbClr val="F5670F"/>
-          </a:solidFill>
-          <a:ln>
-            <a:noFill/>
-          </a:ln>
-          <a:effectLst/>
-        </p:spPr>
-        <p:style>
-          <a:lnRef idx="1">
-            <a:schemeClr val="accent1"/>
-          </a:lnRef>
-          <a:fillRef idx="3">
-            <a:schemeClr val="accent1"/>
-          </a:fillRef>
-          <a:effectRef idx="2">
-            <a:schemeClr val="accent1"/>
-          </a:effectRef>
-          <a:fontRef idx="minor">
-            <a:schemeClr val="lt1"/>
-          </a:fontRef>
-        </p:style>
-        <p:txBody>
-          <a:bodyPr rtlCol="0" anchor="ctr"/>
-          <a:lstStyle/>
-          <a:p>
-            <a:pPr algn="ctr"/>
-          </a:p>
-        </p:txBody>
-      </p:sp>
-      <p:sp>
-        <p:nvSpPr>
-          <p:cNvPr id="7" name="TextBox 6"/>
+          <p:cNvPr id="12" name="TextBox 11"/>
           <p:cNvSpPr txBox="1"/>
           <p:nvPr/>
         </p:nvSpPr>
         <p:spPr>
           <a:xfrm>
-            <a:off x="1020000" y="2050000"/>
-            <a:ext cx="10500000" cy="1400000"/>
+            <a:off x="500000" y="6540000"/>
+            <a:ext cx="7000000" cy="300000"/>
           </a:xfrm>
           <a:prstGeom prst="rect">
             <a:avLst/>
@@ -10830,17 +11260,40 @@
               </a:spcAft>
             </a:pPr>
             <a:r>
-              <a:rPr sz="1700" b="1">
-                <a:solidFill>
-                  <a:srgbClr val="010328"/>
-                </a:solidFill>
-                <a:latin typeface="微软雅黑"/>
-              </a:rPr>
-              <a:t>主题: 构建基类+两子类继承体系——应用：见工单star</a:t>
-            </a:r>
-          </a:p>
-          <a:p>
-            <a:pPr algn="l">
+              <a:rPr sz="1000" b="0">
+                <a:solidFill>
+                  <a:srgbClr val="8A97B5"/>
+                </a:solidFill>
+                <a:latin typeface="微软雅黑"/>
+              </a:rPr>
+              <a:t>两江智造集团 · Python编程基础</a:t>
+            </a:r>
+          </a:p>
+        </p:txBody>
+      </p:sp>
+      <p:sp>
+        <p:nvSpPr>
+          <p:cNvPr id="13" name="TextBox 12"/>
+          <p:cNvSpPr txBox="1"/>
+          <p:nvPr/>
+        </p:nvSpPr>
+        <p:spPr>
+          <a:xfrm>
+            <a:off x="10600000" y="6540000"/>
+            <a:ext cx="1000000" cy="300000"/>
+          </a:xfrm>
+          <a:prstGeom prst="rect">
+            <a:avLst/>
+          </a:prstGeom>
+          <a:noFill/>
+        </p:spPr>
+        <p:txBody>
+          <a:bodyPr wrap="square" anchor="t">
+            <a:spAutoFit/>
+          </a:bodyPr>
+          <a:lstStyle/>
+          <a:p>
+            <a:pPr algn="r">
               <a:lnSpc>
                 <a:spcPct val="110000"/>
               </a:lnSpc>
@@ -10849,27 +11302,27 @@
               </a:spcAft>
             </a:pPr>
             <a:r>
-              <a:rPr sz="1300" b="0">
-                <a:solidFill>
-                  <a:srgbClr val="44546A"/>
-                </a:solidFill>
-                <a:latin typeface="微软雅黑"/>
-              </a:rPr>
-              <a:t>预习快问: 子类如何调用父类__init__？多态怎么理解？</a:t>
-            </a:r>
-          </a:p>
-        </p:txBody>
-      </p:sp>
-      <p:sp>
-        <p:nvSpPr>
-          <p:cNvPr id="8" name="TextBox 7"/>
+              <a:rPr sz="1000" b="0">
+                <a:solidFill>
+                  <a:srgbClr val="8A97B5"/>
+                </a:solidFill>
+                <a:latin typeface="微软雅黑"/>
+              </a:rPr>
+              <a:t>8 / 15</a:t>
+            </a:r>
+          </a:p>
+        </p:txBody>
+      </p:sp>
+      <p:sp>
+        <p:nvSpPr>
+          <p:cNvPr id="14" name="TextBox 13"/>
           <p:cNvSpPr txBox="1"/>
           <p:nvPr/>
         </p:nvSpPr>
         <p:spPr>
           <a:xfrm>
-            <a:off x="760000" y="3900000"/>
-            <a:ext cx="10900000" cy="900000"/>
+            <a:off x="457200" y="1389888"/>
+            <a:ext cx="11274552" cy="274320"/>
           </a:xfrm>
           <a:prstGeom prst="rect">
             <a:avLst/>
@@ -10877,46 +11330,615 @@
           <a:noFill/>
         </p:spPr>
         <p:txBody>
-          <a:bodyPr wrap="square" anchor="t">
+          <a:bodyPr wrap="square">
             <a:spAutoFit/>
           </a:bodyPr>
           <a:lstStyle/>
           <a:p>
-            <a:pPr algn="l">
-              <a:lnSpc>
-                <a:spcPct val="110000"/>
-              </a:lnSpc>
-              <a:spcAft>
-                <a:spcPts val="600"/>
-              </a:spcAft>
-            </a:pPr>
-            <a:r>
-              <a:rPr sz="1400" b="1">
-                <a:solidFill>
-                  <a:srgbClr val="0545E8"/>
-                </a:solidFill>
-                <a:latin typeface="微软雅黑"/>
-              </a:rPr>
-              <a:t>课前完成：导学单 + 预习自测 + starter环境自检</a:t>
-            </a:r>
-          </a:p>
-          <a:p>
-            <a:pPr algn="l">
-              <a:lnSpc>
-                <a:spcPct val="110000"/>
-              </a:lnSpc>
-              <a:spcAft>
-                <a:spcPts val="600"/>
-              </a:spcAft>
-            </a:pPr>
-            <a:r>
-              <a:rPr sz="1250" b="0">
-                <a:solidFill>
-                  <a:srgbClr val="44546A"/>
-                </a:solidFill>
-                <a:latin typeface="微软雅黑"/>
-              </a:rPr>
-              <a:t>带着问题来上课——Predict先于Run</a:t>
+            <a:r>
+              <a:rPr sz="1050" b="0">
+                <a:solidFill>
+                  <a:srgbClr val="6B7280"/>
+                </a:solidFill>
+                <a:latin typeface="微软雅黑"/>
+              </a:rPr>
+              <a:t>本讲是动手冲刺课：知识点在完整讲解课已细讲——这页把它们浓缩成一张速览卡，边做边对照。</a:t>
+            </a:r>
+          </a:p>
+        </p:txBody>
+      </p:sp>
+      <p:sp>
+        <p:nvSpPr>
+          <p:cNvPr id="15" name="Rectangle 14"/>
+          <p:cNvSpPr/>
+          <p:nvPr/>
+        </p:nvSpPr>
+        <p:spPr>
+          <a:xfrm>
+            <a:off x="457200" y="1783080"/>
+            <a:ext cx="6309360" cy="4114800"/>
+          </a:xfrm>
+          <a:prstGeom prst="rect">
+            <a:avLst/>
+          </a:prstGeom>
+          <a:solidFill>
+            <a:srgbClr val="FFFFFF"/>
+          </a:solidFill>
+          <a:ln>
+            <a:solidFill>
+              <a:srgbClr val="D6DCE4"/>
+            </a:solidFill>
+          </a:ln>
+          <a:effectLst/>
+        </p:spPr>
+        <p:style>
+          <a:lnRef idx="1">
+            <a:schemeClr val="accent1"/>
+          </a:lnRef>
+          <a:fillRef idx="3">
+            <a:schemeClr val="accent1"/>
+          </a:fillRef>
+          <a:effectRef idx="2">
+            <a:schemeClr val="accent1"/>
+          </a:effectRef>
+          <a:fontRef idx="minor">
+            <a:schemeClr val="lt1"/>
+          </a:fontRef>
+        </p:style>
+        <p:txBody>
+          <a:bodyPr rtlCol="0" anchor="ctr" wrap="square"/>
+          <a:lstStyle/>
+          <a:p>
+            <a:pPr algn="ctr"/>
+          </a:p>
+        </p:txBody>
+      </p:sp>
+      <p:sp>
+        <p:nvSpPr>
+          <p:cNvPr id="16" name="Rectangle 15"/>
+          <p:cNvSpPr/>
+          <p:nvPr/>
+        </p:nvSpPr>
+        <p:spPr>
+          <a:xfrm>
+            <a:off x="457200" y="1783080"/>
+            <a:ext cx="6309360" cy="365760"/>
+          </a:xfrm>
+          <a:prstGeom prst="rect">
+            <a:avLst/>
+          </a:prstGeom>
+          <a:solidFill>
+            <a:srgbClr val="2F5D8C"/>
+          </a:solidFill>
+          <a:ln>
+            <a:noFill/>
+          </a:ln>
+          <a:effectLst/>
+        </p:spPr>
+        <p:style>
+          <a:lnRef idx="1">
+            <a:schemeClr val="accent1"/>
+          </a:lnRef>
+          <a:fillRef idx="3">
+            <a:schemeClr val="accent1"/>
+          </a:fillRef>
+          <a:effectRef idx="2">
+            <a:schemeClr val="accent1"/>
+          </a:effectRef>
+          <a:fontRef idx="minor">
+            <a:schemeClr val="lt1"/>
+          </a:fontRef>
+        </p:style>
+        <p:txBody>
+          <a:bodyPr rtlCol="0" anchor="ctr" wrap="square"/>
+          <a:lstStyle/>
+          <a:p>
+            <a:pPr algn="ctr"/>
+          </a:p>
+        </p:txBody>
+      </p:sp>
+      <p:sp>
+        <p:nvSpPr>
+          <p:cNvPr id="17" name="TextBox 16"/>
+          <p:cNvSpPr txBox="1"/>
+          <p:nvPr/>
+        </p:nvSpPr>
+        <p:spPr>
+          <a:xfrm>
+            <a:off x="566928" y="1819656"/>
+            <a:ext cx="6089904" cy="292608"/>
+          </a:xfrm>
+          <a:prstGeom prst="rect">
+            <a:avLst/>
+          </a:prstGeom>
+          <a:noFill/>
+        </p:spPr>
+        <p:txBody>
+          <a:bodyPr wrap="square">
+            <a:spAutoFit/>
+          </a:bodyPr>
+          <a:lstStyle/>
+          <a:p>
+            <a:r>
+              <a:rPr sz="1150" b="1">
+                <a:solidFill>
+                  <a:srgbClr val="FFFFFF"/>
+                </a:solidFill>
+                <a:latin typeface="微软雅黑"/>
+              </a:rPr>
+              <a:t>知识点速览（逐字摘自同周完整讲解课知识卡）</a:t>
+            </a:r>
+          </a:p>
+        </p:txBody>
+      </p:sp>
+      <p:sp>
+        <p:nvSpPr>
+          <p:cNvPr id="18" name="TextBox 17"/>
+          <p:cNvSpPr txBox="1"/>
+          <p:nvPr/>
+        </p:nvSpPr>
+        <p:spPr>
+          <a:xfrm>
+            <a:off x="621792" y="2267712"/>
+            <a:ext cx="6035040" cy="3474720"/>
+          </a:xfrm>
+          <a:prstGeom prst="rect">
+            <a:avLst/>
+          </a:prstGeom>
+          <a:noFill/>
+        </p:spPr>
+        <p:txBody>
+          <a:bodyPr wrap="square">
+            <a:spAutoFit/>
+          </a:bodyPr>
+          <a:lstStyle/>
+          <a:p>
+            <a:r>
+              <a:rPr sz="950" b="0">
+                <a:solidFill>
+                  <a:srgbClr val="2B2F36"/>
+                </a:solidFill>
+                <a:latin typeface="微软雅黑"/>
+              </a:rPr>
+              <a:t>◆ B01 类与实例｜类=图纸，实例=按图纸造出的每台泵——一图多产品</a:t>
+            </a:r>
+          </a:p>
+          <a:p>
+            <a:r>
+              <a:rPr sz="950" b="0">
+                <a:solidFill>
+                  <a:srgbClr val="2B2F36"/>
+                </a:solidFill>
+                <a:latin typeface="微软雅黑"/>
+              </a:rPr>
+              <a:t>◆ B02 __init__与self｜self='我自己'；__init__=出厂设置，造时自动执行</a:t>
+            </a:r>
+          </a:p>
+          <a:p>
+            <a:r>
+              <a:rPr sz="950" b="0">
+                <a:solidFill>
+                  <a:srgbClr val="2B2F36"/>
+                </a:solidFill>
+                <a:latin typeface="微软雅黑"/>
+              </a:rPr>
+              <a:t>◆ B03 实例属性｜属性写在__init__里=每台设备自己的小本本</a:t>
+            </a:r>
+          </a:p>
+          <a:p>
+            <a:r>
+              <a:rPr sz="950" b="0">
+                <a:solidFill>
+                  <a:srgbClr val="2B2F36"/>
+                </a:solidFill>
+                <a:latin typeface="微软雅黑"/>
+              </a:rPr>
+              <a:t>◆ B04 方法调用｜方法=类里装的技能；d.start()=让这台设备执行</a:t>
+            </a:r>
+          </a:p>
+          <a:p>
+            <a:r>
+              <a:rPr sz="950" b="0">
+                <a:solidFill>
+                  <a:srgbClr val="2B2F36"/>
+                </a:solidFill>
+                <a:latin typeface="微软雅黑"/>
+              </a:rPr>
+              <a:t>◆ B05 __str__可读化｜__str__=设备的自我介绍：print时说人话不报内存地址</a:t>
+            </a:r>
+          </a:p>
+          <a:p>
+            <a:r>
+              <a:rPr sz="950" b="0">
+                <a:solidFill>
+                  <a:srgbClr val="2B2F36"/>
+                </a:solidFill>
+                <a:latin typeface="微软雅黑"/>
+              </a:rPr>
+              <a:t>◆ B06 状态校验｜状态机=设备只走合法路线：停机才能启动，运行中拒重复</a:t>
+            </a:r>
+          </a:p>
+        </p:txBody>
+      </p:sp>
+      <p:sp>
+        <p:nvSpPr>
+          <p:cNvPr id="19" name="Rectangle 18"/>
+          <p:cNvSpPr/>
+          <p:nvPr/>
+        </p:nvSpPr>
+        <p:spPr>
+          <a:xfrm>
+            <a:off x="6903720" y="1783080"/>
+            <a:ext cx="4828032" cy="1965960"/>
+          </a:xfrm>
+          <a:prstGeom prst="rect">
+            <a:avLst/>
+          </a:prstGeom>
+          <a:solidFill>
+            <a:srgbClr val="FFFFFF"/>
+          </a:solidFill>
+          <a:ln>
+            <a:solidFill>
+              <a:srgbClr val="D6DCE4"/>
+            </a:solidFill>
+          </a:ln>
+          <a:effectLst/>
+        </p:spPr>
+        <p:style>
+          <a:lnRef idx="1">
+            <a:schemeClr val="accent1"/>
+          </a:lnRef>
+          <a:fillRef idx="3">
+            <a:schemeClr val="accent1"/>
+          </a:fillRef>
+          <a:effectRef idx="2">
+            <a:schemeClr val="accent1"/>
+          </a:effectRef>
+          <a:fontRef idx="minor">
+            <a:schemeClr val="lt1"/>
+          </a:fontRef>
+        </p:style>
+        <p:txBody>
+          <a:bodyPr rtlCol="0" anchor="ctr" wrap="square"/>
+          <a:lstStyle/>
+          <a:p>
+            <a:pPr algn="ctr"/>
+          </a:p>
+        </p:txBody>
+      </p:sp>
+      <p:sp>
+        <p:nvSpPr>
+          <p:cNvPr id="20" name="Rectangle 19"/>
+          <p:cNvSpPr/>
+          <p:nvPr/>
+        </p:nvSpPr>
+        <p:spPr>
+          <a:xfrm>
+            <a:off x="6903720" y="1783080"/>
+            <a:ext cx="4828032" cy="365760"/>
+          </a:xfrm>
+          <a:prstGeom prst="rect">
+            <a:avLst/>
+          </a:prstGeom>
+          <a:solidFill>
+            <a:srgbClr val="2E7D46"/>
+          </a:solidFill>
+          <a:ln>
+            <a:noFill/>
+          </a:ln>
+          <a:effectLst/>
+        </p:spPr>
+        <p:style>
+          <a:lnRef idx="1">
+            <a:schemeClr val="accent1"/>
+          </a:lnRef>
+          <a:fillRef idx="3">
+            <a:schemeClr val="accent1"/>
+          </a:fillRef>
+          <a:effectRef idx="2">
+            <a:schemeClr val="accent1"/>
+          </a:effectRef>
+          <a:fontRef idx="minor">
+            <a:schemeClr val="lt1"/>
+          </a:fontRef>
+        </p:style>
+        <p:txBody>
+          <a:bodyPr rtlCol="0" anchor="ctr" wrap="square"/>
+          <a:lstStyle/>
+          <a:p>
+            <a:pPr algn="ctr"/>
+          </a:p>
+        </p:txBody>
+      </p:sp>
+      <p:sp>
+        <p:nvSpPr>
+          <p:cNvPr id="21" name="TextBox 20"/>
+          <p:cNvSpPr txBox="1"/>
+          <p:nvPr/>
+        </p:nvSpPr>
+        <p:spPr>
+          <a:xfrm>
+            <a:off x="7013448" y="1819656"/>
+            <a:ext cx="4608576" cy="292608"/>
+          </a:xfrm>
+          <a:prstGeom prst="rect">
+            <a:avLst/>
+          </a:prstGeom>
+          <a:noFill/>
+        </p:spPr>
+        <p:txBody>
+          <a:bodyPr wrap="square">
+            <a:spAutoFit/>
+          </a:bodyPr>
+          <a:lstStyle/>
+          <a:p>
+            <a:r>
+              <a:rPr sz="1150" b="1">
+                <a:solidFill>
+                  <a:srgbClr val="FFFFFF"/>
+                </a:solidFill>
+                <a:latin typeface="微软雅黑"/>
+              </a:rPr>
+              <a:t>本讲达标线（当堂评分同口径）</a:t>
+            </a:r>
+          </a:p>
+        </p:txBody>
+      </p:sp>
+      <p:sp>
+        <p:nvSpPr>
+          <p:cNvPr id="22" name="TextBox 21"/>
+          <p:cNvSpPr txBox="1"/>
+          <p:nvPr/>
+        </p:nvSpPr>
+        <p:spPr>
+          <a:xfrm>
+            <a:off x="7068312" y="2249424"/>
+            <a:ext cx="4526280" cy="1371600"/>
+          </a:xfrm>
+          <a:prstGeom prst="rect">
+            <a:avLst/>
+          </a:prstGeom>
+          <a:noFill/>
+        </p:spPr>
+        <p:txBody>
+          <a:bodyPr wrap="square">
+            <a:spAutoFit/>
+          </a:bodyPr>
+          <a:lstStyle/>
+          <a:p>
+            <a:r>
+              <a:rPr sz="900" b="0">
+                <a:solidFill>
+                  <a:srgbClr val="2B2F36"/>
+                </a:solidFill>
+                <a:latin typeface="微软雅黑"/>
+              </a:rPr>
+              <a:t>① 及格(D)：1类+2属性+2方法+2实例</a:t>
+            </a:r>
+          </a:p>
+          <a:p>
+            <a:r>
+              <a:rPr sz="900" b="0">
+                <a:solidFill>
+                  <a:srgbClr val="2B2F36"/>
+                </a:solidFill>
+                <a:latin typeface="微软雅黑"/>
+              </a:rPr>
+              <a:t>② 优秀(B+)：状态校验完善；内存图正确</a:t>
+            </a:r>
+          </a:p>
+        </p:txBody>
+      </p:sp>
+      <p:sp>
+        <p:nvSpPr>
+          <p:cNvPr id="23" name="Rectangle 22"/>
+          <p:cNvSpPr/>
+          <p:nvPr/>
+        </p:nvSpPr>
+        <p:spPr>
+          <a:xfrm>
+            <a:off x="6903720" y="3886200"/>
+            <a:ext cx="4828032" cy="2011680"/>
+          </a:xfrm>
+          <a:prstGeom prst="rect">
+            <a:avLst/>
+          </a:prstGeom>
+          <a:solidFill>
+            <a:srgbClr val="FFFFFF"/>
+          </a:solidFill>
+          <a:ln>
+            <a:solidFill>
+              <a:srgbClr val="D6DCE4"/>
+            </a:solidFill>
+          </a:ln>
+          <a:effectLst/>
+        </p:spPr>
+        <p:style>
+          <a:lnRef idx="1">
+            <a:schemeClr val="accent1"/>
+          </a:lnRef>
+          <a:fillRef idx="3">
+            <a:schemeClr val="accent1"/>
+          </a:fillRef>
+          <a:effectRef idx="2">
+            <a:schemeClr val="accent1"/>
+          </a:effectRef>
+          <a:fontRef idx="minor">
+            <a:schemeClr val="lt1"/>
+          </a:fontRef>
+        </p:style>
+        <p:txBody>
+          <a:bodyPr rtlCol="0" anchor="ctr" wrap="square"/>
+          <a:lstStyle/>
+          <a:p>
+            <a:pPr algn="ctr"/>
+          </a:p>
+        </p:txBody>
+      </p:sp>
+      <p:sp>
+        <p:nvSpPr>
+          <p:cNvPr id="24" name="Rectangle 23"/>
+          <p:cNvSpPr/>
+          <p:nvPr/>
+        </p:nvSpPr>
+        <p:spPr>
+          <a:xfrm>
+            <a:off x="6903720" y="3886200"/>
+            <a:ext cx="4828032" cy="365760"/>
+          </a:xfrm>
+          <a:prstGeom prst="rect">
+            <a:avLst/>
+          </a:prstGeom>
+          <a:solidFill>
+            <a:srgbClr val="8A4B2D"/>
+          </a:solidFill>
+          <a:ln>
+            <a:noFill/>
+          </a:ln>
+          <a:effectLst/>
+        </p:spPr>
+        <p:style>
+          <a:lnRef idx="1">
+            <a:schemeClr val="accent1"/>
+          </a:lnRef>
+          <a:fillRef idx="3">
+            <a:schemeClr val="accent1"/>
+          </a:fillRef>
+          <a:effectRef idx="2">
+            <a:schemeClr val="accent1"/>
+          </a:effectRef>
+          <a:fontRef idx="minor">
+            <a:schemeClr val="lt1"/>
+          </a:fontRef>
+        </p:style>
+        <p:txBody>
+          <a:bodyPr rtlCol="0" anchor="ctr" wrap="square"/>
+          <a:lstStyle/>
+          <a:p>
+            <a:pPr algn="ctr"/>
+          </a:p>
+        </p:txBody>
+      </p:sp>
+      <p:sp>
+        <p:nvSpPr>
+          <p:cNvPr id="25" name="TextBox 24"/>
+          <p:cNvSpPr txBox="1"/>
+          <p:nvPr/>
+        </p:nvSpPr>
+        <p:spPr>
+          <a:xfrm>
+            <a:off x="7013448" y="3922776"/>
+            <a:ext cx="4608576" cy="292608"/>
+          </a:xfrm>
+          <a:prstGeom prst="rect">
+            <a:avLst/>
+          </a:prstGeom>
+          <a:noFill/>
+        </p:spPr>
+        <p:txBody>
+          <a:bodyPr wrap="square">
+            <a:spAutoFit/>
+          </a:bodyPr>
+          <a:lstStyle/>
+          <a:p>
+            <a:r>
+              <a:rPr sz="1150" b="1">
+                <a:solidFill>
+                  <a:srgbClr val="FFFFFF"/>
+                </a:solidFill>
+                <a:latin typeface="微软雅黑"/>
+              </a:rPr>
+              <a:t>动手前三个提醒（踩坑点摘录）</a:t>
+            </a:r>
+          </a:p>
+        </p:txBody>
+      </p:sp>
+      <p:sp>
+        <p:nvSpPr>
+          <p:cNvPr id="26" name="TextBox 25"/>
+          <p:cNvSpPr txBox="1"/>
+          <p:nvPr/>
+        </p:nvSpPr>
+        <p:spPr>
+          <a:xfrm>
+            <a:off x="7068312" y="4352544"/>
+            <a:ext cx="4526280" cy="1463040"/>
+          </a:xfrm>
+          <a:prstGeom prst="rect">
+            <a:avLst/>
+          </a:prstGeom>
+          <a:noFill/>
+        </p:spPr>
+        <p:txBody>
+          <a:bodyPr wrap="square">
+            <a:spAutoFit/>
+          </a:bodyPr>
+          <a:lstStyle/>
+          <a:p>
+            <a:r>
+              <a:rPr sz="900" b="0">
+                <a:solidFill>
+                  <a:srgbClr val="2B2F36"/>
+                </a:solidFill>
+                <a:latin typeface="微软雅黑"/>
+              </a:rPr>
+              <a:t>⚠ 方法第一参数写self</a:t>
+            </a:r>
+          </a:p>
+          <a:p>
+            <a:r>
+              <a:rPr sz="900" b="0">
+                <a:solidFill>
+                  <a:srgbClr val="2B2F36"/>
+                </a:solidFill>
+                <a:latin typeface="微软雅黑"/>
+              </a:rPr>
+              <a:t>⚠ 移入__init__</a:t>
+            </a:r>
+          </a:p>
+          <a:p>
+            <a:r>
+              <a:rPr sz="900" b="0">
+                <a:solidFill>
+                  <a:srgbClr val="2B2F36"/>
+                </a:solidFill>
+                <a:latin typeface="微软雅黑"/>
+              </a:rPr>
+              <a:t>⚠ d.start()才调用</a:t>
+            </a:r>
+          </a:p>
+        </p:txBody>
+      </p:sp>
+      <p:sp>
+        <p:nvSpPr>
+          <p:cNvPr id="27" name="TextBox 26"/>
+          <p:cNvSpPr txBox="1"/>
+          <p:nvPr/>
+        </p:nvSpPr>
+        <p:spPr>
+          <a:xfrm>
+            <a:off x="457200" y="6281928"/>
+            <a:ext cx="9601200" cy="182880"/>
+          </a:xfrm>
+          <a:prstGeom prst="rect">
+            <a:avLst/>
+          </a:prstGeom>
+          <a:noFill/>
+        </p:spPr>
+        <p:txBody>
+          <a:bodyPr wrap="square">
+            <a:spAutoFit/>
+          </a:bodyPr>
+          <a:lstStyle/>
+          <a:p>
+            <a:r>
+              <a:rPr sz="900" b="0">
+                <a:solidFill>
+                  <a:srgbClr val="6B7280"/>
+                </a:solidFill>
+                <a:latin typeface="微软雅黑"/>
+              </a:rPr>
+              <a:t>素材来源：同周《第7次课-从图纸到对象：设备建模》知识卡与避坑清单（逐字摘录）</a:t>
             </a:r>
           </a:p>
         </p:txBody>
@@ -10941,14 +11963,102 @@
       <p:grpSpPr/>
       <p:sp>
         <p:nvSpPr>
-          <p:cNvPr id="2" name="TextBox 1"/>
+          <p:cNvPr id="2" name="Rectangle 1"/>
+          <p:cNvSpPr/>
+          <p:nvPr/>
+        </p:nvSpPr>
+        <p:spPr>
+          <a:xfrm>
+            <a:off x="0" y="0"/>
+            <a:ext cx="12192000" cy="1150000"/>
+          </a:xfrm>
+          <a:prstGeom prst="rect">
+            <a:avLst/>
+          </a:prstGeom>
+          <a:solidFill>
+            <a:srgbClr val="010328"/>
+          </a:solidFill>
+          <a:ln>
+            <a:noFill/>
+          </a:ln>
+          <a:effectLst/>
+        </p:spPr>
+        <p:style>
+          <a:lnRef idx="1">
+            <a:schemeClr val="accent1"/>
+          </a:lnRef>
+          <a:fillRef idx="3">
+            <a:schemeClr val="accent1"/>
+          </a:fillRef>
+          <a:effectRef idx="2">
+            <a:schemeClr val="accent1"/>
+          </a:effectRef>
+          <a:fontRef idx="minor">
+            <a:schemeClr val="lt1"/>
+          </a:fontRef>
+        </p:style>
+        <p:txBody>
+          <a:bodyPr rtlCol="0" anchor="ctr"/>
+          <a:lstStyle/>
+          <a:p>
+            <a:pPr algn="ctr"/>
+          </a:p>
+        </p:txBody>
+      </p:sp>
+      <p:sp>
+        <p:nvSpPr>
+          <p:cNvPr id="3" name="Rectangle 2"/>
+          <p:cNvSpPr/>
+          <p:nvPr/>
+        </p:nvSpPr>
+        <p:spPr>
+          <a:xfrm>
+            <a:off x="0" y="1150000"/>
+            <a:ext cx="2600000" cy="70000"/>
+          </a:xfrm>
+          <a:prstGeom prst="rect">
+            <a:avLst/>
+          </a:prstGeom>
+          <a:solidFill>
+            <a:srgbClr val="F5670F"/>
+          </a:solidFill>
+          <a:ln>
+            <a:noFill/>
+          </a:ln>
+          <a:effectLst/>
+        </p:spPr>
+        <p:style>
+          <a:lnRef idx="1">
+            <a:schemeClr val="accent1"/>
+          </a:lnRef>
+          <a:fillRef idx="3">
+            <a:schemeClr val="accent1"/>
+          </a:fillRef>
+          <a:effectRef idx="2">
+            <a:schemeClr val="accent1"/>
+          </a:effectRef>
+          <a:fontRef idx="minor">
+            <a:schemeClr val="lt1"/>
+          </a:fontRef>
+        </p:style>
+        <p:txBody>
+          <a:bodyPr rtlCol="0" anchor="ctr"/>
+          <a:lstStyle/>
+          <a:p>
+            <a:pPr algn="ctr"/>
+          </a:p>
+        </p:txBody>
+      </p:sp>
+      <p:sp>
+        <p:nvSpPr>
+          <p:cNvPr id="4" name="TextBox 3"/>
           <p:cNvSpPr txBox="1"/>
           <p:nvPr/>
         </p:nvSpPr>
         <p:spPr>
           <a:xfrm>
-            <a:off x="548640" y="320040"/>
-            <a:ext cx="11094720" cy="914400"/>
+            <a:off x="700000" y="300000"/>
+            <a:ext cx="10792000" cy="700000"/>
           </a:xfrm>
           <a:prstGeom prst="rect">
             <a:avLst/>
@@ -10956,28 +12066,169 @@
           <a:noFill/>
         </p:spPr>
         <p:txBody>
-          <a:bodyPr wrap="none">
+          <a:bodyPr wrap="square" anchor="t">
             <a:spAutoFit/>
           </a:bodyPr>
           <a:lstStyle/>
           <a:p>
-            <a:r>
-              <a:rPr sz="3000" b="1"/>
-              <a:t>本任务六步法导航</a:t>
-            </a:r>
-          </a:p>
-        </p:txBody>
-      </p:sp>
-      <p:sp>
-        <p:nvSpPr>
-          <p:cNvPr id="3" name="TextBox 2"/>
+            <a:pPr algn="l">
+              <a:lnSpc>
+                <a:spcPct val="110000"/>
+              </a:lnSpc>
+              <a:spcAft>
+                <a:spcPts val="600"/>
+              </a:spcAft>
+            </a:pPr>
+            <a:r>
+              <a:rPr sz="2400" b="1">
+                <a:solidFill>
+                  <a:srgbClr val="FFFFFF"/>
+                </a:solidFill>
+                <a:latin typeface="微软雅黑"/>
+              </a:rPr>
+              <a:t>下次课预告 · 带着问题去下一讲</a:t>
+            </a:r>
+          </a:p>
+        </p:txBody>
+      </p:sp>
+      <p:sp>
+        <p:nvSpPr>
+          <p:cNvPr id="11" name="Rectangle 10"/>
+          <p:cNvSpPr/>
+          <p:nvPr/>
+        </p:nvSpPr>
+        <p:spPr>
+          <a:xfrm>
+            <a:off x="500000" y="6500000"/>
+            <a:ext cx="11100000" cy="20000"/>
+          </a:xfrm>
+          <a:prstGeom prst="rect">
+            <a:avLst/>
+          </a:prstGeom>
+          <a:solidFill>
+            <a:srgbClr val="C9D4EE"/>
+          </a:solidFill>
+          <a:ln>
+            <a:noFill/>
+          </a:ln>
+          <a:effectLst/>
+        </p:spPr>
+        <p:style>
+          <a:lnRef idx="1">
+            <a:schemeClr val="accent1"/>
+          </a:lnRef>
+          <a:fillRef idx="3">
+            <a:schemeClr val="accent1"/>
+          </a:fillRef>
+          <a:effectRef idx="2">
+            <a:schemeClr val="accent1"/>
+          </a:effectRef>
+          <a:fontRef idx="minor">
+            <a:schemeClr val="lt1"/>
+          </a:fontRef>
+        </p:style>
+        <p:txBody>
+          <a:bodyPr rtlCol="0" anchor="ctr"/>
+          <a:lstStyle/>
+          <a:p>
+            <a:pPr algn="ctr"/>
+          </a:p>
+        </p:txBody>
+      </p:sp>
+      <p:sp>
+        <p:nvSpPr>
+          <p:cNvPr id="12" name="TextBox 11"/>
           <p:cNvSpPr txBox="1"/>
           <p:nvPr/>
         </p:nvSpPr>
         <p:spPr>
           <a:xfrm>
-            <a:off x="731520" y="1371600"/>
-            <a:ext cx="10728960" cy="4663440"/>
+            <a:off x="500000" y="6540000"/>
+            <a:ext cx="7000000" cy="300000"/>
+          </a:xfrm>
+          <a:prstGeom prst="rect">
+            <a:avLst/>
+          </a:prstGeom>
+          <a:noFill/>
+        </p:spPr>
+        <p:txBody>
+          <a:bodyPr wrap="square" anchor="t">
+            <a:spAutoFit/>
+          </a:bodyPr>
+          <a:lstStyle/>
+          <a:p>
+            <a:pPr algn="l">
+              <a:lnSpc>
+                <a:spcPct val="110000"/>
+              </a:lnSpc>
+              <a:spcAft>
+                <a:spcPts val="600"/>
+              </a:spcAft>
+            </a:pPr>
+            <a:r>
+              <a:rPr sz="1000" b="0">
+                <a:solidFill>
+                  <a:srgbClr val="8A97B5"/>
+                </a:solidFill>
+                <a:latin typeface="微软雅黑"/>
+              </a:rPr>
+              <a:t>两江智造集团 · Python编程基础</a:t>
+            </a:r>
+          </a:p>
+        </p:txBody>
+      </p:sp>
+      <p:sp>
+        <p:nvSpPr>
+          <p:cNvPr id="13" name="TextBox 12"/>
+          <p:cNvSpPr txBox="1"/>
+          <p:nvPr/>
+        </p:nvSpPr>
+        <p:spPr>
+          <a:xfrm>
+            <a:off x="10600000" y="6540000"/>
+            <a:ext cx="1000000" cy="300000"/>
+          </a:xfrm>
+          <a:prstGeom prst="rect">
+            <a:avLst/>
+          </a:prstGeom>
+          <a:noFill/>
+        </p:spPr>
+        <p:txBody>
+          <a:bodyPr wrap="square" anchor="t">
+            <a:spAutoFit/>
+          </a:bodyPr>
+          <a:lstStyle/>
+          <a:p>
+            <a:pPr algn="r">
+              <a:lnSpc>
+                <a:spcPct val="110000"/>
+              </a:lnSpc>
+              <a:spcAft>
+                <a:spcPts val="600"/>
+              </a:spcAft>
+            </a:pPr>
+            <a:r>
+              <a:rPr sz="1000" b="0">
+                <a:solidFill>
+                  <a:srgbClr val="8A97B5"/>
+                </a:solidFill>
+                <a:latin typeface="微软雅黑"/>
+              </a:rPr>
+              <a:t>9 / 15</a:t>
+            </a:r>
+          </a:p>
+        </p:txBody>
+      </p:sp>
+      <p:sp>
+        <p:nvSpPr>
+          <p:cNvPr id="14" name="TextBox 13"/>
+          <p:cNvSpPr txBox="1"/>
+          <p:nvPr/>
+        </p:nvSpPr>
+        <p:spPr>
+          <a:xfrm>
+            <a:off x="457200" y="1389888"/>
+            <a:ext cx="11274552" cy="274320"/>
           </a:xfrm>
           <a:prstGeom prst="rect">
             <a:avLst/>
@@ -10990,47 +12241,510 @@
           </a:bodyPr>
           <a:lstStyle/>
           <a:p>
-            <a:pPr>
-              <a:spcAft>
-                <a:spcPts val="1000"/>
-              </a:spcAft>
-            </a:pPr>
-            <a:r>
-              <a:rPr sz="1800"/>
-              <a:t>六步法：资讯 → 计划 → 决策 → 实施 → 检查 → 评估</a:t>
-            </a:r>
-          </a:p>
-          <a:p>
-            <a:pPr>
-              <a:spcAft>
-                <a:spcPts val="1000"/>
-              </a:spcAft>
-            </a:pPr>
-            <a:r>
-              <a:rPr sz="1800"/>
-              <a:t>本讲对应工单：《程序设计基础》分层任务工单</a:t>
-            </a:r>
-          </a:p>
-          <a:p>
-            <a:pPr>
-              <a:spcAft>
-                <a:spcPts val="1000"/>
-              </a:spcAft>
-            </a:pPr>
-            <a:r>
-              <a:rPr sz="1800"/>
-              <a:t>课堂产出：工单第六节实施记录须当堂填写，含操作前安全打勾与学生本人签字。</a:t>
-            </a:r>
-          </a:p>
-          <a:p>
-            <a:pPr>
-              <a:spcAft>
-                <a:spcPts val="1000"/>
-              </a:spcAft>
-            </a:pPr>
-            <a:r>
-              <a:rPr sz="1800"/>
-              <a:t>课后交付：班组长／操作员／教师三方联签后交回，缺签视为未交付。</a:t>
+            <a:r>
+              <a:rPr sz="1050" b="0">
+                <a:solidFill>
+                  <a:srgbClr val="6B7280"/>
+                </a:solidFill>
+                <a:latin typeface="微软雅黑"/>
+              </a:rPr>
+              <a:t>带着问题去下一讲——预习任务与自测问题逐字取自课程安排，课前完成。</a:t>
+            </a:r>
+          </a:p>
+        </p:txBody>
+      </p:sp>
+      <p:sp>
+        <p:nvSpPr>
+          <p:cNvPr id="15" name="Rectangle 14"/>
+          <p:cNvSpPr/>
+          <p:nvPr/>
+        </p:nvSpPr>
+        <p:spPr>
+          <a:xfrm>
+            <a:off x="457200" y="1920240"/>
+            <a:ext cx="11274552" cy="960120"/>
+          </a:xfrm>
+          <a:prstGeom prst="rect">
+            <a:avLst/>
+          </a:prstGeom>
+          <a:solidFill>
+            <a:srgbClr val="F7F9FC"/>
+          </a:solidFill>
+          <a:ln>
+            <a:solidFill>
+              <a:srgbClr val="D6DCE4"/>
+            </a:solidFill>
+          </a:ln>
+          <a:effectLst/>
+        </p:spPr>
+        <p:style>
+          <a:lnRef idx="1">
+            <a:schemeClr val="accent1"/>
+          </a:lnRef>
+          <a:fillRef idx="3">
+            <a:schemeClr val="accent1"/>
+          </a:fillRef>
+          <a:effectRef idx="2">
+            <a:schemeClr val="accent1"/>
+          </a:effectRef>
+          <a:fontRef idx="minor">
+            <a:schemeClr val="lt1"/>
+          </a:fontRef>
+        </p:style>
+        <p:txBody>
+          <a:bodyPr rtlCol="0" anchor="ctr" wrap="square"/>
+          <a:lstStyle/>
+          <a:p>
+            <a:pPr algn="ctr"/>
+          </a:p>
+        </p:txBody>
+      </p:sp>
+      <p:sp>
+        <p:nvSpPr>
+          <p:cNvPr id="16" name="Rectangle 15"/>
+          <p:cNvSpPr/>
+          <p:nvPr/>
+        </p:nvSpPr>
+        <p:spPr>
+          <a:xfrm>
+            <a:off x="457200" y="1920240"/>
+            <a:ext cx="82296" cy="960120"/>
+          </a:xfrm>
+          <a:prstGeom prst="rect">
+            <a:avLst/>
+          </a:prstGeom>
+          <a:solidFill>
+            <a:srgbClr val="2F5D8C"/>
+          </a:solidFill>
+          <a:ln>
+            <a:noFill/>
+          </a:ln>
+          <a:effectLst/>
+        </p:spPr>
+        <p:style>
+          <a:lnRef idx="1">
+            <a:schemeClr val="accent1"/>
+          </a:lnRef>
+          <a:fillRef idx="3">
+            <a:schemeClr val="accent1"/>
+          </a:fillRef>
+          <a:effectRef idx="2">
+            <a:schemeClr val="accent1"/>
+          </a:effectRef>
+          <a:fontRef idx="minor">
+            <a:schemeClr val="lt1"/>
+          </a:fontRef>
+        </p:style>
+        <p:txBody>
+          <a:bodyPr rtlCol="0" anchor="ctr" wrap="square"/>
+          <a:lstStyle/>
+          <a:p>
+            <a:pPr algn="ctr"/>
+          </a:p>
+        </p:txBody>
+      </p:sp>
+      <p:sp>
+        <p:nvSpPr>
+          <p:cNvPr id="17" name="TextBox 16"/>
+          <p:cNvSpPr txBox="1"/>
+          <p:nvPr/>
+        </p:nvSpPr>
+        <p:spPr>
+          <a:xfrm>
+            <a:off x="685800" y="2084832"/>
+            <a:ext cx="10881360" cy="685800"/>
+          </a:xfrm>
+          <a:prstGeom prst="rect">
+            <a:avLst/>
+          </a:prstGeom>
+          <a:noFill/>
+        </p:spPr>
+        <p:txBody>
+          <a:bodyPr wrap="square">
+            <a:spAutoFit/>
+          </a:bodyPr>
+          <a:lstStyle/>
+          <a:p>
+            <a:r>
+              <a:rPr sz="1050" b="0">
+                <a:solidFill>
+                  <a:srgbClr val="2B2F36"/>
+                </a:solidFill>
+                <a:latin typeface="微软雅黑"/>
+              </a:rPr>
+              <a:t>主题：构建基类+两子类继承体系——应用：见工单star</a:t>
+            </a:r>
+          </a:p>
+        </p:txBody>
+      </p:sp>
+      <p:sp>
+        <p:nvSpPr>
+          <p:cNvPr id="18" name="Rectangle 17"/>
+          <p:cNvSpPr/>
+          <p:nvPr/>
+        </p:nvSpPr>
+        <p:spPr>
+          <a:xfrm>
+            <a:off x="457200" y="3026664"/>
+            <a:ext cx="11274552" cy="960120"/>
+          </a:xfrm>
+          <a:prstGeom prst="rect">
+            <a:avLst/>
+          </a:prstGeom>
+          <a:solidFill>
+            <a:srgbClr val="F7F9FC"/>
+          </a:solidFill>
+          <a:ln>
+            <a:solidFill>
+              <a:srgbClr val="D6DCE4"/>
+            </a:solidFill>
+          </a:ln>
+          <a:effectLst/>
+        </p:spPr>
+        <p:style>
+          <a:lnRef idx="1">
+            <a:schemeClr val="accent1"/>
+          </a:lnRef>
+          <a:fillRef idx="3">
+            <a:schemeClr val="accent1"/>
+          </a:fillRef>
+          <a:effectRef idx="2">
+            <a:schemeClr val="accent1"/>
+          </a:effectRef>
+          <a:fontRef idx="minor">
+            <a:schemeClr val="lt1"/>
+          </a:fontRef>
+        </p:style>
+        <p:txBody>
+          <a:bodyPr rtlCol="0" anchor="ctr" wrap="square"/>
+          <a:lstStyle/>
+          <a:p>
+            <a:pPr algn="ctr"/>
+          </a:p>
+        </p:txBody>
+      </p:sp>
+      <p:sp>
+        <p:nvSpPr>
+          <p:cNvPr id="19" name="Rectangle 18"/>
+          <p:cNvSpPr/>
+          <p:nvPr/>
+        </p:nvSpPr>
+        <p:spPr>
+          <a:xfrm>
+            <a:off x="457200" y="3026664"/>
+            <a:ext cx="82296" cy="960120"/>
+          </a:xfrm>
+          <a:prstGeom prst="rect">
+            <a:avLst/>
+          </a:prstGeom>
+          <a:solidFill>
+            <a:srgbClr val="2F5D8C"/>
+          </a:solidFill>
+          <a:ln>
+            <a:noFill/>
+          </a:ln>
+          <a:effectLst/>
+        </p:spPr>
+        <p:style>
+          <a:lnRef idx="1">
+            <a:schemeClr val="accent1"/>
+          </a:lnRef>
+          <a:fillRef idx="3">
+            <a:schemeClr val="accent1"/>
+          </a:fillRef>
+          <a:effectRef idx="2">
+            <a:schemeClr val="accent1"/>
+          </a:effectRef>
+          <a:fontRef idx="minor">
+            <a:schemeClr val="lt1"/>
+          </a:fontRef>
+        </p:style>
+        <p:txBody>
+          <a:bodyPr rtlCol="0" anchor="ctr" wrap="square"/>
+          <a:lstStyle/>
+          <a:p>
+            <a:pPr algn="ctr"/>
+          </a:p>
+        </p:txBody>
+      </p:sp>
+      <p:sp>
+        <p:nvSpPr>
+          <p:cNvPr id="20" name="TextBox 19"/>
+          <p:cNvSpPr txBox="1"/>
+          <p:nvPr/>
+        </p:nvSpPr>
+        <p:spPr>
+          <a:xfrm>
+            <a:off x="685800" y="3191256"/>
+            <a:ext cx="10881360" cy="685800"/>
+          </a:xfrm>
+          <a:prstGeom prst="rect">
+            <a:avLst/>
+          </a:prstGeom>
+          <a:noFill/>
+        </p:spPr>
+        <p:txBody>
+          <a:bodyPr wrap="square">
+            <a:spAutoFit/>
+          </a:bodyPr>
+          <a:lstStyle/>
+          <a:p>
+            <a:r>
+              <a:rPr sz="1050" b="0">
+                <a:solidFill>
+                  <a:srgbClr val="2B2F36"/>
+                </a:solidFill>
+                <a:latin typeface="微软雅黑"/>
+              </a:rPr>
+              <a:t>预习快问：子类如何调用父类__init__？多态怎么理解？</a:t>
+            </a:r>
+          </a:p>
+        </p:txBody>
+      </p:sp>
+      <p:sp>
+        <p:nvSpPr>
+          <p:cNvPr id="21" name="Rectangle 20"/>
+          <p:cNvSpPr/>
+          <p:nvPr/>
+        </p:nvSpPr>
+        <p:spPr>
+          <a:xfrm>
+            <a:off x="457200" y="4133087"/>
+            <a:ext cx="11274552" cy="960120"/>
+          </a:xfrm>
+          <a:prstGeom prst="rect">
+            <a:avLst/>
+          </a:prstGeom>
+          <a:solidFill>
+            <a:srgbClr val="F7F9FC"/>
+          </a:solidFill>
+          <a:ln>
+            <a:solidFill>
+              <a:srgbClr val="D6DCE4"/>
+            </a:solidFill>
+          </a:ln>
+          <a:effectLst/>
+        </p:spPr>
+        <p:style>
+          <a:lnRef idx="1">
+            <a:schemeClr val="accent1"/>
+          </a:lnRef>
+          <a:fillRef idx="3">
+            <a:schemeClr val="accent1"/>
+          </a:fillRef>
+          <a:effectRef idx="2">
+            <a:schemeClr val="accent1"/>
+          </a:effectRef>
+          <a:fontRef idx="minor">
+            <a:schemeClr val="lt1"/>
+          </a:fontRef>
+        </p:style>
+        <p:txBody>
+          <a:bodyPr rtlCol="0" anchor="ctr" wrap="square"/>
+          <a:lstStyle/>
+          <a:p>
+            <a:pPr algn="ctr"/>
+          </a:p>
+        </p:txBody>
+      </p:sp>
+      <p:sp>
+        <p:nvSpPr>
+          <p:cNvPr id="22" name="Rectangle 21"/>
+          <p:cNvSpPr/>
+          <p:nvPr/>
+        </p:nvSpPr>
+        <p:spPr>
+          <a:xfrm>
+            <a:off x="457200" y="4133087"/>
+            <a:ext cx="82296" cy="960120"/>
+          </a:xfrm>
+          <a:prstGeom prst="rect">
+            <a:avLst/>
+          </a:prstGeom>
+          <a:solidFill>
+            <a:srgbClr val="2F5D8C"/>
+          </a:solidFill>
+          <a:ln>
+            <a:noFill/>
+          </a:ln>
+          <a:effectLst/>
+        </p:spPr>
+        <p:style>
+          <a:lnRef idx="1">
+            <a:schemeClr val="accent1"/>
+          </a:lnRef>
+          <a:fillRef idx="3">
+            <a:schemeClr val="accent1"/>
+          </a:fillRef>
+          <a:effectRef idx="2">
+            <a:schemeClr val="accent1"/>
+          </a:effectRef>
+          <a:fontRef idx="minor">
+            <a:schemeClr val="lt1"/>
+          </a:fontRef>
+        </p:style>
+        <p:txBody>
+          <a:bodyPr rtlCol="0" anchor="ctr" wrap="square"/>
+          <a:lstStyle/>
+          <a:p>
+            <a:pPr algn="ctr"/>
+          </a:p>
+        </p:txBody>
+      </p:sp>
+      <p:sp>
+        <p:nvSpPr>
+          <p:cNvPr id="23" name="TextBox 22"/>
+          <p:cNvSpPr txBox="1"/>
+          <p:nvPr/>
+        </p:nvSpPr>
+        <p:spPr>
+          <a:xfrm>
+            <a:off x="685800" y="4297679"/>
+            <a:ext cx="10881360" cy="685800"/>
+          </a:xfrm>
+          <a:prstGeom prst="rect">
+            <a:avLst/>
+          </a:prstGeom>
+          <a:noFill/>
+        </p:spPr>
+        <p:txBody>
+          <a:bodyPr wrap="square">
+            <a:spAutoFit/>
+          </a:bodyPr>
+          <a:lstStyle/>
+          <a:p>
+            <a:r>
+              <a:rPr sz="1050" b="0">
+                <a:solidFill>
+                  <a:srgbClr val="2B2F36"/>
+                </a:solidFill>
+                <a:latin typeface="微软雅黑"/>
+              </a:rPr>
+              <a:t>课前完成：导学单 + 预习自测 + starter环境自检</a:t>
+            </a:r>
+          </a:p>
+        </p:txBody>
+      </p:sp>
+      <p:sp>
+        <p:nvSpPr>
+          <p:cNvPr id="24" name="Rectangle 23"/>
+          <p:cNvSpPr/>
+          <p:nvPr/>
+        </p:nvSpPr>
+        <p:spPr>
+          <a:xfrm>
+            <a:off x="457200" y="5239512"/>
+            <a:ext cx="11274552" cy="960120"/>
+          </a:xfrm>
+          <a:prstGeom prst="rect">
+            <a:avLst/>
+          </a:prstGeom>
+          <a:solidFill>
+            <a:srgbClr val="F7F9FC"/>
+          </a:solidFill>
+          <a:ln>
+            <a:solidFill>
+              <a:srgbClr val="D6DCE4"/>
+            </a:solidFill>
+          </a:ln>
+          <a:effectLst/>
+        </p:spPr>
+        <p:style>
+          <a:lnRef idx="1">
+            <a:schemeClr val="accent1"/>
+          </a:lnRef>
+          <a:fillRef idx="3">
+            <a:schemeClr val="accent1"/>
+          </a:fillRef>
+          <a:effectRef idx="2">
+            <a:schemeClr val="accent1"/>
+          </a:effectRef>
+          <a:fontRef idx="minor">
+            <a:schemeClr val="lt1"/>
+          </a:fontRef>
+        </p:style>
+        <p:txBody>
+          <a:bodyPr rtlCol="0" anchor="ctr" wrap="square"/>
+          <a:lstStyle/>
+          <a:p>
+            <a:pPr algn="ctr"/>
+          </a:p>
+        </p:txBody>
+      </p:sp>
+      <p:sp>
+        <p:nvSpPr>
+          <p:cNvPr id="25" name="Rectangle 24"/>
+          <p:cNvSpPr/>
+          <p:nvPr/>
+        </p:nvSpPr>
+        <p:spPr>
+          <a:xfrm>
+            <a:off x="457200" y="5239512"/>
+            <a:ext cx="82296" cy="960120"/>
+          </a:xfrm>
+          <a:prstGeom prst="rect">
+            <a:avLst/>
+          </a:prstGeom>
+          <a:solidFill>
+            <a:srgbClr val="2F5D8C"/>
+          </a:solidFill>
+          <a:ln>
+            <a:noFill/>
+          </a:ln>
+          <a:effectLst/>
+        </p:spPr>
+        <p:style>
+          <a:lnRef idx="1">
+            <a:schemeClr val="accent1"/>
+          </a:lnRef>
+          <a:fillRef idx="3">
+            <a:schemeClr val="accent1"/>
+          </a:fillRef>
+          <a:effectRef idx="2">
+            <a:schemeClr val="accent1"/>
+          </a:effectRef>
+          <a:fontRef idx="minor">
+            <a:schemeClr val="lt1"/>
+          </a:fontRef>
+        </p:style>
+        <p:txBody>
+          <a:bodyPr rtlCol="0" anchor="ctr" wrap="square"/>
+          <a:lstStyle/>
+          <a:p>
+            <a:pPr algn="ctr"/>
+          </a:p>
+        </p:txBody>
+      </p:sp>
+      <p:sp>
+        <p:nvSpPr>
+          <p:cNvPr id="26" name="TextBox 25"/>
+          <p:cNvSpPr txBox="1"/>
+          <p:nvPr/>
+        </p:nvSpPr>
+        <p:spPr>
+          <a:xfrm>
+            <a:off x="685800" y="5404103"/>
+            <a:ext cx="10881360" cy="685800"/>
+          </a:xfrm>
+          <a:prstGeom prst="rect">
+            <a:avLst/>
+          </a:prstGeom>
+          <a:noFill/>
+        </p:spPr>
+        <p:txBody>
+          <a:bodyPr wrap="square">
+            <a:spAutoFit/>
+          </a:bodyPr>
+          <a:lstStyle/>
+          <a:p>
+            <a:r>
+              <a:rPr sz="1050" b="0">
+                <a:solidFill>
+                  <a:srgbClr val="2B2F36"/>
+                </a:solidFill>
+                <a:latin typeface="微软雅黑"/>
+              </a:rPr>
+              <a:t>带着问题：来上课——Predict先于Run</a:t>
             </a:r>
           </a:p>
         </p:txBody>
